--- a/python_course/chapter_09_file_io/file_io.pptx
+++ b/python_course/chapter_09_file_io/file_io.pptx
@@ -14,10 +14,6 @@
     <p:sldId id="262" r:id="rId13"/>
     <p:sldId id="263" r:id="rId14"/>
     <p:sldId id="264" r:id="rId15"/>
-    <p:sldId id="265" r:id="rId16"/>
-    <p:sldId id="266" r:id="rId17"/>
-    <p:sldId id="267" r:id="rId18"/>
-    <p:sldId id="268" r:id="rId19"/>
   </p:sldIdLst>
   <p:sldSz cx="12191695" cy="6858000" type="screen4x3"/>
   <p:notesSz cx="6858000" cy="9144000"/>
@@ -3151,8 +3147,8 @@
         </p:nvSpPr>
         <p:spPr>
           <a:xfrm>
-            <a:off x="914400" y="1828800"/>
-            <a:ext cx="10360152" cy="1371600"/>
+            <a:off x="914400" y="2286000"/>
+            <a:ext cx="10360152" cy="1097280"/>
           </a:xfrm>
           <a:prstGeom prst="rect">
             <a:avLst/>
@@ -3166,14 +3162,14 @@
           <a:lstStyle/>
           <a:p>
             <a:pPr algn="ctr">
-              <a:defRPr sz="5400" b="1">
+              <a:defRPr sz="4800" b="1">
                 <a:solidFill>
                   <a:srgbClr val="003366"/>
                 </a:solidFill>
               </a:defRPr>
             </a:pPr>
             <a:r>
-              <a:t>Chapter 9</a:t>
+              <a:t>Chapter 9: File I/O</a:t>
             </a:r>
           </a:p>
         </p:txBody>
@@ -3187,7 +3183,7 @@
         <p:spPr>
           <a:xfrm>
             <a:off x="914400" y="3657600"/>
-            <a:ext cx="10360152" cy="548640"/>
+            <a:ext cx="10360152" cy="731520"/>
           </a:xfrm>
           <a:prstGeom prst="rect">
             <a:avLst/>
@@ -3208,42 +3204,7 @@
               </a:defRPr>
             </a:pPr>
             <a:r>
-              <a:t>File I/O - Reading and Writing Files</a:t>
-            </a:r>
-          </a:p>
-        </p:txBody>
-      </p:sp>
-      <p:sp>
-        <p:nvSpPr>
-          <p:cNvPr id="5" name="TextBox 4"/>
-          <p:cNvSpPr txBox="1"/>
-          <p:nvPr/>
-        </p:nvSpPr>
-        <p:spPr>
-          <a:xfrm>
-            <a:off x="914400" y="4297680"/>
-            <a:ext cx="10360152" cy="548640"/>
-          </a:xfrm>
-          <a:prstGeom prst="rect">
-            <a:avLst/>
-          </a:prstGeom>
-          <a:noFill/>
-        </p:spPr>
-        <p:txBody>
-          <a:bodyPr wrap="none">
-            <a:spAutoFit/>
-          </a:bodyPr>
-          <a:lstStyle/>
-          <a:p>
-            <a:pPr algn="ctr">
-              <a:defRPr sz="2800">
-                <a:solidFill>
-                  <a:srgbClr val="4682B4"/>
-                </a:solidFill>
-              </a:defRPr>
-            </a:pPr>
-            <a:r>
-              <a:t>Making Your Data Permanent</a:t>
+              <a:t>Reading and Writing Files</a:t>
             </a:r>
           </a:p>
         </p:txBody>
@@ -3256,7 +3217,7 @@
 </p:sld>
 </file>
 
-<file path=ppt/slides/slide10.xml><?xml version="1.0" encoding="utf-8"?>
+<file path=ppt/slides/slide2.xml><?xml version="1.0" encoding="utf-8"?>
 <p:sld xmlns:a="http://schemas.openxmlformats.org/drawingml/2006/main" xmlns:p="http://schemas.openxmlformats.org/presentationml/2006/main" xmlns:r="http://schemas.openxmlformats.org/officeDocument/2006/relationships">
   <p:cSld>
     <p:spTree>
@@ -3360,8 +3321,8 @@
         </p:nvSpPr>
         <p:spPr>
           <a:xfrm>
-            <a:off x="457200" y="365760"/>
-            <a:ext cx="10972800" cy="731520"/>
+            <a:off x="457200" y="320040"/>
+            <a:ext cx="10972800" cy="640080"/>
           </a:xfrm>
           <a:prstGeom prst="rect">
             <a:avLst/>
@@ -3375,71 +3336,28 @@
           <a:lstStyle/>
           <a:p>
             <a:pPr>
-              <a:defRPr sz="4000" b="1">
+              <a:defRPr sz="3600" b="1">
                 <a:solidFill>
                   <a:srgbClr val="003366"/>
                 </a:solidFill>
               </a:defRPr>
             </a:pPr>
             <a:r>
-              <a:t>Using datetime for Timestamps</a:t>
-            </a:r>
-          </a:p>
-        </p:txBody>
-      </p:sp>
-      <p:sp>
-        <p:nvSpPr>
-          <p:cNvPr id="5" name="Rectangle 4"/>
-          <p:cNvSpPr/>
+              <a:t>Why Work with Files?</a:t>
+            </a:r>
+          </a:p>
+        </p:txBody>
+      </p:sp>
+      <p:sp>
+        <p:nvSpPr>
+          <p:cNvPr id="5" name="TextBox 4"/>
+          <p:cNvSpPr txBox="1"/>
           <p:nvPr/>
         </p:nvSpPr>
         <p:spPr>
           <a:xfrm>
-            <a:off x="457200" y="1005840"/>
-            <a:ext cx="1828800" cy="45720"/>
-          </a:xfrm>
-          <a:prstGeom prst="rect">
-            <a:avLst/>
-          </a:prstGeom>
-          <a:solidFill>
-            <a:srgbClr val="0066CC"/>
-          </a:solidFill>
-          <a:ln>
-            <a:noFill/>
-          </a:ln>
-        </p:spPr>
-        <p:style>
-          <a:lnRef idx="1">
-            <a:schemeClr val="accent1"/>
-          </a:lnRef>
-          <a:fillRef idx="3">
-            <a:schemeClr val="accent1"/>
-          </a:fillRef>
-          <a:effectRef idx="2">
-            <a:schemeClr val="accent1"/>
-          </a:effectRef>
-          <a:fontRef idx="minor">
-            <a:schemeClr val="lt1"/>
-          </a:fontRef>
-        </p:style>
-        <p:txBody>
-          <a:bodyPr rtlCol="0" anchor="ctr"/>
-          <a:lstStyle/>
-          <a:p>
-            <a:pPr algn="ctr"/>
-          </a:p>
-        </p:txBody>
-      </p:sp>
-      <p:sp>
-        <p:nvSpPr>
-          <p:cNvPr id="6" name="TextBox 5"/>
-          <p:cNvSpPr txBox="1"/>
-          <p:nvPr/>
-        </p:nvSpPr>
-        <p:spPr>
-          <a:xfrm>
-            <a:off x="640080" y="1371600"/>
-            <a:ext cx="10789920" cy="4572000"/>
+            <a:off x="640080" y="1188720"/>
+            <a:ext cx="10789920" cy="5303520"/>
           </a:xfrm>
           <a:prstGeom prst="rect">
             <a:avLst/>
@@ -3454,46 +3372,226 @@
           <a:p>
             <a:pPr>
               <a:spcAft>
-                <a:spcPts val="800"/>
-              </a:spcAft>
-              <a:defRPr sz="2000" b="1">
-                <a:solidFill>
-                  <a:srgbClr val="333333"/>
-                </a:solidFill>
-              </a:defRPr>
-            </a:pPr>
-            <a:r>
-              <a:t>Add timestamps to your log files and data!</a:t>
-            </a:r>
-          </a:p>
-          <a:p>
-            <a:pPr>
-              <a:spcAft>
-                <a:spcPts val="800"/>
-              </a:spcAft>
-              <a:defRPr sz="2000" b="1">
-                <a:solidFill>
-                  <a:srgbClr val="333333"/>
-                </a:solidFill>
-              </a:defRPr>
-            </a:pPr>
-            <a:r>
-              <a:t>Getting Current Date/Time:</a:t>
-            </a:r>
-          </a:p>
-          <a:p>
-            <a:pPr>
-              <a:spcAft>
-                <a:spcPts val="800"/>
-              </a:spcAft>
-              <a:defRPr sz="2000" b="1">
-                <a:solidFill>
-                  <a:srgbClr val="333333"/>
-                </a:solidFill>
-              </a:defRPr>
-            </a:pPr>
-            <a:r>
-              <a:t>Writing Timestamped Logs:</a:t>
+                <a:spcPts val="600"/>
+              </a:spcAft>
+              <a:defRPr b="1" sz="2000">
+                <a:solidFill>
+                  <a:srgbClr val="333333"/>
+                </a:solidFill>
+              </a:defRPr>
+            </a:pPr>
+            <a:r>
+              <a:t>Data Persistence:</a:t>
+            </a:r>
+          </a:p>
+          <a:p>
+            <a:pPr lvl="1">
+              <a:spcAft>
+                <a:spcPts val="400"/>
+              </a:spcAft>
+              <a:defRPr sz="1600">
+                <a:solidFill>
+                  <a:srgbClr val="333333"/>
+                </a:solidFill>
+              </a:defRPr>
+            </a:pPr>
+            <a:r>
+              <a:t>• Save data between program runs</a:t>
+            </a:r>
+          </a:p>
+          <a:p>
+            <a:pPr lvl="1">
+              <a:spcAft>
+                <a:spcPts val="400"/>
+              </a:spcAft>
+              <a:defRPr sz="1600">
+                <a:solidFill>
+                  <a:srgbClr val="333333"/>
+                </a:solidFill>
+              </a:defRPr>
+            </a:pPr>
+            <a:r>
+              <a:t>• Store user information</a:t>
+            </a:r>
+          </a:p>
+          <a:p>
+            <a:pPr lvl="1">
+              <a:spcAft>
+                <a:spcPts val="400"/>
+              </a:spcAft>
+              <a:defRPr sz="1600">
+                <a:solidFill>
+                  <a:srgbClr val="333333"/>
+                </a:solidFill>
+              </a:defRPr>
+            </a:pPr>
+            <a:r>
+              <a:t>• Log program activity</a:t>
+            </a:r>
+          </a:p>
+          <a:p>
+            <a:pPr lvl="1">
+              <a:spcAft>
+                <a:spcPts val="400"/>
+              </a:spcAft>
+              <a:defRPr sz="1600">
+                <a:solidFill>
+                  <a:srgbClr val="333333"/>
+                </a:solidFill>
+              </a:defRPr>
+            </a:pPr>
+            <a:r>
+              <a:t>• Import/export data</a:t>
+            </a:r>
+          </a:p>
+          <a:p>
+            <a:pPr>
+              <a:spcAft>
+                <a:spcPts val="600"/>
+              </a:spcAft>
+              <a:defRPr b="1" sz="2000">
+                <a:solidFill>
+                  <a:srgbClr val="333333"/>
+                </a:solidFill>
+              </a:defRPr>
+            </a:pPr>
+            <a:r>
+              <a:t>Common File Types:</a:t>
+            </a:r>
+          </a:p>
+          <a:p>
+            <a:pPr lvl="1">
+              <a:spcAft>
+                <a:spcPts val="400"/>
+              </a:spcAft>
+              <a:defRPr sz="1600">
+                <a:solidFill>
+                  <a:srgbClr val="333333"/>
+                </a:solidFill>
+              </a:defRPr>
+            </a:pPr>
+            <a:r>
+              <a:t>• Text files (.txt)</a:t>
+            </a:r>
+          </a:p>
+          <a:p>
+            <a:pPr lvl="1">
+              <a:spcAft>
+                <a:spcPts val="400"/>
+              </a:spcAft>
+              <a:defRPr sz="1600">
+                <a:solidFill>
+                  <a:srgbClr val="333333"/>
+                </a:solidFill>
+              </a:defRPr>
+            </a:pPr>
+            <a:r>
+              <a:t>• CSV files (.csv)</a:t>
+            </a:r>
+          </a:p>
+          <a:p>
+            <a:pPr lvl="1">
+              <a:spcAft>
+                <a:spcPts val="400"/>
+              </a:spcAft>
+              <a:defRPr sz="1600">
+                <a:solidFill>
+                  <a:srgbClr val="333333"/>
+                </a:solidFill>
+              </a:defRPr>
+            </a:pPr>
+            <a:r>
+              <a:t>• JSON files (.json)</a:t>
+            </a:r>
+          </a:p>
+          <a:p>
+            <a:pPr lvl="1">
+              <a:spcAft>
+                <a:spcPts val="400"/>
+              </a:spcAft>
+              <a:defRPr sz="1600">
+                <a:solidFill>
+                  <a:srgbClr val="333333"/>
+                </a:solidFill>
+              </a:defRPr>
+            </a:pPr>
+            <a:r>
+              <a:t>• Configuration files</a:t>
+            </a:r>
+          </a:p>
+          <a:p>
+            <a:pPr>
+              <a:spcAft>
+                <a:spcPts val="600"/>
+              </a:spcAft>
+              <a:defRPr b="1" sz="2000">
+                <a:solidFill>
+                  <a:srgbClr val="333333"/>
+                </a:solidFill>
+              </a:defRPr>
+            </a:pPr>
+            <a:r>
+              <a:t>File Operations:</a:t>
+            </a:r>
+          </a:p>
+          <a:p>
+            <a:pPr lvl="1">
+              <a:spcAft>
+                <a:spcPts val="400"/>
+              </a:spcAft>
+              <a:defRPr sz="1600">
+                <a:solidFill>
+                  <a:srgbClr val="333333"/>
+                </a:solidFill>
+              </a:defRPr>
+            </a:pPr>
+            <a:r>
+              <a:t>• Read: Get data from file</a:t>
+            </a:r>
+          </a:p>
+          <a:p>
+            <a:pPr lvl="1">
+              <a:spcAft>
+                <a:spcPts val="400"/>
+              </a:spcAft>
+              <a:defRPr sz="1600">
+                <a:solidFill>
+                  <a:srgbClr val="333333"/>
+                </a:solidFill>
+              </a:defRPr>
+            </a:pPr>
+            <a:r>
+              <a:t>• Write: Save data to file</a:t>
+            </a:r>
+          </a:p>
+          <a:p>
+            <a:pPr lvl="1">
+              <a:spcAft>
+                <a:spcPts val="400"/>
+              </a:spcAft>
+              <a:defRPr sz="1600">
+                <a:solidFill>
+                  <a:srgbClr val="333333"/>
+                </a:solidFill>
+              </a:defRPr>
+            </a:pPr>
+            <a:r>
+              <a:t>• Append: Add to existing file</a:t>
+            </a:r>
+          </a:p>
+          <a:p>
+            <a:pPr lvl="1">
+              <a:spcAft>
+                <a:spcPts val="400"/>
+              </a:spcAft>
+              <a:defRPr sz="1600">
+                <a:solidFill>
+                  <a:srgbClr val="333333"/>
+                </a:solidFill>
+              </a:defRPr>
+            </a:pPr>
+            <a:r>
+              <a:t>• Delete: Remove file</a:t>
             </a:r>
           </a:p>
         </p:txBody>
@@ -3506,7 +3604,7 @@
 </p:sld>
 </file>
 
-<file path=ppt/slides/slide11.xml><?xml version="1.0" encoding="utf-8"?>
+<file path=ppt/slides/slide3.xml><?xml version="1.0" encoding="utf-8"?>
 <p:sld xmlns:a="http://schemas.openxmlformats.org/drawingml/2006/main" xmlns:p="http://schemas.openxmlformats.org/presentationml/2006/main" xmlns:r="http://schemas.openxmlformats.org/officeDocument/2006/relationships">
   <p:cSld>
     <p:spTree>
@@ -3610,8 +3708,8 @@
         </p:nvSpPr>
         <p:spPr>
           <a:xfrm>
-            <a:off x="457200" y="365760"/>
-            <a:ext cx="10972800" cy="731520"/>
+            <a:off x="457200" y="320040"/>
+            <a:ext cx="10972800" cy="640080"/>
           </a:xfrm>
           <a:prstGeom prst="rect">
             <a:avLst/>
@@ -3625,71 +3723,28 @@
           <a:lstStyle/>
           <a:p>
             <a:pPr>
-              <a:defRPr sz="4000" b="1">
+              <a:defRPr sz="3600" b="1">
                 <a:solidFill>
                   <a:srgbClr val="003366"/>
                 </a:solidFill>
               </a:defRPr>
             </a:pPr>
             <a:r>
-              <a:t>File Error Handling</a:t>
-            </a:r>
-          </a:p>
-        </p:txBody>
-      </p:sp>
-      <p:sp>
-        <p:nvSpPr>
-          <p:cNvPr id="5" name="Rectangle 4"/>
-          <p:cNvSpPr/>
+              <a:t>Reading Files</a:t>
+            </a:r>
+          </a:p>
+        </p:txBody>
+      </p:sp>
+      <p:sp>
+        <p:nvSpPr>
+          <p:cNvPr id="5" name="TextBox 4"/>
+          <p:cNvSpPr txBox="1"/>
           <p:nvPr/>
         </p:nvSpPr>
         <p:spPr>
           <a:xfrm>
-            <a:off x="457200" y="1005840"/>
-            <a:ext cx="1828800" cy="45720"/>
-          </a:xfrm>
-          <a:prstGeom prst="rect">
-            <a:avLst/>
-          </a:prstGeom>
-          <a:solidFill>
-            <a:srgbClr val="0066CC"/>
-          </a:solidFill>
-          <a:ln>
-            <a:noFill/>
-          </a:ln>
-        </p:spPr>
-        <p:style>
-          <a:lnRef idx="1">
-            <a:schemeClr val="accent1"/>
-          </a:lnRef>
-          <a:fillRef idx="3">
-            <a:schemeClr val="accent1"/>
-          </a:fillRef>
-          <a:effectRef idx="2">
-            <a:schemeClr val="accent1"/>
-          </a:effectRef>
-          <a:fontRef idx="minor">
-            <a:schemeClr val="lt1"/>
-          </a:fontRef>
-        </p:style>
-        <p:txBody>
-          <a:bodyPr rtlCol="0" anchor="ctr"/>
-          <a:lstStyle/>
-          <a:p>
-            <a:pPr algn="ctr"/>
-          </a:p>
-        </p:txBody>
-      </p:sp>
-      <p:sp>
-        <p:nvSpPr>
-          <p:cNvPr id="6" name="TextBox 5"/>
-          <p:cNvSpPr txBox="1"/>
-          <p:nvPr/>
-        </p:nvSpPr>
-        <p:spPr>
-          <a:xfrm>
-            <a:off x="640080" y="1371600"/>
-            <a:ext cx="10789920" cy="4572000"/>
+            <a:off x="640080" y="1188720"/>
+            <a:ext cx="10789920" cy="5303520"/>
           </a:xfrm>
           <a:prstGeom prst="rect">
             <a:avLst/>
@@ -3704,106 +3759,226 @@
           <a:p>
             <a:pPr>
               <a:spcAft>
-                <a:spcPts val="800"/>
-              </a:spcAft>
-              <a:defRPr sz="2000" b="1">
-                <a:solidFill>
-                  <a:srgbClr val="333333"/>
-                </a:solidFill>
-              </a:defRPr>
-            </a:pPr>
-            <a:r>
-              <a:t>Files can cause errors - be prepared!</a:t>
-            </a:r>
-          </a:p>
-          <a:p>
-            <a:pPr>
-              <a:spcAft>
-                <a:spcPts val="800"/>
-              </a:spcAft>
-              <a:defRPr sz="2000" b="1">
-                <a:solidFill>
-                  <a:srgbClr val="333333"/>
-                </a:solidFill>
-              </a:defRPr>
-            </a:pPr>
-            <a:r>
-              <a:t>Common File Errors:</a:t>
-            </a:r>
-          </a:p>
-          <a:p>
-            <a:pPr>
-              <a:spcAft>
-                <a:spcPts val="800"/>
-              </a:spcAft>
-              <a:defRPr sz="2000" b="1">
-                <a:solidFill>
-                  <a:srgbClr val="333333"/>
-                </a:solidFill>
-              </a:defRPr>
-            </a:pPr>
-            <a:r>
-              <a:t>Basic Error Handling:</a:t>
-            </a:r>
-          </a:p>
-          <a:p>
-            <a:pPr>
-              <a:spcAft>
-                <a:spcPts val="800"/>
-              </a:spcAft>
-              <a:defRPr sz="2000" b="1">
-                <a:solidFill>
-                  <a:srgbClr val="333333"/>
-                </a:solidFill>
-              </a:defRPr>
-            </a:pPr>
-            <a:r>
-              <a:t>More about error handling in Chapter 10!</a:t>
+                <a:spcPts val="600"/>
+              </a:spcAft>
+              <a:defRPr b="1" sz="2000">
+                <a:solidFill>
+                  <a:srgbClr val="333333"/>
+                </a:solidFill>
+              </a:defRPr>
+            </a:pPr>
+            <a:r>
+              <a:t>Basic Pattern:</a:t>
+            </a:r>
+          </a:p>
+          <a:p>
+            <a:pPr>
+              <a:spcAft>
+                <a:spcPts val="600"/>
+              </a:spcAft>
+              <a:defRPr b="1" sz="2000">
+                <a:solidFill>
+                  <a:srgbClr val="333333"/>
+                </a:solidFill>
+              </a:defRPr>
+            </a:pPr>
+            <a:r>
+              <a:t>with open("file.txt", "r") as file:</a:t>
+            </a:r>
+          </a:p>
+          <a:p>
+            <a:pPr>
+              <a:spcAft>
+                <a:spcPts val="600"/>
+              </a:spcAft>
+              <a:defRPr sz="1600">
+                <a:solidFill>
+                  <a:srgbClr val="333333"/>
+                </a:solidFill>
+              </a:defRPr>
+            </a:pPr>
+            <a:r>
+              <a:t>    content = file.read()</a:t>
+            </a:r>
+          </a:p>
+          <a:p>
+            <a:pPr>
+              <a:spcAft>
+                <a:spcPts val="600"/>
+              </a:spcAft>
+              <a:defRPr b="1" sz="2000">
+                <a:solidFill>
+                  <a:srgbClr val="333333"/>
+                </a:solidFill>
+              </a:defRPr>
+            </a:pPr>
+            <a:r>
+              <a:t>Reading Methods:</a:t>
+            </a:r>
+          </a:p>
+          <a:p>
+            <a:pPr>
+              <a:spcAft>
+                <a:spcPts val="600"/>
+              </a:spcAft>
+              <a:defRPr sz="1600">
+                <a:solidFill>
+                  <a:srgbClr val="333333"/>
+                </a:solidFill>
+              </a:defRPr>
+            </a:pPr>
+            <a:r>
+              <a:t>file.read()  # Entire file</a:t>
+            </a:r>
+          </a:p>
+          <a:p>
+            <a:pPr>
+              <a:spcAft>
+                <a:spcPts val="600"/>
+              </a:spcAft>
+              <a:defRPr sz="1600">
+                <a:solidFill>
+                  <a:srgbClr val="333333"/>
+                </a:solidFill>
+              </a:defRPr>
+            </a:pPr>
+            <a:r>
+              <a:t>file.readline()  # One line</a:t>
+            </a:r>
+          </a:p>
+          <a:p>
+            <a:pPr>
+              <a:spcAft>
+                <a:spcPts val="600"/>
+              </a:spcAft>
+              <a:defRPr sz="1600">
+                <a:solidFill>
+                  <a:srgbClr val="333333"/>
+                </a:solidFill>
+              </a:defRPr>
+            </a:pPr>
+            <a:r>
+              <a:t>file.readlines()  # List of lines</a:t>
+            </a:r>
+          </a:p>
+          <a:p>
+            <a:pPr>
+              <a:spcAft>
+                <a:spcPts val="600"/>
+              </a:spcAft>
+              <a:defRPr b="1" sz="2000">
+                <a:solidFill>
+                  <a:srgbClr val="333333"/>
+                </a:solidFill>
+              </a:defRPr>
+            </a:pPr>
+            <a:r>
+              <a:t>Iterating:</a:t>
+            </a:r>
+          </a:p>
+          <a:p>
+            <a:pPr>
+              <a:spcAft>
+                <a:spcPts val="600"/>
+              </a:spcAft>
+              <a:defRPr b="1" sz="2000">
+                <a:solidFill>
+                  <a:srgbClr val="333333"/>
+                </a:solidFill>
+              </a:defRPr>
+            </a:pPr>
+            <a:r>
+              <a:t>with open("file.txt", "r") as file:</a:t>
+            </a:r>
+          </a:p>
+          <a:p>
+            <a:pPr>
+              <a:spcAft>
+                <a:spcPts val="600"/>
+              </a:spcAft>
+              <a:defRPr sz="1600">
+                <a:solidFill>
+                  <a:srgbClr val="333333"/>
+                </a:solidFill>
+              </a:defRPr>
+            </a:pPr>
+            <a:r>
+              <a:t>    for line in file:</a:t>
+            </a:r>
+          </a:p>
+          <a:p>
+            <a:pPr>
+              <a:spcAft>
+                <a:spcPts val="600"/>
+              </a:spcAft>
+              <a:defRPr sz="1600">
+                <a:solidFill>
+                  <a:srgbClr val="333333"/>
+                </a:solidFill>
+              </a:defRPr>
+            </a:pPr>
+            <a:r>
+              <a:t>        print(line.strip())</a:t>
+            </a:r>
+          </a:p>
+          <a:p>
+            <a:pPr>
+              <a:spcAft>
+                <a:spcPts val="600"/>
+              </a:spcAft>
+              <a:defRPr sz="1600">
+                <a:solidFill>
+                  <a:srgbClr val="333333"/>
+                </a:solidFill>
+              </a:defRPr>
+            </a:pPr>
+            <a:r>
+              <a:t>Why use "with"?</a:t>
             </a:r>
           </a:p>
           <a:p>
             <a:pPr lvl="1">
               <a:spcAft>
-                <a:spcPts val="800"/>
-              </a:spcAft>
-              <a:defRPr sz="1800">
-                <a:solidFill>
-                  <a:srgbClr val="333333"/>
-                </a:solidFill>
-              </a:defRPr>
-            </a:pPr>
-            <a:r>
-              <a:t>• ❌FileNotFoundError- File doesn't exist</a:t>
+                <a:spcPts val="400"/>
+              </a:spcAft>
+              <a:defRPr sz="1600">
+                <a:solidFill>
+                  <a:srgbClr val="333333"/>
+                </a:solidFill>
+              </a:defRPr>
+            </a:pPr>
+            <a:r>
+              <a:t>• Automatically closes file</a:t>
             </a:r>
           </a:p>
           <a:p>
             <a:pPr lvl="1">
               <a:spcAft>
-                <a:spcPts val="800"/>
-              </a:spcAft>
-              <a:defRPr sz="1800">
-                <a:solidFill>
-                  <a:srgbClr val="333333"/>
-                </a:solidFill>
-              </a:defRPr>
-            </a:pPr>
-            <a:r>
-              <a:t>• ❌PermissionError- No permission to access</a:t>
+                <a:spcPts val="400"/>
+              </a:spcAft>
+              <a:defRPr sz="1600">
+                <a:solidFill>
+                  <a:srgbClr val="333333"/>
+                </a:solidFill>
+              </a:defRPr>
+            </a:pPr>
+            <a:r>
+              <a:t>• Works even if error occurs</a:t>
             </a:r>
           </a:p>
           <a:p>
             <a:pPr lvl="1">
               <a:spcAft>
-                <a:spcPts val="800"/>
-              </a:spcAft>
-              <a:defRPr sz="1800">
-                <a:solidFill>
-                  <a:srgbClr val="333333"/>
-                </a:solidFill>
-              </a:defRPr>
-            </a:pPr>
-            <a:r>
-              <a:t>• ❌IsADirectoryError- Tried to open a folder</a:t>
+                <a:spcPts val="400"/>
+              </a:spcAft>
+              <a:defRPr sz="1600">
+                <a:solidFill>
+                  <a:srgbClr val="333333"/>
+                </a:solidFill>
+              </a:defRPr>
+            </a:pPr>
+            <a:r>
+              <a:t>• Best practice</a:t>
             </a:r>
           </a:p>
         </p:txBody>
@@ -3816,7 +3991,7 @@
 </p:sld>
 </file>
 
-<file path=ppt/slides/slide12.xml><?xml version="1.0" encoding="utf-8"?>
+<file path=ppt/slides/slide4.xml><?xml version="1.0" encoding="utf-8"?>
 <p:sld xmlns:a="http://schemas.openxmlformats.org/drawingml/2006/main" xmlns:p="http://schemas.openxmlformats.org/presentationml/2006/main" xmlns:r="http://schemas.openxmlformats.org/officeDocument/2006/relationships">
   <p:cSld>
     <p:spTree>
@@ -3920,8 +4095,8 @@
         </p:nvSpPr>
         <p:spPr>
           <a:xfrm>
-            <a:off x="457200" y="365760"/>
-            <a:ext cx="10972800" cy="731520"/>
+            <a:off x="457200" y="320040"/>
+            <a:ext cx="10972800" cy="640080"/>
           </a:xfrm>
           <a:prstGeom prst="rect">
             <a:avLst/>
@@ -3935,71 +4110,28 @@
           <a:lstStyle/>
           <a:p>
             <a:pPr>
-              <a:defRPr sz="4000" b="1">
+              <a:defRPr sz="3600" b="1">
                 <a:solidFill>
                   <a:srgbClr val="003366"/>
                 </a:solidFill>
               </a:defRPr>
             </a:pPr>
             <a:r>
-              <a:t>Key Concepts</a:t>
-            </a:r>
-          </a:p>
-        </p:txBody>
-      </p:sp>
-      <p:sp>
-        <p:nvSpPr>
-          <p:cNvPr id="5" name="Rectangle 4"/>
-          <p:cNvSpPr/>
+              <a:t>Writing Files</a:t>
+            </a:r>
+          </a:p>
+        </p:txBody>
+      </p:sp>
+      <p:sp>
+        <p:nvSpPr>
+          <p:cNvPr id="5" name="TextBox 4"/>
+          <p:cNvSpPr txBox="1"/>
           <p:nvPr/>
         </p:nvSpPr>
         <p:spPr>
           <a:xfrm>
-            <a:off x="457200" y="1005840"/>
-            <a:ext cx="1828800" cy="45720"/>
-          </a:xfrm>
-          <a:prstGeom prst="rect">
-            <a:avLst/>
-          </a:prstGeom>
-          <a:solidFill>
-            <a:srgbClr val="0066CC"/>
-          </a:solidFill>
-          <a:ln>
-            <a:noFill/>
-          </a:ln>
-        </p:spPr>
-        <p:style>
-          <a:lnRef idx="1">
-            <a:schemeClr val="accent1"/>
-          </a:lnRef>
-          <a:fillRef idx="3">
-            <a:schemeClr val="accent1"/>
-          </a:fillRef>
-          <a:effectRef idx="2">
-            <a:schemeClr val="accent1"/>
-          </a:effectRef>
-          <a:fontRef idx="minor">
-            <a:schemeClr val="lt1"/>
-          </a:fontRef>
-        </p:style>
-        <p:txBody>
-          <a:bodyPr rtlCol="0" anchor="ctr"/>
-          <a:lstStyle/>
-          <a:p>
-            <a:pPr algn="ctr"/>
-          </a:p>
-        </p:txBody>
-      </p:sp>
-      <p:sp>
-        <p:nvSpPr>
-          <p:cNvPr id="6" name="TextBox 5"/>
-          <p:cNvSpPr txBox="1"/>
-          <p:nvPr/>
-        </p:nvSpPr>
-        <p:spPr>
-          <a:xfrm>
-            <a:off x="640080" y="1371600"/>
-            <a:ext cx="10789920" cy="4572000"/>
+            <a:off x="640080" y="1188720"/>
+            <a:ext cx="10789920" cy="5303520"/>
           </a:xfrm>
           <a:prstGeom prst="rect">
             <a:avLst/>
@@ -4014,151 +4146,211 @@
           <a:p>
             <a:pPr>
               <a:spcAft>
-                <a:spcPts val="800"/>
-              </a:spcAft>
-              <a:defRPr sz="2000" b="1">
-                <a:solidFill>
-                  <a:srgbClr val="333333"/>
-                </a:solidFill>
-              </a:defRPr>
-            </a:pPr>
-            <a:r>
-              <a:t>✓ Use 'with' Statement</a:t>
-            </a:r>
-          </a:p>
-          <a:p>
-            <a:pPr>
-              <a:spcAft>
-                <a:spcPts val="800"/>
-              </a:spcAft>
-              <a:defRPr sz="2000" b="1">
-                <a:solidFill>
-                  <a:srgbClr val="333333"/>
-                </a:solidFill>
-              </a:defRPr>
-            </a:pPr>
-            <a:r>
-              <a:t>Automatically closes files safely</a:t>
-            </a:r>
-          </a:p>
-          <a:p>
-            <a:pPr>
-              <a:spcAft>
-                <a:spcPts val="800"/>
-              </a:spcAft>
-              <a:defRPr sz="2000" b="1">
-                <a:solidFill>
-                  <a:srgbClr val="333333"/>
-                </a:solidFill>
-              </a:defRPr>
-            </a:pPr>
-            <a:r>
-              <a:t>✓ Know File Modes</a:t>
-            </a:r>
-          </a:p>
-          <a:p>
-            <a:pPr>
-              <a:spcAft>
-                <a:spcPts val="800"/>
-              </a:spcAft>
-              <a:defRPr sz="2000" b="1">
-                <a:solidFill>
-                  <a:srgbClr val="333333"/>
-                </a:solidFill>
-              </a:defRPr>
-            </a:pPr>
-            <a:r>
-              <a:t>"r" read, "w" write, "a" append</a:t>
-            </a:r>
-          </a:p>
-          <a:p>
-            <a:pPr>
-              <a:spcAft>
-                <a:spcPts val="800"/>
-              </a:spcAft>
-              <a:defRPr sz="2000" b="1">
-                <a:solidFill>
-                  <a:srgbClr val="333333"/>
-                </a:solidFill>
-              </a:defRPr>
-            </a:pPr>
-            <a:r>
-              <a:t>✓ CSV for Tables</a:t>
-            </a:r>
-          </a:p>
-          <a:p>
-            <a:pPr>
-              <a:spcAft>
-                <a:spcPts val="800"/>
-              </a:spcAft>
-              <a:defRPr sz="2000" b="1">
-                <a:solidFill>
-                  <a:srgbClr val="333333"/>
-                </a:solidFill>
-              </a:defRPr>
-            </a:pPr>
-            <a:r>
-              <a:t>Perfect for spreadsheet data</a:t>
-            </a:r>
-          </a:p>
-          <a:p>
-            <a:pPr>
-              <a:spcAft>
-                <a:spcPts val="800"/>
-              </a:spcAft>
-              <a:defRPr sz="2000" b="1">
-                <a:solidFill>
-                  <a:srgbClr val="333333"/>
-                </a:solidFill>
-              </a:defRPr>
-            </a:pPr>
-            <a:r>
-              <a:t>✓ JSON for Objects</a:t>
-            </a:r>
-          </a:p>
-          <a:p>
-            <a:pPr>
-              <a:spcAft>
-                <a:spcPts val="800"/>
-              </a:spcAft>
-              <a:defRPr sz="2000" b="1">
-                <a:solidFill>
-                  <a:srgbClr val="333333"/>
-                </a:solidFill>
-              </a:defRPr>
-            </a:pPr>
-            <a:r>
-              <a:t>Store dictionaries and configs</a:t>
-            </a:r>
-          </a:p>
-          <a:p>
-            <a:pPr>
-              <a:spcAft>
-                <a:spcPts val="800"/>
-              </a:spcAft>
-              <a:defRPr sz="2000" b="1">
-                <a:solidFill>
-                  <a:srgbClr val="333333"/>
-                </a:solidFill>
-              </a:defRPr>
-            </a:pPr>
-            <a:r>
-              <a:t>✓ Add Timestamps</a:t>
-            </a:r>
-          </a:p>
-          <a:p>
-            <a:pPr>
-              <a:spcAft>
-                <a:spcPts val="800"/>
-              </a:spcAft>
-              <a:defRPr sz="2000" b="1">
-                <a:solidFill>
-                  <a:srgbClr val="333333"/>
-                </a:solidFill>
-              </a:defRPr>
-            </a:pPr>
-            <a:r>
-              <a:t>Use datetime for log files</a:t>
+                <a:spcPts val="600"/>
+              </a:spcAft>
+              <a:defRPr b="1" sz="2000">
+                <a:solidFill>
+                  <a:srgbClr val="333333"/>
+                </a:solidFill>
+              </a:defRPr>
+            </a:pPr>
+            <a:r>
+              <a:t>Write Mode (Overwrites):</a:t>
+            </a:r>
+          </a:p>
+          <a:p>
+            <a:pPr>
+              <a:spcAft>
+                <a:spcPts val="600"/>
+              </a:spcAft>
+              <a:defRPr b="1" sz="2000">
+                <a:solidFill>
+                  <a:srgbClr val="333333"/>
+                </a:solidFill>
+              </a:defRPr>
+            </a:pPr>
+            <a:r>
+              <a:t>with open("file.txt", "w") as file:</a:t>
+            </a:r>
+          </a:p>
+          <a:p>
+            <a:pPr>
+              <a:spcAft>
+                <a:spcPts val="600"/>
+              </a:spcAft>
+              <a:defRPr sz="1600">
+                <a:solidFill>
+                  <a:srgbClr val="333333"/>
+                </a:solidFill>
+              </a:defRPr>
+            </a:pPr>
+            <a:r>
+              <a:t>    file.write("Hello\n")</a:t>
+            </a:r>
+          </a:p>
+          <a:p>
+            <a:pPr>
+              <a:spcAft>
+                <a:spcPts val="600"/>
+              </a:spcAft>
+              <a:defRPr sz="1600">
+                <a:solidFill>
+                  <a:srgbClr val="333333"/>
+                </a:solidFill>
+              </a:defRPr>
+            </a:pPr>
+            <a:r>
+              <a:t>    file.write("World\n")</a:t>
+            </a:r>
+          </a:p>
+          <a:p>
+            <a:pPr>
+              <a:spcAft>
+                <a:spcPts val="600"/>
+              </a:spcAft>
+              <a:defRPr b="1" sz="2000">
+                <a:solidFill>
+                  <a:srgbClr val="333333"/>
+                </a:solidFill>
+              </a:defRPr>
+            </a:pPr>
+            <a:r>
+              <a:t>Append Mode (Adds to End):</a:t>
+            </a:r>
+          </a:p>
+          <a:p>
+            <a:pPr>
+              <a:spcAft>
+                <a:spcPts val="600"/>
+              </a:spcAft>
+              <a:defRPr b="1" sz="2000">
+                <a:solidFill>
+                  <a:srgbClr val="333333"/>
+                </a:solidFill>
+              </a:defRPr>
+            </a:pPr>
+            <a:r>
+              <a:t>with open("file.txt", "a") as file:</a:t>
+            </a:r>
+          </a:p>
+          <a:p>
+            <a:pPr>
+              <a:spcAft>
+                <a:spcPts val="600"/>
+              </a:spcAft>
+              <a:defRPr sz="1600">
+                <a:solidFill>
+                  <a:srgbClr val="333333"/>
+                </a:solidFill>
+              </a:defRPr>
+            </a:pPr>
+            <a:r>
+              <a:t>    file.write("New line\n")</a:t>
+            </a:r>
+          </a:p>
+          <a:p>
+            <a:pPr>
+              <a:spcAft>
+                <a:spcPts val="600"/>
+              </a:spcAft>
+              <a:defRPr b="1" sz="2000">
+                <a:solidFill>
+                  <a:srgbClr val="333333"/>
+                </a:solidFill>
+              </a:defRPr>
+            </a:pPr>
+            <a:r>
+              <a:t>Write Multiple Lines:</a:t>
+            </a:r>
+          </a:p>
+          <a:p>
+            <a:pPr>
+              <a:spcAft>
+                <a:spcPts val="600"/>
+              </a:spcAft>
+              <a:defRPr sz="1600">
+                <a:solidFill>
+                  <a:srgbClr val="333333"/>
+                </a:solidFill>
+              </a:defRPr>
+            </a:pPr>
+            <a:r>
+              <a:t>lines = ["Line 1\n", "Line 2\n"]</a:t>
+            </a:r>
+          </a:p>
+          <a:p>
+            <a:pPr>
+              <a:spcAft>
+                <a:spcPts val="600"/>
+              </a:spcAft>
+              <a:defRPr b="1" sz="2000">
+                <a:solidFill>
+                  <a:srgbClr val="333333"/>
+                </a:solidFill>
+              </a:defRPr>
+            </a:pPr>
+            <a:r>
+              <a:t>with open("file.txt", "w") as file:</a:t>
+            </a:r>
+          </a:p>
+          <a:p>
+            <a:pPr>
+              <a:spcAft>
+                <a:spcPts val="600"/>
+              </a:spcAft>
+              <a:defRPr sz="1600">
+                <a:solidFill>
+                  <a:srgbClr val="333333"/>
+                </a:solidFill>
+              </a:defRPr>
+            </a:pPr>
+            <a:r>
+              <a:t>    file.writelines(lines)</a:t>
+            </a:r>
+          </a:p>
+          <a:p>
+            <a:pPr>
+              <a:spcAft>
+                <a:spcPts val="600"/>
+              </a:spcAft>
+              <a:defRPr b="1" sz="2000">
+                <a:solidFill>
+                  <a:srgbClr val="333333"/>
+                </a:solidFill>
+              </a:defRPr>
+            </a:pPr>
+            <a:r>
+              <a:t>Using print():</a:t>
+            </a:r>
+          </a:p>
+          <a:p>
+            <a:pPr>
+              <a:spcAft>
+                <a:spcPts val="600"/>
+              </a:spcAft>
+              <a:defRPr b="1" sz="2000">
+                <a:solidFill>
+                  <a:srgbClr val="333333"/>
+                </a:solidFill>
+              </a:defRPr>
+            </a:pPr>
+            <a:r>
+              <a:t>with open("file.txt", "w") as file:</a:t>
+            </a:r>
+          </a:p>
+          <a:p>
+            <a:pPr>
+              <a:spcAft>
+                <a:spcPts val="600"/>
+              </a:spcAft>
+              <a:defRPr sz="1600">
+                <a:solidFill>
+                  <a:srgbClr val="333333"/>
+                </a:solidFill>
+              </a:defRPr>
+            </a:pPr>
+            <a:r>
+              <a:t>    print("Hello", file=file)</a:t>
             </a:r>
           </a:p>
         </p:txBody>
@@ -4171,173 +4363,7 @@
 </p:sld>
 </file>
 
-<file path=ppt/slides/slide13.xml><?xml version="1.0" encoding="utf-8"?>
-<p:sld xmlns:a="http://schemas.openxmlformats.org/drawingml/2006/main" xmlns:p="http://schemas.openxmlformats.org/presentationml/2006/main" xmlns:r="http://schemas.openxmlformats.org/officeDocument/2006/relationships">
-  <p:cSld>
-    <p:spTree>
-      <p:nvGrpSpPr>
-        <p:cNvPr id="1" name=""/>
-        <p:cNvGrpSpPr/>
-        <p:nvPr/>
-      </p:nvGrpSpPr>
-      <p:grpSpPr/>
-      <p:sp>
-        <p:nvSpPr>
-          <p:cNvPr id="2" name="Rectangle 1"/>
-          <p:cNvSpPr/>
-          <p:nvPr/>
-        </p:nvSpPr>
-        <p:spPr>
-          <a:xfrm>
-            <a:off x="0" y="0"/>
-            <a:ext cx="12191695" cy="6858000"/>
-          </a:xfrm>
-          <a:prstGeom prst="rect">
-            <a:avLst/>
-          </a:prstGeom>
-          <a:solidFill>
-            <a:srgbClr val="F0F8FF"/>
-          </a:solidFill>
-          <a:ln>
-            <a:noFill/>
-          </a:ln>
-        </p:spPr>
-        <p:style>
-          <a:lnRef idx="1">
-            <a:schemeClr val="accent1"/>
-          </a:lnRef>
-          <a:fillRef idx="3">
-            <a:schemeClr val="accent1"/>
-          </a:fillRef>
-          <a:effectRef idx="2">
-            <a:schemeClr val="accent1"/>
-          </a:effectRef>
-          <a:fontRef idx="minor">
-            <a:schemeClr val="lt1"/>
-          </a:fontRef>
-        </p:style>
-        <p:txBody>
-          <a:bodyPr rtlCol="0" anchor="ctr"/>
-          <a:lstStyle/>
-          <a:p>
-            <a:pPr algn="ctr"/>
-          </a:p>
-        </p:txBody>
-      </p:sp>
-      <p:sp>
-        <p:nvSpPr>
-          <p:cNvPr id="3" name="TextBox 2"/>
-          <p:cNvSpPr txBox="1"/>
-          <p:nvPr/>
-        </p:nvSpPr>
-        <p:spPr>
-          <a:xfrm>
-            <a:off x="914400" y="1828800"/>
-            <a:ext cx="10360152" cy="1371600"/>
-          </a:xfrm>
-          <a:prstGeom prst="rect">
-            <a:avLst/>
-          </a:prstGeom>
-          <a:noFill/>
-        </p:spPr>
-        <p:txBody>
-          <a:bodyPr wrap="none">
-            <a:spAutoFit/>
-          </a:bodyPr>
-          <a:lstStyle/>
-          <a:p>
-            <a:pPr algn="ctr">
-              <a:defRPr sz="5400" b="1">
-                <a:solidFill>
-                  <a:srgbClr val="003366"/>
-                </a:solidFill>
-              </a:defRPr>
-            </a:pPr>
-            <a:r>
-              <a:t>Ready to Code!</a:t>
-            </a:r>
-          </a:p>
-        </p:txBody>
-      </p:sp>
-      <p:sp>
-        <p:nvSpPr>
-          <p:cNvPr id="4" name="TextBox 3"/>
-          <p:cNvSpPr txBox="1"/>
-          <p:nvPr/>
-        </p:nvSpPr>
-        <p:spPr>
-          <a:xfrm>
-            <a:off x="914400" y="3657600"/>
-            <a:ext cx="10360152" cy="548640"/>
-          </a:xfrm>
-          <a:prstGeom prst="rect">
-            <a:avLst/>
-          </a:prstGeom>
-          <a:noFill/>
-        </p:spPr>
-        <p:txBody>
-          <a:bodyPr wrap="none">
-            <a:spAutoFit/>
-          </a:bodyPr>
-          <a:lstStyle/>
-          <a:p>
-            <a:pPr algn="ctr">
-              <a:defRPr sz="2800">
-                <a:solidFill>
-                  <a:srgbClr val="4682B4"/>
-                </a:solidFill>
-              </a:defRPr>
-            </a:pPr>
-            <a:r>
-              <a:t>Open the practice notebook to master file I/O</a:t>
-            </a:r>
-          </a:p>
-        </p:txBody>
-      </p:sp>
-      <p:sp>
-        <p:nvSpPr>
-          <p:cNvPr id="5" name="TextBox 4"/>
-          <p:cNvSpPr txBox="1"/>
-          <p:nvPr/>
-        </p:nvSpPr>
-        <p:spPr>
-          <a:xfrm>
-            <a:off x="914400" y="4297680"/>
-            <a:ext cx="10360152" cy="548640"/>
-          </a:xfrm>
-          <a:prstGeom prst="rect">
-            <a:avLst/>
-          </a:prstGeom>
-          <a:noFill/>
-        </p:spPr>
-        <p:txBody>
-          <a:bodyPr wrap="none">
-            <a:spAutoFit/>
-          </a:bodyPr>
-          <a:lstStyle/>
-          <a:p>
-            <a:pPr algn="ctr">
-              <a:defRPr sz="2800">
-                <a:solidFill>
-                  <a:srgbClr val="4682B4"/>
-                </a:solidFill>
-              </a:defRPr>
-            </a:pPr>
-            <a:r>
-              <a:t>Build apps that remember!</a:t>
-            </a:r>
-          </a:p>
-        </p:txBody>
-      </p:sp>
-    </p:spTree>
-  </p:cSld>
-  <p:clrMapOvr>
-    <a:masterClrMapping/>
-  </p:clrMapOvr>
-</p:sld>
-</file>
-
-<file path=ppt/slides/slide2.xml><?xml version="1.0" encoding="utf-8"?>
+<file path=ppt/slides/slide5.xml><?xml version="1.0" encoding="utf-8"?>
 <p:sld xmlns:a="http://schemas.openxmlformats.org/drawingml/2006/main" xmlns:p="http://schemas.openxmlformats.org/presentationml/2006/main" xmlns:r="http://schemas.openxmlformats.org/officeDocument/2006/relationships">
   <p:cSld>
     <p:spTree>
@@ -4441,8 +4467,8 @@
         </p:nvSpPr>
         <p:spPr>
           <a:xfrm>
-            <a:off x="457200" y="365760"/>
-            <a:ext cx="10972800" cy="731520"/>
+            <a:off x="457200" y="320040"/>
+            <a:ext cx="10972800" cy="640080"/>
           </a:xfrm>
           <a:prstGeom prst="rect">
             <a:avLst/>
@@ -4456,71 +4482,28 @@
           <a:lstStyle/>
           <a:p>
             <a:pPr>
-              <a:defRPr sz="4000" b="1">
+              <a:defRPr sz="3600" b="1">
                 <a:solidFill>
                   <a:srgbClr val="003366"/>
                 </a:solidFill>
               </a:defRPr>
             </a:pPr>
             <a:r>
-              <a:t>Why Work with Files?</a:t>
-            </a:r>
-          </a:p>
-        </p:txBody>
-      </p:sp>
-      <p:sp>
-        <p:nvSpPr>
-          <p:cNvPr id="5" name="Rectangle 4"/>
-          <p:cNvSpPr/>
+              <a:t>Working with CSV Files</a:t>
+            </a:r>
+          </a:p>
+        </p:txBody>
+      </p:sp>
+      <p:sp>
+        <p:nvSpPr>
+          <p:cNvPr id="5" name="TextBox 4"/>
+          <p:cNvSpPr txBox="1"/>
           <p:nvPr/>
         </p:nvSpPr>
         <p:spPr>
           <a:xfrm>
-            <a:off x="457200" y="1005840"/>
-            <a:ext cx="1828800" cy="45720"/>
-          </a:xfrm>
-          <a:prstGeom prst="rect">
-            <a:avLst/>
-          </a:prstGeom>
-          <a:solidFill>
-            <a:srgbClr val="0066CC"/>
-          </a:solidFill>
-          <a:ln>
-            <a:noFill/>
-          </a:ln>
-        </p:spPr>
-        <p:style>
-          <a:lnRef idx="1">
-            <a:schemeClr val="accent1"/>
-          </a:lnRef>
-          <a:fillRef idx="3">
-            <a:schemeClr val="accent1"/>
-          </a:fillRef>
-          <a:effectRef idx="2">
-            <a:schemeClr val="accent1"/>
-          </a:effectRef>
-          <a:fontRef idx="minor">
-            <a:schemeClr val="lt1"/>
-          </a:fontRef>
-        </p:style>
-        <p:txBody>
-          <a:bodyPr rtlCol="0" anchor="ctr"/>
-          <a:lstStyle/>
-          <a:p>
-            <a:pPr algn="ctr"/>
-          </a:p>
-        </p:txBody>
-      </p:sp>
-      <p:sp>
-        <p:nvSpPr>
-          <p:cNvPr id="6" name="TextBox 5"/>
-          <p:cNvSpPr txBox="1"/>
-          <p:nvPr/>
-        </p:nvSpPr>
-        <p:spPr>
-          <a:xfrm>
-            <a:off x="640080" y="1371600"/>
-            <a:ext cx="10789920" cy="4572000"/>
+            <a:off x="640080" y="1188720"/>
+            <a:ext cx="10789920" cy="5303520"/>
           </a:xfrm>
           <a:prstGeom prst="rect">
             <a:avLst/>
@@ -4535,151 +4518,241 @@
           <a:p>
             <a:pPr>
               <a:spcAft>
-                <a:spcPts val="800"/>
-              </a:spcAft>
-              <a:defRPr sz="2000" b="1">
-                <a:solidFill>
-                  <a:srgbClr val="333333"/>
-                </a:solidFill>
-              </a:defRPr>
-            </a:pPr>
-            <a:r>
-              <a:t>Files give your programsmemory- data that survives after the program ends!</a:t>
-            </a:r>
-          </a:p>
-          <a:p>
-            <a:pPr>
-              <a:spcAft>
-                <a:spcPts val="800"/>
-              </a:spcAft>
-              <a:defRPr sz="2000" b="1">
-                <a:solidFill>
-                  <a:srgbClr val="333333"/>
-                </a:solidFill>
-              </a:defRPr>
-            </a:pPr>
-            <a:r>
-              <a:t>Without Files:</a:t>
-            </a:r>
-          </a:p>
-          <a:p>
-            <a:pPr>
-              <a:spcAft>
-                <a:spcPts val="800"/>
-              </a:spcAft>
-              <a:defRPr sz="2000" b="1">
-                <a:solidFill>
-                  <a:srgbClr val="333333"/>
-                </a:solidFill>
-              </a:defRPr>
-            </a:pPr>
-            <a:r>
-              <a:t>With Files:</a:t>
-            </a:r>
-          </a:p>
-          <a:p>
-            <a:pPr>
-              <a:spcAft>
-                <a:spcPts val="800"/>
-              </a:spcAft>
-              <a:defRPr sz="2000" b="1">
-                <a:solidFill>
-                  <a:srgbClr val="333333"/>
-                </a:solidFill>
-              </a:defRPr>
-            </a:pPr>
-            <a:r>
-              <a:t>Real-World Examples:</a:t>
-            </a:r>
-          </a:p>
-          <a:p>
-            <a:pPr lvl="1">
-              <a:spcAft>
-                <a:spcPts val="800"/>
-              </a:spcAft>
-              <a:defRPr sz="1800">
-                <a:solidFill>
-                  <a:srgbClr val="333333"/>
-                </a:solidFill>
-              </a:defRPr>
-            </a:pPr>
-            <a:r>
-              <a:t>• ❌ Data lost when program closes</a:t>
-            </a:r>
-          </a:p>
-          <a:p>
-            <a:pPr lvl="1">
-              <a:spcAft>
-                <a:spcPts val="800"/>
-              </a:spcAft>
-              <a:defRPr sz="1800">
-                <a:solidFill>
-                  <a:srgbClr val="333333"/>
-                </a:solidFill>
-              </a:defRPr>
-            </a:pPr>
-            <a:r>
-              <a:t>• ❌ Can't save user settings</a:t>
-            </a:r>
-          </a:p>
-          <a:p>
-            <a:pPr lvl="1">
-              <a:spcAft>
-                <a:spcPts val="800"/>
-              </a:spcAft>
-              <a:defRPr sz="1800">
-                <a:solidFill>
-                  <a:srgbClr val="333333"/>
-                </a:solidFill>
-              </a:defRPr>
-            </a:pPr>
-            <a:r>
-              <a:t>• ❌ No way to share data</a:t>
-            </a:r>
-          </a:p>
-          <a:p>
-            <a:pPr lvl="1">
-              <a:spcAft>
-                <a:spcPts val="800"/>
-              </a:spcAft>
-              <a:defRPr sz="1800">
-                <a:solidFill>
-                  <a:srgbClr val="333333"/>
-                </a:solidFill>
-              </a:defRPr>
-            </a:pPr>
-            <a:r>
-              <a:t>• ❌ Must re-enter everything</a:t>
-            </a:r>
-          </a:p>
-          <a:p>
-            <a:pPr lvl="1">
-              <a:spcAft>
-                <a:spcPts val="800"/>
-              </a:spcAft>
-              <a:defRPr sz="1800">
-                <a:solidFill>
-                  <a:srgbClr val="333333"/>
-                </a:solidFill>
-              </a:defRPr>
-            </a:pPr>
-            <a:r>
-              <a:t>• ✓ Data persists forever</a:t>
-            </a:r>
-          </a:p>
-          <a:p>
-            <a:pPr lvl="1">
-              <a:spcAft>
-                <a:spcPts val="800"/>
-              </a:spcAft>
-              <a:defRPr sz="1800">
-                <a:solidFill>
-                  <a:srgbClr val="333333"/>
-                </a:solidFill>
-              </a:defRPr>
-            </a:pPr>
-            <a:r>
-              <a:t>• ✓ Save and load settings</a:t>
+                <a:spcPts val="600"/>
+              </a:spcAft>
+              <a:defRPr b="1" sz="2000">
+                <a:solidFill>
+                  <a:srgbClr val="333333"/>
+                </a:solidFill>
+              </a:defRPr>
+            </a:pPr>
+            <a:r>
+              <a:t>Reading CSV:</a:t>
+            </a:r>
+          </a:p>
+          <a:p>
+            <a:pPr>
+              <a:spcAft>
+                <a:spcPts val="600"/>
+              </a:spcAft>
+              <a:defRPr sz="1600">
+                <a:solidFill>
+                  <a:srgbClr val="333333"/>
+                </a:solidFill>
+              </a:defRPr>
+            </a:pPr>
+            <a:r>
+              <a:t>import csv</a:t>
+            </a:r>
+          </a:p>
+          <a:p>
+            <a:pPr>
+              <a:spcAft>
+                <a:spcPts val="600"/>
+              </a:spcAft>
+              <a:defRPr b="1" sz="2000">
+                <a:solidFill>
+                  <a:srgbClr val="333333"/>
+                </a:solidFill>
+              </a:defRPr>
+            </a:pPr>
+            <a:r>
+              <a:t>with open("data.csv", "r") as file:</a:t>
+            </a:r>
+          </a:p>
+          <a:p>
+            <a:pPr>
+              <a:spcAft>
+                <a:spcPts val="600"/>
+              </a:spcAft>
+              <a:defRPr sz="1600">
+                <a:solidFill>
+                  <a:srgbClr val="333333"/>
+                </a:solidFill>
+              </a:defRPr>
+            </a:pPr>
+            <a:r>
+              <a:t>    reader = csv.reader(file)</a:t>
+            </a:r>
+          </a:p>
+          <a:p>
+            <a:pPr>
+              <a:spcAft>
+                <a:spcPts val="600"/>
+              </a:spcAft>
+              <a:defRPr sz="1600">
+                <a:solidFill>
+                  <a:srgbClr val="333333"/>
+                </a:solidFill>
+              </a:defRPr>
+            </a:pPr>
+            <a:r>
+              <a:t>    for row in reader:</a:t>
+            </a:r>
+          </a:p>
+          <a:p>
+            <a:pPr>
+              <a:spcAft>
+                <a:spcPts val="600"/>
+              </a:spcAft>
+              <a:defRPr sz="1600">
+                <a:solidFill>
+                  <a:srgbClr val="333333"/>
+                </a:solidFill>
+              </a:defRPr>
+            </a:pPr>
+            <a:r>
+              <a:t>        print(row)  # List of values</a:t>
+            </a:r>
+          </a:p>
+          <a:p>
+            <a:pPr>
+              <a:spcAft>
+                <a:spcPts val="600"/>
+              </a:spcAft>
+              <a:defRPr b="1" sz="2000">
+                <a:solidFill>
+                  <a:srgbClr val="333333"/>
+                </a:solidFill>
+              </a:defRPr>
+            </a:pPr>
+            <a:r>
+              <a:t>Using DictReader:</a:t>
+            </a:r>
+          </a:p>
+          <a:p>
+            <a:pPr>
+              <a:spcAft>
+                <a:spcPts val="600"/>
+              </a:spcAft>
+              <a:defRPr b="1" sz="2000">
+                <a:solidFill>
+                  <a:srgbClr val="333333"/>
+                </a:solidFill>
+              </a:defRPr>
+            </a:pPr>
+            <a:r>
+              <a:t>with open("data.csv", "r") as file:</a:t>
+            </a:r>
+          </a:p>
+          <a:p>
+            <a:pPr>
+              <a:spcAft>
+                <a:spcPts val="600"/>
+              </a:spcAft>
+              <a:defRPr sz="1600">
+                <a:solidFill>
+                  <a:srgbClr val="333333"/>
+                </a:solidFill>
+              </a:defRPr>
+            </a:pPr>
+            <a:r>
+              <a:t>    reader = csv.DictReader(file)</a:t>
+            </a:r>
+          </a:p>
+          <a:p>
+            <a:pPr>
+              <a:spcAft>
+                <a:spcPts val="600"/>
+              </a:spcAft>
+              <a:defRPr sz="1600">
+                <a:solidFill>
+                  <a:srgbClr val="333333"/>
+                </a:solidFill>
+              </a:defRPr>
+            </a:pPr>
+            <a:r>
+              <a:t>    for row in reader:</a:t>
+            </a:r>
+          </a:p>
+          <a:p>
+            <a:pPr>
+              <a:spcAft>
+                <a:spcPts val="600"/>
+              </a:spcAft>
+              <a:defRPr sz="1600">
+                <a:solidFill>
+                  <a:srgbClr val="333333"/>
+                </a:solidFill>
+              </a:defRPr>
+            </a:pPr>
+            <a:r>
+              <a:t>        print(row["name"])</a:t>
+            </a:r>
+          </a:p>
+          <a:p>
+            <a:pPr>
+              <a:spcAft>
+                <a:spcPts val="600"/>
+              </a:spcAft>
+              <a:defRPr b="1" sz="2000">
+                <a:solidFill>
+                  <a:srgbClr val="333333"/>
+                </a:solidFill>
+              </a:defRPr>
+            </a:pPr>
+            <a:r>
+              <a:t>Writing CSV:</a:t>
+            </a:r>
+          </a:p>
+          <a:p>
+            <a:pPr>
+              <a:spcAft>
+                <a:spcPts val="600"/>
+              </a:spcAft>
+              <a:defRPr b="1" sz="2000">
+                <a:solidFill>
+                  <a:srgbClr val="333333"/>
+                </a:solidFill>
+              </a:defRPr>
+            </a:pPr>
+            <a:r>
+              <a:t>with open("data.csv", "w", newline="") as file:</a:t>
+            </a:r>
+          </a:p>
+          <a:p>
+            <a:pPr>
+              <a:spcAft>
+                <a:spcPts val="600"/>
+              </a:spcAft>
+              <a:defRPr sz="1600">
+                <a:solidFill>
+                  <a:srgbClr val="333333"/>
+                </a:solidFill>
+              </a:defRPr>
+            </a:pPr>
+            <a:r>
+              <a:t>    writer = csv.writer(file)</a:t>
+            </a:r>
+          </a:p>
+          <a:p>
+            <a:pPr>
+              <a:spcAft>
+                <a:spcPts val="600"/>
+              </a:spcAft>
+              <a:defRPr sz="1600">
+                <a:solidFill>
+                  <a:srgbClr val="333333"/>
+                </a:solidFill>
+              </a:defRPr>
+            </a:pPr>
+            <a:r>
+              <a:t>    writer.writerow(["Name", "Age"])</a:t>
+            </a:r>
+          </a:p>
+          <a:p>
+            <a:pPr>
+              <a:spcAft>
+                <a:spcPts val="600"/>
+              </a:spcAft>
+              <a:defRPr sz="1600">
+                <a:solidFill>
+                  <a:srgbClr val="333333"/>
+                </a:solidFill>
+              </a:defRPr>
+            </a:pPr>
+            <a:r>
+              <a:t>    writer.writerow(["Alice", "25"])</a:t>
             </a:r>
           </a:p>
         </p:txBody>
@@ -4692,7 +4765,7 @@
 </p:sld>
 </file>
 
-<file path=ppt/slides/slide3.xml><?xml version="1.0" encoding="utf-8"?>
+<file path=ppt/slides/slide6.xml><?xml version="1.0" encoding="utf-8"?>
 <p:sld xmlns:a="http://schemas.openxmlformats.org/drawingml/2006/main" xmlns:p="http://schemas.openxmlformats.org/presentationml/2006/main" xmlns:r="http://schemas.openxmlformats.org/officeDocument/2006/relationships">
   <p:cSld>
     <p:spTree>
@@ -4796,8 +4869,8 @@
         </p:nvSpPr>
         <p:spPr>
           <a:xfrm>
-            <a:off x="457200" y="365760"/>
-            <a:ext cx="10972800" cy="731520"/>
+            <a:off x="457200" y="320040"/>
+            <a:ext cx="10972800" cy="640080"/>
           </a:xfrm>
           <a:prstGeom prst="rect">
             <a:avLst/>
@@ -4811,71 +4884,28 @@
           <a:lstStyle/>
           <a:p>
             <a:pPr>
-              <a:defRPr sz="4000" b="1">
+              <a:defRPr sz="3600" b="1">
                 <a:solidFill>
                   <a:srgbClr val="003366"/>
                 </a:solidFill>
               </a:defRPr>
             </a:pPr>
             <a:r>
-              <a:t>Opening and Closing Files</a:t>
-            </a:r>
-          </a:p>
-        </p:txBody>
-      </p:sp>
-      <p:sp>
-        <p:nvSpPr>
-          <p:cNvPr id="5" name="Rectangle 4"/>
-          <p:cNvSpPr/>
+              <a:t>Working with JSON Files</a:t>
+            </a:r>
+          </a:p>
+        </p:txBody>
+      </p:sp>
+      <p:sp>
+        <p:nvSpPr>
+          <p:cNvPr id="5" name="TextBox 4"/>
+          <p:cNvSpPr txBox="1"/>
           <p:nvPr/>
         </p:nvSpPr>
         <p:spPr>
           <a:xfrm>
-            <a:off x="457200" y="1005840"/>
-            <a:ext cx="1828800" cy="45720"/>
-          </a:xfrm>
-          <a:prstGeom prst="rect">
-            <a:avLst/>
-          </a:prstGeom>
-          <a:solidFill>
-            <a:srgbClr val="0066CC"/>
-          </a:solidFill>
-          <a:ln>
-            <a:noFill/>
-          </a:ln>
-        </p:spPr>
-        <p:style>
-          <a:lnRef idx="1">
-            <a:schemeClr val="accent1"/>
-          </a:lnRef>
-          <a:fillRef idx="3">
-            <a:schemeClr val="accent1"/>
-          </a:fillRef>
-          <a:effectRef idx="2">
-            <a:schemeClr val="accent1"/>
-          </a:effectRef>
-          <a:fontRef idx="minor">
-            <a:schemeClr val="lt1"/>
-          </a:fontRef>
-        </p:style>
-        <p:txBody>
-          <a:bodyPr rtlCol="0" anchor="ctr"/>
-          <a:lstStyle/>
-          <a:p>
-            <a:pPr algn="ctr"/>
-          </a:p>
-        </p:txBody>
-      </p:sp>
-      <p:sp>
-        <p:nvSpPr>
-          <p:cNvPr id="6" name="TextBox 5"/>
-          <p:cNvSpPr txBox="1"/>
-          <p:nvPr/>
-        </p:nvSpPr>
-        <p:spPr>
-          <a:xfrm>
-            <a:off x="640080" y="1371600"/>
-            <a:ext cx="10789920" cy="4572000"/>
+            <a:off x="640080" y="1188720"/>
+            <a:ext cx="10789920" cy="5303520"/>
           </a:xfrm>
           <a:prstGeom prst="rect">
             <a:avLst/>
@@ -4890,46 +4920,241 @@
           <a:p>
             <a:pPr>
               <a:spcAft>
-                <a:spcPts val="800"/>
-              </a:spcAft>
-              <a:defRPr sz="2000" b="1">
-                <a:solidFill>
-                  <a:srgbClr val="333333"/>
-                </a:solidFill>
-              </a:defRPr>
-            </a:pPr>
-            <a:r>
-              <a:t>Basic File Operations:</a:t>
-            </a:r>
-          </a:p>
-          <a:p>
-            <a:pPr>
-              <a:spcAft>
-                <a:spcPts val="800"/>
-              </a:spcAft>
-              <a:defRPr sz="2000" b="1">
-                <a:solidFill>
-                  <a:srgbClr val="333333"/>
-                </a:solidFill>
-              </a:defRPr>
-            </a:pPr>
-            <a:r>
-              <a:t>File Modes:</a:t>
-            </a:r>
-          </a:p>
-          <a:p>
-            <a:pPr>
-              <a:spcAft>
-                <a:spcPts val="800"/>
-              </a:spcAft>
-              <a:defRPr sz="2000" b="1">
-                <a:solidFill>
-                  <a:srgbClr val="333333"/>
-                </a:solidFill>
-              </a:defRPr>
-            </a:pPr>
-            <a:r>
-              <a:t>Important:Always close files when done! But there's a better way...</a:t>
+                <a:spcPts val="600"/>
+              </a:spcAft>
+              <a:defRPr b="1" sz="2000">
+                <a:solidFill>
+                  <a:srgbClr val="333333"/>
+                </a:solidFill>
+              </a:defRPr>
+            </a:pPr>
+            <a:r>
+              <a:t>Reading JSON:</a:t>
+            </a:r>
+          </a:p>
+          <a:p>
+            <a:pPr>
+              <a:spcAft>
+                <a:spcPts val="600"/>
+              </a:spcAft>
+              <a:defRPr sz="1600">
+                <a:solidFill>
+                  <a:srgbClr val="333333"/>
+                </a:solidFill>
+              </a:defRPr>
+            </a:pPr>
+            <a:r>
+              <a:t>import json</a:t>
+            </a:r>
+          </a:p>
+          <a:p>
+            <a:pPr>
+              <a:spcAft>
+                <a:spcPts val="600"/>
+              </a:spcAft>
+              <a:defRPr b="1" sz="2000">
+                <a:solidFill>
+                  <a:srgbClr val="333333"/>
+                </a:solidFill>
+              </a:defRPr>
+            </a:pPr>
+            <a:r>
+              <a:t>with open("data.json", "r") as file:</a:t>
+            </a:r>
+          </a:p>
+          <a:p>
+            <a:pPr>
+              <a:spcAft>
+                <a:spcPts val="600"/>
+              </a:spcAft>
+              <a:defRPr sz="1600">
+                <a:solidFill>
+                  <a:srgbClr val="333333"/>
+                </a:solidFill>
+              </a:defRPr>
+            </a:pPr>
+            <a:r>
+              <a:t>    data = json.load(file)</a:t>
+            </a:r>
+          </a:p>
+          <a:p>
+            <a:pPr>
+              <a:spcAft>
+                <a:spcPts val="600"/>
+              </a:spcAft>
+              <a:defRPr b="1" sz="2000">
+                <a:solidFill>
+                  <a:srgbClr val="333333"/>
+                </a:solidFill>
+              </a:defRPr>
+            </a:pPr>
+            <a:r>
+              <a:t>Writing JSON:</a:t>
+            </a:r>
+          </a:p>
+          <a:p>
+            <a:pPr>
+              <a:spcAft>
+                <a:spcPts val="600"/>
+              </a:spcAft>
+              <a:defRPr b="1" sz="2000">
+                <a:solidFill>
+                  <a:srgbClr val="333333"/>
+                </a:solidFill>
+              </a:defRPr>
+            </a:pPr>
+            <a:r>
+              <a:t>data = {"name": "Alice", "age": 25}</a:t>
+            </a:r>
+          </a:p>
+          <a:p>
+            <a:pPr>
+              <a:spcAft>
+                <a:spcPts val="600"/>
+              </a:spcAft>
+              <a:defRPr b="1" sz="2000">
+                <a:solidFill>
+                  <a:srgbClr val="333333"/>
+                </a:solidFill>
+              </a:defRPr>
+            </a:pPr>
+            <a:r>
+              <a:t>with open("data.json", "w") as file:</a:t>
+            </a:r>
+          </a:p>
+          <a:p>
+            <a:pPr>
+              <a:spcAft>
+                <a:spcPts val="600"/>
+              </a:spcAft>
+              <a:defRPr sz="1600">
+                <a:solidFill>
+                  <a:srgbClr val="333333"/>
+                </a:solidFill>
+              </a:defRPr>
+            </a:pPr>
+            <a:r>
+              <a:t>    json.dump(data, file, indent=4)</a:t>
+            </a:r>
+          </a:p>
+          <a:p>
+            <a:pPr>
+              <a:spcAft>
+                <a:spcPts val="600"/>
+              </a:spcAft>
+              <a:defRPr b="1" sz="2000">
+                <a:solidFill>
+                  <a:srgbClr val="333333"/>
+                </a:solidFill>
+              </a:defRPr>
+            </a:pPr>
+            <a:r>
+              <a:t>JSON Strings:</a:t>
+            </a:r>
+          </a:p>
+          <a:p>
+            <a:pPr>
+              <a:spcAft>
+                <a:spcPts val="600"/>
+              </a:spcAft>
+              <a:defRPr sz="1600">
+                <a:solidFill>
+                  <a:srgbClr val="333333"/>
+                </a:solidFill>
+              </a:defRPr>
+            </a:pPr>
+            <a:r>
+              <a:t>json_str = json.dumps(data)  # To string</a:t>
+            </a:r>
+          </a:p>
+          <a:p>
+            <a:pPr>
+              <a:spcAft>
+                <a:spcPts val="600"/>
+              </a:spcAft>
+              <a:defRPr sz="1600">
+                <a:solidFill>
+                  <a:srgbClr val="333333"/>
+                </a:solidFill>
+              </a:defRPr>
+            </a:pPr>
+            <a:r>
+              <a:t>data = json.loads(json_str)  # From string</a:t>
+            </a:r>
+          </a:p>
+          <a:p>
+            <a:pPr>
+              <a:spcAft>
+                <a:spcPts val="600"/>
+              </a:spcAft>
+              <a:defRPr sz="1600">
+                <a:solidFill>
+                  <a:srgbClr val="333333"/>
+                </a:solidFill>
+              </a:defRPr>
+            </a:pPr>
+            <a:r>
+              <a:t>Why JSON?</a:t>
+            </a:r>
+          </a:p>
+          <a:p>
+            <a:pPr lvl="1">
+              <a:spcAft>
+                <a:spcPts val="400"/>
+              </a:spcAft>
+              <a:defRPr sz="1600">
+                <a:solidFill>
+                  <a:srgbClr val="333333"/>
+                </a:solidFill>
+              </a:defRPr>
+            </a:pPr>
+            <a:r>
+              <a:t>• Human-readable</a:t>
+            </a:r>
+          </a:p>
+          <a:p>
+            <a:pPr lvl="1">
+              <a:spcAft>
+                <a:spcPts val="400"/>
+              </a:spcAft>
+              <a:defRPr sz="1600">
+                <a:solidFill>
+                  <a:srgbClr val="333333"/>
+                </a:solidFill>
+              </a:defRPr>
+            </a:pPr>
+            <a:r>
+              <a:t>• Language-independent</a:t>
+            </a:r>
+          </a:p>
+          <a:p>
+            <a:pPr lvl="1">
+              <a:spcAft>
+                <a:spcPts val="400"/>
+              </a:spcAft>
+              <a:defRPr sz="1600">
+                <a:solidFill>
+                  <a:srgbClr val="333333"/>
+                </a:solidFill>
+              </a:defRPr>
+            </a:pPr>
+            <a:r>
+              <a:t>• Supports nested structures</a:t>
+            </a:r>
+          </a:p>
+          <a:p>
+            <a:pPr lvl="1">
+              <a:spcAft>
+                <a:spcPts val="400"/>
+              </a:spcAft>
+              <a:defRPr sz="1600">
+                <a:solidFill>
+                  <a:srgbClr val="333333"/>
+                </a:solidFill>
+              </a:defRPr>
+            </a:pPr>
+            <a:r>
+              <a:t>• Common API format</a:t>
             </a:r>
           </a:p>
         </p:txBody>
@@ -4942,7 +5167,7 @@
 </p:sld>
 </file>
 
-<file path=ppt/slides/slide4.xml><?xml version="1.0" encoding="utf-8"?>
+<file path=ppt/slides/slide7.xml><?xml version="1.0" encoding="utf-8"?>
 <p:sld xmlns:a="http://schemas.openxmlformats.org/drawingml/2006/main" xmlns:p="http://schemas.openxmlformats.org/presentationml/2006/main" xmlns:r="http://schemas.openxmlformats.org/officeDocument/2006/relationships">
   <p:cSld>
     <p:spTree>
@@ -5046,8 +5271,8 @@
         </p:nvSpPr>
         <p:spPr>
           <a:xfrm>
-            <a:off x="457200" y="365760"/>
-            <a:ext cx="10972800" cy="731520"/>
+            <a:off x="457200" y="320040"/>
+            <a:ext cx="10972800" cy="640080"/>
           </a:xfrm>
           <a:prstGeom prst="rect">
             <a:avLst/>
@@ -5061,71 +5286,28 @@
           <a:lstStyle/>
           <a:p>
             <a:pPr>
-              <a:defRPr sz="4000" b="1">
+              <a:defRPr sz="3600" b="1">
                 <a:solidFill>
                   <a:srgbClr val="003366"/>
                 </a:solidFill>
               </a:defRPr>
             </a:pPr>
             <a:r>
-              <a:t>Reading Files</a:t>
-            </a:r>
-          </a:p>
-        </p:txBody>
-      </p:sp>
-      <p:sp>
-        <p:nvSpPr>
-          <p:cNvPr id="5" name="Rectangle 4"/>
-          <p:cNvSpPr/>
+              <a:t>File Paths</a:t>
+            </a:r>
+          </a:p>
+        </p:txBody>
+      </p:sp>
+      <p:sp>
+        <p:nvSpPr>
+          <p:cNvPr id="5" name="TextBox 4"/>
+          <p:cNvSpPr txBox="1"/>
           <p:nvPr/>
         </p:nvSpPr>
         <p:spPr>
           <a:xfrm>
-            <a:off x="457200" y="1005840"/>
-            <a:ext cx="1828800" cy="45720"/>
-          </a:xfrm>
-          <a:prstGeom prst="rect">
-            <a:avLst/>
-          </a:prstGeom>
-          <a:solidFill>
-            <a:srgbClr val="0066CC"/>
-          </a:solidFill>
-          <a:ln>
-            <a:noFill/>
-          </a:ln>
-        </p:spPr>
-        <p:style>
-          <a:lnRef idx="1">
-            <a:schemeClr val="accent1"/>
-          </a:lnRef>
-          <a:fillRef idx="3">
-            <a:schemeClr val="accent1"/>
-          </a:fillRef>
-          <a:effectRef idx="2">
-            <a:schemeClr val="accent1"/>
-          </a:effectRef>
-          <a:fontRef idx="minor">
-            <a:schemeClr val="lt1"/>
-          </a:fontRef>
-        </p:style>
-        <p:txBody>
-          <a:bodyPr rtlCol="0" anchor="ctr"/>
-          <a:lstStyle/>
-          <a:p>
-            <a:pPr algn="ctr"/>
-          </a:p>
-        </p:txBody>
-      </p:sp>
-      <p:sp>
-        <p:nvSpPr>
-          <p:cNvPr id="6" name="TextBox 5"/>
-          <p:cNvSpPr txBox="1"/>
-          <p:nvPr/>
-        </p:nvSpPr>
-        <p:spPr>
-          <a:xfrm>
-            <a:off x="640080" y="1371600"/>
-            <a:ext cx="10789920" cy="4572000"/>
+            <a:off x="640080" y="1188720"/>
+            <a:ext cx="10789920" cy="5303520"/>
           </a:xfrm>
           <a:prstGeom prst="rect">
             <a:avLst/>
@@ -5140,46 +5322,256 @@
           <a:p>
             <a:pPr>
               <a:spcAft>
-                <a:spcPts val="800"/>
-              </a:spcAft>
-              <a:defRPr sz="2000" b="1">
-                <a:solidFill>
-                  <a:srgbClr val="333333"/>
-                </a:solidFill>
-              </a:defRPr>
-            </a:pPr>
-            <a:r>
-              <a:t>read() - Read Entire File:</a:t>
-            </a:r>
-          </a:p>
-          <a:p>
-            <a:pPr>
-              <a:spcAft>
-                <a:spcPts val="800"/>
-              </a:spcAft>
-              <a:defRPr sz="2000" b="1">
-                <a:solidFill>
-                  <a:srgbClr val="333333"/>
-                </a:solidFill>
-              </a:defRPr>
-            </a:pPr>
-            <a:r>
-              <a:t>readline() - Read One Line:</a:t>
-            </a:r>
-          </a:p>
-          <a:p>
-            <a:pPr>
-              <a:spcAft>
-                <a:spcPts val="800"/>
-              </a:spcAft>
-              <a:defRPr sz="2000" b="1">
-                <a:solidFill>
-                  <a:srgbClr val="333333"/>
-                </a:solidFill>
-              </a:defRPr>
-            </a:pPr>
-            <a:r>
-              <a:t>readlines() - Read All Lines as List:</a:t>
+                <a:spcPts val="600"/>
+              </a:spcAft>
+              <a:defRPr b="1" sz="2000">
+                <a:solidFill>
+                  <a:srgbClr val="333333"/>
+                </a:solidFill>
+              </a:defRPr>
+            </a:pPr>
+            <a:r>
+              <a:t>Absolute Path:</a:t>
+            </a:r>
+          </a:p>
+          <a:p>
+            <a:pPr>
+              <a:spcAft>
+                <a:spcPts val="600"/>
+              </a:spcAft>
+              <a:defRPr sz="1600">
+                <a:solidFill>
+                  <a:srgbClr val="333333"/>
+                </a:solidFill>
+              </a:defRPr>
+            </a:pPr>
+            <a:r>
+              <a:t>"/home/user/documents/file.txt"</a:t>
+            </a:r>
+          </a:p>
+          <a:p>
+            <a:pPr>
+              <a:spcAft>
+                <a:spcPts val="600"/>
+              </a:spcAft>
+              <a:defRPr b="1" sz="2000">
+                <a:solidFill>
+                  <a:srgbClr val="333333"/>
+                </a:solidFill>
+              </a:defRPr>
+            </a:pPr>
+            <a:r>
+              <a:t>"C:\\Users\\Name\\file.txt"</a:t>
+            </a:r>
+          </a:p>
+          <a:p>
+            <a:pPr>
+              <a:spcAft>
+                <a:spcPts val="600"/>
+              </a:spcAft>
+              <a:defRPr b="1" sz="2000">
+                <a:solidFill>
+                  <a:srgbClr val="333333"/>
+                </a:solidFill>
+              </a:defRPr>
+            </a:pPr>
+            <a:r>
+              <a:t>Relative Path:</a:t>
+            </a:r>
+          </a:p>
+          <a:p>
+            <a:pPr>
+              <a:spcAft>
+                <a:spcPts val="600"/>
+              </a:spcAft>
+              <a:defRPr sz="1600">
+                <a:solidFill>
+                  <a:srgbClr val="333333"/>
+                </a:solidFill>
+              </a:defRPr>
+            </a:pPr>
+            <a:r>
+              <a:t>"file.txt"  # Same directory</a:t>
+            </a:r>
+          </a:p>
+          <a:p>
+            <a:pPr>
+              <a:spcAft>
+                <a:spcPts val="600"/>
+              </a:spcAft>
+              <a:defRPr sz="1600">
+                <a:solidFill>
+                  <a:srgbClr val="333333"/>
+                </a:solidFill>
+              </a:defRPr>
+            </a:pPr>
+            <a:r>
+              <a:t>"data/file.txt"  # Subdirectory</a:t>
+            </a:r>
+          </a:p>
+          <a:p>
+            <a:pPr>
+              <a:spcAft>
+                <a:spcPts val="600"/>
+              </a:spcAft>
+              <a:defRPr sz="1600">
+                <a:solidFill>
+                  <a:srgbClr val="333333"/>
+                </a:solidFill>
+              </a:defRPr>
+            </a:pPr>
+            <a:r>
+              <a:t>"../file.txt"  # Parent directory</a:t>
+            </a:r>
+          </a:p>
+          <a:p>
+            <a:pPr>
+              <a:spcAft>
+                <a:spcPts val="600"/>
+              </a:spcAft>
+              <a:defRPr b="1" sz="2000">
+                <a:solidFill>
+                  <a:srgbClr val="333333"/>
+                </a:solidFill>
+              </a:defRPr>
+            </a:pPr>
+            <a:r>
+              <a:t>Using pathlib:</a:t>
+            </a:r>
+          </a:p>
+          <a:p>
+            <a:pPr>
+              <a:spcAft>
+                <a:spcPts val="600"/>
+              </a:spcAft>
+              <a:defRPr sz="1600">
+                <a:solidFill>
+                  <a:srgbClr val="333333"/>
+                </a:solidFill>
+              </a:defRPr>
+            </a:pPr>
+            <a:r>
+              <a:t>from pathlib import Path</a:t>
+            </a:r>
+          </a:p>
+          <a:p>
+            <a:pPr>
+              <a:spcAft>
+                <a:spcPts val="600"/>
+              </a:spcAft>
+              <a:defRPr sz="1600">
+                <a:solidFill>
+                  <a:srgbClr val="333333"/>
+                </a:solidFill>
+              </a:defRPr>
+            </a:pPr>
+            <a:r>
+              <a:t>path = Path("data") / "file.txt"</a:t>
+            </a:r>
+          </a:p>
+          <a:p>
+            <a:pPr>
+              <a:spcAft>
+                <a:spcPts val="600"/>
+              </a:spcAft>
+              <a:defRPr sz="1600">
+                <a:solidFill>
+                  <a:srgbClr val="333333"/>
+                </a:solidFill>
+              </a:defRPr>
+            </a:pPr>
+            <a:r>
+              <a:t>path.exists()</a:t>
+            </a:r>
+          </a:p>
+          <a:p>
+            <a:pPr>
+              <a:spcAft>
+                <a:spcPts val="600"/>
+              </a:spcAft>
+              <a:defRPr sz="1600">
+                <a:solidFill>
+                  <a:srgbClr val="333333"/>
+                </a:solidFill>
+              </a:defRPr>
+            </a:pPr>
+            <a:r>
+              <a:t>path.read_text()</a:t>
+            </a:r>
+          </a:p>
+          <a:p>
+            <a:pPr>
+              <a:spcAft>
+                <a:spcPts val="600"/>
+              </a:spcAft>
+              <a:defRPr sz="1600">
+                <a:solidFill>
+                  <a:srgbClr val="333333"/>
+                </a:solidFill>
+              </a:defRPr>
+            </a:pPr>
+            <a:r>
+              <a:t>path.write_text("content")</a:t>
+            </a:r>
+          </a:p>
+          <a:p>
+            <a:pPr>
+              <a:spcAft>
+                <a:spcPts val="600"/>
+              </a:spcAft>
+              <a:defRPr b="1" sz="2000">
+                <a:solidFill>
+                  <a:srgbClr val="333333"/>
+                </a:solidFill>
+              </a:defRPr>
+            </a:pPr>
+            <a:r>
+              <a:t>Best Practices:</a:t>
+            </a:r>
+          </a:p>
+          <a:p>
+            <a:pPr lvl="1">
+              <a:spcAft>
+                <a:spcPts val="400"/>
+              </a:spcAft>
+              <a:defRPr sz="1600">
+                <a:solidFill>
+                  <a:srgbClr val="333333"/>
+                </a:solidFill>
+              </a:defRPr>
+            </a:pPr>
+            <a:r>
+              <a:t>• Use Path for cross-platform</a:t>
+            </a:r>
+          </a:p>
+          <a:p>
+            <a:pPr lvl="1">
+              <a:spcAft>
+                <a:spcPts val="400"/>
+              </a:spcAft>
+              <a:defRPr sz="1600">
+                <a:solidFill>
+                  <a:srgbClr val="333333"/>
+                </a:solidFill>
+              </a:defRPr>
+            </a:pPr>
+            <a:r>
+              <a:t>• Check if file exists</a:t>
+            </a:r>
+          </a:p>
+          <a:p>
+            <a:pPr lvl="1">
+              <a:spcAft>
+                <a:spcPts val="400"/>
+              </a:spcAft>
+              <a:defRPr sz="1600">
+                <a:solidFill>
+                  <a:srgbClr val="333333"/>
+                </a:solidFill>
+              </a:defRPr>
+            </a:pPr>
+            <a:r>
+              <a:t>• Use absolute paths when possible</a:t>
             </a:r>
           </a:p>
         </p:txBody>
@@ -5192,7 +5584,7 @@
 </p:sld>
 </file>
 
-<file path=ppt/slides/slide5.xml><?xml version="1.0" encoding="utf-8"?>
+<file path=ppt/slides/slide8.xml><?xml version="1.0" encoding="utf-8"?>
 <p:sld xmlns:a="http://schemas.openxmlformats.org/drawingml/2006/main" xmlns:p="http://schemas.openxmlformats.org/presentationml/2006/main" xmlns:r="http://schemas.openxmlformats.org/officeDocument/2006/relationships">
   <p:cSld>
     <p:spTree>
@@ -5296,8 +5688,8 @@
         </p:nvSpPr>
         <p:spPr>
           <a:xfrm>
-            <a:off x="457200" y="365760"/>
-            <a:ext cx="10972800" cy="731520"/>
+            <a:off x="457200" y="320040"/>
+            <a:ext cx="10972800" cy="640080"/>
           </a:xfrm>
           <a:prstGeom prst="rect">
             <a:avLst/>
@@ -5311,71 +5703,28 @@
           <a:lstStyle/>
           <a:p>
             <a:pPr>
-              <a:defRPr sz="4000" b="1">
+              <a:defRPr sz="3600" b="1">
                 <a:solidFill>
                   <a:srgbClr val="003366"/>
                 </a:solidFill>
               </a:defRPr>
             </a:pPr>
             <a:r>
-              <a:t>Writing and Appending to Files</a:t>
-            </a:r>
-          </a:p>
-        </p:txBody>
-      </p:sp>
-      <p:sp>
-        <p:nvSpPr>
-          <p:cNvPr id="5" name="Rectangle 4"/>
-          <p:cNvSpPr/>
+              <a:t>Error Handling with Files</a:t>
+            </a:r>
+          </a:p>
+        </p:txBody>
+      </p:sp>
+      <p:sp>
+        <p:nvSpPr>
+          <p:cNvPr id="5" name="TextBox 4"/>
+          <p:cNvSpPr txBox="1"/>
           <p:nvPr/>
         </p:nvSpPr>
         <p:spPr>
           <a:xfrm>
-            <a:off x="457200" y="1005840"/>
-            <a:ext cx="1828800" cy="45720"/>
-          </a:xfrm>
-          <a:prstGeom prst="rect">
-            <a:avLst/>
-          </a:prstGeom>
-          <a:solidFill>
-            <a:srgbClr val="0066CC"/>
-          </a:solidFill>
-          <a:ln>
-            <a:noFill/>
-          </a:ln>
-        </p:spPr>
-        <p:style>
-          <a:lnRef idx="1">
-            <a:schemeClr val="accent1"/>
-          </a:lnRef>
-          <a:fillRef idx="3">
-            <a:schemeClr val="accent1"/>
-          </a:fillRef>
-          <a:effectRef idx="2">
-            <a:schemeClr val="accent1"/>
-          </a:effectRef>
-          <a:fontRef idx="minor">
-            <a:schemeClr val="lt1"/>
-          </a:fontRef>
-        </p:style>
-        <p:txBody>
-          <a:bodyPr rtlCol="0" anchor="ctr"/>
-          <a:lstStyle/>
-          <a:p>
-            <a:pPr algn="ctr"/>
-          </a:p>
-        </p:txBody>
-      </p:sp>
-      <p:sp>
-        <p:nvSpPr>
-          <p:cNvPr id="6" name="TextBox 5"/>
-          <p:cNvSpPr txBox="1"/>
-          <p:nvPr/>
-        </p:nvSpPr>
-        <p:spPr>
-          <a:xfrm>
-            <a:off x="640080" y="1371600"/>
-            <a:ext cx="10789920" cy="4572000"/>
+            <a:off x="640080" y="1188720"/>
+            <a:ext cx="10789920" cy="5303520"/>
           </a:xfrm>
           <a:prstGeom prst="rect">
             <a:avLst/>
@@ -5390,46 +5739,301 @@
           <a:p>
             <a:pPr>
               <a:spcAft>
-                <a:spcPts val="800"/>
-              </a:spcAft>
-              <a:defRPr sz="2000" b="1">
-                <a:solidFill>
-                  <a:srgbClr val="333333"/>
-                </a:solidFill>
-              </a:defRPr>
-            </a:pPr>
-            <a:r>
-              <a:t>Write Mode ("w") - Overwrites File:</a:t>
-            </a:r>
-          </a:p>
-          <a:p>
-            <a:pPr>
-              <a:spcAft>
-                <a:spcPts val="800"/>
-              </a:spcAft>
-              <a:defRPr sz="2000" b="1">
-                <a:solidFill>
-                  <a:srgbClr val="333333"/>
-                </a:solidFill>
-              </a:defRPr>
-            </a:pPr>
-            <a:r>
-              <a:t>Append Mode ("a") - Adds to End:</a:t>
-            </a:r>
-          </a:p>
-          <a:p>
-            <a:pPr>
-              <a:spcAft>
-                <a:spcPts val="800"/>
-              </a:spcAft>
-              <a:defRPr sz="2000" b="1">
-                <a:solidFill>
-                  <a:srgbClr val="333333"/>
-                </a:solidFill>
-              </a:defRPr>
-            </a:pPr>
-            <a:r>
-              <a:t>Warning:"w" mode erases the file! Use "a" to preserve content.</a:t>
+                <a:spcPts val="600"/>
+              </a:spcAft>
+              <a:defRPr b="1" sz="2000">
+                <a:solidFill>
+                  <a:srgbClr val="333333"/>
+                </a:solidFill>
+              </a:defRPr>
+            </a:pPr>
+            <a:r>
+              <a:t>Common Errors:</a:t>
+            </a:r>
+          </a:p>
+          <a:p>
+            <a:pPr lvl="1">
+              <a:spcAft>
+                <a:spcPts val="400"/>
+              </a:spcAft>
+              <a:defRPr sz="1600">
+                <a:solidFill>
+                  <a:srgbClr val="333333"/>
+                </a:solidFill>
+              </a:defRPr>
+            </a:pPr>
+            <a:r>
+              <a:t>• FileNotFoundError</a:t>
+            </a:r>
+          </a:p>
+          <a:p>
+            <a:pPr lvl="1">
+              <a:spcAft>
+                <a:spcPts val="400"/>
+              </a:spcAft>
+              <a:defRPr sz="1600">
+                <a:solidFill>
+                  <a:srgbClr val="333333"/>
+                </a:solidFill>
+              </a:defRPr>
+            </a:pPr>
+            <a:r>
+              <a:t>• PermissionError</a:t>
+            </a:r>
+          </a:p>
+          <a:p>
+            <a:pPr lvl="1">
+              <a:spcAft>
+                <a:spcPts val="400"/>
+              </a:spcAft>
+              <a:defRPr sz="1600">
+                <a:solidFill>
+                  <a:srgbClr val="333333"/>
+                </a:solidFill>
+              </a:defRPr>
+            </a:pPr>
+            <a:r>
+              <a:t>• IsADirectoryError</a:t>
+            </a:r>
+          </a:p>
+          <a:p>
+            <a:pPr>
+              <a:spcAft>
+                <a:spcPts val="600"/>
+              </a:spcAft>
+              <a:defRPr b="1" sz="2000">
+                <a:solidFill>
+                  <a:srgbClr val="333333"/>
+                </a:solidFill>
+              </a:defRPr>
+            </a:pPr>
+            <a:r>
+              <a:t>Safe Reading:</a:t>
+            </a:r>
+          </a:p>
+          <a:p>
+            <a:pPr>
+              <a:spcAft>
+                <a:spcPts val="600"/>
+              </a:spcAft>
+              <a:defRPr b="1" sz="2000">
+                <a:solidFill>
+                  <a:srgbClr val="333333"/>
+                </a:solidFill>
+              </a:defRPr>
+            </a:pPr>
+            <a:r>
+              <a:t>try:</a:t>
+            </a:r>
+          </a:p>
+          <a:p>
+            <a:pPr>
+              <a:spcAft>
+                <a:spcPts val="600"/>
+              </a:spcAft>
+              <a:defRPr sz="1600">
+                <a:solidFill>
+                  <a:srgbClr val="333333"/>
+                </a:solidFill>
+              </a:defRPr>
+            </a:pPr>
+            <a:r>
+              <a:t>    with open("file.txt", "r") as file:</a:t>
+            </a:r>
+          </a:p>
+          <a:p>
+            <a:pPr>
+              <a:spcAft>
+                <a:spcPts val="600"/>
+              </a:spcAft>
+              <a:defRPr sz="1600">
+                <a:solidFill>
+                  <a:srgbClr val="333333"/>
+                </a:solidFill>
+              </a:defRPr>
+            </a:pPr>
+            <a:r>
+              <a:t>        content = file.read()</a:t>
+            </a:r>
+          </a:p>
+          <a:p>
+            <a:pPr>
+              <a:spcAft>
+                <a:spcPts val="600"/>
+              </a:spcAft>
+              <a:defRPr b="1" sz="2000">
+                <a:solidFill>
+                  <a:srgbClr val="333333"/>
+                </a:solidFill>
+              </a:defRPr>
+            </a:pPr>
+            <a:r>
+              <a:t>except FileNotFoundError:</a:t>
+            </a:r>
+          </a:p>
+          <a:p>
+            <a:pPr>
+              <a:spcAft>
+                <a:spcPts val="600"/>
+              </a:spcAft>
+              <a:defRPr sz="1600">
+                <a:solidFill>
+                  <a:srgbClr val="333333"/>
+                </a:solidFill>
+              </a:defRPr>
+            </a:pPr>
+            <a:r>
+              <a:t>    print("File not found")</a:t>
+            </a:r>
+          </a:p>
+          <a:p>
+            <a:pPr>
+              <a:spcAft>
+                <a:spcPts val="600"/>
+              </a:spcAft>
+              <a:defRPr sz="1600">
+                <a:solidFill>
+                  <a:srgbClr val="333333"/>
+                </a:solidFill>
+              </a:defRPr>
+            </a:pPr>
+            <a:r>
+              <a:t>    content = ""</a:t>
+            </a:r>
+          </a:p>
+          <a:p>
+            <a:pPr>
+              <a:spcAft>
+                <a:spcPts val="600"/>
+              </a:spcAft>
+              <a:defRPr b="1" sz="2000">
+                <a:solidFill>
+                  <a:srgbClr val="333333"/>
+                </a:solidFill>
+              </a:defRPr>
+            </a:pPr>
+            <a:r>
+              <a:t>Check Before Opening:</a:t>
+            </a:r>
+          </a:p>
+          <a:p>
+            <a:pPr>
+              <a:spcAft>
+                <a:spcPts val="600"/>
+              </a:spcAft>
+              <a:defRPr sz="1600">
+                <a:solidFill>
+                  <a:srgbClr val="333333"/>
+                </a:solidFill>
+              </a:defRPr>
+            </a:pPr>
+            <a:r>
+              <a:t>import os</a:t>
+            </a:r>
+          </a:p>
+          <a:p>
+            <a:pPr>
+              <a:spcAft>
+                <a:spcPts val="600"/>
+              </a:spcAft>
+              <a:defRPr b="1" sz="2000">
+                <a:solidFill>
+                  <a:srgbClr val="333333"/>
+                </a:solidFill>
+              </a:defRPr>
+            </a:pPr>
+            <a:r>
+              <a:t>if os.path.exists("file.txt"):</a:t>
+            </a:r>
+          </a:p>
+          <a:p>
+            <a:pPr>
+              <a:spcAft>
+                <a:spcPts val="600"/>
+              </a:spcAft>
+              <a:defRPr sz="1600">
+                <a:solidFill>
+                  <a:srgbClr val="333333"/>
+                </a:solidFill>
+              </a:defRPr>
+            </a:pPr>
+            <a:r>
+              <a:t>    with open("file.txt", "r") as file:</a:t>
+            </a:r>
+          </a:p>
+          <a:p>
+            <a:pPr>
+              <a:spcAft>
+                <a:spcPts val="600"/>
+              </a:spcAft>
+              <a:defRPr sz="1600">
+                <a:solidFill>
+                  <a:srgbClr val="333333"/>
+                </a:solidFill>
+              </a:defRPr>
+            </a:pPr>
+            <a:r>
+              <a:t>        content = file.read()</a:t>
+            </a:r>
+          </a:p>
+          <a:p>
+            <a:pPr>
+              <a:spcAft>
+                <a:spcPts val="600"/>
+              </a:spcAft>
+              <a:defRPr b="1" sz="2000">
+                <a:solidFill>
+                  <a:srgbClr val="333333"/>
+                </a:solidFill>
+              </a:defRPr>
+            </a:pPr>
+            <a:r>
+              <a:t>Directory Operations:</a:t>
+            </a:r>
+          </a:p>
+          <a:p>
+            <a:pPr>
+              <a:spcAft>
+                <a:spcPts val="600"/>
+              </a:spcAft>
+              <a:defRPr sz="1600">
+                <a:solidFill>
+                  <a:srgbClr val="333333"/>
+                </a:solidFill>
+              </a:defRPr>
+            </a:pPr>
+            <a:r>
+              <a:t>os.listdir(".")  # List files</a:t>
+            </a:r>
+          </a:p>
+          <a:p>
+            <a:pPr>
+              <a:spcAft>
+                <a:spcPts val="600"/>
+              </a:spcAft>
+              <a:defRPr sz="1600">
+                <a:solidFill>
+                  <a:srgbClr val="333333"/>
+                </a:solidFill>
+              </a:defRPr>
+            </a:pPr>
+            <a:r>
+              <a:t>os.makedirs("new_dir")</a:t>
+            </a:r>
+          </a:p>
+          <a:p>
+            <a:pPr>
+              <a:spcAft>
+                <a:spcPts val="600"/>
+              </a:spcAft>
+              <a:defRPr sz="1600">
+                <a:solidFill>
+                  <a:srgbClr val="333333"/>
+                </a:solidFill>
+              </a:defRPr>
+            </a:pPr>
+            <a:r>
+              <a:t>os.path.isfile("file.txt")</a:t>
             </a:r>
           </a:p>
         </p:txBody>
@@ -5442,138 +6046,7 @@
 </p:sld>
 </file>
 
-<file path=ppt/slides/slide6.xml><?xml version="1.0" encoding="utf-8"?>
-<p:sld xmlns:a="http://schemas.openxmlformats.org/drawingml/2006/main" xmlns:p="http://schemas.openxmlformats.org/presentationml/2006/main" xmlns:r="http://schemas.openxmlformats.org/officeDocument/2006/relationships">
-  <p:cSld>
-    <p:spTree>
-      <p:nvGrpSpPr>
-        <p:cNvPr id="1" name=""/>
-        <p:cNvGrpSpPr/>
-        <p:nvPr/>
-      </p:nvGrpSpPr>
-      <p:grpSpPr/>
-      <p:sp>
-        <p:nvSpPr>
-          <p:cNvPr id="2" name="Rectangle 1"/>
-          <p:cNvSpPr/>
-          <p:nvPr/>
-        </p:nvSpPr>
-        <p:spPr>
-          <a:xfrm>
-            <a:off x="0" y="0"/>
-            <a:ext cx="12191695" cy="6858000"/>
-          </a:xfrm>
-          <a:prstGeom prst="rect">
-            <a:avLst/>
-          </a:prstGeom>
-          <a:solidFill>
-            <a:srgbClr val="0066CC"/>
-          </a:solidFill>
-          <a:ln>
-            <a:noFill/>
-          </a:ln>
-        </p:spPr>
-        <p:style>
-          <a:lnRef idx="1">
-            <a:schemeClr val="accent1"/>
-          </a:lnRef>
-          <a:fillRef idx="3">
-            <a:schemeClr val="accent1"/>
-          </a:fillRef>
-          <a:effectRef idx="2">
-            <a:schemeClr val="accent1"/>
-          </a:effectRef>
-          <a:fontRef idx="minor">
-            <a:schemeClr val="lt1"/>
-          </a:fontRef>
-        </p:style>
-        <p:txBody>
-          <a:bodyPr rtlCol="0" anchor="ctr"/>
-          <a:lstStyle/>
-          <a:p>
-            <a:pPr algn="ctr"/>
-          </a:p>
-        </p:txBody>
-      </p:sp>
-      <p:sp>
-        <p:nvSpPr>
-          <p:cNvPr id="3" name="TextBox 2"/>
-          <p:cNvSpPr txBox="1"/>
-          <p:nvPr/>
-        </p:nvSpPr>
-        <p:spPr>
-          <a:xfrm>
-            <a:off x="914400" y="2286000"/>
-            <a:ext cx="10360152" cy="1371600"/>
-          </a:xfrm>
-          <a:prstGeom prst="rect">
-            <a:avLst/>
-          </a:prstGeom>
-          <a:noFill/>
-        </p:spPr>
-        <p:txBody>
-          <a:bodyPr wrap="none">
-            <a:spAutoFit/>
-          </a:bodyPr>
-          <a:lstStyle/>
-          <a:p>
-            <a:pPr algn="ctr">
-              <a:defRPr sz="4800" b="1">
-                <a:solidFill>
-                  <a:srgbClr val="FFFFFF"/>
-                </a:solidFill>
-              </a:defRPr>
-            </a:pPr>
-            <a:r>
-              <a:t>The 'with' Statement (Best Practice!)</a:t>
-            </a:r>
-          </a:p>
-        </p:txBody>
-      </p:sp>
-      <p:sp>
-        <p:nvSpPr>
-          <p:cNvPr id="4" name="TextBox 3"/>
-          <p:cNvSpPr txBox="1"/>
-          <p:nvPr/>
-        </p:nvSpPr>
-        <p:spPr>
-          <a:xfrm>
-            <a:off x="914400" y="3840480"/>
-            <a:ext cx="10360152" cy="914400"/>
-          </a:xfrm>
-          <a:prstGeom prst="rect">
-            <a:avLst/>
-          </a:prstGeom>
-          <a:noFill/>
-        </p:spPr>
-        <p:txBody>
-          <a:bodyPr wrap="none">
-            <a:spAutoFit/>
-          </a:bodyPr>
-          <a:lstStyle/>
-          <a:p>
-            <a:pPr algn="ctr">
-              <a:defRPr sz="2400">
-                <a:solidFill>
-                  <a:srgbClr val="FFFFFF"/>
-                </a:solidFill>
-              </a:defRPr>
-            </a:pPr>
-            <a:r>
-              <a:t>Thewithstatement automatically closes files - even if errors occur!</a:t>
-            </a:r>
-          </a:p>
-        </p:txBody>
-      </p:sp>
-    </p:spTree>
-  </p:cSld>
-  <p:clrMapOvr>
-    <a:masterClrMapping/>
-  </p:clrMapOvr>
-</p:sld>
-</file>
-
-<file path=ppt/slides/slide7.xml><?xml version="1.0" encoding="utf-8"?>
+<file path=ppt/slides/slide9.xml><?xml version="1.0" encoding="utf-8"?>
 <p:sld xmlns:a="http://schemas.openxmlformats.org/drawingml/2006/main" xmlns:p="http://schemas.openxmlformats.org/presentationml/2006/main" xmlns:r="http://schemas.openxmlformats.org/officeDocument/2006/relationships">
   <p:cSld>
     <p:spTree>
@@ -5677,8 +6150,8 @@
         </p:nvSpPr>
         <p:spPr>
           <a:xfrm>
-            <a:off x="457200" y="365760"/>
-            <a:ext cx="10972800" cy="731520"/>
+            <a:off x="457200" y="320040"/>
+            <a:ext cx="10972800" cy="640080"/>
           </a:xfrm>
           <a:prstGeom prst="rect">
             <a:avLst/>
@@ -5692,71 +6165,28 @@
           <a:lstStyle/>
           <a:p>
             <a:pPr>
-              <a:defRPr sz="4000" b="1">
+              <a:defRPr sz="3600" b="1">
                 <a:solidFill>
                   <a:srgbClr val="003366"/>
                 </a:solidFill>
               </a:defRPr>
             </a:pPr>
             <a:r>
-              <a:t>File Paths: Absolute vs Relative</a:t>
-            </a:r>
-          </a:p>
-        </p:txBody>
-      </p:sp>
-      <p:sp>
-        <p:nvSpPr>
-          <p:cNvPr id="5" name="Rectangle 4"/>
-          <p:cNvSpPr/>
+              <a:t>Best Practices</a:t>
+            </a:r>
+          </a:p>
+        </p:txBody>
+      </p:sp>
+      <p:sp>
+        <p:nvSpPr>
+          <p:cNvPr id="5" name="TextBox 4"/>
+          <p:cNvSpPr txBox="1"/>
           <p:nvPr/>
         </p:nvSpPr>
         <p:spPr>
           <a:xfrm>
-            <a:off x="457200" y="1005840"/>
-            <a:ext cx="1828800" cy="45720"/>
-          </a:xfrm>
-          <a:prstGeom prst="rect">
-            <a:avLst/>
-          </a:prstGeom>
-          <a:solidFill>
-            <a:srgbClr val="0066CC"/>
-          </a:solidFill>
-          <a:ln>
-            <a:noFill/>
-          </a:ln>
-        </p:spPr>
-        <p:style>
-          <a:lnRef idx="1">
-            <a:schemeClr val="accent1"/>
-          </a:lnRef>
-          <a:fillRef idx="3">
-            <a:schemeClr val="accent1"/>
-          </a:fillRef>
-          <a:effectRef idx="2">
-            <a:schemeClr val="accent1"/>
-          </a:effectRef>
-          <a:fontRef idx="minor">
-            <a:schemeClr val="lt1"/>
-          </a:fontRef>
-        </p:style>
-        <p:txBody>
-          <a:bodyPr rtlCol="0" anchor="ctr"/>
-          <a:lstStyle/>
-          <a:p>
-            <a:pPr algn="ctr"/>
-          </a:p>
-        </p:txBody>
-      </p:sp>
-      <p:sp>
-        <p:nvSpPr>
-          <p:cNvPr id="6" name="TextBox 5"/>
-          <p:cNvSpPr txBox="1"/>
-          <p:nvPr/>
-        </p:nvSpPr>
-        <p:spPr>
-          <a:xfrm>
-            <a:off x="640080" y="1371600"/>
-            <a:ext cx="10789920" cy="4572000"/>
+            <a:off x="640080" y="1188720"/>
+            <a:ext cx="10789920" cy="5303520"/>
           </a:xfrm>
           <a:prstGeom prst="rect">
             <a:avLst/>
@@ -5771,576 +6201,301 @@
           <a:p>
             <a:pPr>
               <a:spcAft>
-                <a:spcPts val="800"/>
-              </a:spcAft>
-              <a:defRPr sz="2000" b="1">
-                <a:solidFill>
-                  <a:srgbClr val="333333"/>
-                </a:solidFill>
-              </a:defRPr>
-            </a:pPr>
-            <a:r>
-              <a:t>Relative Path (from current folder):</a:t>
-            </a:r>
-          </a:p>
-          <a:p>
-            <a:pPr>
-              <a:spcAft>
-                <a:spcPts val="800"/>
-              </a:spcAft>
-              <a:defRPr sz="2000" b="1">
-                <a:solidFill>
-                  <a:srgbClr val="333333"/>
-                </a:solidFill>
-              </a:defRPr>
-            </a:pPr>
-            <a:r>
-              <a:t>Absolute Path (complete location):</a:t>
-            </a:r>
-          </a:p>
-          <a:p>
-            <a:pPr>
-              <a:spcAft>
-                <a:spcPts val="800"/>
-              </a:spcAft>
-              <a:defRPr sz="2000" b="1">
-                <a:solidFill>
-                  <a:srgbClr val="333333"/>
-                </a:solidFill>
-              </a:defRPr>
-            </a:pPr>
-            <a:r>
-              <a:t>Tip:Use relative paths for portable code!</a:t>
-            </a:r>
-          </a:p>
-        </p:txBody>
-      </p:sp>
-    </p:spTree>
-  </p:cSld>
-  <p:clrMapOvr>
-    <a:masterClrMapping/>
-  </p:clrMapOvr>
-</p:sld>
-</file>
-
-<file path=ppt/slides/slide8.xml><?xml version="1.0" encoding="utf-8"?>
-<p:sld xmlns:a="http://schemas.openxmlformats.org/drawingml/2006/main" xmlns:p="http://schemas.openxmlformats.org/presentationml/2006/main" xmlns:r="http://schemas.openxmlformats.org/officeDocument/2006/relationships">
-  <p:cSld>
-    <p:spTree>
-      <p:nvGrpSpPr>
-        <p:cNvPr id="1" name=""/>
-        <p:cNvGrpSpPr/>
-        <p:nvPr/>
-      </p:nvGrpSpPr>
-      <p:grpSpPr/>
-      <p:sp>
-        <p:nvSpPr>
-          <p:cNvPr id="2" name="Rectangle 1"/>
-          <p:cNvSpPr/>
-          <p:nvPr/>
-        </p:nvSpPr>
-        <p:spPr>
-          <a:xfrm>
-            <a:off x="0" y="0"/>
-            <a:ext cx="12191695" cy="6858000"/>
-          </a:xfrm>
-          <a:prstGeom prst="rect">
-            <a:avLst/>
-          </a:prstGeom>
-          <a:solidFill>
-            <a:srgbClr val="FFFFFF"/>
-          </a:solidFill>
-          <a:ln>
-            <a:noFill/>
-          </a:ln>
-        </p:spPr>
-        <p:style>
-          <a:lnRef idx="1">
-            <a:schemeClr val="accent1"/>
-          </a:lnRef>
-          <a:fillRef idx="3">
-            <a:schemeClr val="accent1"/>
-          </a:fillRef>
-          <a:effectRef idx="2">
-            <a:schemeClr val="accent1"/>
-          </a:effectRef>
-          <a:fontRef idx="minor">
-            <a:schemeClr val="lt1"/>
-          </a:fontRef>
-        </p:style>
-        <p:txBody>
-          <a:bodyPr rtlCol="0" anchor="ctr"/>
-          <a:lstStyle/>
-          <a:p>
-            <a:pPr algn="ctr"/>
-          </a:p>
-        </p:txBody>
-      </p:sp>
-      <p:sp>
-        <p:nvSpPr>
-          <p:cNvPr id="3" name="Rectangle 2"/>
-          <p:cNvSpPr/>
-          <p:nvPr/>
-        </p:nvSpPr>
-        <p:spPr>
-          <a:xfrm>
-            <a:off x="0" y="0"/>
-            <a:ext cx="12191695" cy="137160"/>
-          </a:xfrm>
-          <a:prstGeom prst="rect">
-            <a:avLst/>
-          </a:prstGeom>
-          <a:solidFill>
-            <a:srgbClr val="0066CC"/>
-          </a:solidFill>
-          <a:ln>
-            <a:noFill/>
-          </a:ln>
-        </p:spPr>
-        <p:style>
-          <a:lnRef idx="1">
-            <a:schemeClr val="accent1"/>
-          </a:lnRef>
-          <a:fillRef idx="3">
-            <a:schemeClr val="accent1"/>
-          </a:fillRef>
-          <a:effectRef idx="2">
-            <a:schemeClr val="accent1"/>
-          </a:effectRef>
-          <a:fontRef idx="minor">
-            <a:schemeClr val="lt1"/>
-          </a:fontRef>
-        </p:style>
-        <p:txBody>
-          <a:bodyPr rtlCol="0" anchor="ctr"/>
-          <a:lstStyle/>
-          <a:p>
-            <a:pPr algn="ctr"/>
-          </a:p>
-        </p:txBody>
-      </p:sp>
-      <p:sp>
-        <p:nvSpPr>
-          <p:cNvPr id="4" name="TextBox 3"/>
-          <p:cNvSpPr txBox="1"/>
-          <p:nvPr/>
-        </p:nvSpPr>
-        <p:spPr>
-          <a:xfrm>
-            <a:off x="457200" y="365760"/>
-            <a:ext cx="10972800" cy="731520"/>
-          </a:xfrm>
-          <a:prstGeom prst="rect">
-            <a:avLst/>
-          </a:prstGeom>
-          <a:noFill/>
-        </p:spPr>
-        <p:txBody>
-          <a:bodyPr wrap="none">
-            <a:spAutoFit/>
-          </a:bodyPr>
-          <a:lstStyle/>
-          <a:p>
-            <a:pPr>
-              <a:defRPr sz="4000" b="1">
-                <a:solidFill>
-                  <a:srgbClr val="003366"/>
-                </a:solidFill>
-              </a:defRPr>
-            </a:pPr>
-            <a:r>
-              <a:t>Working with CSV Files</a:t>
-            </a:r>
-          </a:p>
-        </p:txBody>
-      </p:sp>
-      <p:sp>
-        <p:nvSpPr>
-          <p:cNvPr id="5" name="Rectangle 4"/>
-          <p:cNvSpPr/>
-          <p:nvPr/>
-        </p:nvSpPr>
-        <p:spPr>
-          <a:xfrm>
-            <a:off x="457200" y="1005840"/>
-            <a:ext cx="1828800" cy="45720"/>
-          </a:xfrm>
-          <a:prstGeom prst="rect">
-            <a:avLst/>
-          </a:prstGeom>
-          <a:solidFill>
-            <a:srgbClr val="0066CC"/>
-          </a:solidFill>
-          <a:ln>
-            <a:noFill/>
-          </a:ln>
-        </p:spPr>
-        <p:style>
-          <a:lnRef idx="1">
-            <a:schemeClr val="accent1"/>
-          </a:lnRef>
-          <a:fillRef idx="3">
-            <a:schemeClr val="accent1"/>
-          </a:fillRef>
-          <a:effectRef idx="2">
-            <a:schemeClr val="accent1"/>
-          </a:effectRef>
-          <a:fontRef idx="minor">
-            <a:schemeClr val="lt1"/>
-          </a:fontRef>
-        </p:style>
-        <p:txBody>
-          <a:bodyPr rtlCol="0" anchor="ctr"/>
-          <a:lstStyle/>
-          <a:p>
-            <a:pPr algn="ctr"/>
-          </a:p>
-        </p:txBody>
-      </p:sp>
-      <p:sp>
-        <p:nvSpPr>
-          <p:cNvPr id="6" name="TextBox 5"/>
-          <p:cNvSpPr txBox="1"/>
-          <p:nvPr/>
-        </p:nvSpPr>
-        <p:spPr>
-          <a:xfrm>
-            <a:off x="640080" y="1371600"/>
-            <a:ext cx="10789920" cy="4572000"/>
-          </a:xfrm>
-          <a:prstGeom prst="rect">
-            <a:avLst/>
-          </a:prstGeom>
-          <a:noFill/>
-        </p:spPr>
-        <p:txBody>
-          <a:bodyPr wrap="square">
-            <a:spAutoFit/>
-          </a:bodyPr>
-          <a:lstStyle/>
-          <a:p>
-            <a:pPr>
-              <a:spcAft>
-                <a:spcPts val="800"/>
-              </a:spcAft>
-              <a:defRPr sz="2000" b="1">
-                <a:solidFill>
-                  <a:srgbClr val="333333"/>
-                </a:solidFill>
-              </a:defRPr>
-            </a:pPr>
-            <a:r>
-              <a:t>CSV (Comma-Separated Values) - perfect for spreadsheet data!</a:t>
-            </a:r>
-          </a:p>
-          <a:p>
-            <a:pPr>
-              <a:spcAft>
-                <a:spcPts val="800"/>
-              </a:spcAft>
-              <a:defRPr sz="2000" b="1">
-                <a:solidFill>
-                  <a:srgbClr val="333333"/>
-                </a:solidFill>
-              </a:defRPr>
-            </a:pPr>
-            <a:r>
-              <a:t>Sample CSV File (students.csv):</a:t>
-            </a:r>
-          </a:p>
-          <a:p>
-            <a:pPr>
-              <a:spcAft>
-                <a:spcPts val="800"/>
-              </a:spcAft>
-              <a:defRPr sz="2000" b="1">
-                <a:solidFill>
-                  <a:srgbClr val="333333"/>
-                </a:solidFill>
-              </a:defRPr>
-            </a:pPr>
-            <a:r>
-              <a:t>Reading CSV:</a:t>
-            </a:r>
-          </a:p>
-          <a:p>
-            <a:pPr>
-              <a:spcAft>
-                <a:spcPts val="800"/>
-              </a:spcAft>
-              <a:defRPr sz="2000" b="1">
-                <a:solidFill>
-                  <a:srgbClr val="333333"/>
-                </a:solidFill>
-              </a:defRPr>
-            </a:pPr>
-            <a:r>
-              <a:t>Writing CSV:</a:t>
-            </a:r>
-          </a:p>
-        </p:txBody>
-      </p:sp>
-    </p:spTree>
-  </p:cSld>
-  <p:clrMapOvr>
-    <a:masterClrMapping/>
-  </p:clrMapOvr>
-</p:sld>
-</file>
-
-<file path=ppt/slides/slide9.xml><?xml version="1.0" encoding="utf-8"?>
-<p:sld xmlns:a="http://schemas.openxmlformats.org/drawingml/2006/main" xmlns:p="http://schemas.openxmlformats.org/presentationml/2006/main" xmlns:r="http://schemas.openxmlformats.org/officeDocument/2006/relationships">
-  <p:cSld>
-    <p:spTree>
-      <p:nvGrpSpPr>
-        <p:cNvPr id="1" name=""/>
-        <p:cNvGrpSpPr/>
-        <p:nvPr/>
-      </p:nvGrpSpPr>
-      <p:grpSpPr/>
-      <p:sp>
-        <p:nvSpPr>
-          <p:cNvPr id="2" name="Rectangle 1"/>
-          <p:cNvSpPr/>
-          <p:nvPr/>
-        </p:nvSpPr>
-        <p:spPr>
-          <a:xfrm>
-            <a:off x="0" y="0"/>
-            <a:ext cx="12191695" cy="6858000"/>
-          </a:xfrm>
-          <a:prstGeom prst="rect">
-            <a:avLst/>
-          </a:prstGeom>
-          <a:solidFill>
-            <a:srgbClr val="FFFFFF"/>
-          </a:solidFill>
-          <a:ln>
-            <a:noFill/>
-          </a:ln>
-        </p:spPr>
-        <p:style>
-          <a:lnRef idx="1">
-            <a:schemeClr val="accent1"/>
-          </a:lnRef>
-          <a:fillRef idx="3">
-            <a:schemeClr val="accent1"/>
-          </a:fillRef>
-          <a:effectRef idx="2">
-            <a:schemeClr val="accent1"/>
-          </a:effectRef>
-          <a:fontRef idx="minor">
-            <a:schemeClr val="lt1"/>
-          </a:fontRef>
-        </p:style>
-        <p:txBody>
-          <a:bodyPr rtlCol="0" anchor="ctr"/>
-          <a:lstStyle/>
-          <a:p>
-            <a:pPr algn="ctr"/>
-          </a:p>
-        </p:txBody>
-      </p:sp>
-      <p:sp>
-        <p:nvSpPr>
-          <p:cNvPr id="3" name="Rectangle 2"/>
-          <p:cNvSpPr/>
-          <p:nvPr/>
-        </p:nvSpPr>
-        <p:spPr>
-          <a:xfrm>
-            <a:off x="0" y="0"/>
-            <a:ext cx="12191695" cy="137160"/>
-          </a:xfrm>
-          <a:prstGeom prst="rect">
-            <a:avLst/>
-          </a:prstGeom>
-          <a:solidFill>
-            <a:srgbClr val="0066CC"/>
-          </a:solidFill>
-          <a:ln>
-            <a:noFill/>
-          </a:ln>
-        </p:spPr>
-        <p:style>
-          <a:lnRef idx="1">
-            <a:schemeClr val="accent1"/>
-          </a:lnRef>
-          <a:fillRef idx="3">
-            <a:schemeClr val="accent1"/>
-          </a:fillRef>
-          <a:effectRef idx="2">
-            <a:schemeClr val="accent1"/>
-          </a:effectRef>
-          <a:fontRef idx="minor">
-            <a:schemeClr val="lt1"/>
-          </a:fontRef>
-        </p:style>
-        <p:txBody>
-          <a:bodyPr rtlCol="0" anchor="ctr"/>
-          <a:lstStyle/>
-          <a:p>
-            <a:pPr algn="ctr"/>
-          </a:p>
-        </p:txBody>
-      </p:sp>
-      <p:sp>
-        <p:nvSpPr>
-          <p:cNvPr id="4" name="TextBox 3"/>
-          <p:cNvSpPr txBox="1"/>
-          <p:nvPr/>
-        </p:nvSpPr>
-        <p:spPr>
-          <a:xfrm>
-            <a:off x="457200" y="365760"/>
-            <a:ext cx="10972800" cy="731520"/>
-          </a:xfrm>
-          <a:prstGeom prst="rect">
-            <a:avLst/>
-          </a:prstGeom>
-          <a:noFill/>
-        </p:spPr>
-        <p:txBody>
-          <a:bodyPr wrap="none">
-            <a:spAutoFit/>
-          </a:bodyPr>
-          <a:lstStyle/>
-          <a:p>
-            <a:pPr>
-              <a:defRPr sz="4000" b="1">
-                <a:solidFill>
-                  <a:srgbClr val="003366"/>
-                </a:solidFill>
-              </a:defRPr>
-            </a:pPr>
-            <a:r>
-              <a:t>Working with JSON Files</a:t>
-            </a:r>
-          </a:p>
-        </p:txBody>
-      </p:sp>
-      <p:sp>
-        <p:nvSpPr>
-          <p:cNvPr id="5" name="Rectangle 4"/>
-          <p:cNvSpPr/>
-          <p:nvPr/>
-        </p:nvSpPr>
-        <p:spPr>
-          <a:xfrm>
-            <a:off x="457200" y="1005840"/>
-            <a:ext cx="1828800" cy="45720"/>
-          </a:xfrm>
-          <a:prstGeom prst="rect">
-            <a:avLst/>
-          </a:prstGeom>
-          <a:solidFill>
-            <a:srgbClr val="0066CC"/>
-          </a:solidFill>
-          <a:ln>
-            <a:noFill/>
-          </a:ln>
-        </p:spPr>
-        <p:style>
-          <a:lnRef idx="1">
-            <a:schemeClr val="accent1"/>
-          </a:lnRef>
-          <a:fillRef idx="3">
-            <a:schemeClr val="accent1"/>
-          </a:fillRef>
-          <a:effectRef idx="2">
-            <a:schemeClr val="accent1"/>
-          </a:effectRef>
-          <a:fontRef idx="minor">
-            <a:schemeClr val="lt1"/>
-          </a:fontRef>
-        </p:style>
-        <p:txBody>
-          <a:bodyPr rtlCol="0" anchor="ctr"/>
-          <a:lstStyle/>
-          <a:p>
-            <a:pPr algn="ctr"/>
-          </a:p>
-        </p:txBody>
-      </p:sp>
-      <p:sp>
-        <p:nvSpPr>
-          <p:cNvPr id="6" name="TextBox 5"/>
-          <p:cNvSpPr txBox="1"/>
-          <p:nvPr/>
-        </p:nvSpPr>
-        <p:spPr>
-          <a:xfrm>
-            <a:off x="640080" y="1371600"/>
-            <a:ext cx="10789920" cy="4572000"/>
-          </a:xfrm>
-          <a:prstGeom prst="rect">
-            <a:avLst/>
-          </a:prstGeom>
-          <a:noFill/>
-        </p:spPr>
-        <p:txBody>
-          <a:bodyPr wrap="square">
-            <a:spAutoFit/>
-          </a:bodyPr>
-          <a:lstStyle/>
-          <a:p>
-            <a:pPr>
-              <a:spcAft>
-                <a:spcPts val="800"/>
-              </a:spcAft>
-              <a:defRPr sz="2000" b="1">
-                <a:solidFill>
-                  <a:srgbClr val="333333"/>
-                </a:solidFill>
-              </a:defRPr>
-            </a:pPr>
-            <a:r>
-              <a:t>JSON - perfect for storing dictionaries and structured data!</a:t>
-            </a:r>
-          </a:p>
-          <a:p>
-            <a:pPr>
-              <a:spcAft>
-                <a:spcPts val="800"/>
-              </a:spcAft>
-              <a:defRPr sz="2000" b="1">
-                <a:solidFill>
-                  <a:srgbClr val="333333"/>
-                </a:solidFill>
-              </a:defRPr>
-            </a:pPr>
-            <a:r>
-              <a:t>Sample JSON (config.json):</a:t>
-            </a:r>
-          </a:p>
-          <a:p>
-            <a:pPr>
-              <a:spcAft>
-                <a:spcPts val="800"/>
-              </a:spcAft>
-              <a:defRPr sz="2000" b="1">
-                <a:solidFill>
-                  <a:srgbClr val="333333"/>
-                </a:solidFill>
-              </a:defRPr>
-            </a:pPr>
-            <a:r>
-              <a:t>Reading JSON:</a:t>
-            </a:r>
-          </a:p>
-          <a:p>
-            <a:pPr>
-              <a:spcAft>
-                <a:spcPts val="800"/>
-              </a:spcAft>
-              <a:defRPr sz="2000" b="1">
-                <a:solidFill>
-                  <a:srgbClr val="333333"/>
-                </a:solidFill>
-              </a:defRPr>
-            </a:pPr>
-            <a:r>
-              <a:t>Writing JSON:</a:t>
+                <a:spcPts val="600"/>
+              </a:spcAft>
+              <a:defRPr b="1" sz="2000">
+                <a:solidFill>
+                  <a:srgbClr val="333333"/>
+                </a:solidFill>
+              </a:defRPr>
+            </a:pPr>
+            <a:r>
+              <a:t>Always Use "with":</a:t>
+            </a:r>
+          </a:p>
+          <a:p>
+            <a:pPr lvl="1">
+              <a:spcAft>
+                <a:spcPts val="400"/>
+              </a:spcAft>
+              <a:defRPr sz="1600">
+                <a:solidFill>
+                  <a:srgbClr val="333333"/>
+                </a:solidFill>
+              </a:defRPr>
+            </a:pPr>
+            <a:r>
+              <a:t>• Automatically closes files</a:t>
+            </a:r>
+          </a:p>
+          <a:p>
+            <a:pPr lvl="1">
+              <a:spcAft>
+                <a:spcPts val="400"/>
+              </a:spcAft>
+              <a:defRPr sz="1600">
+                <a:solidFill>
+                  <a:srgbClr val="333333"/>
+                </a:solidFill>
+              </a:defRPr>
+            </a:pPr>
+            <a:r>
+              <a:t>• Handles errors gracefully</a:t>
+            </a:r>
+          </a:p>
+          <a:p>
+            <a:pPr>
+              <a:spcAft>
+                <a:spcPts val="600"/>
+              </a:spcAft>
+              <a:defRPr b="1" sz="2000">
+                <a:solidFill>
+                  <a:srgbClr val="333333"/>
+                </a:solidFill>
+              </a:defRPr>
+            </a:pPr>
+            <a:r>
+              <a:t>Handle Errors:</a:t>
+            </a:r>
+          </a:p>
+          <a:p>
+            <a:pPr lvl="1">
+              <a:spcAft>
+                <a:spcPts val="400"/>
+              </a:spcAft>
+              <a:defRPr sz="1600">
+                <a:solidFill>
+                  <a:srgbClr val="333333"/>
+                </a:solidFill>
+              </a:defRPr>
+            </a:pPr>
+            <a:r>
+              <a:t>• Check if file exists</a:t>
+            </a:r>
+          </a:p>
+          <a:p>
+            <a:pPr lvl="1">
+              <a:spcAft>
+                <a:spcPts val="400"/>
+              </a:spcAft>
+              <a:defRPr sz="1600">
+                <a:solidFill>
+                  <a:srgbClr val="333333"/>
+                </a:solidFill>
+              </a:defRPr>
+            </a:pPr>
+            <a:r>
+              <a:t>• Use try-except</a:t>
+            </a:r>
+          </a:p>
+          <a:p>
+            <a:pPr lvl="1">
+              <a:spcAft>
+                <a:spcPts val="400"/>
+              </a:spcAft>
+              <a:defRPr sz="1600">
+                <a:solidFill>
+                  <a:srgbClr val="333333"/>
+                </a:solidFill>
+              </a:defRPr>
+            </a:pPr>
+            <a:r>
+              <a:t>• Provide helpful messages</a:t>
+            </a:r>
+          </a:p>
+          <a:p>
+            <a:pPr>
+              <a:spcAft>
+                <a:spcPts val="600"/>
+              </a:spcAft>
+              <a:defRPr b="1" sz="2000">
+                <a:solidFill>
+                  <a:srgbClr val="333333"/>
+                </a:solidFill>
+              </a:defRPr>
+            </a:pPr>
+            <a:r>
+              <a:t>Choose Right Format:</a:t>
+            </a:r>
+          </a:p>
+          <a:p>
+            <a:pPr lvl="1">
+              <a:spcAft>
+                <a:spcPts val="400"/>
+              </a:spcAft>
+              <a:defRPr sz="1600">
+                <a:solidFill>
+                  <a:srgbClr val="333333"/>
+                </a:solidFill>
+              </a:defRPr>
+            </a:pPr>
+            <a:r>
+              <a:t>• Text: Simple data</a:t>
+            </a:r>
+          </a:p>
+          <a:p>
+            <a:pPr lvl="1">
+              <a:spcAft>
+                <a:spcPts val="400"/>
+              </a:spcAft>
+              <a:defRPr sz="1600">
+                <a:solidFill>
+                  <a:srgbClr val="333333"/>
+                </a:solidFill>
+              </a:defRPr>
+            </a:pPr>
+            <a:r>
+              <a:t>• CSV: Tabular data</a:t>
+            </a:r>
+          </a:p>
+          <a:p>
+            <a:pPr lvl="1">
+              <a:spcAft>
+                <a:spcPts val="400"/>
+              </a:spcAft>
+              <a:defRPr sz="1600">
+                <a:solidFill>
+                  <a:srgbClr val="333333"/>
+                </a:solidFill>
+              </a:defRPr>
+            </a:pPr>
+            <a:r>
+              <a:t>• JSON: Structured data</a:t>
+            </a:r>
+          </a:p>
+          <a:p>
+            <a:pPr>
+              <a:spcAft>
+                <a:spcPts val="600"/>
+              </a:spcAft>
+              <a:defRPr b="1" sz="2000">
+                <a:solidFill>
+                  <a:srgbClr val="333333"/>
+                </a:solidFill>
+              </a:defRPr>
+            </a:pPr>
+            <a:r>
+              <a:t>Performance:</a:t>
+            </a:r>
+          </a:p>
+          <a:p>
+            <a:pPr lvl="1">
+              <a:spcAft>
+                <a:spcPts val="400"/>
+              </a:spcAft>
+              <a:defRPr sz="1600">
+                <a:solidFill>
+                  <a:srgbClr val="333333"/>
+                </a:solidFill>
+              </a:defRPr>
+            </a:pPr>
+            <a:r>
+              <a:t>• Read line-by-line for large files</a:t>
+            </a:r>
+          </a:p>
+          <a:p>
+            <a:pPr lvl="1">
+              <a:spcAft>
+                <a:spcPts val="400"/>
+              </a:spcAft>
+              <a:defRPr sz="1600">
+                <a:solidFill>
+                  <a:srgbClr val="333333"/>
+                </a:solidFill>
+              </a:defRPr>
+            </a:pPr>
+            <a:r>
+              <a:t>• Use buffering</a:t>
+            </a:r>
+          </a:p>
+          <a:p>
+            <a:pPr lvl="1">
+              <a:spcAft>
+                <a:spcPts val="400"/>
+              </a:spcAft>
+              <a:defRPr sz="1600">
+                <a:solidFill>
+                  <a:srgbClr val="333333"/>
+                </a:solidFill>
+              </a:defRPr>
+            </a:pPr>
+            <a:r>
+              <a:t>• Close files when done</a:t>
+            </a:r>
+          </a:p>
+          <a:p>
+            <a:pPr>
+              <a:spcAft>
+                <a:spcPts val="600"/>
+              </a:spcAft>
+              <a:defRPr b="1" sz="2000">
+                <a:solidFill>
+                  <a:srgbClr val="333333"/>
+                </a:solidFill>
+              </a:defRPr>
+            </a:pPr>
+            <a:r>
+              <a:t>Security:</a:t>
+            </a:r>
+          </a:p>
+          <a:p>
+            <a:pPr lvl="1">
+              <a:spcAft>
+                <a:spcPts val="400"/>
+              </a:spcAft>
+              <a:defRPr sz="1600">
+                <a:solidFill>
+                  <a:srgbClr val="333333"/>
+                </a:solidFill>
+              </a:defRPr>
+            </a:pPr>
+            <a:r>
+              <a:t>• Validate file paths</a:t>
+            </a:r>
+          </a:p>
+          <a:p>
+            <a:pPr lvl="1">
+              <a:spcAft>
+                <a:spcPts val="400"/>
+              </a:spcAft>
+              <a:defRPr sz="1600">
+                <a:solidFill>
+                  <a:srgbClr val="333333"/>
+                </a:solidFill>
+              </a:defRPr>
+            </a:pPr>
+            <a:r>
+              <a:t>• Don't trust user input</a:t>
+            </a:r>
+          </a:p>
+          <a:p>
+            <a:pPr lvl="1">
+              <a:spcAft>
+                <a:spcPts val="400"/>
+              </a:spcAft>
+              <a:defRPr sz="1600">
+                <a:solidFill>
+                  <a:srgbClr val="333333"/>
+                </a:solidFill>
+              </a:defRPr>
+            </a:pPr>
+            <a:r>
+              <a:t>• Check file size</a:t>
+            </a:r>
+          </a:p>
+          <a:p>
+            <a:pPr lvl="1">
+              <a:spcAft>
+                <a:spcPts val="400"/>
+              </a:spcAft>
+              <a:defRPr sz="1600">
+                <a:solidFill>
+                  <a:srgbClr val="333333"/>
+                </a:solidFill>
+              </a:defRPr>
+            </a:pPr>
+            <a:r>
+              <a:t>• Use appropriate permissions</a:t>
             </a:r>
           </a:p>
         </p:txBody>

--- a/python_course/chapter_09_file_io/file_io.pptx
+++ b/python_course/chapter_09_file_io/file_io.pptx
@@ -14,6 +14,8 @@
     <p:sldId id="262" r:id="rId13"/>
     <p:sldId id="263" r:id="rId14"/>
     <p:sldId id="264" r:id="rId15"/>
+    <p:sldId id="265" r:id="rId16"/>
+    <p:sldId id="266" r:id="rId17"/>
   </p:sldIdLst>
   <p:sldSz cx="12191695" cy="6858000" type="screen4x3"/>
   <p:notesSz cx="6858000" cy="9144000"/>
@@ -3111,7 +3113,7 @@
             <a:avLst/>
           </a:prstGeom>
           <a:solidFill>
-            <a:srgbClr val="F0F8FF"/>
+            <a:srgbClr val="14468C"/>
           </a:solidFill>
           <a:ln>
             <a:noFill/>
@@ -3141,14 +3143,100 @@
       </p:sp>
       <p:sp>
         <p:nvSpPr>
-          <p:cNvPr id="3" name="TextBox 2"/>
+          <p:cNvPr id="3" name="Rectangle 2"/>
+          <p:cNvSpPr/>
+          <p:nvPr/>
+        </p:nvSpPr>
+        <p:spPr>
+          <a:xfrm>
+            <a:off x="0" y="0"/>
+            <a:ext cx="12191695" cy="1828800"/>
+          </a:xfrm>
+          <a:prstGeom prst="rect">
+            <a:avLst/>
+          </a:prstGeom>
+          <a:solidFill>
+            <a:srgbClr val="0078D7"/>
+          </a:solidFill>
+          <a:ln>
+            <a:noFill/>
+          </a:ln>
+        </p:spPr>
+        <p:style>
+          <a:lnRef idx="1">
+            <a:schemeClr val="accent1"/>
+          </a:lnRef>
+          <a:fillRef idx="3">
+            <a:schemeClr val="accent1"/>
+          </a:fillRef>
+          <a:effectRef idx="2">
+            <a:schemeClr val="accent1"/>
+          </a:effectRef>
+          <a:fontRef idx="minor">
+            <a:schemeClr val="lt1"/>
+          </a:fontRef>
+        </p:style>
+        <p:txBody>
+          <a:bodyPr rtlCol="0" anchor="ctr"/>
+          <a:lstStyle/>
+          <a:p>
+            <a:pPr algn="ctr"/>
+          </a:p>
+        </p:txBody>
+      </p:sp>
+      <p:sp>
+        <p:nvSpPr>
+          <p:cNvPr id="4" name="Rectangle 3"/>
+          <p:cNvSpPr/>
+          <p:nvPr/>
+        </p:nvSpPr>
+        <p:spPr>
+          <a:xfrm>
+            <a:off x="0" y="1828800"/>
+            <a:ext cx="274320" cy="5029200"/>
+          </a:xfrm>
+          <a:prstGeom prst="rect">
+            <a:avLst/>
+          </a:prstGeom>
+          <a:solidFill>
+            <a:srgbClr val="FFBB33"/>
+          </a:solidFill>
+          <a:ln>
+            <a:noFill/>
+          </a:ln>
+        </p:spPr>
+        <p:style>
+          <a:lnRef idx="1">
+            <a:schemeClr val="accent1"/>
+          </a:lnRef>
+          <a:fillRef idx="3">
+            <a:schemeClr val="accent1"/>
+          </a:fillRef>
+          <a:effectRef idx="2">
+            <a:schemeClr val="accent1"/>
+          </a:effectRef>
+          <a:fontRef idx="minor">
+            <a:schemeClr val="lt1"/>
+          </a:fontRef>
+        </p:style>
+        <p:txBody>
+          <a:bodyPr rtlCol="0" anchor="ctr"/>
+          <a:lstStyle/>
+          <a:p>
+            <a:pPr algn="ctr"/>
+          </a:p>
+        </p:txBody>
+      </p:sp>
+      <p:sp>
+        <p:nvSpPr>
+          <p:cNvPr id="5" name="TextBox 4"/>
           <p:cNvSpPr txBox="1"/>
           <p:nvPr/>
         </p:nvSpPr>
         <p:spPr>
           <a:xfrm>
-            <a:off x="914400" y="2286000"/>
-            <a:ext cx="10360152" cy="1097280"/>
+            <a:off x="1371600" y="2560320"/>
+            <a:ext cx="10058400" cy="1371600"/>
           </a:xfrm>
           <a:prstGeom prst="rect">
             <a:avLst/>
@@ -3162,9 +3250,9 @@
           <a:lstStyle/>
           <a:p>
             <a:pPr algn="ctr">
-              <a:defRPr sz="4800" b="1">
-                <a:solidFill>
-                  <a:srgbClr val="003366"/>
+              <a:defRPr sz="5200" b="1">
+                <a:solidFill>
+                  <a:srgbClr val="FFFFFF"/>
                 </a:solidFill>
               </a:defRPr>
             </a:pPr>
@@ -3176,14 +3264,57 @@
       </p:sp>
       <p:sp>
         <p:nvSpPr>
-          <p:cNvPr id="4" name="TextBox 3"/>
+          <p:cNvPr id="6" name="Rectangle 5"/>
+          <p:cNvSpPr/>
+          <p:nvPr/>
+        </p:nvSpPr>
+        <p:spPr>
+          <a:xfrm>
+            <a:off x="2743200" y="4114800"/>
+            <a:ext cx="6702552" cy="1097280"/>
+          </a:xfrm>
+          <a:prstGeom prst="rect">
+            <a:avLst/>
+          </a:prstGeom>
+          <a:solidFill>
+            <a:srgbClr val="0066CC"/>
+          </a:solidFill>
+          <a:ln>
+            <a:noFill/>
+          </a:ln>
+        </p:spPr>
+        <p:style>
+          <a:lnRef idx="1">
+            <a:schemeClr val="accent1"/>
+          </a:lnRef>
+          <a:fillRef idx="3">
+            <a:schemeClr val="accent1"/>
+          </a:fillRef>
+          <a:effectRef idx="2">
+            <a:schemeClr val="accent1"/>
+          </a:effectRef>
+          <a:fontRef idx="minor">
+            <a:schemeClr val="lt1"/>
+          </a:fontRef>
+        </p:style>
+        <p:txBody>
+          <a:bodyPr rtlCol="0" anchor="ctr"/>
+          <a:lstStyle/>
+          <a:p>
+            <a:pPr algn="ctr"/>
+          </a:p>
+        </p:txBody>
+      </p:sp>
+      <p:sp>
+        <p:nvSpPr>
+          <p:cNvPr id="7" name="TextBox 6"/>
           <p:cNvSpPr txBox="1"/>
           <p:nvPr/>
         </p:nvSpPr>
         <p:spPr>
           <a:xfrm>
-            <a:off x="914400" y="3657600"/>
-            <a:ext cx="10360152" cy="731520"/>
+            <a:off x="2926080" y="4297680"/>
+            <a:ext cx="6336792" cy="731520"/>
           </a:xfrm>
           <a:prstGeom prst="rect">
             <a:avLst/>
@@ -3199,12 +3330,1253 @@
             <a:pPr algn="ctr">
               <a:defRPr sz="2800">
                 <a:solidFill>
-                  <a:srgbClr val="4682B4"/>
+                  <a:srgbClr val="FFFFFF"/>
                 </a:solidFill>
               </a:defRPr>
             </a:pPr>
             <a:r>
               <a:t>Reading and Writing Files</a:t>
+            </a:r>
+          </a:p>
+        </p:txBody>
+      </p:sp>
+    </p:spTree>
+  </p:cSld>
+  <p:clrMapOvr>
+    <a:masterClrMapping/>
+  </p:clrMapOvr>
+</p:sld>
+</file>
+
+<file path=ppt/slides/slide10.xml><?xml version="1.0" encoding="utf-8"?>
+<p:sld xmlns:a="http://schemas.openxmlformats.org/drawingml/2006/main" xmlns:p="http://schemas.openxmlformats.org/presentationml/2006/main" xmlns:r="http://schemas.openxmlformats.org/officeDocument/2006/relationships">
+  <p:cSld>
+    <p:spTree>
+      <p:nvGrpSpPr>
+        <p:cNvPr id="1" name=""/>
+        <p:cNvGrpSpPr/>
+        <p:nvPr/>
+      </p:nvGrpSpPr>
+      <p:grpSpPr/>
+      <p:sp>
+        <p:nvSpPr>
+          <p:cNvPr id="2" name="Rectangle 1"/>
+          <p:cNvSpPr/>
+          <p:nvPr/>
+        </p:nvSpPr>
+        <p:spPr>
+          <a:xfrm>
+            <a:off x="0" y="0"/>
+            <a:ext cx="12191695" cy="6858000"/>
+          </a:xfrm>
+          <a:prstGeom prst="rect">
+            <a:avLst/>
+          </a:prstGeom>
+          <a:solidFill>
+            <a:srgbClr val="FAFAFA"/>
+          </a:solidFill>
+          <a:ln>
+            <a:noFill/>
+          </a:ln>
+        </p:spPr>
+        <p:style>
+          <a:lnRef idx="1">
+            <a:schemeClr val="accent1"/>
+          </a:lnRef>
+          <a:fillRef idx="3">
+            <a:schemeClr val="accent1"/>
+          </a:fillRef>
+          <a:effectRef idx="2">
+            <a:schemeClr val="accent1"/>
+          </a:effectRef>
+          <a:fontRef idx="minor">
+            <a:schemeClr val="lt1"/>
+          </a:fontRef>
+        </p:style>
+        <p:txBody>
+          <a:bodyPr rtlCol="0" anchor="ctr"/>
+          <a:lstStyle/>
+          <a:p>
+            <a:pPr algn="ctr"/>
+          </a:p>
+        </p:txBody>
+      </p:sp>
+      <p:sp>
+        <p:nvSpPr>
+          <p:cNvPr id="3" name="Rectangle 2"/>
+          <p:cNvSpPr/>
+          <p:nvPr/>
+        </p:nvSpPr>
+        <p:spPr>
+          <a:xfrm>
+            <a:off x="0" y="0"/>
+            <a:ext cx="12191695" cy="1097280"/>
+          </a:xfrm>
+          <a:prstGeom prst="rect">
+            <a:avLst/>
+          </a:prstGeom>
+          <a:solidFill>
+            <a:srgbClr val="0066CC"/>
+          </a:solidFill>
+          <a:ln>
+            <a:noFill/>
+          </a:ln>
+        </p:spPr>
+        <p:style>
+          <a:lnRef idx="1">
+            <a:schemeClr val="accent1"/>
+          </a:lnRef>
+          <a:fillRef idx="3">
+            <a:schemeClr val="accent1"/>
+          </a:fillRef>
+          <a:effectRef idx="2">
+            <a:schemeClr val="accent1"/>
+          </a:effectRef>
+          <a:fontRef idx="minor">
+            <a:schemeClr val="lt1"/>
+          </a:fontRef>
+        </p:style>
+        <p:txBody>
+          <a:bodyPr rtlCol="0" anchor="ctr"/>
+          <a:lstStyle/>
+          <a:p>
+            <a:pPr algn="ctr"/>
+          </a:p>
+        </p:txBody>
+      </p:sp>
+      <p:sp>
+        <p:nvSpPr>
+          <p:cNvPr id="4" name="Rectangle 3"/>
+          <p:cNvSpPr/>
+          <p:nvPr/>
+        </p:nvSpPr>
+        <p:spPr>
+          <a:xfrm>
+            <a:off x="0" y="1097280"/>
+            <a:ext cx="137160" cy="5760720"/>
+          </a:xfrm>
+          <a:prstGeom prst="rect">
+            <a:avLst/>
+          </a:prstGeom>
+          <a:solidFill>
+            <a:srgbClr val="FFBB33"/>
+          </a:solidFill>
+          <a:ln>
+            <a:noFill/>
+          </a:ln>
+        </p:spPr>
+        <p:style>
+          <a:lnRef idx="1">
+            <a:schemeClr val="accent1"/>
+          </a:lnRef>
+          <a:fillRef idx="3">
+            <a:schemeClr val="accent1"/>
+          </a:fillRef>
+          <a:effectRef idx="2">
+            <a:schemeClr val="accent1"/>
+          </a:effectRef>
+          <a:fontRef idx="minor">
+            <a:schemeClr val="lt1"/>
+          </a:fontRef>
+        </p:style>
+        <p:txBody>
+          <a:bodyPr rtlCol="0" anchor="ctr"/>
+          <a:lstStyle/>
+          <a:p>
+            <a:pPr algn="ctr"/>
+          </a:p>
+        </p:txBody>
+      </p:sp>
+      <p:sp>
+        <p:nvSpPr>
+          <p:cNvPr id="5" name="TextBox 4"/>
+          <p:cNvSpPr txBox="1"/>
+          <p:nvPr/>
+        </p:nvSpPr>
+        <p:spPr>
+          <a:xfrm>
+            <a:off x="365760" y="274320"/>
+            <a:ext cx="10972800" cy="640080"/>
+          </a:xfrm>
+          <a:prstGeom prst="rect">
+            <a:avLst/>
+          </a:prstGeom>
+          <a:noFill/>
+        </p:spPr>
+        <p:txBody>
+          <a:bodyPr wrap="none">
+            <a:spAutoFit/>
+          </a:bodyPr>
+          <a:lstStyle/>
+          <a:p>
+            <a:pPr>
+              <a:defRPr sz="3600" b="1">
+                <a:solidFill>
+                  <a:srgbClr val="FFFFFF"/>
+                </a:solidFill>
+              </a:defRPr>
+            </a:pPr>
+            <a:r>
+              <a:t>Best Practices</a:t>
+            </a:r>
+          </a:p>
+        </p:txBody>
+      </p:sp>
+      <p:sp>
+        <p:nvSpPr>
+          <p:cNvPr id="6" name="Rectangle 5"/>
+          <p:cNvSpPr/>
+          <p:nvPr/>
+        </p:nvSpPr>
+        <p:spPr>
+          <a:xfrm>
+            <a:off x="365760" y="1325880"/>
+            <a:ext cx="11430000" cy="365760"/>
+          </a:xfrm>
+          <a:prstGeom prst="rect">
+            <a:avLst/>
+          </a:prstGeom>
+          <a:solidFill>
+            <a:srgbClr val="0078D7"/>
+          </a:solidFill>
+          <a:ln>
+            <a:noFill/>
+          </a:ln>
+        </p:spPr>
+        <p:style>
+          <a:lnRef idx="1">
+            <a:schemeClr val="accent1"/>
+          </a:lnRef>
+          <a:fillRef idx="3">
+            <a:schemeClr val="accent1"/>
+          </a:fillRef>
+          <a:effectRef idx="2">
+            <a:schemeClr val="accent1"/>
+          </a:effectRef>
+          <a:fontRef idx="minor">
+            <a:schemeClr val="lt1"/>
+          </a:fontRef>
+        </p:style>
+        <p:txBody>
+          <a:bodyPr rtlCol="0" anchor="ctr"/>
+          <a:lstStyle/>
+          <a:p>
+            <a:pPr algn="ctr"/>
+          </a:p>
+        </p:txBody>
+      </p:sp>
+      <p:sp>
+        <p:nvSpPr>
+          <p:cNvPr id="7" name="TextBox 6"/>
+          <p:cNvSpPr txBox="1"/>
+          <p:nvPr/>
+        </p:nvSpPr>
+        <p:spPr>
+          <a:xfrm>
+            <a:off x="548640" y="1371600"/>
+            <a:ext cx="10972800" cy="274320"/>
+          </a:xfrm>
+          <a:prstGeom prst="rect">
+            <a:avLst/>
+          </a:prstGeom>
+          <a:noFill/>
+        </p:spPr>
+        <p:txBody>
+          <a:bodyPr wrap="none">
+            <a:spAutoFit/>
+          </a:bodyPr>
+          <a:lstStyle/>
+          <a:p>
+            <a:pPr>
+              <a:defRPr sz="2000" b="1">
+                <a:solidFill>
+                  <a:srgbClr val="FFFFFF"/>
+                </a:solidFill>
+              </a:defRPr>
+            </a:pPr>
+            <a:r>
+              <a:t>Always Use "with":</a:t>
+            </a:r>
+          </a:p>
+        </p:txBody>
+      </p:sp>
+      <p:sp>
+        <p:nvSpPr>
+          <p:cNvPr id="8" name="TextBox 7"/>
+          <p:cNvSpPr txBox="1"/>
+          <p:nvPr/>
+        </p:nvSpPr>
+        <p:spPr>
+          <a:xfrm>
+            <a:off x="457200" y="1828800"/>
+            <a:ext cx="11247120" cy="320040"/>
+          </a:xfrm>
+          <a:prstGeom prst="rect">
+            <a:avLst/>
+          </a:prstGeom>
+          <a:noFill/>
+        </p:spPr>
+        <p:txBody>
+          <a:bodyPr wrap="none">
+            <a:spAutoFit/>
+          </a:bodyPr>
+          <a:lstStyle/>
+          <a:p>
+            <a:pPr lvl="1">
+              <a:defRPr sz="1600">
+                <a:solidFill>
+                  <a:srgbClr val="333333"/>
+                </a:solidFill>
+              </a:defRPr>
+            </a:pPr>
+            <a:r>
+              <a:t>• Automatically closes files</a:t>
+            </a:r>
+          </a:p>
+        </p:txBody>
+      </p:sp>
+      <p:sp>
+        <p:nvSpPr>
+          <p:cNvPr id="9" name="TextBox 8"/>
+          <p:cNvSpPr txBox="1"/>
+          <p:nvPr/>
+        </p:nvSpPr>
+        <p:spPr>
+          <a:xfrm>
+            <a:off x="457200" y="2103120"/>
+            <a:ext cx="11247120" cy="320040"/>
+          </a:xfrm>
+          <a:prstGeom prst="rect">
+            <a:avLst/>
+          </a:prstGeom>
+          <a:noFill/>
+        </p:spPr>
+        <p:txBody>
+          <a:bodyPr wrap="none">
+            <a:spAutoFit/>
+          </a:bodyPr>
+          <a:lstStyle/>
+          <a:p>
+            <a:pPr lvl="1">
+              <a:defRPr sz="1600">
+                <a:solidFill>
+                  <a:srgbClr val="333333"/>
+                </a:solidFill>
+              </a:defRPr>
+            </a:pPr>
+            <a:r>
+              <a:t>• Handles errors gracefully</a:t>
+            </a:r>
+          </a:p>
+        </p:txBody>
+      </p:sp>
+      <p:sp>
+        <p:nvSpPr>
+          <p:cNvPr id="10" name="Rectangle 9"/>
+          <p:cNvSpPr/>
+          <p:nvPr/>
+        </p:nvSpPr>
+        <p:spPr>
+          <a:xfrm>
+            <a:off x="365760" y="2331720"/>
+            <a:ext cx="11430000" cy="365760"/>
+          </a:xfrm>
+          <a:prstGeom prst="rect">
+            <a:avLst/>
+          </a:prstGeom>
+          <a:solidFill>
+            <a:srgbClr val="0078D7"/>
+          </a:solidFill>
+          <a:ln>
+            <a:noFill/>
+          </a:ln>
+        </p:spPr>
+        <p:style>
+          <a:lnRef idx="1">
+            <a:schemeClr val="accent1"/>
+          </a:lnRef>
+          <a:fillRef idx="3">
+            <a:schemeClr val="accent1"/>
+          </a:fillRef>
+          <a:effectRef idx="2">
+            <a:schemeClr val="accent1"/>
+          </a:effectRef>
+          <a:fontRef idx="minor">
+            <a:schemeClr val="lt1"/>
+          </a:fontRef>
+        </p:style>
+        <p:txBody>
+          <a:bodyPr rtlCol="0" anchor="ctr"/>
+          <a:lstStyle/>
+          <a:p>
+            <a:pPr algn="ctr"/>
+          </a:p>
+        </p:txBody>
+      </p:sp>
+      <p:sp>
+        <p:nvSpPr>
+          <p:cNvPr id="11" name="TextBox 10"/>
+          <p:cNvSpPr txBox="1"/>
+          <p:nvPr/>
+        </p:nvSpPr>
+        <p:spPr>
+          <a:xfrm>
+            <a:off x="548640" y="2377439"/>
+            <a:ext cx="10972800" cy="274320"/>
+          </a:xfrm>
+          <a:prstGeom prst="rect">
+            <a:avLst/>
+          </a:prstGeom>
+          <a:noFill/>
+        </p:spPr>
+        <p:txBody>
+          <a:bodyPr wrap="none">
+            <a:spAutoFit/>
+          </a:bodyPr>
+          <a:lstStyle/>
+          <a:p>
+            <a:pPr>
+              <a:defRPr sz="2000" b="1">
+                <a:solidFill>
+                  <a:srgbClr val="FFFFFF"/>
+                </a:solidFill>
+              </a:defRPr>
+            </a:pPr>
+            <a:r>
+              <a:t>Handle Errors:</a:t>
+            </a:r>
+          </a:p>
+        </p:txBody>
+      </p:sp>
+      <p:sp>
+        <p:nvSpPr>
+          <p:cNvPr id="12" name="Rectangle 11"/>
+          <p:cNvSpPr/>
+          <p:nvPr/>
+        </p:nvSpPr>
+        <p:spPr>
+          <a:xfrm>
+            <a:off x="640080" y="2788920"/>
+            <a:ext cx="10789920" cy="411480"/>
+          </a:xfrm>
+          <a:prstGeom prst="rect">
+            <a:avLst/>
+          </a:prstGeom>
+          <a:solidFill>
+            <a:srgbClr val="282C34"/>
+          </a:solidFill>
+          <a:ln>
+            <a:noFill/>
+          </a:ln>
+        </p:spPr>
+        <p:style>
+          <a:lnRef idx="1">
+            <a:schemeClr val="accent1"/>
+          </a:lnRef>
+          <a:fillRef idx="3">
+            <a:schemeClr val="accent1"/>
+          </a:fillRef>
+          <a:effectRef idx="2">
+            <a:schemeClr val="accent1"/>
+          </a:effectRef>
+          <a:fontRef idx="minor">
+            <a:schemeClr val="lt1"/>
+          </a:fontRef>
+        </p:style>
+        <p:txBody>
+          <a:bodyPr rtlCol="0" anchor="ctr"/>
+          <a:lstStyle/>
+          <a:p>
+            <a:pPr algn="ctr"/>
+          </a:p>
+        </p:txBody>
+      </p:sp>
+      <p:sp>
+        <p:nvSpPr>
+          <p:cNvPr id="13" name="Rectangle 12"/>
+          <p:cNvSpPr/>
+          <p:nvPr/>
+        </p:nvSpPr>
+        <p:spPr>
+          <a:xfrm>
+            <a:off x="640080" y="2788920"/>
+            <a:ext cx="73152" cy="411480"/>
+          </a:xfrm>
+          <a:prstGeom prst="rect">
+            <a:avLst/>
+          </a:prstGeom>
+          <a:solidFill>
+            <a:srgbClr val="61AFEF"/>
+          </a:solidFill>
+          <a:ln>
+            <a:noFill/>
+          </a:ln>
+        </p:spPr>
+        <p:style>
+          <a:lnRef idx="1">
+            <a:schemeClr val="accent1"/>
+          </a:lnRef>
+          <a:fillRef idx="3">
+            <a:schemeClr val="accent1"/>
+          </a:fillRef>
+          <a:effectRef idx="2">
+            <a:schemeClr val="accent1"/>
+          </a:effectRef>
+          <a:fontRef idx="minor">
+            <a:schemeClr val="lt1"/>
+          </a:fontRef>
+        </p:style>
+        <p:txBody>
+          <a:bodyPr rtlCol="0" anchor="ctr"/>
+          <a:lstStyle/>
+          <a:p>
+            <a:pPr algn="ctr"/>
+          </a:p>
+        </p:txBody>
+      </p:sp>
+      <p:sp>
+        <p:nvSpPr>
+          <p:cNvPr id="14" name="TextBox 13"/>
+          <p:cNvSpPr txBox="1"/>
+          <p:nvPr/>
+        </p:nvSpPr>
+        <p:spPr>
+          <a:xfrm>
+            <a:off x="914400" y="2834639"/>
+            <a:ext cx="10241280" cy="320040"/>
+          </a:xfrm>
+          <a:prstGeom prst="rect">
+            <a:avLst/>
+          </a:prstGeom>
+          <a:noFill/>
+        </p:spPr>
+        <p:txBody>
+          <a:bodyPr wrap="none">
+            <a:spAutoFit/>
+          </a:bodyPr>
+          <a:lstStyle/>
+          <a:p>
+            <a:pPr>
+              <a:spcAft>
+                <a:spcPts val="200"/>
+              </a:spcAft>
+              <a:defRPr sz="1400">
+                <a:solidFill>
+                  <a:srgbClr val="ABB2BF"/>
+                </a:solidFill>
+                <a:latin typeface="Consolas"/>
+              </a:defRPr>
+            </a:pPr>
+            <a:r>
+              <a:t>• Check if file exists</a:t>
+            </a:r>
+          </a:p>
+        </p:txBody>
+      </p:sp>
+      <p:sp>
+        <p:nvSpPr>
+          <p:cNvPr id="15" name="TextBox 14"/>
+          <p:cNvSpPr txBox="1"/>
+          <p:nvPr/>
+        </p:nvSpPr>
+        <p:spPr>
+          <a:xfrm>
+            <a:off x="457200" y="3383279"/>
+            <a:ext cx="11247120" cy="320040"/>
+          </a:xfrm>
+          <a:prstGeom prst="rect">
+            <a:avLst/>
+          </a:prstGeom>
+          <a:noFill/>
+        </p:spPr>
+        <p:txBody>
+          <a:bodyPr wrap="none">
+            <a:spAutoFit/>
+          </a:bodyPr>
+          <a:lstStyle/>
+          <a:p>
+            <a:pPr lvl="1">
+              <a:defRPr sz="1600">
+                <a:solidFill>
+                  <a:srgbClr val="333333"/>
+                </a:solidFill>
+              </a:defRPr>
+            </a:pPr>
+            <a:r>
+              <a:t>• Use try-except</a:t>
+            </a:r>
+          </a:p>
+        </p:txBody>
+      </p:sp>
+      <p:sp>
+        <p:nvSpPr>
+          <p:cNvPr id="16" name="TextBox 15"/>
+          <p:cNvSpPr txBox="1"/>
+          <p:nvPr/>
+        </p:nvSpPr>
+        <p:spPr>
+          <a:xfrm>
+            <a:off x="457200" y="3657599"/>
+            <a:ext cx="11247120" cy="320040"/>
+          </a:xfrm>
+          <a:prstGeom prst="rect">
+            <a:avLst/>
+          </a:prstGeom>
+          <a:noFill/>
+        </p:spPr>
+        <p:txBody>
+          <a:bodyPr wrap="none">
+            <a:spAutoFit/>
+          </a:bodyPr>
+          <a:lstStyle/>
+          <a:p>
+            <a:pPr lvl="1">
+              <a:defRPr sz="1600">
+                <a:solidFill>
+                  <a:srgbClr val="333333"/>
+                </a:solidFill>
+              </a:defRPr>
+            </a:pPr>
+            <a:r>
+              <a:t>• Provide helpful messages</a:t>
+            </a:r>
+          </a:p>
+        </p:txBody>
+      </p:sp>
+      <p:sp>
+        <p:nvSpPr>
+          <p:cNvPr id="17" name="Rectangle 16"/>
+          <p:cNvSpPr/>
+          <p:nvPr/>
+        </p:nvSpPr>
+        <p:spPr>
+          <a:xfrm>
+            <a:off x="365760" y="3886200"/>
+            <a:ext cx="11430000" cy="365760"/>
+          </a:xfrm>
+          <a:prstGeom prst="rect">
+            <a:avLst/>
+          </a:prstGeom>
+          <a:solidFill>
+            <a:srgbClr val="0078D7"/>
+          </a:solidFill>
+          <a:ln>
+            <a:noFill/>
+          </a:ln>
+        </p:spPr>
+        <p:style>
+          <a:lnRef idx="1">
+            <a:schemeClr val="accent1"/>
+          </a:lnRef>
+          <a:fillRef idx="3">
+            <a:schemeClr val="accent1"/>
+          </a:fillRef>
+          <a:effectRef idx="2">
+            <a:schemeClr val="accent1"/>
+          </a:effectRef>
+          <a:fontRef idx="minor">
+            <a:schemeClr val="lt1"/>
+          </a:fontRef>
+        </p:style>
+        <p:txBody>
+          <a:bodyPr rtlCol="0" anchor="ctr"/>
+          <a:lstStyle/>
+          <a:p>
+            <a:pPr algn="ctr"/>
+          </a:p>
+        </p:txBody>
+      </p:sp>
+      <p:sp>
+        <p:nvSpPr>
+          <p:cNvPr id="18" name="TextBox 17"/>
+          <p:cNvSpPr txBox="1"/>
+          <p:nvPr/>
+        </p:nvSpPr>
+        <p:spPr>
+          <a:xfrm>
+            <a:off x="548640" y="3931920"/>
+            <a:ext cx="10972800" cy="274320"/>
+          </a:xfrm>
+          <a:prstGeom prst="rect">
+            <a:avLst/>
+          </a:prstGeom>
+          <a:noFill/>
+        </p:spPr>
+        <p:txBody>
+          <a:bodyPr wrap="none">
+            <a:spAutoFit/>
+          </a:bodyPr>
+          <a:lstStyle/>
+          <a:p>
+            <a:pPr>
+              <a:defRPr sz="2000" b="1">
+                <a:solidFill>
+                  <a:srgbClr val="FFFFFF"/>
+                </a:solidFill>
+              </a:defRPr>
+            </a:pPr>
+            <a:r>
+              <a:t>Choose Right Format:</a:t>
+            </a:r>
+          </a:p>
+        </p:txBody>
+      </p:sp>
+      <p:sp>
+        <p:nvSpPr>
+          <p:cNvPr id="19" name="TextBox 18"/>
+          <p:cNvSpPr txBox="1"/>
+          <p:nvPr/>
+        </p:nvSpPr>
+        <p:spPr>
+          <a:xfrm>
+            <a:off x="457200" y="4389120"/>
+            <a:ext cx="11247120" cy="320040"/>
+          </a:xfrm>
+          <a:prstGeom prst="rect">
+            <a:avLst/>
+          </a:prstGeom>
+          <a:noFill/>
+        </p:spPr>
+        <p:txBody>
+          <a:bodyPr wrap="none">
+            <a:spAutoFit/>
+          </a:bodyPr>
+          <a:lstStyle/>
+          <a:p>
+            <a:pPr lvl="1">
+              <a:defRPr sz="1600">
+                <a:solidFill>
+                  <a:srgbClr val="333333"/>
+                </a:solidFill>
+              </a:defRPr>
+            </a:pPr>
+            <a:r>
+              <a:t>• Text: Simple data</a:t>
+            </a:r>
+          </a:p>
+        </p:txBody>
+      </p:sp>
+      <p:sp>
+        <p:nvSpPr>
+          <p:cNvPr id="20" name="TextBox 19"/>
+          <p:cNvSpPr txBox="1"/>
+          <p:nvPr/>
+        </p:nvSpPr>
+        <p:spPr>
+          <a:xfrm>
+            <a:off x="457200" y="4663440"/>
+            <a:ext cx="11247120" cy="320040"/>
+          </a:xfrm>
+          <a:prstGeom prst="rect">
+            <a:avLst/>
+          </a:prstGeom>
+          <a:noFill/>
+        </p:spPr>
+        <p:txBody>
+          <a:bodyPr wrap="none">
+            <a:spAutoFit/>
+          </a:bodyPr>
+          <a:lstStyle/>
+          <a:p>
+            <a:pPr lvl="1">
+              <a:defRPr sz="1600">
+                <a:solidFill>
+                  <a:srgbClr val="333333"/>
+                </a:solidFill>
+              </a:defRPr>
+            </a:pPr>
+            <a:r>
+              <a:t>• CSV: Tabular data</a:t>
+            </a:r>
+          </a:p>
+        </p:txBody>
+      </p:sp>
+      <p:sp>
+        <p:nvSpPr>
+          <p:cNvPr id="21" name="TextBox 20"/>
+          <p:cNvSpPr txBox="1"/>
+          <p:nvPr/>
+        </p:nvSpPr>
+        <p:spPr>
+          <a:xfrm>
+            <a:off x="457200" y="4937759"/>
+            <a:ext cx="11247120" cy="320040"/>
+          </a:xfrm>
+          <a:prstGeom prst="rect">
+            <a:avLst/>
+          </a:prstGeom>
+          <a:noFill/>
+        </p:spPr>
+        <p:txBody>
+          <a:bodyPr wrap="none">
+            <a:spAutoFit/>
+          </a:bodyPr>
+          <a:lstStyle/>
+          <a:p>
+            <a:pPr lvl="1">
+              <a:defRPr sz="1600">
+                <a:solidFill>
+                  <a:srgbClr val="333333"/>
+                </a:solidFill>
+              </a:defRPr>
+            </a:pPr>
+            <a:r>
+              <a:t>• JSON: Structured data</a:t>
+            </a:r>
+          </a:p>
+        </p:txBody>
+      </p:sp>
+      <p:sp>
+        <p:nvSpPr>
+          <p:cNvPr id="22" name="Rectangle 21"/>
+          <p:cNvSpPr/>
+          <p:nvPr/>
+        </p:nvSpPr>
+        <p:spPr>
+          <a:xfrm>
+            <a:off x="365760" y="5166359"/>
+            <a:ext cx="11430000" cy="365760"/>
+          </a:xfrm>
+          <a:prstGeom prst="rect">
+            <a:avLst/>
+          </a:prstGeom>
+          <a:solidFill>
+            <a:srgbClr val="0078D7"/>
+          </a:solidFill>
+          <a:ln>
+            <a:noFill/>
+          </a:ln>
+        </p:spPr>
+        <p:style>
+          <a:lnRef idx="1">
+            <a:schemeClr val="accent1"/>
+          </a:lnRef>
+          <a:fillRef idx="3">
+            <a:schemeClr val="accent1"/>
+          </a:fillRef>
+          <a:effectRef idx="2">
+            <a:schemeClr val="accent1"/>
+          </a:effectRef>
+          <a:fontRef idx="minor">
+            <a:schemeClr val="lt1"/>
+          </a:fontRef>
+        </p:style>
+        <p:txBody>
+          <a:bodyPr rtlCol="0" anchor="ctr"/>
+          <a:lstStyle/>
+          <a:p>
+            <a:pPr algn="ctr"/>
+          </a:p>
+        </p:txBody>
+      </p:sp>
+      <p:sp>
+        <p:nvSpPr>
+          <p:cNvPr id="23" name="TextBox 22"/>
+          <p:cNvSpPr txBox="1"/>
+          <p:nvPr/>
+        </p:nvSpPr>
+        <p:spPr>
+          <a:xfrm>
+            <a:off x="548640" y="5212079"/>
+            <a:ext cx="10972800" cy="274320"/>
+          </a:xfrm>
+          <a:prstGeom prst="rect">
+            <a:avLst/>
+          </a:prstGeom>
+          <a:noFill/>
+        </p:spPr>
+        <p:txBody>
+          <a:bodyPr wrap="none">
+            <a:spAutoFit/>
+          </a:bodyPr>
+          <a:lstStyle/>
+          <a:p>
+            <a:pPr>
+              <a:defRPr sz="2000" b="1">
+                <a:solidFill>
+                  <a:srgbClr val="FFFFFF"/>
+                </a:solidFill>
+              </a:defRPr>
+            </a:pPr>
+            <a:r>
+              <a:t>Performance:</a:t>
+            </a:r>
+          </a:p>
+        </p:txBody>
+      </p:sp>
+      <p:sp>
+        <p:nvSpPr>
+          <p:cNvPr id="24" name="Rectangle 23"/>
+          <p:cNvSpPr/>
+          <p:nvPr/>
+        </p:nvSpPr>
+        <p:spPr>
+          <a:xfrm>
+            <a:off x="640080" y="5623559"/>
+            <a:ext cx="10789920" cy="411480"/>
+          </a:xfrm>
+          <a:prstGeom prst="rect">
+            <a:avLst/>
+          </a:prstGeom>
+          <a:solidFill>
+            <a:srgbClr val="282C34"/>
+          </a:solidFill>
+          <a:ln>
+            <a:noFill/>
+          </a:ln>
+        </p:spPr>
+        <p:style>
+          <a:lnRef idx="1">
+            <a:schemeClr val="accent1"/>
+          </a:lnRef>
+          <a:fillRef idx="3">
+            <a:schemeClr val="accent1"/>
+          </a:fillRef>
+          <a:effectRef idx="2">
+            <a:schemeClr val="accent1"/>
+          </a:effectRef>
+          <a:fontRef idx="minor">
+            <a:schemeClr val="lt1"/>
+          </a:fontRef>
+        </p:style>
+        <p:txBody>
+          <a:bodyPr rtlCol="0" anchor="ctr"/>
+          <a:lstStyle/>
+          <a:p>
+            <a:pPr algn="ctr"/>
+          </a:p>
+        </p:txBody>
+      </p:sp>
+      <p:sp>
+        <p:nvSpPr>
+          <p:cNvPr id="25" name="Rectangle 24"/>
+          <p:cNvSpPr/>
+          <p:nvPr/>
+        </p:nvSpPr>
+        <p:spPr>
+          <a:xfrm>
+            <a:off x="640080" y="5623559"/>
+            <a:ext cx="73152" cy="411480"/>
+          </a:xfrm>
+          <a:prstGeom prst="rect">
+            <a:avLst/>
+          </a:prstGeom>
+          <a:solidFill>
+            <a:srgbClr val="61AFEF"/>
+          </a:solidFill>
+          <a:ln>
+            <a:noFill/>
+          </a:ln>
+        </p:spPr>
+        <p:style>
+          <a:lnRef idx="1">
+            <a:schemeClr val="accent1"/>
+          </a:lnRef>
+          <a:fillRef idx="3">
+            <a:schemeClr val="accent1"/>
+          </a:fillRef>
+          <a:effectRef idx="2">
+            <a:schemeClr val="accent1"/>
+          </a:effectRef>
+          <a:fontRef idx="minor">
+            <a:schemeClr val="lt1"/>
+          </a:fontRef>
+        </p:style>
+        <p:txBody>
+          <a:bodyPr rtlCol="0" anchor="ctr"/>
+          <a:lstStyle/>
+          <a:p>
+            <a:pPr algn="ctr"/>
+          </a:p>
+        </p:txBody>
+      </p:sp>
+      <p:sp>
+        <p:nvSpPr>
+          <p:cNvPr id="26" name="TextBox 25"/>
+          <p:cNvSpPr txBox="1"/>
+          <p:nvPr/>
+        </p:nvSpPr>
+        <p:spPr>
+          <a:xfrm>
+            <a:off x="914400" y="5669279"/>
+            <a:ext cx="10241280" cy="320040"/>
+          </a:xfrm>
+          <a:prstGeom prst="rect">
+            <a:avLst/>
+          </a:prstGeom>
+          <a:noFill/>
+        </p:spPr>
+        <p:txBody>
+          <a:bodyPr wrap="none">
+            <a:spAutoFit/>
+          </a:bodyPr>
+          <a:lstStyle/>
+          <a:p>
+            <a:pPr>
+              <a:spcAft>
+                <a:spcPts val="200"/>
+              </a:spcAft>
+              <a:defRPr sz="1400">
+                <a:solidFill>
+                  <a:srgbClr val="ABB2BF"/>
+                </a:solidFill>
+                <a:latin typeface="Consolas"/>
+              </a:defRPr>
+            </a:pPr>
+            <a:r>
+              <a:t>• Read line-by-line for large files</a:t>
+            </a:r>
+          </a:p>
+        </p:txBody>
+      </p:sp>
+      <p:sp>
+        <p:nvSpPr>
+          <p:cNvPr id="27" name="TextBox 26"/>
+          <p:cNvSpPr txBox="1"/>
+          <p:nvPr/>
+        </p:nvSpPr>
+        <p:spPr>
+          <a:xfrm>
+            <a:off x="457200" y="6217920"/>
+            <a:ext cx="11247120" cy="320040"/>
+          </a:xfrm>
+          <a:prstGeom prst="rect">
+            <a:avLst/>
+          </a:prstGeom>
+          <a:noFill/>
+        </p:spPr>
+        <p:txBody>
+          <a:bodyPr wrap="none">
+            <a:spAutoFit/>
+          </a:bodyPr>
+          <a:lstStyle/>
+          <a:p>
+            <a:pPr lvl="1">
+              <a:defRPr sz="1600">
+                <a:solidFill>
+                  <a:srgbClr val="333333"/>
+                </a:solidFill>
+              </a:defRPr>
+            </a:pPr>
+            <a:r>
+              <a:t>• Use buffering</a:t>
+            </a:r>
+          </a:p>
+        </p:txBody>
+      </p:sp>
+    </p:spTree>
+  </p:cSld>
+  <p:clrMapOvr>
+    <a:masterClrMapping/>
+  </p:clrMapOvr>
+</p:sld>
+</file>
+
+<file path=ppt/slides/slide11.xml><?xml version="1.0" encoding="utf-8"?>
+<p:sld xmlns:a="http://schemas.openxmlformats.org/drawingml/2006/main" xmlns:p="http://schemas.openxmlformats.org/presentationml/2006/main" xmlns:r="http://schemas.openxmlformats.org/officeDocument/2006/relationships">
+  <p:cSld>
+    <p:spTree>
+      <p:nvGrpSpPr>
+        <p:cNvPr id="1" name=""/>
+        <p:cNvGrpSpPr/>
+        <p:nvPr/>
+      </p:nvGrpSpPr>
+      <p:grpSpPr/>
+      <p:sp>
+        <p:nvSpPr>
+          <p:cNvPr id="2" name="Rectangle 1"/>
+          <p:cNvSpPr/>
+          <p:nvPr/>
+        </p:nvSpPr>
+        <p:spPr>
+          <a:xfrm>
+            <a:off x="0" y="0"/>
+            <a:ext cx="12191695" cy="6858000"/>
+          </a:xfrm>
+          <a:prstGeom prst="rect">
+            <a:avLst/>
+          </a:prstGeom>
+          <a:solidFill>
+            <a:srgbClr val="0066CC"/>
+          </a:solidFill>
+          <a:ln>
+            <a:noFill/>
+          </a:ln>
+        </p:spPr>
+        <p:style>
+          <a:lnRef idx="1">
+            <a:schemeClr val="accent1"/>
+          </a:lnRef>
+          <a:fillRef idx="3">
+            <a:schemeClr val="accent1"/>
+          </a:fillRef>
+          <a:effectRef idx="2">
+            <a:schemeClr val="accent1"/>
+          </a:effectRef>
+          <a:fontRef idx="minor">
+            <a:schemeClr val="lt1"/>
+          </a:fontRef>
+        </p:style>
+        <p:txBody>
+          <a:bodyPr rtlCol="0" anchor="ctr"/>
+          <a:lstStyle/>
+          <a:p>
+            <a:pPr algn="ctr"/>
+          </a:p>
+        </p:txBody>
+      </p:sp>
+      <p:sp>
+        <p:nvSpPr>
+          <p:cNvPr id="3" name="Rectangle 2"/>
+          <p:cNvSpPr/>
+          <p:nvPr/>
+        </p:nvSpPr>
+        <p:spPr>
+          <a:xfrm>
+            <a:off x="0" y="2743200"/>
+            <a:ext cx="3657600" cy="137160"/>
+          </a:xfrm>
+          <a:prstGeom prst="rect">
+            <a:avLst/>
+          </a:prstGeom>
+          <a:solidFill>
+            <a:srgbClr val="FFBB33"/>
+          </a:solidFill>
+          <a:ln>
+            <a:noFill/>
+          </a:ln>
+        </p:spPr>
+        <p:style>
+          <a:lnRef idx="1">
+            <a:schemeClr val="accent1"/>
+          </a:lnRef>
+          <a:fillRef idx="3">
+            <a:schemeClr val="accent1"/>
+          </a:fillRef>
+          <a:effectRef idx="2">
+            <a:schemeClr val="accent1"/>
+          </a:effectRef>
+          <a:fontRef idx="minor">
+            <a:schemeClr val="lt1"/>
+          </a:fontRef>
+        </p:style>
+        <p:txBody>
+          <a:bodyPr rtlCol="0" anchor="ctr"/>
+          <a:lstStyle/>
+          <a:p>
+            <a:pPr algn="ctr"/>
+          </a:p>
+        </p:txBody>
+      </p:sp>
+      <p:sp>
+        <p:nvSpPr>
+          <p:cNvPr id="4" name="Rectangle 3"/>
+          <p:cNvSpPr/>
+          <p:nvPr/>
+        </p:nvSpPr>
+        <p:spPr>
+          <a:xfrm>
+            <a:off x="8531352" y="4114800"/>
+            <a:ext cx="3657600" cy="137160"/>
+          </a:xfrm>
+          <a:prstGeom prst="rect">
+            <a:avLst/>
+          </a:prstGeom>
+          <a:solidFill>
+            <a:srgbClr val="FFBB33"/>
+          </a:solidFill>
+          <a:ln>
+            <a:noFill/>
+          </a:ln>
+        </p:spPr>
+        <p:style>
+          <a:lnRef idx="1">
+            <a:schemeClr val="accent1"/>
+          </a:lnRef>
+          <a:fillRef idx="3">
+            <a:schemeClr val="accent1"/>
+          </a:fillRef>
+          <a:effectRef idx="2">
+            <a:schemeClr val="accent1"/>
+          </a:effectRef>
+          <a:fontRef idx="minor">
+            <a:schemeClr val="lt1"/>
+          </a:fontRef>
+        </p:style>
+        <p:txBody>
+          <a:bodyPr rtlCol="0" anchor="ctr"/>
+          <a:lstStyle/>
+          <a:p>
+            <a:pPr algn="ctr"/>
+          </a:p>
+        </p:txBody>
+      </p:sp>
+      <p:sp>
+        <p:nvSpPr>
+          <p:cNvPr id="5" name="TextBox 4"/>
+          <p:cNvSpPr txBox="1"/>
+          <p:nvPr/>
+        </p:nvSpPr>
+        <p:spPr>
+          <a:xfrm>
+            <a:off x="914400" y="2560320"/>
+            <a:ext cx="10360152" cy="1371600"/>
+          </a:xfrm>
+          <a:prstGeom prst="rect">
+            <a:avLst/>
+          </a:prstGeom>
+          <a:noFill/>
+        </p:spPr>
+        <p:txBody>
+          <a:bodyPr wrap="none">
+            <a:spAutoFit/>
+          </a:bodyPr>
+          <a:lstStyle/>
+          <a:p>
+            <a:pPr algn="ctr">
+              <a:defRPr sz="4800" b="1">
+                <a:solidFill>
+                  <a:srgbClr val="FFFFFF"/>
+                </a:solidFill>
+              </a:defRPr>
+            </a:pPr>
+            <a:r>
+              <a:t>Time to Practice!</a:t>
+            </a:r>
+          </a:p>
+        </p:txBody>
+      </p:sp>
+      <p:sp>
+        <p:nvSpPr>
+          <p:cNvPr id="6" name="TextBox 5"/>
+          <p:cNvSpPr txBox="1"/>
+          <p:nvPr/>
+        </p:nvSpPr>
+        <p:spPr>
+          <a:xfrm>
+            <a:off x="1828800" y="4389120"/>
+            <a:ext cx="8531352" cy="914400"/>
+          </a:xfrm>
+          <a:prstGeom prst="rect">
+            <a:avLst/>
+          </a:prstGeom>
+          <a:noFill/>
+        </p:spPr>
+        <p:txBody>
+          <a:bodyPr wrap="none">
+            <a:spAutoFit/>
+          </a:bodyPr>
+          <a:lstStyle/>
+          <a:p>
+            <a:pPr algn="ctr">
+              <a:defRPr sz="2400">
+                <a:solidFill>
+                  <a:srgbClr val="FFFFFF"/>
+                </a:solidFill>
+              </a:defRPr>
+            </a:pPr>
+            <a:r>
+              <a:t>Chapter 9 Exercises</a:t>
             </a:r>
           </a:p>
         </p:txBody>
@@ -3242,7 +4614,7 @@
             <a:avLst/>
           </a:prstGeom>
           <a:solidFill>
-            <a:srgbClr val="FFFFFF"/>
+            <a:srgbClr val="FAFAFA"/>
           </a:solidFill>
           <a:ln>
             <a:noFill/>
@@ -3279,7 +4651,7 @@
         <p:spPr>
           <a:xfrm>
             <a:off x="0" y="0"/>
-            <a:ext cx="12191695" cy="137160"/>
+            <a:ext cx="12191695" cy="1097280"/>
           </a:xfrm>
           <a:prstGeom prst="rect">
             <a:avLst/>
@@ -3315,13 +4687,56 @@
       </p:sp>
       <p:sp>
         <p:nvSpPr>
-          <p:cNvPr id="4" name="TextBox 3"/>
+          <p:cNvPr id="4" name="Rectangle 3"/>
+          <p:cNvSpPr/>
+          <p:nvPr/>
+        </p:nvSpPr>
+        <p:spPr>
+          <a:xfrm>
+            <a:off x="0" y="1097280"/>
+            <a:ext cx="137160" cy="5760720"/>
+          </a:xfrm>
+          <a:prstGeom prst="rect">
+            <a:avLst/>
+          </a:prstGeom>
+          <a:solidFill>
+            <a:srgbClr val="FFBB33"/>
+          </a:solidFill>
+          <a:ln>
+            <a:noFill/>
+          </a:ln>
+        </p:spPr>
+        <p:style>
+          <a:lnRef idx="1">
+            <a:schemeClr val="accent1"/>
+          </a:lnRef>
+          <a:fillRef idx="3">
+            <a:schemeClr val="accent1"/>
+          </a:fillRef>
+          <a:effectRef idx="2">
+            <a:schemeClr val="accent1"/>
+          </a:effectRef>
+          <a:fontRef idx="minor">
+            <a:schemeClr val="lt1"/>
+          </a:fontRef>
+        </p:style>
+        <p:txBody>
+          <a:bodyPr rtlCol="0" anchor="ctr"/>
+          <a:lstStyle/>
+          <a:p>
+            <a:pPr algn="ctr"/>
+          </a:p>
+        </p:txBody>
+      </p:sp>
+      <p:sp>
+        <p:nvSpPr>
+          <p:cNvPr id="5" name="TextBox 4"/>
           <p:cNvSpPr txBox="1"/>
           <p:nvPr/>
         </p:nvSpPr>
         <p:spPr>
           <a:xfrm>
-            <a:off x="457200" y="320040"/>
+            <a:off x="365760" y="274320"/>
             <a:ext cx="10972800" cy="640080"/>
           </a:xfrm>
           <a:prstGeom prst="rect">
@@ -3338,7 +4753,7 @@
             <a:pPr>
               <a:defRPr sz="3600" b="1">
                 <a:solidFill>
-                  <a:srgbClr val="003366"/>
+                  <a:srgbClr val="FFFFFF"/>
                 </a:solidFill>
               </a:defRPr>
             </a:pPr>
@@ -3350,14 +4765,57 @@
       </p:sp>
       <p:sp>
         <p:nvSpPr>
-          <p:cNvPr id="5" name="TextBox 4"/>
+          <p:cNvPr id="6" name="Rectangle 5"/>
+          <p:cNvSpPr/>
+          <p:nvPr/>
+        </p:nvSpPr>
+        <p:spPr>
+          <a:xfrm>
+            <a:off x="365760" y="1325880"/>
+            <a:ext cx="11430000" cy="365760"/>
+          </a:xfrm>
+          <a:prstGeom prst="rect">
+            <a:avLst/>
+          </a:prstGeom>
+          <a:solidFill>
+            <a:srgbClr val="0078D7"/>
+          </a:solidFill>
+          <a:ln>
+            <a:noFill/>
+          </a:ln>
+        </p:spPr>
+        <p:style>
+          <a:lnRef idx="1">
+            <a:schemeClr val="accent1"/>
+          </a:lnRef>
+          <a:fillRef idx="3">
+            <a:schemeClr val="accent1"/>
+          </a:fillRef>
+          <a:effectRef idx="2">
+            <a:schemeClr val="accent1"/>
+          </a:effectRef>
+          <a:fontRef idx="minor">
+            <a:schemeClr val="lt1"/>
+          </a:fontRef>
+        </p:style>
+        <p:txBody>
+          <a:bodyPr rtlCol="0" anchor="ctr"/>
+          <a:lstStyle/>
+          <a:p>
+            <a:pPr algn="ctr"/>
+          </a:p>
+        </p:txBody>
+      </p:sp>
+      <p:sp>
+        <p:nvSpPr>
+          <p:cNvPr id="7" name="TextBox 6"/>
           <p:cNvSpPr txBox="1"/>
           <p:nvPr/>
         </p:nvSpPr>
         <p:spPr>
           <a:xfrm>
-            <a:off x="640080" y="1188720"/>
-            <a:ext cx="10789920" cy="5303520"/>
+            <a:off x="548640" y="1371600"/>
+            <a:ext cx="10972800" cy="274320"/>
           </a:xfrm>
           <a:prstGeom prst="rect">
             <a:avLst/>
@@ -3365,30 +4823,82 @@
           <a:noFill/>
         </p:spPr>
         <p:txBody>
-          <a:bodyPr wrap="square">
+          <a:bodyPr wrap="none">
             <a:spAutoFit/>
           </a:bodyPr>
           <a:lstStyle/>
           <a:p>
             <a:pPr>
-              <a:spcAft>
-                <a:spcPts val="600"/>
-              </a:spcAft>
-              <a:defRPr b="1" sz="2000">
+              <a:defRPr sz="2000" b="1">
+                <a:solidFill>
+                  <a:srgbClr val="FFFFFF"/>
+                </a:solidFill>
+              </a:defRPr>
+            </a:pPr>
+            <a:r>
+              <a:t>Data Persistence:</a:t>
+            </a:r>
+          </a:p>
+        </p:txBody>
+      </p:sp>
+      <p:sp>
+        <p:nvSpPr>
+          <p:cNvPr id="8" name="TextBox 7"/>
+          <p:cNvSpPr txBox="1"/>
+          <p:nvPr/>
+        </p:nvSpPr>
+        <p:spPr>
+          <a:xfrm>
+            <a:off x="457200" y="1828800"/>
+            <a:ext cx="11247120" cy="320040"/>
+          </a:xfrm>
+          <a:prstGeom prst="rect">
+            <a:avLst/>
+          </a:prstGeom>
+          <a:noFill/>
+        </p:spPr>
+        <p:txBody>
+          <a:bodyPr wrap="none">
+            <a:spAutoFit/>
+          </a:bodyPr>
+          <a:lstStyle/>
+          <a:p>
+            <a:pPr lvl="1">
+              <a:defRPr sz="1600">
                 <a:solidFill>
                   <a:srgbClr val="333333"/>
                 </a:solidFill>
               </a:defRPr>
             </a:pPr>
             <a:r>
-              <a:t>Data Persistence:</a:t>
-            </a:r>
-          </a:p>
+              <a:t>• Save data between program runs</a:t>
+            </a:r>
+          </a:p>
+        </p:txBody>
+      </p:sp>
+      <p:sp>
+        <p:nvSpPr>
+          <p:cNvPr id="9" name="TextBox 8"/>
+          <p:cNvSpPr txBox="1"/>
+          <p:nvPr/>
+        </p:nvSpPr>
+        <p:spPr>
+          <a:xfrm>
+            <a:off x="457200" y="2103120"/>
+            <a:ext cx="11247120" cy="320040"/>
+          </a:xfrm>
+          <a:prstGeom prst="rect">
+            <a:avLst/>
+          </a:prstGeom>
+          <a:noFill/>
+        </p:spPr>
+        <p:txBody>
+          <a:bodyPr wrap="none">
+            <a:spAutoFit/>
+          </a:bodyPr>
+          <a:lstStyle/>
           <a:p>
             <a:pPr lvl="1">
-              <a:spcAft>
-                <a:spcPts val="400"/>
-              </a:spcAft>
               <a:defRPr sz="1600">
                 <a:solidFill>
                   <a:srgbClr val="333333"/>
@@ -3396,14 +4906,34 @@
               </a:defRPr>
             </a:pPr>
             <a:r>
-              <a:t>• Save data between program runs</a:t>
-            </a:r>
-          </a:p>
+              <a:t>• Store user information</a:t>
+            </a:r>
+          </a:p>
+        </p:txBody>
+      </p:sp>
+      <p:sp>
+        <p:nvSpPr>
+          <p:cNvPr id="10" name="TextBox 9"/>
+          <p:cNvSpPr txBox="1"/>
+          <p:nvPr/>
+        </p:nvSpPr>
+        <p:spPr>
+          <a:xfrm>
+            <a:off x="457200" y="2377439"/>
+            <a:ext cx="11247120" cy="320040"/>
+          </a:xfrm>
+          <a:prstGeom prst="rect">
+            <a:avLst/>
+          </a:prstGeom>
+          <a:noFill/>
+        </p:spPr>
+        <p:txBody>
+          <a:bodyPr wrap="none">
+            <a:spAutoFit/>
+          </a:bodyPr>
+          <a:lstStyle/>
           <a:p>
             <a:pPr lvl="1">
-              <a:spcAft>
-                <a:spcPts val="400"/>
-              </a:spcAft>
               <a:defRPr sz="1600">
                 <a:solidFill>
                   <a:srgbClr val="333333"/>
@@ -3411,14 +4941,34 @@
               </a:defRPr>
             </a:pPr>
             <a:r>
-              <a:t>• Store user information</a:t>
-            </a:r>
-          </a:p>
+              <a:t>• Log program activity</a:t>
+            </a:r>
+          </a:p>
+        </p:txBody>
+      </p:sp>
+      <p:sp>
+        <p:nvSpPr>
+          <p:cNvPr id="11" name="TextBox 10"/>
+          <p:cNvSpPr txBox="1"/>
+          <p:nvPr/>
+        </p:nvSpPr>
+        <p:spPr>
+          <a:xfrm>
+            <a:off x="457200" y="2651759"/>
+            <a:ext cx="11247120" cy="320040"/>
+          </a:xfrm>
+          <a:prstGeom prst="rect">
+            <a:avLst/>
+          </a:prstGeom>
+          <a:noFill/>
+        </p:spPr>
+        <p:txBody>
+          <a:bodyPr wrap="none">
+            <a:spAutoFit/>
+          </a:bodyPr>
+          <a:lstStyle/>
           <a:p>
             <a:pPr lvl="1">
-              <a:spcAft>
-                <a:spcPts val="400"/>
-              </a:spcAft>
               <a:defRPr sz="1600">
                 <a:solidFill>
                   <a:srgbClr val="333333"/>
@@ -3426,14 +4976,112 @@
               </a:defRPr>
             </a:pPr>
             <a:r>
-              <a:t>• Log program activity</a:t>
-            </a:r>
-          </a:p>
+              <a:t>• Import/export data</a:t>
+            </a:r>
+          </a:p>
+        </p:txBody>
+      </p:sp>
+      <p:sp>
+        <p:nvSpPr>
+          <p:cNvPr id="12" name="Rectangle 11"/>
+          <p:cNvSpPr/>
+          <p:nvPr/>
+        </p:nvSpPr>
+        <p:spPr>
+          <a:xfrm>
+            <a:off x="365760" y="2880359"/>
+            <a:ext cx="11430000" cy="365760"/>
+          </a:xfrm>
+          <a:prstGeom prst="rect">
+            <a:avLst/>
+          </a:prstGeom>
+          <a:solidFill>
+            <a:srgbClr val="0078D7"/>
+          </a:solidFill>
+          <a:ln>
+            <a:noFill/>
+          </a:ln>
+        </p:spPr>
+        <p:style>
+          <a:lnRef idx="1">
+            <a:schemeClr val="accent1"/>
+          </a:lnRef>
+          <a:fillRef idx="3">
+            <a:schemeClr val="accent1"/>
+          </a:fillRef>
+          <a:effectRef idx="2">
+            <a:schemeClr val="accent1"/>
+          </a:effectRef>
+          <a:fontRef idx="minor">
+            <a:schemeClr val="lt1"/>
+          </a:fontRef>
+        </p:style>
+        <p:txBody>
+          <a:bodyPr rtlCol="0" anchor="ctr"/>
+          <a:lstStyle/>
+          <a:p>
+            <a:pPr algn="ctr"/>
+          </a:p>
+        </p:txBody>
+      </p:sp>
+      <p:sp>
+        <p:nvSpPr>
+          <p:cNvPr id="13" name="TextBox 12"/>
+          <p:cNvSpPr txBox="1"/>
+          <p:nvPr/>
+        </p:nvSpPr>
+        <p:spPr>
+          <a:xfrm>
+            <a:off x="548640" y="2926079"/>
+            <a:ext cx="10972800" cy="274320"/>
+          </a:xfrm>
+          <a:prstGeom prst="rect">
+            <a:avLst/>
+          </a:prstGeom>
+          <a:noFill/>
+        </p:spPr>
+        <p:txBody>
+          <a:bodyPr wrap="none">
+            <a:spAutoFit/>
+          </a:bodyPr>
+          <a:lstStyle/>
+          <a:p>
+            <a:pPr>
+              <a:defRPr sz="2000" b="1">
+                <a:solidFill>
+                  <a:srgbClr val="FFFFFF"/>
+                </a:solidFill>
+              </a:defRPr>
+            </a:pPr>
+            <a:r>
+              <a:t>Common File Types:</a:t>
+            </a:r>
+          </a:p>
+        </p:txBody>
+      </p:sp>
+      <p:sp>
+        <p:nvSpPr>
+          <p:cNvPr id="14" name="TextBox 13"/>
+          <p:cNvSpPr txBox="1"/>
+          <p:nvPr/>
+        </p:nvSpPr>
+        <p:spPr>
+          <a:xfrm>
+            <a:off x="457200" y="3383279"/>
+            <a:ext cx="11247120" cy="320040"/>
+          </a:xfrm>
+          <a:prstGeom prst="rect">
+            <a:avLst/>
+          </a:prstGeom>
+          <a:noFill/>
+        </p:spPr>
+        <p:txBody>
+          <a:bodyPr wrap="none">
+            <a:spAutoFit/>
+          </a:bodyPr>
+          <a:lstStyle/>
           <a:p>
             <a:pPr lvl="1">
-              <a:spcAft>
-                <a:spcPts val="400"/>
-              </a:spcAft>
               <a:defRPr sz="1600">
                 <a:solidFill>
                   <a:srgbClr val="333333"/>
@@ -3441,29 +5089,252 @@
               </a:defRPr>
             </a:pPr>
             <a:r>
-              <a:t>• Import/export data</a:t>
-            </a:r>
-          </a:p>
+              <a:t>• Text files (.txt)</a:t>
+            </a:r>
+          </a:p>
+        </p:txBody>
+      </p:sp>
+      <p:sp>
+        <p:nvSpPr>
+          <p:cNvPr id="15" name="TextBox 14"/>
+          <p:cNvSpPr txBox="1"/>
+          <p:nvPr/>
+        </p:nvSpPr>
+        <p:spPr>
+          <a:xfrm>
+            <a:off x="457200" y="3657599"/>
+            <a:ext cx="11247120" cy="320040"/>
+          </a:xfrm>
+          <a:prstGeom prst="rect">
+            <a:avLst/>
+          </a:prstGeom>
+          <a:noFill/>
+        </p:spPr>
+        <p:txBody>
+          <a:bodyPr wrap="none">
+            <a:spAutoFit/>
+          </a:bodyPr>
+          <a:lstStyle/>
+          <a:p>
+            <a:pPr lvl="1">
+              <a:defRPr sz="1600">
+                <a:solidFill>
+                  <a:srgbClr val="333333"/>
+                </a:solidFill>
+              </a:defRPr>
+            </a:pPr>
+            <a:r>
+              <a:t>• CSV files (.csv)</a:t>
+            </a:r>
+          </a:p>
+        </p:txBody>
+      </p:sp>
+      <p:sp>
+        <p:nvSpPr>
+          <p:cNvPr id="16" name="TextBox 15"/>
+          <p:cNvSpPr txBox="1"/>
+          <p:nvPr/>
+        </p:nvSpPr>
+        <p:spPr>
+          <a:xfrm>
+            <a:off x="457200" y="3931919"/>
+            <a:ext cx="11247120" cy="320040"/>
+          </a:xfrm>
+          <a:prstGeom prst="rect">
+            <a:avLst/>
+          </a:prstGeom>
+          <a:noFill/>
+        </p:spPr>
+        <p:txBody>
+          <a:bodyPr wrap="none">
+            <a:spAutoFit/>
+          </a:bodyPr>
+          <a:lstStyle/>
+          <a:p>
+            <a:pPr lvl="1">
+              <a:defRPr sz="1600">
+                <a:solidFill>
+                  <a:srgbClr val="333333"/>
+                </a:solidFill>
+              </a:defRPr>
+            </a:pPr>
+            <a:r>
+              <a:t>• JSON files (.json)</a:t>
+            </a:r>
+          </a:p>
+        </p:txBody>
+      </p:sp>
+      <p:sp>
+        <p:nvSpPr>
+          <p:cNvPr id="17" name="TextBox 16"/>
+          <p:cNvSpPr txBox="1"/>
+          <p:nvPr/>
+        </p:nvSpPr>
+        <p:spPr>
+          <a:xfrm>
+            <a:off x="457200" y="4206239"/>
+            <a:ext cx="11247120" cy="320040"/>
+          </a:xfrm>
+          <a:prstGeom prst="rect">
+            <a:avLst/>
+          </a:prstGeom>
+          <a:noFill/>
+        </p:spPr>
+        <p:txBody>
+          <a:bodyPr wrap="none">
+            <a:spAutoFit/>
+          </a:bodyPr>
+          <a:lstStyle/>
+          <a:p>
+            <a:pPr lvl="1">
+              <a:defRPr sz="1600">
+                <a:solidFill>
+                  <a:srgbClr val="333333"/>
+                </a:solidFill>
+              </a:defRPr>
+            </a:pPr>
+            <a:r>
+              <a:t>• Configuration files</a:t>
+            </a:r>
+          </a:p>
+        </p:txBody>
+      </p:sp>
+      <p:sp>
+        <p:nvSpPr>
+          <p:cNvPr id="18" name="Rectangle 17"/>
+          <p:cNvSpPr/>
+          <p:nvPr/>
+        </p:nvSpPr>
+        <p:spPr>
+          <a:xfrm>
+            <a:off x="365760" y="4434839"/>
+            <a:ext cx="11430000" cy="365760"/>
+          </a:xfrm>
+          <a:prstGeom prst="rect">
+            <a:avLst/>
+          </a:prstGeom>
+          <a:solidFill>
+            <a:srgbClr val="0078D7"/>
+          </a:solidFill>
+          <a:ln>
+            <a:noFill/>
+          </a:ln>
+        </p:spPr>
+        <p:style>
+          <a:lnRef idx="1">
+            <a:schemeClr val="accent1"/>
+          </a:lnRef>
+          <a:fillRef idx="3">
+            <a:schemeClr val="accent1"/>
+          </a:fillRef>
+          <a:effectRef idx="2">
+            <a:schemeClr val="accent1"/>
+          </a:effectRef>
+          <a:fontRef idx="minor">
+            <a:schemeClr val="lt1"/>
+          </a:fontRef>
+        </p:style>
+        <p:txBody>
+          <a:bodyPr rtlCol="0" anchor="ctr"/>
+          <a:lstStyle/>
+          <a:p>
+            <a:pPr algn="ctr"/>
+          </a:p>
+        </p:txBody>
+      </p:sp>
+      <p:sp>
+        <p:nvSpPr>
+          <p:cNvPr id="19" name="TextBox 18"/>
+          <p:cNvSpPr txBox="1"/>
+          <p:nvPr/>
+        </p:nvSpPr>
+        <p:spPr>
+          <a:xfrm>
+            <a:off x="548640" y="4480559"/>
+            <a:ext cx="10972800" cy="274320"/>
+          </a:xfrm>
+          <a:prstGeom prst="rect">
+            <a:avLst/>
+          </a:prstGeom>
+          <a:noFill/>
+        </p:spPr>
+        <p:txBody>
+          <a:bodyPr wrap="none">
+            <a:spAutoFit/>
+          </a:bodyPr>
+          <a:lstStyle/>
           <a:p>
             <a:pPr>
-              <a:spcAft>
-                <a:spcPts val="600"/>
-              </a:spcAft>
-              <a:defRPr b="1" sz="2000">
+              <a:defRPr sz="2000" b="1">
+                <a:solidFill>
+                  <a:srgbClr val="FFFFFF"/>
+                </a:solidFill>
+              </a:defRPr>
+            </a:pPr>
+            <a:r>
+              <a:t>File Operations:</a:t>
+            </a:r>
+          </a:p>
+        </p:txBody>
+      </p:sp>
+      <p:sp>
+        <p:nvSpPr>
+          <p:cNvPr id="20" name="TextBox 19"/>
+          <p:cNvSpPr txBox="1"/>
+          <p:nvPr/>
+        </p:nvSpPr>
+        <p:spPr>
+          <a:xfrm>
+            <a:off x="457200" y="4937759"/>
+            <a:ext cx="11247120" cy="320040"/>
+          </a:xfrm>
+          <a:prstGeom prst="rect">
+            <a:avLst/>
+          </a:prstGeom>
+          <a:noFill/>
+        </p:spPr>
+        <p:txBody>
+          <a:bodyPr wrap="none">
+            <a:spAutoFit/>
+          </a:bodyPr>
+          <a:lstStyle/>
+          <a:p>
+            <a:pPr lvl="1">
+              <a:defRPr sz="1600">
                 <a:solidFill>
                   <a:srgbClr val="333333"/>
                 </a:solidFill>
               </a:defRPr>
             </a:pPr>
             <a:r>
-              <a:t>Common File Types:</a:t>
-            </a:r>
-          </a:p>
+              <a:t>• Read: Get data from file</a:t>
+            </a:r>
+          </a:p>
+        </p:txBody>
+      </p:sp>
+      <p:sp>
+        <p:nvSpPr>
+          <p:cNvPr id="21" name="TextBox 20"/>
+          <p:cNvSpPr txBox="1"/>
+          <p:nvPr/>
+        </p:nvSpPr>
+        <p:spPr>
+          <a:xfrm>
+            <a:off x="457200" y="5212079"/>
+            <a:ext cx="11247120" cy="320040"/>
+          </a:xfrm>
+          <a:prstGeom prst="rect">
+            <a:avLst/>
+          </a:prstGeom>
+          <a:noFill/>
+        </p:spPr>
+        <p:txBody>
+          <a:bodyPr wrap="none">
+            <a:spAutoFit/>
+          </a:bodyPr>
+          <a:lstStyle/>
           <a:p>
             <a:pPr lvl="1">
-              <a:spcAft>
-                <a:spcPts val="400"/>
-              </a:spcAft>
               <a:defRPr sz="1600">
                 <a:solidFill>
                   <a:srgbClr val="333333"/>
@@ -3471,14 +5342,34 @@
               </a:defRPr>
             </a:pPr>
             <a:r>
-              <a:t>• Text files (.txt)</a:t>
-            </a:r>
-          </a:p>
+              <a:t>• Write: Save data to file</a:t>
+            </a:r>
+          </a:p>
+        </p:txBody>
+      </p:sp>
+      <p:sp>
+        <p:nvSpPr>
+          <p:cNvPr id="22" name="TextBox 21"/>
+          <p:cNvSpPr txBox="1"/>
+          <p:nvPr/>
+        </p:nvSpPr>
+        <p:spPr>
+          <a:xfrm>
+            <a:off x="457200" y="5486399"/>
+            <a:ext cx="11247120" cy="320040"/>
+          </a:xfrm>
+          <a:prstGeom prst="rect">
+            <a:avLst/>
+          </a:prstGeom>
+          <a:noFill/>
+        </p:spPr>
+        <p:txBody>
+          <a:bodyPr wrap="none">
+            <a:spAutoFit/>
+          </a:bodyPr>
+          <a:lstStyle/>
           <a:p>
             <a:pPr lvl="1">
-              <a:spcAft>
-                <a:spcPts val="400"/>
-              </a:spcAft>
               <a:defRPr sz="1600">
                 <a:solidFill>
                   <a:srgbClr val="333333"/>
@@ -3486,104 +5377,34 @@
               </a:defRPr>
             </a:pPr>
             <a:r>
-              <a:t>• CSV files (.csv)</a:t>
-            </a:r>
-          </a:p>
+              <a:t>• Append: Add to existing file</a:t>
+            </a:r>
+          </a:p>
+        </p:txBody>
+      </p:sp>
+      <p:sp>
+        <p:nvSpPr>
+          <p:cNvPr id="23" name="TextBox 22"/>
+          <p:cNvSpPr txBox="1"/>
+          <p:nvPr/>
+        </p:nvSpPr>
+        <p:spPr>
+          <a:xfrm>
+            <a:off x="457200" y="5760719"/>
+            <a:ext cx="11247120" cy="320040"/>
+          </a:xfrm>
+          <a:prstGeom prst="rect">
+            <a:avLst/>
+          </a:prstGeom>
+          <a:noFill/>
+        </p:spPr>
+        <p:txBody>
+          <a:bodyPr wrap="none">
+            <a:spAutoFit/>
+          </a:bodyPr>
+          <a:lstStyle/>
           <a:p>
             <a:pPr lvl="1">
-              <a:spcAft>
-                <a:spcPts val="400"/>
-              </a:spcAft>
-              <a:defRPr sz="1600">
-                <a:solidFill>
-                  <a:srgbClr val="333333"/>
-                </a:solidFill>
-              </a:defRPr>
-            </a:pPr>
-            <a:r>
-              <a:t>• JSON files (.json)</a:t>
-            </a:r>
-          </a:p>
-          <a:p>
-            <a:pPr lvl="1">
-              <a:spcAft>
-                <a:spcPts val="400"/>
-              </a:spcAft>
-              <a:defRPr sz="1600">
-                <a:solidFill>
-                  <a:srgbClr val="333333"/>
-                </a:solidFill>
-              </a:defRPr>
-            </a:pPr>
-            <a:r>
-              <a:t>• Configuration files</a:t>
-            </a:r>
-          </a:p>
-          <a:p>
-            <a:pPr>
-              <a:spcAft>
-                <a:spcPts val="600"/>
-              </a:spcAft>
-              <a:defRPr b="1" sz="2000">
-                <a:solidFill>
-                  <a:srgbClr val="333333"/>
-                </a:solidFill>
-              </a:defRPr>
-            </a:pPr>
-            <a:r>
-              <a:t>File Operations:</a:t>
-            </a:r>
-          </a:p>
-          <a:p>
-            <a:pPr lvl="1">
-              <a:spcAft>
-                <a:spcPts val="400"/>
-              </a:spcAft>
-              <a:defRPr sz="1600">
-                <a:solidFill>
-                  <a:srgbClr val="333333"/>
-                </a:solidFill>
-              </a:defRPr>
-            </a:pPr>
-            <a:r>
-              <a:t>• Read: Get data from file</a:t>
-            </a:r>
-          </a:p>
-          <a:p>
-            <a:pPr lvl="1">
-              <a:spcAft>
-                <a:spcPts val="400"/>
-              </a:spcAft>
-              <a:defRPr sz="1600">
-                <a:solidFill>
-                  <a:srgbClr val="333333"/>
-                </a:solidFill>
-              </a:defRPr>
-            </a:pPr>
-            <a:r>
-              <a:t>• Write: Save data to file</a:t>
-            </a:r>
-          </a:p>
-          <a:p>
-            <a:pPr lvl="1">
-              <a:spcAft>
-                <a:spcPts val="400"/>
-              </a:spcAft>
-              <a:defRPr sz="1600">
-                <a:solidFill>
-                  <a:srgbClr val="333333"/>
-                </a:solidFill>
-              </a:defRPr>
-            </a:pPr>
-            <a:r>
-              <a:t>• Append: Add to existing file</a:t>
-            </a:r>
-          </a:p>
-          <a:p>
-            <a:pPr lvl="1">
-              <a:spcAft>
-                <a:spcPts val="400"/>
-              </a:spcAft>
               <a:defRPr sz="1600">
                 <a:solidFill>
                   <a:srgbClr val="333333"/>
@@ -3629,7 +5450,7 @@
             <a:avLst/>
           </a:prstGeom>
           <a:solidFill>
-            <a:srgbClr val="FFFFFF"/>
+            <a:srgbClr val="FAFAFA"/>
           </a:solidFill>
           <a:ln>
             <a:noFill/>
@@ -3666,7 +5487,7 @@
         <p:spPr>
           <a:xfrm>
             <a:off x="0" y="0"/>
-            <a:ext cx="12191695" cy="137160"/>
+            <a:ext cx="12191695" cy="1097280"/>
           </a:xfrm>
           <a:prstGeom prst="rect">
             <a:avLst/>
@@ -3702,13 +5523,56 @@
       </p:sp>
       <p:sp>
         <p:nvSpPr>
-          <p:cNvPr id="4" name="TextBox 3"/>
+          <p:cNvPr id="4" name="Rectangle 3"/>
+          <p:cNvSpPr/>
+          <p:nvPr/>
+        </p:nvSpPr>
+        <p:spPr>
+          <a:xfrm>
+            <a:off x="0" y="1097280"/>
+            <a:ext cx="137160" cy="5760720"/>
+          </a:xfrm>
+          <a:prstGeom prst="rect">
+            <a:avLst/>
+          </a:prstGeom>
+          <a:solidFill>
+            <a:srgbClr val="FFBB33"/>
+          </a:solidFill>
+          <a:ln>
+            <a:noFill/>
+          </a:ln>
+        </p:spPr>
+        <p:style>
+          <a:lnRef idx="1">
+            <a:schemeClr val="accent1"/>
+          </a:lnRef>
+          <a:fillRef idx="3">
+            <a:schemeClr val="accent1"/>
+          </a:fillRef>
+          <a:effectRef idx="2">
+            <a:schemeClr val="accent1"/>
+          </a:effectRef>
+          <a:fontRef idx="minor">
+            <a:schemeClr val="lt1"/>
+          </a:fontRef>
+        </p:style>
+        <p:txBody>
+          <a:bodyPr rtlCol="0" anchor="ctr"/>
+          <a:lstStyle/>
+          <a:p>
+            <a:pPr algn="ctr"/>
+          </a:p>
+        </p:txBody>
+      </p:sp>
+      <p:sp>
+        <p:nvSpPr>
+          <p:cNvPr id="5" name="TextBox 4"/>
           <p:cNvSpPr txBox="1"/>
           <p:nvPr/>
         </p:nvSpPr>
         <p:spPr>
           <a:xfrm>
-            <a:off x="457200" y="320040"/>
+            <a:off x="365760" y="274320"/>
             <a:ext cx="10972800" cy="640080"/>
           </a:xfrm>
           <a:prstGeom prst="rect">
@@ -3725,7 +5589,7 @@
             <a:pPr>
               <a:defRPr sz="3600" b="1">
                 <a:solidFill>
-                  <a:srgbClr val="003366"/>
+                  <a:srgbClr val="FFFFFF"/>
                 </a:solidFill>
               </a:defRPr>
             </a:pPr>
@@ -3737,14 +5601,57 @@
       </p:sp>
       <p:sp>
         <p:nvSpPr>
-          <p:cNvPr id="5" name="TextBox 4"/>
+          <p:cNvPr id="6" name="Rectangle 5"/>
+          <p:cNvSpPr/>
+          <p:nvPr/>
+        </p:nvSpPr>
+        <p:spPr>
+          <a:xfrm>
+            <a:off x="365760" y="1325880"/>
+            <a:ext cx="11430000" cy="365760"/>
+          </a:xfrm>
+          <a:prstGeom prst="rect">
+            <a:avLst/>
+          </a:prstGeom>
+          <a:solidFill>
+            <a:srgbClr val="0078D7"/>
+          </a:solidFill>
+          <a:ln>
+            <a:noFill/>
+          </a:ln>
+        </p:spPr>
+        <p:style>
+          <a:lnRef idx="1">
+            <a:schemeClr val="accent1"/>
+          </a:lnRef>
+          <a:fillRef idx="3">
+            <a:schemeClr val="accent1"/>
+          </a:fillRef>
+          <a:effectRef idx="2">
+            <a:schemeClr val="accent1"/>
+          </a:effectRef>
+          <a:fontRef idx="minor">
+            <a:schemeClr val="lt1"/>
+          </a:fontRef>
+        </p:style>
+        <p:txBody>
+          <a:bodyPr rtlCol="0" anchor="ctr"/>
+          <a:lstStyle/>
+          <a:p>
+            <a:pPr algn="ctr"/>
+          </a:p>
+        </p:txBody>
+      </p:sp>
+      <p:sp>
+        <p:nvSpPr>
+          <p:cNvPr id="7" name="TextBox 6"/>
           <p:cNvSpPr txBox="1"/>
           <p:nvPr/>
         </p:nvSpPr>
         <p:spPr>
           <a:xfrm>
-            <a:off x="640080" y="1188720"/>
-            <a:ext cx="10789920" cy="5303520"/>
+            <a:off x="548640" y="1371600"/>
+            <a:ext cx="10972800" cy="274320"/>
           </a:xfrm>
           <a:prstGeom prst="rect">
             <a:avLst/>
@@ -3752,18 +5659,15 @@
           <a:noFill/>
         </p:spPr>
         <p:txBody>
-          <a:bodyPr wrap="square">
+          <a:bodyPr wrap="none">
             <a:spAutoFit/>
           </a:bodyPr>
           <a:lstStyle/>
           <a:p>
             <a:pPr>
-              <a:spcAft>
-                <a:spcPts val="600"/>
-              </a:spcAft>
-              <a:defRPr b="1" sz="2000">
-                <a:solidFill>
-                  <a:srgbClr val="333333"/>
+              <a:defRPr sz="2000" b="1">
+                <a:solidFill>
+                  <a:srgbClr val="FFFFFF"/>
                 </a:solidFill>
               </a:defRPr>
             </a:pPr>
@@ -3771,56 +5675,749 @@
               <a:t>Basic Pattern:</a:t>
             </a:r>
           </a:p>
+        </p:txBody>
+      </p:sp>
+      <p:sp>
+        <p:nvSpPr>
+          <p:cNvPr id="8" name="Rectangle 7"/>
+          <p:cNvSpPr/>
+          <p:nvPr/>
+        </p:nvSpPr>
+        <p:spPr>
+          <a:xfrm>
+            <a:off x="365760" y="1783080"/>
+            <a:ext cx="11430000" cy="365760"/>
+          </a:xfrm>
+          <a:prstGeom prst="rect">
+            <a:avLst/>
+          </a:prstGeom>
+          <a:solidFill>
+            <a:srgbClr val="0078D7"/>
+          </a:solidFill>
+          <a:ln>
+            <a:noFill/>
+          </a:ln>
+        </p:spPr>
+        <p:style>
+          <a:lnRef idx="1">
+            <a:schemeClr val="accent1"/>
+          </a:lnRef>
+          <a:fillRef idx="3">
+            <a:schemeClr val="accent1"/>
+          </a:fillRef>
+          <a:effectRef idx="2">
+            <a:schemeClr val="accent1"/>
+          </a:effectRef>
+          <a:fontRef idx="minor">
+            <a:schemeClr val="lt1"/>
+          </a:fontRef>
+        </p:style>
+        <p:txBody>
+          <a:bodyPr rtlCol="0" anchor="ctr"/>
+          <a:lstStyle/>
+          <a:p>
+            <a:pPr algn="ctr"/>
+          </a:p>
+        </p:txBody>
+      </p:sp>
+      <p:sp>
+        <p:nvSpPr>
+          <p:cNvPr id="9" name="TextBox 8"/>
+          <p:cNvSpPr txBox="1"/>
+          <p:nvPr/>
+        </p:nvSpPr>
+        <p:spPr>
+          <a:xfrm>
+            <a:off x="548640" y="1828800"/>
+            <a:ext cx="10972800" cy="274320"/>
+          </a:xfrm>
+          <a:prstGeom prst="rect">
+            <a:avLst/>
+          </a:prstGeom>
+          <a:noFill/>
+        </p:spPr>
+        <p:txBody>
+          <a:bodyPr wrap="none">
+            <a:spAutoFit/>
+          </a:bodyPr>
+          <a:lstStyle/>
+          <a:p>
+            <a:pPr>
+              <a:defRPr sz="2000" b="1">
+                <a:solidFill>
+                  <a:srgbClr val="FFFFFF"/>
+                </a:solidFill>
+              </a:defRPr>
+            </a:pPr>
+            <a:r>
+              <a:t>with open("file.txt", "r") as file:</a:t>
+            </a:r>
+          </a:p>
+        </p:txBody>
+      </p:sp>
+      <p:sp>
+        <p:nvSpPr>
+          <p:cNvPr id="10" name="Rectangle 9"/>
+          <p:cNvSpPr/>
+          <p:nvPr/>
+        </p:nvSpPr>
+        <p:spPr>
+          <a:xfrm>
+            <a:off x="640080" y="2240280"/>
+            <a:ext cx="10789920" cy="411480"/>
+          </a:xfrm>
+          <a:prstGeom prst="rect">
+            <a:avLst/>
+          </a:prstGeom>
+          <a:solidFill>
+            <a:srgbClr val="282C34"/>
+          </a:solidFill>
+          <a:ln>
+            <a:noFill/>
+          </a:ln>
+        </p:spPr>
+        <p:style>
+          <a:lnRef idx="1">
+            <a:schemeClr val="accent1"/>
+          </a:lnRef>
+          <a:fillRef idx="3">
+            <a:schemeClr val="accent1"/>
+          </a:fillRef>
+          <a:effectRef idx="2">
+            <a:schemeClr val="accent1"/>
+          </a:effectRef>
+          <a:fontRef idx="minor">
+            <a:schemeClr val="lt1"/>
+          </a:fontRef>
+        </p:style>
+        <p:txBody>
+          <a:bodyPr rtlCol="0" anchor="ctr"/>
+          <a:lstStyle/>
+          <a:p>
+            <a:pPr algn="ctr"/>
+          </a:p>
+        </p:txBody>
+      </p:sp>
+      <p:sp>
+        <p:nvSpPr>
+          <p:cNvPr id="11" name="Rectangle 10"/>
+          <p:cNvSpPr/>
+          <p:nvPr/>
+        </p:nvSpPr>
+        <p:spPr>
+          <a:xfrm>
+            <a:off x="640080" y="2240280"/>
+            <a:ext cx="73152" cy="411480"/>
+          </a:xfrm>
+          <a:prstGeom prst="rect">
+            <a:avLst/>
+          </a:prstGeom>
+          <a:solidFill>
+            <a:srgbClr val="61AFEF"/>
+          </a:solidFill>
+          <a:ln>
+            <a:noFill/>
+          </a:ln>
+        </p:spPr>
+        <p:style>
+          <a:lnRef idx="1">
+            <a:schemeClr val="accent1"/>
+          </a:lnRef>
+          <a:fillRef idx="3">
+            <a:schemeClr val="accent1"/>
+          </a:fillRef>
+          <a:effectRef idx="2">
+            <a:schemeClr val="accent1"/>
+          </a:effectRef>
+          <a:fontRef idx="minor">
+            <a:schemeClr val="lt1"/>
+          </a:fontRef>
+        </p:style>
+        <p:txBody>
+          <a:bodyPr rtlCol="0" anchor="ctr"/>
+          <a:lstStyle/>
+          <a:p>
+            <a:pPr algn="ctr"/>
+          </a:p>
+        </p:txBody>
+      </p:sp>
+      <p:sp>
+        <p:nvSpPr>
+          <p:cNvPr id="12" name="TextBox 11"/>
+          <p:cNvSpPr txBox="1"/>
+          <p:nvPr/>
+        </p:nvSpPr>
+        <p:spPr>
+          <a:xfrm>
+            <a:off x="914400" y="2286000"/>
+            <a:ext cx="10241280" cy="320040"/>
+          </a:xfrm>
+          <a:prstGeom prst="rect">
+            <a:avLst/>
+          </a:prstGeom>
+          <a:noFill/>
+        </p:spPr>
+        <p:txBody>
+          <a:bodyPr wrap="none">
+            <a:spAutoFit/>
+          </a:bodyPr>
+          <a:lstStyle/>
           <a:p>
             <a:pPr>
               <a:spcAft>
-                <a:spcPts val="600"/>
+                <a:spcPts val="200"/>
               </a:spcAft>
-              <a:defRPr b="1" sz="2000">
+              <a:defRPr sz="1400">
+                <a:solidFill>
+                  <a:srgbClr val="ABB2BF"/>
+                </a:solidFill>
+                <a:latin typeface="Consolas"/>
+              </a:defRPr>
+            </a:pPr>
+            <a:r>
+              <a:t>    content = file.read()</a:t>
+            </a:r>
+          </a:p>
+        </p:txBody>
+      </p:sp>
+      <p:sp>
+        <p:nvSpPr>
+          <p:cNvPr id="13" name="Rectangle 12"/>
+          <p:cNvSpPr/>
+          <p:nvPr/>
+        </p:nvSpPr>
+        <p:spPr>
+          <a:xfrm>
+            <a:off x="365760" y="2788920"/>
+            <a:ext cx="11430000" cy="365760"/>
+          </a:xfrm>
+          <a:prstGeom prst="rect">
+            <a:avLst/>
+          </a:prstGeom>
+          <a:solidFill>
+            <a:srgbClr val="0078D7"/>
+          </a:solidFill>
+          <a:ln>
+            <a:noFill/>
+          </a:ln>
+        </p:spPr>
+        <p:style>
+          <a:lnRef idx="1">
+            <a:schemeClr val="accent1"/>
+          </a:lnRef>
+          <a:fillRef idx="3">
+            <a:schemeClr val="accent1"/>
+          </a:fillRef>
+          <a:effectRef idx="2">
+            <a:schemeClr val="accent1"/>
+          </a:effectRef>
+          <a:fontRef idx="minor">
+            <a:schemeClr val="lt1"/>
+          </a:fontRef>
+        </p:style>
+        <p:txBody>
+          <a:bodyPr rtlCol="0" anchor="ctr"/>
+          <a:lstStyle/>
+          <a:p>
+            <a:pPr algn="ctr"/>
+          </a:p>
+        </p:txBody>
+      </p:sp>
+      <p:sp>
+        <p:nvSpPr>
+          <p:cNvPr id="14" name="TextBox 13"/>
+          <p:cNvSpPr txBox="1"/>
+          <p:nvPr/>
+        </p:nvSpPr>
+        <p:spPr>
+          <a:xfrm>
+            <a:off x="548640" y="2834640"/>
+            <a:ext cx="10972800" cy="274320"/>
+          </a:xfrm>
+          <a:prstGeom prst="rect">
+            <a:avLst/>
+          </a:prstGeom>
+          <a:noFill/>
+        </p:spPr>
+        <p:txBody>
+          <a:bodyPr wrap="none">
+            <a:spAutoFit/>
+          </a:bodyPr>
+          <a:lstStyle/>
+          <a:p>
+            <a:pPr>
+              <a:defRPr sz="2000" b="1">
+                <a:solidFill>
+                  <a:srgbClr val="FFFFFF"/>
+                </a:solidFill>
+              </a:defRPr>
+            </a:pPr>
+            <a:r>
+              <a:t>Reading Methods:</a:t>
+            </a:r>
+          </a:p>
+        </p:txBody>
+      </p:sp>
+      <p:sp>
+        <p:nvSpPr>
+          <p:cNvPr id="15" name="TextBox 14"/>
+          <p:cNvSpPr txBox="1"/>
+          <p:nvPr/>
+        </p:nvSpPr>
+        <p:spPr>
+          <a:xfrm>
+            <a:off x="457200" y="3291840"/>
+            <a:ext cx="11247120" cy="320040"/>
+          </a:xfrm>
+          <a:prstGeom prst="rect">
+            <a:avLst/>
+          </a:prstGeom>
+          <a:noFill/>
+        </p:spPr>
+        <p:txBody>
+          <a:bodyPr wrap="none">
+            <a:spAutoFit/>
+          </a:bodyPr>
+          <a:lstStyle/>
+          <a:p>
+            <a:pPr>
+              <a:defRPr sz="1700">
                 <a:solidFill>
                   <a:srgbClr val="333333"/>
                 </a:solidFill>
               </a:defRPr>
             </a:pPr>
             <a:r>
+              <a:t>file.read()  # Entire file</a:t>
+            </a:r>
+          </a:p>
+        </p:txBody>
+      </p:sp>
+      <p:sp>
+        <p:nvSpPr>
+          <p:cNvPr id="16" name="TextBox 15"/>
+          <p:cNvSpPr txBox="1"/>
+          <p:nvPr/>
+        </p:nvSpPr>
+        <p:spPr>
+          <a:xfrm>
+            <a:off x="457200" y="3566160"/>
+            <a:ext cx="11247120" cy="320040"/>
+          </a:xfrm>
+          <a:prstGeom prst="rect">
+            <a:avLst/>
+          </a:prstGeom>
+          <a:noFill/>
+        </p:spPr>
+        <p:txBody>
+          <a:bodyPr wrap="none">
+            <a:spAutoFit/>
+          </a:bodyPr>
+          <a:lstStyle/>
+          <a:p>
+            <a:pPr>
+              <a:defRPr sz="1700">
+                <a:solidFill>
+                  <a:srgbClr val="333333"/>
+                </a:solidFill>
+              </a:defRPr>
+            </a:pPr>
+            <a:r>
+              <a:t>file.readline()  # One line</a:t>
+            </a:r>
+          </a:p>
+        </p:txBody>
+      </p:sp>
+      <p:sp>
+        <p:nvSpPr>
+          <p:cNvPr id="17" name="TextBox 16"/>
+          <p:cNvSpPr txBox="1"/>
+          <p:nvPr/>
+        </p:nvSpPr>
+        <p:spPr>
+          <a:xfrm>
+            <a:off x="457200" y="3840480"/>
+            <a:ext cx="11247120" cy="320040"/>
+          </a:xfrm>
+          <a:prstGeom prst="rect">
+            <a:avLst/>
+          </a:prstGeom>
+          <a:noFill/>
+        </p:spPr>
+        <p:txBody>
+          <a:bodyPr wrap="none">
+            <a:spAutoFit/>
+          </a:bodyPr>
+          <a:lstStyle/>
+          <a:p>
+            <a:pPr>
+              <a:defRPr sz="1700">
+                <a:solidFill>
+                  <a:srgbClr val="333333"/>
+                </a:solidFill>
+              </a:defRPr>
+            </a:pPr>
+            <a:r>
+              <a:t>file.readlines()  # List of lines</a:t>
+            </a:r>
+          </a:p>
+        </p:txBody>
+      </p:sp>
+      <p:sp>
+        <p:nvSpPr>
+          <p:cNvPr id="18" name="Rectangle 17"/>
+          <p:cNvSpPr/>
+          <p:nvPr/>
+        </p:nvSpPr>
+        <p:spPr>
+          <a:xfrm>
+            <a:off x="365760" y="4069080"/>
+            <a:ext cx="11430000" cy="365760"/>
+          </a:xfrm>
+          <a:prstGeom prst="rect">
+            <a:avLst/>
+          </a:prstGeom>
+          <a:solidFill>
+            <a:srgbClr val="0078D7"/>
+          </a:solidFill>
+          <a:ln>
+            <a:noFill/>
+          </a:ln>
+        </p:spPr>
+        <p:style>
+          <a:lnRef idx="1">
+            <a:schemeClr val="accent1"/>
+          </a:lnRef>
+          <a:fillRef idx="3">
+            <a:schemeClr val="accent1"/>
+          </a:fillRef>
+          <a:effectRef idx="2">
+            <a:schemeClr val="accent1"/>
+          </a:effectRef>
+          <a:fontRef idx="minor">
+            <a:schemeClr val="lt1"/>
+          </a:fontRef>
+        </p:style>
+        <p:txBody>
+          <a:bodyPr rtlCol="0" anchor="ctr"/>
+          <a:lstStyle/>
+          <a:p>
+            <a:pPr algn="ctr"/>
+          </a:p>
+        </p:txBody>
+      </p:sp>
+      <p:sp>
+        <p:nvSpPr>
+          <p:cNvPr id="19" name="TextBox 18"/>
+          <p:cNvSpPr txBox="1"/>
+          <p:nvPr/>
+        </p:nvSpPr>
+        <p:spPr>
+          <a:xfrm>
+            <a:off x="548640" y="4114800"/>
+            <a:ext cx="10972800" cy="274320"/>
+          </a:xfrm>
+          <a:prstGeom prst="rect">
+            <a:avLst/>
+          </a:prstGeom>
+          <a:noFill/>
+        </p:spPr>
+        <p:txBody>
+          <a:bodyPr wrap="none">
+            <a:spAutoFit/>
+          </a:bodyPr>
+          <a:lstStyle/>
+          <a:p>
+            <a:pPr>
+              <a:defRPr sz="2000" b="1">
+                <a:solidFill>
+                  <a:srgbClr val="FFFFFF"/>
+                </a:solidFill>
+              </a:defRPr>
+            </a:pPr>
+            <a:r>
+              <a:t>Iterating:</a:t>
+            </a:r>
+          </a:p>
+        </p:txBody>
+      </p:sp>
+      <p:sp>
+        <p:nvSpPr>
+          <p:cNvPr id="20" name="Rectangle 19"/>
+          <p:cNvSpPr/>
+          <p:nvPr/>
+        </p:nvSpPr>
+        <p:spPr>
+          <a:xfrm>
+            <a:off x="365760" y="4526280"/>
+            <a:ext cx="11430000" cy="365760"/>
+          </a:xfrm>
+          <a:prstGeom prst="rect">
+            <a:avLst/>
+          </a:prstGeom>
+          <a:solidFill>
+            <a:srgbClr val="0078D7"/>
+          </a:solidFill>
+          <a:ln>
+            <a:noFill/>
+          </a:ln>
+        </p:spPr>
+        <p:style>
+          <a:lnRef idx="1">
+            <a:schemeClr val="accent1"/>
+          </a:lnRef>
+          <a:fillRef idx="3">
+            <a:schemeClr val="accent1"/>
+          </a:fillRef>
+          <a:effectRef idx="2">
+            <a:schemeClr val="accent1"/>
+          </a:effectRef>
+          <a:fontRef idx="minor">
+            <a:schemeClr val="lt1"/>
+          </a:fontRef>
+        </p:style>
+        <p:txBody>
+          <a:bodyPr rtlCol="0" anchor="ctr"/>
+          <a:lstStyle/>
+          <a:p>
+            <a:pPr algn="ctr"/>
+          </a:p>
+        </p:txBody>
+      </p:sp>
+      <p:sp>
+        <p:nvSpPr>
+          <p:cNvPr id="21" name="TextBox 20"/>
+          <p:cNvSpPr txBox="1"/>
+          <p:nvPr/>
+        </p:nvSpPr>
+        <p:spPr>
+          <a:xfrm>
+            <a:off x="548640" y="4572000"/>
+            <a:ext cx="10972800" cy="274320"/>
+          </a:xfrm>
+          <a:prstGeom prst="rect">
+            <a:avLst/>
+          </a:prstGeom>
+          <a:noFill/>
+        </p:spPr>
+        <p:txBody>
+          <a:bodyPr wrap="none">
+            <a:spAutoFit/>
+          </a:bodyPr>
+          <a:lstStyle/>
+          <a:p>
+            <a:pPr>
+              <a:defRPr sz="2000" b="1">
+                <a:solidFill>
+                  <a:srgbClr val="FFFFFF"/>
+                </a:solidFill>
+              </a:defRPr>
+            </a:pPr>
+            <a:r>
               <a:t>with open("file.txt", "r") as file:</a:t>
             </a:r>
           </a:p>
+        </p:txBody>
+      </p:sp>
+      <p:sp>
+        <p:nvSpPr>
+          <p:cNvPr id="22" name="Rectangle 21"/>
+          <p:cNvSpPr/>
+          <p:nvPr/>
+        </p:nvSpPr>
+        <p:spPr>
+          <a:xfrm>
+            <a:off x="640080" y="4983480"/>
+            <a:ext cx="10789920" cy="640080"/>
+          </a:xfrm>
+          <a:prstGeom prst="rect">
+            <a:avLst/>
+          </a:prstGeom>
+          <a:solidFill>
+            <a:srgbClr val="282C34"/>
+          </a:solidFill>
+          <a:ln>
+            <a:noFill/>
+          </a:ln>
+        </p:spPr>
+        <p:style>
+          <a:lnRef idx="1">
+            <a:schemeClr val="accent1"/>
+          </a:lnRef>
+          <a:fillRef idx="3">
+            <a:schemeClr val="accent1"/>
+          </a:fillRef>
+          <a:effectRef idx="2">
+            <a:schemeClr val="accent1"/>
+          </a:effectRef>
+          <a:fontRef idx="minor">
+            <a:schemeClr val="lt1"/>
+          </a:fontRef>
+        </p:style>
+        <p:txBody>
+          <a:bodyPr rtlCol="0" anchor="ctr"/>
+          <a:lstStyle/>
+          <a:p>
+            <a:pPr algn="ctr"/>
+          </a:p>
+        </p:txBody>
+      </p:sp>
+      <p:sp>
+        <p:nvSpPr>
+          <p:cNvPr id="23" name="Rectangle 22"/>
+          <p:cNvSpPr/>
+          <p:nvPr/>
+        </p:nvSpPr>
+        <p:spPr>
+          <a:xfrm>
+            <a:off x="640080" y="4983480"/>
+            <a:ext cx="73152" cy="640080"/>
+          </a:xfrm>
+          <a:prstGeom prst="rect">
+            <a:avLst/>
+          </a:prstGeom>
+          <a:solidFill>
+            <a:srgbClr val="61AFEF"/>
+          </a:solidFill>
+          <a:ln>
+            <a:noFill/>
+          </a:ln>
+        </p:spPr>
+        <p:style>
+          <a:lnRef idx="1">
+            <a:schemeClr val="accent1"/>
+          </a:lnRef>
+          <a:fillRef idx="3">
+            <a:schemeClr val="accent1"/>
+          </a:fillRef>
+          <a:effectRef idx="2">
+            <a:schemeClr val="accent1"/>
+          </a:effectRef>
+          <a:fontRef idx="minor">
+            <a:schemeClr val="lt1"/>
+          </a:fontRef>
+        </p:style>
+        <p:txBody>
+          <a:bodyPr rtlCol="0" anchor="ctr"/>
+          <a:lstStyle/>
+          <a:p>
+            <a:pPr algn="ctr"/>
+          </a:p>
+        </p:txBody>
+      </p:sp>
+      <p:sp>
+        <p:nvSpPr>
+          <p:cNvPr id="24" name="TextBox 23"/>
+          <p:cNvSpPr txBox="1"/>
+          <p:nvPr/>
+        </p:nvSpPr>
+        <p:spPr>
+          <a:xfrm>
+            <a:off x="914400" y="5029200"/>
+            <a:ext cx="10241280" cy="548640"/>
+          </a:xfrm>
+          <a:prstGeom prst="rect">
+            <a:avLst/>
+          </a:prstGeom>
+          <a:noFill/>
+        </p:spPr>
+        <p:txBody>
+          <a:bodyPr wrap="none">
+            <a:spAutoFit/>
+          </a:bodyPr>
+          <a:lstStyle/>
           <a:p>
             <a:pPr>
               <a:spcAft>
-                <a:spcPts val="600"/>
+                <a:spcPts val="200"/>
               </a:spcAft>
-              <a:defRPr sz="1600">
-                <a:solidFill>
-                  <a:srgbClr val="333333"/>
-                </a:solidFill>
+              <a:defRPr sz="1400">
+                <a:solidFill>
+                  <a:srgbClr val="ABB2BF"/>
+                </a:solidFill>
+                <a:latin typeface="Consolas"/>
               </a:defRPr>
             </a:pPr>
             <a:r>
-              <a:t>    content = file.read()</a:t>
+              <a:t>    for line in file:</a:t>
             </a:r>
           </a:p>
           <a:p>
             <a:pPr>
               <a:spcAft>
-                <a:spcPts val="600"/>
+                <a:spcPts val="200"/>
               </a:spcAft>
-              <a:defRPr b="1" sz="2000">
+              <a:defRPr sz="1400">
+                <a:solidFill>
+                  <a:srgbClr val="ABB2BF"/>
+                </a:solidFill>
+                <a:latin typeface="Consolas"/>
+              </a:defRPr>
+            </a:pPr>
+            <a:r>
+              <a:t>        print(line.strip())</a:t>
+            </a:r>
+          </a:p>
+        </p:txBody>
+      </p:sp>
+      <p:sp>
+        <p:nvSpPr>
+          <p:cNvPr id="25" name="TextBox 24"/>
+          <p:cNvSpPr txBox="1"/>
+          <p:nvPr/>
+        </p:nvSpPr>
+        <p:spPr>
+          <a:xfrm>
+            <a:off x="457200" y="5806440"/>
+            <a:ext cx="11247120" cy="320040"/>
+          </a:xfrm>
+          <a:prstGeom prst="rect">
+            <a:avLst/>
+          </a:prstGeom>
+          <a:noFill/>
+        </p:spPr>
+        <p:txBody>
+          <a:bodyPr wrap="none">
+            <a:spAutoFit/>
+          </a:bodyPr>
+          <a:lstStyle/>
+          <a:p>
+            <a:pPr>
+              <a:defRPr sz="1700">
                 <a:solidFill>
                   <a:srgbClr val="333333"/>
                 </a:solidFill>
               </a:defRPr>
             </a:pPr>
             <a:r>
-              <a:t>Reading Methods:</a:t>
-            </a:r>
-          </a:p>
-          <a:p>
-            <a:pPr>
-              <a:spcAft>
-                <a:spcPts val="600"/>
-              </a:spcAft>
+              <a:t>Why use "with"?</a:t>
+            </a:r>
+          </a:p>
+        </p:txBody>
+      </p:sp>
+      <p:sp>
+        <p:nvSpPr>
+          <p:cNvPr id="26" name="TextBox 25"/>
+          <p:cNvSpPr txBox="1"/>
+          <p:nvPr/>
+        </p:nvSpPr>
+        <p:spPr>
+          <a:xfrm>
+            <a:off x="457200" y="6080760"/>
+            <a:ext cx="11247120" cy="320040"/>
+          </a:xfrm>
+          <a:prstGeom prst="rect">
+            <a:avLst/>
+          </a:prstGeom>
+          <a:noFill/>
+        </p:spPr>
+        <p:txBody>
+          <a:bodyPr wrap="none">
+            <a:spAutoFit/>
+          </a:bodyPr>
+          <a:lstStyle/>
+          <a:p>
+            <a:pPr lvl="1">
               <a:defRPr sz="1600">
                 <a:solidFill>
                   <a:srgbClr val="333333"/>
@@ -3828,157 +6425,7 @@
               </a:defRPr>
             </a:pPr>
             <a:r>
-              <a:t>file.read()  # Entire file</a:t>
-            </a:r>
-          </a:p>
-          <a:p>
-            <a:pPr>
-              <a:spcAft>
-                <a:spcPts val="600"/>
-              </a:spcAft>
-              <a:defRPr sz="1600">
-                <a:solidFill>
-                  <a:srgbClr val="333333"/>
-                </a:solidFill>
-              </a:defRPr>
-            </a:pPr>
-            <a:r>
-              <a:t>file.readline()  # One line</a:t>
-            </a:r>
-          </a:p>
-          <a:p>
-            <a:pPr>
-              <a:spcAft>
-                <a:spcPts val="600"/>
-              </a:spcAft>
-              <a:defRPr sz="1600">
-                <a:solidFill>
-                  <a:srgbClr val="333333"/>
-                </a:solidFill>
-              </a:defRPr>
-            </a:pPr>
-            <a:r>
-              <a:t>file.readlines()  # List of lines</a:t>
-            </a:r>
-          </a:p>
-          <a:p>
-            <a:pPr>
-              <a:spcAft>
-                <a:spcPts val="600"/>
-              </a:spcAft>
-              <a:defRPr b="1" sz="2000">
-                <a:solidFill>
-                  <a:srgbClr val="333333"/>
-                </a:solidFill>
-              </a:defRPr>
-            </a:pPr>
-            <a:r>
-              <a:t>Iterating:</a:t>
-            </a:r>
-          </a:p>
-          <a:p>
-            <a:pPr>
-              <a:spcAft>
-                <a:spcPts val="600"/>
-              </a:spcAft>
-              <a:defRPr b="1" sz="2000">
-                <a:solidFill>
-                  <a:srgbClr val="333333"/>
-                </a:solidFill>
-              </a:defRPr>
-            </a:pPr>
-            <a:r>
-              <a:t>with open("file.txt", "r") as file:</a:t>
-            </a:r>
-          </a:p>
-          <a:p>
-            <a:pPr>
-              <a:spcAft>
-                <a:spcPts val="600"/>
-              </a:spcAft>
-              <a:defRPr sz="1600">
-                <a:solidFill>
-                  <a:srgbClr val="333333"/>
-                </a:solidFill>
-              </a:defRPr>
-            </a:pPr>
-            <a:r>
-              <a:t>    for line in file:</a:t>
-            </a:r>
-          </a:p>
-          <a:p>
-            <a:pPr>
-              <a:spcAft>
-                <a:spcPts val="600"/>
-              </a:spcAft>
-              <a:defRPr sz="1600">
-                <a:solidFill>
-                  <a:srgbClr val="333333"/>
-                </a:solidFill>
-              </a:defRPr>
-            </a:pPr>
-            <a:r>
-              <a:t>        print(line.strip())</a:t>
-            </a:r>
-          </a:p>
-          <a:p>
-            <a:pPr>
-              <a:spcAft>
-                <a:spcPts val="600"/>
-              </a:spcAft>
-              <a:defRPr sz="1600">
-                <a:solidFill>
-                  <a:srgbClr val="333333"/>
-                </a:solidFill>
-              </a:defRPr>
-            </a:pPr>
-            <a:r>
-              <a:t>Why use "with"?</a:t>
-            </a:r>
-          </a:p>
-          <a:p>
-            <a:pPr lvl="1">
-              <a:spcAft>
-                <a:spcPts val="400"/>
-              </a:spcAft>
-              <a:defRPr sz="1600">
-                <a:solidFill>
-                  <a:srgbClr val="333333"/>
-                </a:solidFill>
-              </a:defRPr>
-            </a:pPr>
-            <a:r>
               <a:t>• Automatically closes file</a:t>
-            </a:r>
-          </a:p>
-          <a:p>
-            <a:pPr lvl="1">
-              <a:spcAft>
-                <a:spcPts val="400"/>
-              </a:spcAft>
-              <a:defRPr sz="1600">
-                <a:solidFill>
-                  <a:srgbClr val="333333"/>
-                </a:solidFill>
-              </a:defRPr>
-            </a:pPr>
-            <a:r>
-              <a:t>• Works even if error occurs</a:t>
-            </a:r>
-          </a:p>
-          <a:p>
-            <a:pPr lvl="1">
-              <a:spcAft>
-                <a:spcPts val="400"/>
-              </a:spcAft>
-              <a:defRPr sz="1600">
-                <a:solidFill>
-                  <a:srgbClr val="333333"/>
-                </a:solidFill>
-              </a:defRPr>
-            </a:pPr>
-            <a:r>
-              <a:t>• Best practice</a:t>
             </a:r>
           </a:p>
         </p:txBody>
@@ -4016,7 +6463,7 @@
             <a:avLst/>
           </a:prstGeom>
           <a:solidFill>
-            <a:srgbClr val="FFFFFF"/>
+            <a:srgbClr val="FAFAFA"/>
           </a:solidFill>
           <a:ln>
             <a:noFill/>
@@ -4053,7 +6500,7 @@
         <p:spPr>
           <a:xfrm>
             <a:off x="0" y="0"/>
-            <a:ext cx="12191695" cy="137160"/>
+            <a:ext cx="12191695" cy="1097280"/>
           </a:xfrm>
           <a:prstGeom prst="rect">
             <a:avLst/>
@@ -4089,13 +6536,56 @@
       </p:sp>
       <p:sp>
         <p:nvSpPr>
-          <p:cNvPr id="4" name="TextBox 3"/>
+          <p:cNvPr id="4" name="Rectangle 3"/>
+          <p:cNvSpPr/>
+          <p:nvPr/>
+        </p:nvSpPr>
+        <p:spPr>
+          <a:xfrm>
+            <a:off x="0" y="1097280"/>
+            <a:ext cx="137160" cy="5760720"/>
+          </a:xfrm>
+          <a:prstGeom prst="rect">
+            <a:avLst/>
+          </a:prstGeom>
+          <a:solidFill>
+            <a:srgbClr val="FFBB33"/>
+          </a:solidFill>
+          <a:ln>
+            <a:noFill/>
+          </a:ln>
+        </p:spPr>
+        <p:style>
+          <a:lnRef idx="1">
+            <a:schemeClr val="accent1"/>
+          </a:lnRef>
+          <a:fillRef idx="3">
+            <a:schemeClr val="accent1"/>
+          </a:fillRef>
+          <a:effectRef idx="2">
+            <a:schemeClr val="accent1"/>
+          </a:effectRef>
+          <a:fontRef idx="minor">
+            <a:schemeClr val="lt1"/>
+          </a:fontRef>
+        </p:style>
+        <p:txBody>
+          <a:bodyPr rtlCol="0" anchor="ctr"/>
+          <a:lstStyle/>
+          <a:p>
+            <a:pPr algn="ctr"/>
+          </a:p>
+        </p:txBody>
+      </p:sp>
+      <p:sp>
+        <p:nvSpPr>
+          <p:cNvPr id="5" name="TextBox 4"/>
           <p:cNvSpPr txBox="1"/>
           <p:nvPr/>
         </p:nvSpPr>
         <p:spPr>
           <a:xfrm>
-            <a:off x="457200" y="320040"/>
+            <a:off x="365760" y="274320"/>
             <a:ext cx="10972800" cy="640080"/>
           </a:xfrm>
           <a:prstGeom prst="rect">
@@ -4112,7 +6602,7 @@
             <a:pPr>
               <a:defRPr sz="3600" b="1">
                 <a:solidFill>
-                  <a:srgbClr val="003366"/>
+                  <a:srgbClr val="FFFFFF"/>
                 </a:solidFill>
               </a:defRPr>
             </a:pPr>
@@ -4124,14 +6614,57 @@
       </p:sp>
       <p:sp>
         <p:nvSpPr>
-          <p:cNvPr id="5" name="TextBox 4"/>
+          <p:cNvPr id="6" name="Rectangle 5"/>
+          <p:cNvSpPr/>
+          <p:nvPr/>
+        </p:nvSpPr>
+        <p:spPr>
+          <a:xfrm>
+            <a:off x="365760" y="1325880"/>
+            <a:ext cx="11430000" cy="365760"/>
+          </a:xfrm>
+          <a:prstGeom prst="rect">
+            <a:avLst/>
+          </a:prstGeom>
+          <a:solidFill>
+            <a:srgbClr val="0078D7"/>
+          </a:solidFill>
+          <a:ln>
+            <a:noFill/>
+          </a:ln>
+        </p:spPr>
+        <p:style>
+          <a:lnRef idx="1">
+            <a:schemeClr val="accent1"/>
+          </a:lnRef>
+          <a:fillRef idx="3">
+            <a:schemeClr val="accent1"/>
+          </a:fillRef>
+          <a:effectRef idx="2">
+            <a:schemeClr val="accent1"/>
+          </a:effectRef>
+          <a:fontRef idx="minor">
+            <a:schemeClr val="lt1"/>
+          </a:fontRef>
+        </p:style>
+        <p:txBody>
+          <a:bodyPr rtlCol="0" anchor="ctr"/>
+          <a:lstStyle/>
+          <a:p>
+            <a:pPr algn="ctr"/>
+          </a:p>
+        </p:txBody>
+      </p:sp>
+      <p:sp>
+        <p:nvSpPr>
+          <p:cNvPr id="7" name="TextBox 6"/>
           <p:cNvSpPr txBox="1"/>
           <p:nvPr/>
         </p:nvSpPr>
         <p:spPr>
           <a:xfrm>
-            <a:off x="640080" y="1188720"/>
-            <a:ext cx="10789920" cy="5303520"/>
+            <a:off x="548640" y="1371600"/>
+            <a:ext cx="10972800" cy="274320"/>
           </a:xfrm>
           <a:prstGeom prst="rect">
             <a:avLst/>
@@ -4139,18 +6672,15 @@
           <a:noFill/>
         </p:spPr>
         <p:txBody>
-          <a:bodyPr wrap="square">
+          <a:bodyPr wrap="none">
             <a:spAutoFit/>
           </a:bodyPr>
           <a:lstStyle/>
           <a:p>
             <a:pPr>
-              <a:spcAft>
-                <a:spcPts val="600"/>
-              </a:spcAft>
-              <a:defRPr b="1" sz="2000">
-                <a:solidFill>
-                  <a:srgbClr val="333333"/>
+              <a:defRPr sz="2000" b="1">
+                <a:solidFill>
+                  <a:srgbClr val="FFFFFF"/>
                 </a:solidFill>
               </a:defRPr>
             </a:pPr>
@@ -4158,199 +6688,863 @@
               <a:t>Write Mode (Overwrites):</a:t>
             </a:r>
           </a:p>
+        </p:txBody>
+      </p:sp>
+      <p:sp>
+        <p:nvSpPr>
+          <p:cNvPr id="8" name="Rectangle 7"/>
+          <p:cNvSpPr/>
+          <p:nvPr/>
+        </p:nvSpPr>
+        <p:spPr>
+          <a:xfrm>
+            <a:off x="365760" y="1783080"/>
+            <a:ext cx="11430000" cy="365760"/>
+          </a:xfrm>
+          <a:prstGeom prst="rect">
+            <a:avLst/>
+          </a:prstGeom>
+          <a:solidFill>
+            <a:srgbClr val="0078D7"/>
+          </a:solidFill>
+          <a:ln>
+            <a:noFill/>
+          </a:ln>
+        </p:spPr>
+        <p:style>
+          <a:lnRef idx="1">
+            <a:schemeClr val="accent1"/>
+          </a:lnRef>
+          <a:fillRef idx="3">
+            <a:schemeClr val="accent1"/>
+          </a:fillRef>
+          <a:effectRef idx="2">
+            <a:schemeClr val="accent1"/>
+          </a:effectRef>
+          <a:fontRef idx="minor">
+            <a:schemeClr val="lt1"/>
+          </a:fontRef>
+        </p:style>
+        <p:txBody>
+          <a:bodyPr rtlCol="0" anchor="ctr"/>
+          <a:lstStyle/>
+          <a:p>
+            <a:pPr algn="ctr"/>
+          </a:p>
+        </p:txBody>
+      </p:sp>
+      <p:sp>
+        <p:nvSpPr>
+          <p:cNvPr id="9" name="TextBox 8"/>
+          <p:cNvSpPr txBox="1"/>
+          <p:nvPr/>
+        </p:nvSpPr>
+        <p:spPr>
+          <a:xfrm>
+            <a:off x="548640" y="1828800"/>
+            <a:ext cx="10972800" cy="274320"/>
+          </a:xfrm>
+          <a:prstGeom prst="rect">
+            <a:avLst/>
+          </a:prstGeom>
+          <a:noFill/>
+        </p:spPr>
+        <p:txBody>
+          <a:bodyPr wrap="none">
+            <a:spAutoFit/>
+          </a:bodyPr>
+          <a:lstStyle/>
+          <a:p>
+            <a:pPr>
+              <a:defRPr sz="2000" b="1">
+                <a:solidFill>
+                  <a:srgbClr val="FFFFFF"/>
+                </a:solidFill>
+              </a:defRPr>
+            </a:pPr>
+            <a:r>
+              <a:t>with open("file.txt", "w") as file:</a:t>
+            </a:r>
+          </a:p>
+        </p:txBody>
+      </p:sp>
+      <p:sp>
+        <p:nvSpPr>
+          <p:cNvPr id="10" name="Rectangle 9"/>
+          <p:cNvSpPr/>
+          <p:nvPr/>
+        </p:nvSpPr>
+        <p:spPr>
+          <a:xfrm>
+            <a:off x="640080" y="2240280"/>
+            <a:ext cx="10789920" cy="640080"/>
+          </a:xfrm>
+          <a:prstGeom prst="rect">
+            <a:avLst/>
+          </a:prstGeom>
+          <a:solidFill>
+            <a:srgbClr val="282C34"/>
+          </a:solidFill>
+          <a:ln>
+            <a:noFill/>
+          </a:ln>
+        </p:spPr>
+        <p:style>
+          <a:lnRef idx="1">
+            <a:schemeClr val="accent1"/>
+          </a:lnRef>
+          <a:fillRef idx="3">
+            <a:schemeClr val="accent1"/>
+          </a:fillRef>
+          <a:effectRef idx="2">
+            <a:schemeClr val="accent1"/>
+          </a:effectRef>
+          <a:fontRef idx="minor">
+            <a:schemeClr val="lt1"/>
+          </a:fontRef>
+        </p:style>
+        <p:txBody>
+          <a:bodyPr rtlCol="0" anchor="ctr"/>
+          <a:lstStyle/>
+          <a:p>
+            <a:pPr algn="ctr"/>
+          </a:p>
+        </p:txBody>
+      </p:sp>
+      <p:sp>
+        <p:nvSpPr>
+          <p:cNvPr id="11" name="Rectangle 10"/>
+          <p:cNvSpPr/>
+          <p:nvPr/>
+        </p:nvSpPr>
+        <p:spPr>
+          <a:xfrm>
+            <a:off x="640080" y="2240280"/>
+            <a:ext cx="73152" cy="640080"/>
+          </a:xfrm>
+          <a:prstGeom prst="rect">
+            <a:avLst/>
+          </a:prstGeom>
+          <a:solidFill>
+            <a:srgbClr val="61AFEF"/>
+          </a:solidFill>
+          <a:ln>
+            <a:noFill/>
+          </a:ln>
+        </p:spPr>
+        <p:style>
+          <a:lnRef idx="1">
+            <a:schemeClr val="accent1"/>
+          </a:lnRef>
+          <a:fillRef idx="3">
+            <a:schemeClr val="accent1"/>
+          </a:fillRef>
+          <a:effectRef idx="2">
+            <a:schemeClr val="accent1"/>
+          </a:effectRef>
+          <a:fontRef idx="minor">
+            <a:schemeClr val="lt1"/>
+          </a:fontRef>
+        </p:style>
+        <p:txBody>
+          <a:bodyPr rtlCol="0" anchor="ctr"/>
+          <a:lstStyle/>
+          <a:p>
+            <a:pPr algn="ctr"/>
+          </a:p>
+        </p:txBody>
+      </p:sp>
+      <p:sp>
+        <p:nvSpPr>
+          <p:cNvPr id="12" name="TextBox 11"/>
+          <p:cNvSpPr txBox="1"/>
+          <p:nvPr/>
+        </p:nvSpPr>
+        <p:spPr>
+          <a:xfrm>
+            <a:off x="914400" y="2286000"/>
+            <a:ext cx="10241280" cy="548640"/>
+          </a:xfrm>
+          <a:prstGeom prst="rect">
+            <a:avLst/>
+          </a:prstGeom>
+          <a:noFill/>
+        </p:spPr>
+        <p:txBody>
+          <a:bodyPr wrap="none">
+            <a:spAutoFit/>
+          </a:bodyPr>
+          <a:lstStyle/>
           <a:p>
             <a:pPr>
               <a:spcAft>
-                <a:spcPts val="600"/>
+                <a:spcPts val="200"/>
               </a:spcAft>
-              <a:defRPr b="1" sz="2000">
-                <a:solidFill>
-                  <a:srgbClr val="333333"/>
-                </a:solidFill>
+              <a:defRPr sz="1400">
+                <a:solidFill>
+                  <a:srgbClr val="ABB2BF"/>
+                </a:solidFill>
+                <a:latin typeface="Consolas"/>
               </a:defRPr>
             </a:pPr>
             <a:r>
-              <a:t>with open("file.txt", "w") as file:</a:t>
+              <a:t>    file.write("Hello\n")</a:t>
             </a:r>
           </a:p>
           <a:p>
             <a:pPr>
               <a:spcAft>
-                <a:spcPts val="600"/>
+                <a:spcPts val="200"/>
               </a:spcAft>
-              <a:defRPr sz="1600">
-                <a:solidFill>
-                  <a:srgbClr val="333333"/>
-                </a:solidFill>
+              <a:defRPr sz="1400">
+                <a:solidFill>
+                  <a:srgbClr val="ABB2BF"/>
+                </a:solidFill>
+                <a:latin typeface="Consolas"/>
               </a:defRPr>
             </a:pPr>
             <a:r>
-              <a:t>    file.write("Hello\n")</a:t>
-            </a:r>
-          </a:p>
+              <a:t>    file.write("World\n")</a:t>
+            </a:r>
+          </a:p>
+        </p:txBody>
+      </p:sp>
+      <p:sp>
+        <p:nvSpPr>
+          <p:cNvPr id="13" name="Rectangle 12"/>
+          <p:cNvSpPr/>
+          <p:nvPr/>
+        </p:nvSpPr>
+        <p:spPr>
+          <a:xfrm>
+            <a:off x="365760" y="3017520"/>
+            <a:ext cx="11430000" cy="365760"/>
+          </a:xfrm>
+          <a:prstGeom prst="rect">
+            <a:avLst/>
+          </a:prstGeom>
+          <a:solidFill>
+            <a:srgbClr val="0078D7"/>
+          </a:solidFill>
+          <a:ln>
+            <a:noFill/>
+          </a:ln>
+        </p:spPr>
+        <p:style>
+          <a:lnRef idx="1">
+            <a:schemeClr val="accent1"/>
+          </a:lnRef>
+          <a:fillRef idx="3">
+            <a:schemeClr val="accent1"/>
+          </a:fillRef>
+          <a:effectRef idx="2">
+            <a:schemeClr val="accent1"/>
+          </a:effectRef>
+          <a:fontRef idx="minor">
+            <a:schemeClr val="lt1"/>
+          </a:fontRef>
+        </p:style>
+        <p:txBody>
+          <a:bodyPr rtlCol="0" anchor="ctr"/>
+          <a:lstStyle/>
+          <a:p>
+            <a:pPr algn="ctr"/>
+          </a:p>
+        </p:txBody>
+      </p:sp>
+      <p:sp>
+        <p:nvSpPr>
+          <p:cNvPr id="14" name="TextBox 13"/>
+          <p:cNvSpPr txBox="1"/>
+          <p:nvPr/>
+        </p:nvSpPr>
+        <p:spPr>
+          <a:xfrm>
+            <a:off x="548640" y="3063240"/>
+            <a:ext cx="10972800" cy="274320"/>
+          </a:xfrm>
+          <a:prstGeom prst="rect">
+            <a:avLst/>
+          </a:prstGeom>
+          <a:noFill/>
+        </p:spPr>
+        <p:txBody>
+          <a:bodyPr wrap="none">
+            <a:spAutoFit/>
+          </a:bodyPr>
+          <a:lstStyle/>
+          <a:p>
+            <a:pPr>
+              <a:defRPr sz="2000" b="1">
+                <a:solidFill>
+                  <a:srgbClr val="FFFFFF"/>
+                </a:solidFill>
+              </a:defRPr>
+            </a:pPr>
+            <a:r>
+              <a:t>Append Mode (Adds to End):</a:t>
+            </a:r>
+          </a:p>
+        </p:txBody>
+      </p:sp>
+      <p:sp>
+        <p:nvSpPr>
+          <p:cNvPr id="15" name="Rectangle 14"/>
+          <p:cNvSpPr/>
+          <p:nvPr/>
+        </p:nvSpPr>
+        <p:spPr>
+          <a:xfrm>
+            <a:off x="365760" y="3474720"/>
+            <a:ext cx="11430000" cy="365760"/>
+          </a:xfrm>
+          <a:prstGeom prst="rect">
+            <a:avLst/>
+          </a:prstGeom>
+          <a:solidFill>
+            <a:srgbClr val="0078D7"/>
+          </a:solidFill>
+          <a:ln>
+            <a:noFill/>
+          </a:ln>
+        </p:spPr>
+        <p:style>
+          <a:lnRef idx="1">
+            <a:schemeClr val="accent1"/>
+          </a:lnRef>
+          <a:fillRef idx="3">
+            <a:schemeClr val="accent1"/>
+          </a:fillRef>
+          <a:effectRef idx="2">
+            <a:schemeClr val="accent1"/>
+          </a:effectRef>
+          <a:fontRef idx="minor">
+            <a:schemeClr val="lt1"/>
+          </a:fontRef>
+        </p:style>
+        <p:txBody>
+          <a:bodyPr rtlCol="0" anchor="ctr"/>
+          <a:lstStyle/>
+          <a:p>
+            <a:pPr algn="ctr"/>
+          </a:p>
+        </p:txBody>
+      </p:sp>
+      <p:sp>
+        <p:nvSpPr>
+          <p:cNvPr id="16" name="TextBox 15"/>
+          <p:cNvSpPr txBox="1"/>
+          <p:nvPr/>
+        </p:nvSpPr>
+        <p:spPr>
+          <a:xfrm>
+            <a:off x="548640" y="3520440"/>
+            <a:ext cx="10972800" cy="274320"/>
+          </a:xfrm>
+          <a:prstGeom prst="rect">
+            <a:avLst/>
+          </a:prstGeom>
+          <a:noFill/>
+        </p:spPr>
+        <p:txBody>
+          <a:bodyPr wrap="none">
+            <a:spAutoFit/>
+          </a:bodyPr>
+          <a:lstStyle/>
+          <a:p>
+            <a:pPr>
+              <a:defRPr sz="2000" b="1">
+                <a:solidFill>
+                  <a:srgbClr val="FFFFFF"/>
+                </a:solidFill>
+              </a:defRPr>
+            </a:pPr>
+            <a:r>
+              <a:t>with open("file.txt", "a") as file:</a:t>
+            </a:r>
+          </a:p>
+        </p:txBody>
+      </p:sp>
+      <p:sp>
+        <p:nvSpPr>
+          <p:cNvPr id="17" name="Rectangle 16"/>
+          <p:cNvSpPr/>
+          <p:nvPr/>
+        </p:nvSpPr>
+        <p:spPr>
+          <a:xfrm>
+            <a:off x="640080" y="3931920"/>
+            <a:ext cx="10789920" cy="411480"/>
+          </a:xfrm>
+          <a:prstGeom prst="rect">
+            <a:avLst/>
+          </a:prstGeom>
+          <a:solidFill>
+            <a:srgbClr val="282C34"/>
+          </a:solidFill>
+          <a:ln>
+            <a:noFill/>
+          </a:ln>
+        </p:spPr>
+        <p:style>
+          <a:lnRef idx="1">
+            <a:schemeClr val="accent1"/>
+          </a:lnRef>
+          <a:fillRef idx="3">
+            <a:schemeClr val="accent1"/>
+          </a:fillRef>
+          <a:effectRef idx="2">
+            <a:schemeClr val="accent1"/>
+          </a:effectRef>
+          <a:fontRef idx="minor">
+            <a:schemeClr val="lt1"/>
+          </a:fontRef>
+        </p:style>
+        <p:txBody>
+          <a:bodyPr rtlCol="0" anchor="ctr"/>
+          <a:lstStyle/>
+          <a:p>
+            <a:pPr algn="ctr"/>
+          </a:p>
+        </p:txBody>
+      </p:sp>
+      <p:sp>
+        <p:nvSpPr>
+          <p:cNvPr id="18" name="Rectangle 17"/>
+          <p:cNvSpPr/>
+          <p:nvPr/>
+        </p:nvSpPr>
+        <p:spPr>
+          <a:xfrm>
+            <a:off x="640080" y="3931920"/>
+            <a:ext cx="73152" cy="411480"/>
+          </a:xfrm>
+          <a:prstGeom prst="rect">
+            <a:avLst/>
+          </a:prstGeom>
+          <a:solidFill>
+            <a:srgbClr val="61AFEF"/>
+          </a:solidFill>
+          <a:ln>
+            <a:noFill/>
+          </a:ln>
+        </p:spPr>
+        <p:style>
+          <a:lnRef idx="1">
+            <a:schemeClr val="accent1"/>
+          </a:lnRef>
+          <a:fillRef idx="3">
+            <a:schemeClr val="accent1"/>
+          </a:fillRef>
+          <a:effectRef idx="2">
+            <a:schemeClr val="accent1"/>
+          </a:effectRef>
+          <a:fontRef idx="minor">
+            <a:schemeClr val="lt1"/>
+          </a:fontRef>
+        </p:style>
+        <p:txBody>
+          <a:bodyPr rtlCol="0" anchor="ctr"/>
+          <a:lstStyle/>
+          <a:p>
+            <a:pPr algn="ctr"/>
+          </a:p>
+        </p:txBody>
+      </p:sp>
+      <p:sp>
+        <p:nvSpPr>
+          <p:cNvPr id="19" name="TextBox 18"/>
+          <p:cNvSpPr txBox="1"/>
+          <p:nvPr/>
+        </p:nvSpPr>
+        <p:spPr>
+          <a:xfrm>
+            <a:off x="914400" y="3977639"/>
+            <a:ext cx="10241280" cy="320040"/>
+          </a:xfrm>
+          <a:prstGeom prst="rect">
+            <a:avLst/>
+          </a:prstGeom>
+          <a:noFill/>
+        </p:spPr>
+        <p:txBody>
+          <a:bodyPr wrap="none">
+            <a:spAutoFit/>
+          </a:bodyPr>
+          <a:lstStyle/>
           <a:p>
             <a:pPr>
               <a:spcAft>
-                <a:spcPts val="600"/>
+                <a:spcPts val="200"/>
               </a:spcAft>
-              <a:defRPr sz="1600">
-                <a:solidFill>
-                  <a:srgbClr val="333333"/>
-                </a:solidFill>
+              <a:defRPr sz="1400">
+                <a:solidFill>
+                  <a:srgbClr val="ABB2BF"/>
+                </a:solidFill>
+                <a:latin typeface="Consolas"/>
               </a:defRPr>
             </a:pPr>
             <a:r>
-              <a:t>    file.write("World\n")</a:t>
-            </a:r>
-          </a:p>
+              <a:t>    file.write("New line\n")</a:t>
+            </a:r>
+          </a:p>
+        </p:txBody>
+      </p:sp>
+      <p:sp>
+        <p:nvSpPr>
+          <p:cNvPr id="20" name="Rectangle 19"/>
+          <p:cNvSpPr/>
+          <p:nvPr/>
+        </p:nvSpPr>
+        <p:spPr>
+          <a:xfrm>
+            <a:off x="365760" y="4480560"/>
+            <a:ext cx="11430000" cy="365760"/>
+          </a:xfrm>
+          <a:prstGeom prst="rect">
+            <a:avLst/>
+          </a:prstGeom>
+          <a:solidFill>
+            <a:srgbClr val="0078D7"/>
+          </a:solidFill>
+          <a:ln>
+            <a:noFill/>
+          </a:ln>
+        </p:spPr>
+        <p:style>
+          <a:lnRef idx="1">
+            <a:schemeClr val="accent1"/>
+          </a:lnRef>
+          <a:fillRef idx="3">
+            <a:schemeClr val="accent1"/>
+          </a:fillRef>
+          <a:effectRef idx="2">
+            <a:schemeClr val="accent1"/>
+          </a:effectRef>
+          <a:fontRef idx="minor">
+            <a:schemeClr val="lt1"/>
+          </a:fontRef>
+        </p:style>
+        <p:txBody>
+          <a:bodyPr rtlCol="0" anchor="ctr"/>
+          <a:lstStyle/>
+          <a:p>
+            <a:pPr algn="ctr"/>
+          </a:p>
+        </p:txBody>
+      </p:sp>
+      <p:sp>
+        <p:nvSpPr>
+          <p:cNvPr id="21" name="TextBox 20"/>
+          <p:cNvSpPr txBox="1"/>
+          <p:nvPr/>
+        </p:nvSpPr>
+        <p:spPr>
+          <a:xfrm>
+            <a:off x="548640" y="4526280"/>
+            <a:ext cx="10972800" cy="274320"/>
+          </a:xfrm>
+          <a:prstGeom prst="rect">
+            <a:avLst/>
+          </a:prstGeom>
+          <a:noFill/>
+        </p:spPr>
+        <p:txBody>
+          <a:bodyPr wrap="none">
+            <a:spAutoFit/>
+          </a:bodyPr>
+          <a:lstStyle/>
+          <a:p>
+            <a:pPr>
+              <a:defRPr sz="2000" b="1">
+                <a:solidFill>
+                  <a:srgbClr val="FFFFFF"/>
+                </a:solidFill>
+              </a:defRPr>
+            </a:pPr>
+            <a:r>
+              <a:t>Write Multiple Lines:</a:t>
+            </a:r>
+          </a:p>
+        </p:txBody>
+      </p:sp>
+      <p:sp>
+        <p:nvSpPr>
+          <p:cNvPr id="22" name="Rectangle 21"/>
+          <p:cNvSpPr/>
+          <p:nvPr/>
+        </p:nvSpPr>
+        <p:spPr>
+          <a:xfrm>
+            <a:off x="640080" y="4937760"/>
+            <a:ext cx="10789920" cy="411480"/>
+          </a:xfrm>
+          <a:prstGeom prst="rect">
+            <a:avLst/>
+          </a:prstGeom>
+          <a:solidFill>
+            <a:srgbClr val="282C34"/>
+          </a:solidFill>
+          <a:ln>
+            <a:noFill/>
+          </a:ln>
+        </p:spPr>
+        <p:style>
+          <a:lnRef idx="1">
+            <a:schemeClr val="accent1"/>
+          </a:lnRef>
+          <a:fillRef idx="3">
+            <a:schemeClr val="accent1"/>
+          </a:fillRef>
+          <a:effectRef idx="2">
+            <a:schemeClr val="accent1"/>
+          </a:effectRef>
+          <a:fontRef idx="minor">
+            <a:schemeClr val="lt1"/>
+          </a:fontRef>
+        </p:style>
+        <p:txBody>
+          <a:bodyPr rtlCol="0" anchor="ctr"/>
+          <a:lstStyle/>
+          <a:p>
+            <a:pPr algn="ctr"/>
+          </a:p>
+        </p:txBody>
+      </p:sp>
+      <p:sp>
+        <p:nvSpPr>
+          <p:cNvPr id="23" name="Rectangle 22"/>
+          <p:cNvSpPr/>
+          <p:nvPr/>
+        </p:nvSpPr>
+        <p:spPr>
+          <a:xfrm>
+            <a:off x="640080" y="4937760"/>
+            <a:ext cx="73152" cy="411480"/>
+          </a:xfrm>
+          <a:prstGeom prst="rect">
+            <a:avLst/>
+          </a:prstGeom>
+          <a:solidFill>
+            <a:srgbClr val="61AFEF"/>
+          </a:solidFill>
+          <a:ln>
+            <a:noFill/>
+          </a:ln>
+        </p:spPr>
+        <p:style>
+          <a:lnRef idx="1">
+            <a:schemeClr val="accent1"/>
+          </a:lnRef>
+          <a:fillRef idx="3">
+            <a:schemeClr val="accent1"/>
+          </a:fillRef>
+          <a:effectRef idx="2">
+            <a:schemeClr val="accent1"/>
+          </a:effectRef>
+          <a:fontRef idx="minor">
+            <a:schemeClr val="lt1"/>
+          </a:fontRef>
+        </p:style>
+        <p:txBody>
+          <a:bodyPr rtlCol="0" anchor="ctr"/>
+          <a:lstStyle/>
+          <a:p>
+            <a:pPr algn="ctr"/>
+          </a:p>
+        </p:txBody>
+      </p:sp>
+      <p:sp>
+        <p:nvSpPr>
+          <p:cNvPr id="24" name="TextBox 23"/>
+          <p:cNvSpPr txBox="1"/>
+          <p:nvPr/>
+        </p:nvSpPr>
+        <p:spPr>
+          <a:xfrm>
+            <a:off x="914400" y="4983480"/>
+            <a:ext cx="10241280" cy="320040"/>
+          </a:xfrm>
+          <a:prstGeom prst="rect">
+            <a:avLst/>
+          </a:prstGeom>
+          <a:noFill/>
+        </p:spPr>
+        <p:txBody>
+          <a:bodyPr wrap="none">
+            <a:spAutoFit/>
+          </a:bodyPr>
+          <a:lstStyle/>
           <a:p>
             <a:pPr>
               <a:spcAft>
-                <a:spcPts val="600"/>
+                <a:spcPts val="200"/>
               </a:spcAft>
-              <a:defRPr b="1" sz="2000">
-                <a:solidFill>
-                  <a:srgbClr val="333333"/>
-                </a:solidFill>
+              <a:defRPr sz="1400">
+                <a:solidFill>
+                  <a:srgbClr val="ABB2BF"/>
+                </a:solidFill>
+                <a:latin typeface="Consolas"/>
               </a:defRPr>
             </a:pPr>
             <a:r>
-              <a:t>Append Mode (Adds to End):</a:t>
-            </a:r>
-          </a:p>
+              <a:t>lines = ["Line 1\n", "Line 2\n"]</a:t>
+            </a:r>
+          </a:p>
+        </p:txBody>
+      </p:sp>
+      <p:sp>
+        <p:nvSpPr>
+          <p:cNvPr id="25" name="Rectangle 24"/>
+          <p:cNvSpPr/>
+          <p:nvPr/>
+        </p:nvSpPr>
+        <p:spPr>
+          <a:xfrm>
+            <a:off x="365760" y="5486400"/>
+            <a:ext cx="11430000" cy="365760"/>
+          </a:xfrm>
+          <a:prstGeom prst="rect">
+            <a:avLst/>
+          </a:prstGeom>
+          <a:solidFill>
+            <a:srgbClr val="0078D7"/>
+          </a:solidFill>
+          <a:ln>
+            <a:noFill/>
+          </a:ln>
+        </p:spPr>
+        <p:style>
+          <a:lnRef idx="1">
+            <a:schemeClr val="accent1"/>
+          </a:lnRef>
+          <a:fillRef idx="3">
+            <a:schemeClr val="accent1"/>
+          </a:fillRef>
+          <a:effectRef idx="2">
+            <a:schemeClr val="accent1"/>
+          </a:effectRef>
+          <a:fontRef idx="minor">
+            <a:schemeClr val="lt1"/>
+          </a:fontRef>
+        </p:style>
+        <p:txBody>
+          <a:bodyPr rtlCol="0" anchor="ctr"/>
+          <a:lstStyle/>
+          <a:p>
+            <a:pPr algn="ctr"/>
+          </a:p>
+        </p:txBody>
+      </p:sp>
+      <p:sp>
+        <p:nvSpPr>
+          <p:cNvPr id="26" name="TextBox 25"/>
+          <p:cNvSpPr txBox="1"/>
+          <p:nvPr/>
+        </p:nvSpPr>
+        <p:spPr>
+          <a:xfrm>
+            <a:off x="548640" y="5532120"/>
+            <a:ext cx="10972800" cy="274320"/>
+          </a:xfrm>
+          <a:prstGeom prst="rect">
+            <a:avLst/>
+          </a:prstGeom>
+          <a:noFill/>
+        </p:spPr>
+        <p:txBody>
+          <a:bodyPr wrap="none">
+            <a:spAutoFit/>
+          </a:bodyPr>
+          <a:lstStyle/>
           <a:p>
             <a:pPr>
-              <a:spcAft>
-                <a:spcPts val="600"/>
-              </a:spcAft>
-              <a:defRPr b="1" sz="2000">
-                <a:solidFill>
-                  <a:srgbClr val="333333"/>
+              <a:defRPr sz="2000" b="1">
+                <a:solidFill>
+                  <a:srgbClr val="FFFFFF"/>
                 </a:solidFill>
               </a:defRPr>
             </a:pPr>
             <a:r>
-              <a:t>with open("file.txt", "a") as file:</a:t>
-            </a:r>
-          </a:p>
+              <a:t>with open("file.txt", "w") as file:</a:t>
+            </a:r>
+          </a:p>
+        </p:txBody>
+      </p:sp>
+      <p:sp>
+        <p:nvSpPr>
+          <p:cNvPr id="27" name="Rectangle 26"/>
+          <p:cNvSpPr/>
+          <p:nvPr/>
+        </p:nvSpPr>
+        <p:spPr>
+          <a:xfrm>
+            <a:off x="365760" y="5943600"/>
+            <a:ext cx="11430000" cy="365760"/>
+          </a:xfrm>
+          <a:prstGeom prst="rect">
+            <a:avLst/>
+          </a:prstGeom>
+          <a:solidFill>
+            <a:srgbClr val="0078D7"/>
+          </a:solidFill>
+          <a:ln>
+            <a:noFill/>
+          </a:ln>
+        </p:spPr>
+        <p:style>
+          <a:lnRef idx="1">
+            <a:schemeClr val="accent1"/>
+          </a:lnRef>
+          <a:fillRef idx="3">
+            <a:schemeClr val="accent1"/>
+          </a:fillRef>
+          <a:effectRef idx="2">
+            <a:schemeClr val="accent1"/>
+          </a:effectRef>
+          <a:fontRef idx="minor">
+            <a:schemeClr val="lt1"/>
+          </a:fontRef>
+        </p:style>
+        <p:txBody>
+          <a:bodyPr rtlCol="0" anchor="ctr"/>
+          <a:lstStyle/>
+          <a:p>
+            <a:pPr algn="ctr"/>
+          </a:p>
+        </p:txBody>
+      </p:sp>
+      <p:sp>
+        <p:nvSpPr>
+          <p:cNvPr id="28" name="TextBox 27"/>
+          <p:cNvSpPr txBox="1"/>
+          <p:nvPr/>
+        </p:nvSpPr>
+        <p:spPr>
+          <a:xfrm>
+            <a:off x="548640" y="5989320"/>
+            <a:ext cx="10972800" cy="274320"/>
+          </a:xfrm>
+          <a:prstGeom prst="rect">
+            <a:avLst/>
+          </a:prstGeom>
+          <a:noFill/>
+        </p:spPr>
+        <p:txBody>
+          <a:bodyPr wrap="none">
+            <a:spAutoFit/>
+          </a:bodyPr>
+          <a:lstStyle/>
           <a:p>
             <a:pPr>
-              <a:spcAft>
-                <a:spcPts val="600"/>
-              </a:spcAft>
-              <a:defRPr sz="1600">
-                <a:solidFill>
-                  <a:srgbClr val="333333"/>
+              <a:defRPr sz="2000" b="1">
+                <a:solidFill>
+                  <a:srgbClr val="FFFFFF"/>
                 </a:solidFill>
               </a:defRPr>
             </a:pPr>
             <a:r>
-              <a:t>    file.write("New line\n")</a:t>
-            </a:r>
-          </a:p>
-          <a:p>
-            <a:pPr>
-              <a:spcAft>
-                <a:spcPts val="600"/>
-              </a:spcAft>
-              <a:defRPr b="1" sz="2000">
-                <a:solidFill>
-                  <a:srgbClr val="333333"/>
-                </a:solidFill>
-              </a:defRPr>
-            </a:pPr>
-            <a:r>
-              <a:t>Write Multiple Lines:</a:t>
-            </a:r>
-          </a:p>
-          <a:p>
-            <a:pPr>
-              <a:spcAft>
-                <a:spcPts val="600"/>
-              </a:spcAft>
-              <a:defRPr sz="1600">
-                <a:solidFill>
-                  <a:srgbClr val="333333"/>
-                </a:solidFill>
-              </a:defRPr>
-            </a:pPr>
-            <a:r>
-              <a:t>lines = ["Line 1\n", "Line 2\n"]</a:t>
-            </a:r>
-          </a:p>
-          <a:p>
-            <a:pPr>
-              <a:spcAft>
-                <a:spcPts val="600"/>
-              </a:spcAft>
-              <a:defRPr b="1" sz="2000">
-                <a:solidFill>
-                  <a:srgbClr val="333333"/>
-                </a:solidFill>
-              </a:defRPr>
-            </a:pPr>
-            <a:r>
-              <a:t>with open("file.txt", "w") as file:</a:t>
-            </a:r>
-          </a:p>
-          <a:p>
-            <a:pPr>
-              <a:spcAft>
-                <a:spcPts val="600"/>
-              </a:spcAft>
-              <a:defRPr sz="1600">
-                <a:solidFill>
-                  <a:srgbClr val="333333"/>
-                </a:solidFill>
-              </a:defRPr>
-            </a:pPr>
-            <a:r>
-              <a:t>    file.writelines(lines)</a:t>
-            </a:r>
-          </a:p>
-          <a:p>
-            <a:pPr>
-              <a:spcAft>
-                <a:spcPts val="600"/>
-              </a:spcAft>
-              <a:defRPr b="1" sz="2000">
-                <a:solidFill>
-                  <a:srgbClr val="333333"/>
-                </a:solidFill>
-              </a:defRPr>
-            </a:pPr>
-            <a:r>
               <a:t>Using print():</a:t>
-            </a:r>
-          </a:p>
-          <a:p>
-            <a:pPr>
-              <a:spcAft>
-                <a:spcPts val="600"/>
-              </a:spcAft>
-              <a:defRPr b="1" sz="2000">
-                <a:solidFill>
-                  <a:srgbClr val="333333"/>
-                </a:solidFill>
-              </a:defRPr>
-            </a:pPr>
-            <a:r>
-              <a:t>with open("file.txt", "w") as file:</a:t>
-            </a:r>
-          </a:p>
-          <a:p>
-            <a:pPr>
-              <a:spcAft>
-                <a:spcPts val="600"/>
-              </a:spcAft>
-              <a:defRPr sz="1600">
-                <a:solidFill>
-                  <a:srgbClr val="333333"/>
-                </a:solidFill>
-              </a:defRPr>
-            </a:pPr>
-            <a:r>
-              <a:t>    print("Hello", file=file)</a:t>
             </a:r>
           </a:p>
         </p:txBody>
@@ -4388,7 +7582,7 @@
             <a:avLst/>
           </a:prstGeom>
           <a:solidFill>
-            <a:srgbClr val="FFFFFF"/>
+            <a:srgbClr val="FAFAFA"/>
           </a:solidFill>
           <a:ln>
             <a:noFill/>
@@ -4425,7 +7619,7 @@
         <p:spPr>
           <a:xfrm>
             <a:off x="0" y="0"/>
-            <a:ext cx="12191695" cy="137160"/>
+            <a:ext cx="12191695" cy="1097280"/>
           </a:xfrm>
           <a:prstGeom prst="rect">
             <a:avLst/>
@@ -4461,13 +7655,56 @@
       </p:sp>
       <p:sp>
         <p:nvSpPr>
-          <p:cNvPr id="4" name="TextBox 3"/>
+          <p:cNvPr id="4" name="Rectangle 3"/>
+          <p:cNvSpPr/>
+          <p:nvPr/>
+        </p:nvSpPr>
+        <p:spPr>
+          <a:xfrm>
+            <a:off x="0" y="1097280"/>
+            <a:ext cx="137160" cy="5760720"/>
+          </a:xfrm>
+          <a:prstGeom prst="rect">
+            <a:avLst/>
+          </a:prstGeom>
+          <a:solidFill>
+            <a:srgbClr val="FFBB33"/>
+          </a:solidFill>
+          <a:ln>
+            <a:noFill/>
+          </a:ln>
+        </p:spPr>
+        <p:style>
+          <a:lnRef idx="1">
+            <a:schemeClr val="accent1"/>
+          </a:lnRef>
+          <a:fillRef idx="3">
+            <a:schemeClr val="accent1"/>
+          </a:fillRef>
+          <a:effectRef idx="2">
+            <a:schemeClr val="accent1"/>
+          </a:effectRef>
+          <a:fontRef idx="minor">
+            <a:schemeClr val="lt1"/>
+          </a:fontRef>
+        </p:style>
+        <p:txBody>
+          <a:bodyPr rtlCol="0" anchor="ctr"/>
+          <a:lstStyle/>
+          <a:p>
+            <a:pPr algn="ctr"/>
+          </a:p>
+        </p:txBody>
+      </p:sp>
+      <p:sp>
+        <p:nvSpPr>
+          <p:cNvPr id="5" name="TextBox 4"/>
           <p:cNvSpPr txBox="1"/>
           <p:nvPr/>
         </p:nvSpPr>
         <p:spPr>
           <a:xfrm>
-            <a:off x="457200" y="320040"/>
+            <a:off x="365760" y="274320"/>
             <a:ext cx="10972800" cy="640080"/>
           </a:xfrm>
           <a:prstGeom prst="rect">
@@ -4484,7 +7721,7 @@
             <a:pPr>
               <a:defRPr sz="3600" b="1">
                 <a:solidFill>
-                  <a:srgbClr val="003366"/>
+                  <a:srgbClr val="FFFFFF"/>
                 </a:solidFill>
               </a:defRPr>
             </a:pPr>
@@ -4496,14 +7733,57 @@
       </p:sp>
       <p:sp>
         <p:nvSpPr>
-          <p:cNvPr id="5" name="TextBox 4"/>
+          <p:cNvPr id="6" name="Rectangle 5"/>
+          <p:cNvSpPr/>
+          <p:nvPr/>
+        </p:nvSpPr>
+        <p:spPr>
+          <a:xfrm>
+            <a:off x="365760" y="1325880"/>
+            <a:ext cx="11430000" cy="365760"/>
+          </a:xfrm>
+          <a:prstGeom prst="rect">
+            <a:avLst/>
+          </a:prstGeom>
+          <a:solidFill>
+            <a:srgbClr val="0078D7"/>
+          </a:solidFill>
+          <a:ln>
+            <a:noFill/>
+          </a:ln>
+        </p:spPr>
+        <p:style>
+          <a:lnRef idx="1">
+            <a:schemeClr val="accent1"/>
+          </a:lnRef>
+          <a:fillRef idx="3">
+            <a:schemeClr val="accent1"/>
+          </a:fillRef>
+          <a:effectRef idx="2">
+            <a:schemeClr val="accent1"/>
+          </a:effectRef>
+          <a:fontRef idx="minor">
+            <a:schemeClr val="lt1"/>
+          </a:fontRef>
+        </p:style>
+        <p:txBody>
+          <a:bodyPr rtlCol="0" anchor="ctr"/>
+          <a:lstStyle/>
+          <a:p>
+            <a:pPr algn="ctr"/>
+          </a:p>
+        </p:txBody>
+      </p:sp>
+      <p:sp>
+        <p:nvSpPr>
+          <p:cNvPr id="7" name="TextBox 6"/>
           <p:cNvSpPr txBox="1"/>
           <p:nvPr/>
         </p:nvSpPr>
         <p:spPr>
           <a:xfrm>
-            <a:off x="640080" y="1188720"/>
-            <a:ext cx="10789920" cy="5303520"/>
+            <a:off x="548640" y="1371600"/>
+            <a:ext cx="10972800" cy="274320"/>
           </a:xfrm>
           <a:prstGeom prst="rect">
             <a:avLst/>
@@ -4511,18 +7791,15 @@
           <a:noFill/>
         </p:spPr>
         <p:txBody>
-          <a:bodyPr wrap="square">
+          <a:bodyPr wrap="none">
             <a:spAutoFit/>
           </a:bodyPr>
           <a:lstStyle/>
           <a:p>
             <a:pPr>
-              <a:spcAft>
-                <a:spcPts val="600"/>
-              </a:spcAft>
-              <a:defRPr b="1" sz="2000">
-                <a:solidFill>
-                  <a:srgbClr val="333333"/>
+              <a:defRPr sz="2000" b="1">
+                <a:solidFill>
+                  <a:srgbClr val="FFFFFF"/>
                 </a:solidFill>
               </a:defRPr>
             </a:pPr>
@@ -4530,229 +7807,755 @@
               <a:t>Reading CSV:</a:t>
             </a:r>
           </a:p>
+        </p:txBody>
+      </p:sp>
+      <p:sp>
+        <p:nvSpPr>
+          <p:cNvPr id="8" name="Rectangle 7"/>
+          <p:cNvSpPr/>
+          <p:nvPr/>
+        </p:nvSpPr>
+        <p:spPr>
+          <a:xfrm>
+            <a:off x="640080" y="1783080"/>
+            <a:ext cx="10789920" cy="411480"/>
+          </a:xfrm>
+          <a:prstGeom prst="rect">
+            <a:avLst/>
+          </a:prstGeom>
+          <a:solidFill>
+            <a:srgbClr val="282C34"/>
+          </a:solidFill>
+          <a:ln>
+            <a:noFill/>
+          </a:ln>
+        </p:spPr>
+        <p:style>
+          <a:lnRef idx="1">
+            <a:schemeClr val="accent1"/>
+          </a:lnRef>
+          <a:fillRef idx="3">
+            <a:schemeClr val="accent1"/>
+          </a:fillRef>
+          <a:effectRef idx="2">
+            <a:schemeClr val="accent1"/>
+          </a:effectRef>
+          <a:fontRef idx="minor">
+            <a:schemeClr val="lt1"/>
+          </a:fontRef>
+        </p:style>
+        <p:txBody>
+          <a:bodyPr rtlCol="0" anchor="ctr"/>
+          <a:lstStyle/>
+          <a:p>
+            <a:pPr algn="ctr"/>
+          </a:p>
+        </p:txBody>
+      </p:sp>
+      <p:sp>
+        <p:nvSpPr>
+          <p:cNvPr id="9" name="Rectangle 8"/>
+          <p:cNvSpPr/>
+          <p:nvPr/>
+        </p:nvSpPr>
+        <p:spPr>
+          <a:xfrm>
+            <a:off x="640080" y="1783080"/>
+            <a:ext cx="73152" cy="411480"/>
+          </a:xfrm>
+          <a:prstGeom prst="rect">
+            <a:avLst/>
+          </a:prstGeom>
+          <a:solidFill>
+            <a:srgbClr val="61AFEF"/>
+          </a:solidFill>
+          <a:ln>
+            <a:noFill/>
+          </a:ln>
+        </p:spPr>
+        <p:style>
+          <a:lnRef idx="1">
+            <a:schemeClr val="accent1"/>
+          </a:lnRef>
+          <a:fillRef idx="3">
+            <a:schemeClr val="accent1"/>
+          </a:fillRef>
+          <a:effectRef idx="2">
+            <a:schemeClr val="accent1"/>
+          </a:effectRef>
+          <a:fontRef idx="minor">
+            <a:schemeClr val="lt1"/>
+          </a:fontRef>
+        </p:style>
+        <p:txBody>
+          <a:bodyPr rtlCol="0" anchor="ctr"/>
+          <a:lstStyle/>
+          <a:p>
+            <a:pPr algn="ctr"/>
+          </a:p>
+        </p:txBody>
+      </p:sp>
+      <p:sp>
+        <p:nvSpPr>
+          <p:cNvPr id="10" name="TextBox 9"/>
+          <p:cNvSpPr txBox="1"/>
+          <p:nvPr/>
+        </p:nvSpPr>
+        <p:spPr>
+          <a:xfrm>
+            <a:off x="914400" y="1828800"/>
+            <a:ext cx="10241280" cy="320040"/>
+          </a:xfrm>
+          <a:prstGeom prst="rect">
+            <a:avLst/>
+          </a:prstGeom>
+          <a:noFill/>
+        </p:spPr>
+        <p:txBody>
+          <a:bodyPr wrap="none">
+            <a:spAutoFit/>
+          </a:bodyPr>
+          <a:lstStyle/>
           <a:p>
             <a:pPr>
               <a:spcAft>
-                <a:spcPts val="600"/>
+                <a:spcPts val="200"/>
               </a:spcAft>
-              <a:defRPr sz="1600">
-                <a:solidFill>
-                  <a:srgbClr val="333333"/>
-                </a:solidFill>
+              <a:defRPr sz="1400">
+                <a:solidFill>
+                  <a:srgbClr val="ABB2BF"/>
+                </a:solidFill>
+                <a:latin typeface="Consolas"/>
               </a:defRPr>
             </a:pPr>
             <a:r>
               <a:t>import csv</a:t>
             </a:r>
           </a:p>
+        </p:txBody>
+      </p:sp>
+      <p:sp>
+        <p:nvSpPr>
+          <p:cNvPr id="11" name="Rectangle 10"/>
+          <p:cNvSpPr/>
+          <p:nvPr/>
+        </p:nvSpPr>
+        <p:spPr>
+          <a:xfrm>
+            <a:off x="365760" y="2331720"/>
+            <a:ext cx="11430000" cy="365760"/>
+          </a:xfrm>
+          <a:prstGeom prst="rect">
+            <a:avLst/>
+          </a:prstGeom>
+          <a:solidFill>
+            <a:srgbClr val="0078D7"/>
+          </a:solidFill>
+          <a:ln>
+            <a:noFill/>
+          </a:ln>
+        </p:spPr>
+        <p:style>
+          <a:lnRef idx="1">
+            <a:schemeClr val="accent1"/>
+          </a:lnRef>
+          <a:fillRef idx="3">
+            <a:schemeClr val="accent1"/>
+          </a:fillRef>
+          <a:effectRef idx="2">
+            <a:schemeClr val="accent1"/>
+          </a:effectRef>
+          <a:fontRef idx="minor">
+            <a:schemeClr val="lt1"/>
+          </a:fontRef>
+        </p:style>
+        <p:txBody>
+          <a:bodyPr rtlCol="0" anchor="ctr"/>
+          <a:lstStyle/>
+          <a:p>
+            <a:pPr algn="ctr"/>
+          </a:p>
+        </p:txBody>
+      </p:sp>
+      <p:sp>
+        <p:nvSpPr>
+          <p:cNvPr id="12" name="TextBox 11"/>
+          <p:cNvSpPr txBox="1"/>
+          <p:nvPr/>
+        </p:nvSpPr>
+        <p:spPr>
+          <a:xfrm>
+            <a:off x="548640" y="2377440"/>
+            <a:ext cx="10972800" cy="274320"/>
+          </a:xfrm>
+          <a:prstGeom prst="rect">
+            <a:avLst/>
+          </a:prstGeom>
+          <a:noFill/>
+        </p:spPr>
+        <p:txBody>
+          <a:bodyPr wrap="none">
+            <a:spAutoFit/>
+          </a:bodyPr>
+          <a:lstStyle/>
+          <a:p>
+            <a:pPr>
+              <a:defRPr sz="2000" b="1">
+                <a:solidFill>
+                  <a:srgbClr val="FFFFFF"/>
+                </a:solidFill>
+              </a:defRPr>
+            </a:pPr>
+            <a:r>
+              <a:t>with open("data.csv", "r") as file:</a:t>
+            </a:r>
+          </a:p>
+        </p:txBody>
+      </p:sp>
+      <p:sp>
+        <p:nvSpPr>
+          <p:cNvPr id="13" name="Rectangle 12"/>
+          <p:cNvSpPr/>
+          <p:nvPr/>
+        </p:nvSpPr>
+        <p:spPr>
+          <a:xfrm>
+            <a:off x="640080" y="2788920"/>
+            <a:ext cx="10789920" cy="868680"/>
+          </a:xfrm>
+          <a:prstGeom prst="rect">
+            <a:avLst/>
+          </a:prstGeom>
+          <a:solidFill>
+            <a:srgbClr val="282C34"/>
+          </a:solidFill>
+          <a:ln>
+            <a:noFill/>
+          </a:ln>
+        </p:spPr>
+        <p:style>
+          <a:lnRef idx="1">
+            <a:schemeClr val="accent1"/>
+          </a:lnRef>
+          <a:fillRef idx="3">
+            <a:schemeClr val="accent1"/>
+          </a:fillRef>
+          <a:effectRef idx="2">
+            <a:schemeClr val="accent1"/>
+          </a:effectRef>
+          <a:fontRef idx="minor">
+            <a:schemeClr val="lt1"/>
+          </a:fontRef>
+        </p:style>
+        <p:txBody>
+          <a:bodyPr rtlCol="0" anchor="ctr"/>
+          <a:lstStyle/>
+          <a:p>
+            <a:pPr algn="ctr"/>
+          </a:p>
+        </p:txBody>
+      </p:sp>
+      <p:sp>
+        <p:nvSpPr>
+          <p:cNvPr id="14" name="Rectangle 13"/>
+          <p:cNvSpPr/>
+          <p:nvPr/>
+        </p:nvSpPr>
+        <p:spPr>
+          <a:xfrm>
+            <a:off x="640080" y="2788920"/>
+            <a:ext cx="73152" cy="868680"/>
+          </a:xfrm>
+          <a:prstGeom prst="rect">
+            <a:avLst/>
+          </a:prstGeom>
+          <a:solidFill>
+            <a:srgbClr val="61AFEF"/>
+          </a:solidFill>
+          <a:ln>
+            <a:noFill/>
+          </a:ln>
+        </p:spPr>
+        <p:style>
+          <a:lnRef idx="1">
+            <a:schemeClr val="accent1"/>
+          </a:lnRef>
+          <a:fillRef idx="3">
+            <a:schemeClr val="accent1"/>
+          </a:fillRef>
+          <a:effectRef idx="2">
+            <a:schemeClr val="accent1"/>
+          </a:effectRef>
+          <a:fontRef idx="minor">
+            <a:schemeClr val="lt1"/>
+          </a:fontRef>
+        </p:style>
+        <p:txBody>
+          <a:bodyPr rtlCol="0" anchor="ctr"/>
+          <a:lstStyle/>
+          <a:p>
+            <a:pPr algn="ctr"/>
+          </a:p>
+        </p:txBody>
+      </p:sp>
+      <p:sp>
+        <p:nvSpPr>
+          <p:cNvPr id="15" name="TextBox 14"/>
+          <p:cNvSpPr txBox="1"/>
+          <p:nvPr/>
+        </p:nvSpPr>
+        <p:spPr>
+          <a:xfrm>
+            <a:off x="914400" y="2834640"/>
+            <a:ext cx="10241280" cy="777240"/>
+          </a:xfrm>
+          <a:prstGeom prst="rect">
+            <a:avLst/>
+          </a:prstGeom>
+          <a:noFill/>
+        </p:spPr>
+        <p:txBody>
+          <a:bodyPr wrap="none">
+            <a:spAutoFit/>
+          </a:bodyPr>
+          <a:lstStyle/>
           <a:p>
             <a:pPr>
               <a:spcAft>
-                <a:spcPts val="600"/>
+                <a:spcPts val="200"/>
               </a:spcAft>
-              <a:defRPr b="1" sz="2000">
-                <a:solidFill>
-                  <a:srgbClr val="333333"/>
-                </a:solidFill>
+              <a:defRPr sz="1400">
+                <a:solidFill>
+                  <a:srgbClr val="ABB2BF"/>
+                </a:solidFill>
+                <a:latin typeface="Consolas"/>
               </a:defRPr>
             </a:pPr>
             <a:r>
-              <a:t>with open("data.csv", "r") as file:</a:t>
+              <a:t>    reader = csv.reader(file)</a:t>
             </a:r>
           </a:p>
           <a:p>
             <a:pPr>
               <a:spcAft>
-                <a:spcPts val="600"/>
+                <a:spcPts val="200"/>
               </a:spcAft>
-              <a:defRPr sz="1600">
-                <a:solidFill>
-                  <a:srgbClr val="333333"/>
-                </a:solidFill>
+              <a:defRPr sz="1400">
+                <a:solidFill>
+                  <a:srgbClr val="ABB2BF"/>
+                </a:solidFill>
+                <a:latin typeface="Consolas"/>
               </a:defRPr>
             </a:pPr>
             <a:r>
-              <a:t>    reader = csv.reader(file)</a:t>
+              <a:t>    for row in reader:</a:t>
             </a:r>
           </a:p>
           <a:p>
             <a:pPr>
               <a:spcAft>
-                <a:spcPts val="600"/>
+                <a:spcPts val="200"/>
               </a:spcAft>
-              <a:defRPr sz="1600">
-                <a:solidFill>
-                  <a:srgbClr val="333333"/>
-                </a:solidFill>
+              <a:defRPr sz="1400">
+                <a:solidFill>
+                  <a:srgbClr val="ABB2BF"/>
+                </a:solidFill>
+                <a:latin typeface="Consolas"/>
               </a:defRPr>
             </a:pPr>
             <a:r>
-              <a:t>    for row in reader:</a:t>
-            </a:r>
-          </a:p>
+              <a:t>        print(row)  # List of values</a:t>
+            </a:r>
+          </a:p>
+        </p:txBody>
+      </p:sp>
+      <p:sp>
+        <p:nvSpPr>
+          <p:cNvPr id="16" name="Rectangle 15"/>
+          <p:cNvSpPr/>
+          <p:nvPr/>
+        </p:nvSpPr>
+        <p:spPr>
+          <a:xfrm>
+            <a:off x="365760" y="3794760"/>
+            <a:ext cx="11430000" cy="365760"/>
+          </a:xfrm>
+          <a:prstGeom prst="rect">
+            <a:avLst/>
+          </a:prstGeom>
+          <a:solidFill>
+            <a:srgbClr val="0078D7"/>
+          </a:solidFill>
+          <a:ln>
+            <a:noFill/>
+          </a:ln>
+        </p:spPr>
+        <p:style>
+          <a:lnRef idx="1">
+            <a:schemeClr val="accent1"/>
+          </a:lnRef>
+          <a:fillRef idx="3">
+            <a:schemeClr val="accent1"/>
+          </a:fillRef>
+          <a:effectRef idx="2">
+            <a:schemeClr val="accent1"/>
+          </a:effectRef>
+          <a:fontRef idx="minor">
+            <a:schemeClr val="lt1"/>
+          </a:fontRef>
+        </p:style>
+        <p:txBody>
+          <a:bodyPr rtlCol="0" anchor="ctr"/>
+          <a:lstStyle/>
+          <a:p>
+            <a:pPr algn="ctr"/>
+          </a:p>
+        </p:txBody>
+      </p:sp>
+      <p:sp>
+        <p:nvSpPr>
+          <p:cNvPr id="17" name="TextBox 16"/>
+          <p:cNvSpPr txBox="1"/>
+          <p:nvPr/>
+        </p:nvSpPr>
+        <p:spPr>
+          <a:xfrm>
+            <a:off x="548640" y="3840480"/>
+            <a:ext cx="10972800" cy="274320"/>
+          </a:xfrm>
+          <a:prstGeom prst="rect">
+            <a:avLst/>
+          </a:prstGeom>
+          <a:noFill/>
+        </p:spPr>
+        <p:txBody>
+          <a:bodyPr wrap="none">
+            <a:spAutoFit/>
+          </a:bodyPr>
+          <a:lstStyle/>
+          <a:p>
+            <a:pPr>
+              <a:defRPr sz="2000" b="1">
+                <a:solidFill>
+                  <a:srgbClr val="FFFFFF"/>
+                </a:solidFill>
+              </a:defRPr>
+            </a:pPr>
+            <a:r>
+              <a:t>Using DictReader:</a:t>
+            </a:r>
+          </a:p>
+        </p:txBody>
+      </p:sp>
+      <p:sp>
+        <p:nvSpPr>
+          <p:cNvPr id="18" name="Rectangle 17"/>
+          <p:cNvSpPr/>
+          <p:nvPr/>
+        </p:nvSpPr>
+        <p:spPr>
+          <a:xfrm>
+            <a:off x="365760" y="4251960"/>
+            <a:ext cx="11430000" cy="365760"/>
+          </a:xfrm>
+          <a:prstGeom prst="rect">
+            <a:avLst/>
+          </a:prstGeom>
+          <a:solidFill>
+            <a:srgbClr val="0078D7"/>
+          </a:solidFill>
+          <a:ln>
+            <a:noFill/>
+          </a:ln>
+        </p:spPr>
+        <p:style>
+          <a:lnRef idx="1">
+            <a:schemeClr val="accent1"/>
+          </a:lnRef>
+          <a:fillRef idx="3">
+            <a:schemeClr val="accent1"/>
+          </a:fillRef>
+          <a:effectRef idx="2">
+            <a:schemeClr val="accent1"/>
+          </a:effectRef>
+          <a:fontRef idx="minor">
+            <a:schemeClr val="lt1"/>
+          </a:fontRef>
+        </p:style>
+        <p:txBody>
+          <a:bodyPr rtlCol="0" anchor="ctr"/>
+          <a:lstStyle/>
+          <a:p>
+            <a:pPr algn="ctr"/>
+          </a:p>
+        </p:txBody>
+      </p:sp>
+      <p:sp>
+        <p:nvSpPr>
+          <p:cNvPr id="19" name="TextBox 18"/>
+          <p:cNvSpPr txBox="1"/>
+          <p:nvPr/>
+        </p:nvSpPr>
+        <p:spPr>
+          <a:xfrm>
+            <a:off x="548640" y="4297680"/>
+            <a:ext cx="10972800" cy="274320"/>
+          </a:xfrm>
+          <a:prstGeom prst="rect">
+            <a:avLst/>
+          </a:prstGeom>
+          <a:noFill/>
+        </p:spPr>
+        <p:txBody>
+          <a:bodyPr wrap="none">
+            <a:spAutoFit/>
+          </a:bodyPr>
+          <a:lstStyle/>
+          <a:p>
+            <a:pPr>
+              <a:defRPr sz="2000" b="1">
+                <a:solidFill>
+                  <a:srgbClr val="FFFFFF"/>
+                </a:solidFill>
+              </a:defRPr>
+            </a:pPr>
+            <a:r>
+              <a:t>with open("data.csv", "r") as file:</a:t>
+            </a:r>
+          </a:p>
+        </p:txBody>
+      </p:sp>
+      <p:sp>
+        <p:nvSpPr>
+          <p:cNvPr id="20" name="Rectangle 19"/>
+          <p:cNvSpPr/>
+          <p:nvPr/>
+        </p:nvSpPr>
+        <p:spPr>
+          <a:xfrm>
+            <a:off x="640080" y="4709160"/>
+            <a:ext cx="10789920" cy="868680"/>
+          </a:xfrm>
+          <a:prstGeom prst="rect">
+            <a:avLst/>
+          </a:prstGeom>
+          <a:solidFill>
+            <a:srgbClr val="282C34"/>
+          </a:solidFill>
+          <a:ln>
+            <a:noFill/>
+          </a:ln>
+        </p:spPr>
+        <p:style>
+          <a:lnRef idx="1">
+            <a:schemeClr val="accent1"/>
+          </a:lnRef>
+          <a:fillRef idx="3">
+            <a:schemeClr val="accent1"/>
+          </a:fillRef>
+          <a:effectRef idx="2">
+            <a:schemeClr val="accent1"/>
+          </a:effectRef>
+          <a:fontRef idx="minor">
+            <a:schemeClr val="lt1"/>
+          </a:fontRef>
+        </p:style>
+        <p:txBody>
+          <a:bodyPr rtlCol="0" anchor="ctr"/>
+          <a:lstStyle/>
+          <a:p>
+            <a:pPr algn="ctr"/>
+          </a:p>
+        </p:txBody>
+      </p:sp>
+      <p:sp>
+        <p:nvSpPr>
+          <p:cNvPr id="21" name="Rectangle 20"/>
+          <p:cNvSpPr/>
+          <p:nvPr/>
+        </p:nvSpPr>
+        <p:spPr>
+          <a:xfrm>
+            <a:off x="640080" y="4709160"/>
+            <a:ext cx="73152" cy="868680"/>
+          </a:xfrm>
+          <a:prstGeom prst="rect">
+            <a:avLst/>
+          </a:prstGeom>
+          <a:solidFill>
+            <a:srgbClr val="61AFEF"/>
+          </a:solidFill>
+          <a:ln>
+            <a:noFill/>
+          </a:ln>
+        </p:spPr>
+        <p:style>
+          <a:lnRef idx="1">
+            <a:schemeClr val="accent1"/>
+          </a:lnRef>
+          <a:fillRef idx="3">
+            <a:schemeClr val="accent1"/>
+          </a:fillRef>
+          <a:effectRef idx="2">
+            <a:schemeClr val="accent1"/>
+          </a:effectRef>
+          <a:fontRef idx="minor">
+            <a:schemeClr val="lt1"/>
+          </a:fontRef>
+        </p:style>
+        <p:txBody>
+          <a:bodyPr rtlCol="0" anchor="ctr"/>
+          <a:lstStyle/>
+          <a:p>
+            <a:pPr algn="ctr"/>
+          </a:p>
+        </p:txBody>
+      </p:sp>
+      <p:sp>
+        <p:nvSpPr>
+          <p:cNvPr id="22" name="TextBox 21"/>
+          <p:cNvSpPr txBox="1"/>
+          <p:nvPr/>
+        </p:nvSpPr>
+        <p:spPr>
+          <a:xfrm>
+            <a:off x="914400" y="4754880"/>
+            <a:ext cx="10241280" cy="777240"/>
+          </a:xfrm>
+          <a:prstGeom prst="rect">
+            <a:avLst/>
+          </a:prstGeom>
+          <a:noFill/>
+        </p:spPr>
+        <p:txBody>
+          <a:bodyPr wrap="none">
+            <a:spAutoFit/>
+          </a:bodyPr>
+          <a:lstStyle/>
           <a:p>
             <a:pPr>
               <a:spcAft>
-                <a:spcPts val="600"/>
+                <a:spcPts val="200"/>
               </a:spcAft>
-              <a:defRPr sz="1600">
-                <a:solidFill>
-                  <a:srgbClr val="333333"/>
-                </a:solidFill>
+              <a:defRPr sz="1400">
+                <a:solidFill>
+                  <a:srgbClr val="ABB2BF"/>
+                </a:solidFill>
+                <a:latin typeface="Consolas"/>
               </a:defRPr>
             </a:pPr>
             <a:r>
-              <a:t>        print(row)  # List of values</a:t>
+              <a:t>    reader = csv.DictReader(file)</a:t>
             </a:r>
           </a:p>
           <a:p>
             <a:pPr>
               <a:spcAft>
-                <a:spcPts val="600"/>
+                <a:spcPts val="200"/>
               </a:spcAft>
-              <a:defRPr b="1" sz="2000">
-                <a:solidFill>
-                  <a:srgbClr val="333333"/>
-                </a:solidFill>
+              <a:defRPr sz="1400">
+                <a:solidFill>
+                  <a:srgbClr val="ABB2BF"/>
+                </a:solidFill>
+                <a:latin typeface="Consolas"/>
               </a:defRPr>
             </a:pPr>
             <a:r>
-              <a:t>Using DictReader:</a:t>
+              <a:t>    for row in reader:</a:t>
             </a:r>
           </a:p>
           <a:p>
             <a:pPr>
               <a:spcAft>
-                <a:spcPts val="600"/>
+                <a:spcPts val="200"/>
               </a:spcAft>
-              <a:defRPr b="1" sz="2000">
-                <a:solidFill>
-                  <a:srgbClr val="333333"/>
-                </a:solidFill>
+              <a:defRPr sz="1400">
+                <a:solidFill>
+                  <a:srgbClr val="ABB2BF"/>
+                </a:solidFill>
+                <a:latin typeface="Consolas"/>
               </a:defRPr>
             </a:pPr>
             <a:r>
-              <a:t>with open("data.csv", "r") as file:</a:t>
-            </a:r>
-          </a:p>
+              <a:t>        print(row["name"])</a:t>
+            </a:r>
+          </a:p>
+        </p:txBody>
+      </p:sp>
+      <p:sp>
+        <p:nvSpPr>
+          <p:cNvPr id="23" name="Rectangle 22"/>
+          <p:cNvSpPr/>
+          <p:nvPr/>
+        </p:nvSpPr>
+        <p:spPr>
+          <a:xfrm>
+            <a:off x="365760" y="5715000"/>
+            <a:ext cx="11430000" cy="365760"/>
+          </a:xfrm>
+          <a:prstGeom prst="rect">
+            <a:avLst/>
+          </a:prstGeom>
+          <a:solidFill>
+            <a:srgbClr val="0078D7"/>
+          </a:solidFill>
+          <a:ln>
+            <a:noFill/>
+          </a:ln>
+        </p:spPr>
+        <p:style>
+          <a:lnRef idx="1">
+            <a:schemeClr val="accent1"/>
+          </a:lnRef>
+          <a:fillRef idx="3">
+            <a:schemeClr val="accent1"/>
+          </a:fillRef>
+          <a:effectRef idx="2">
+            <a:schemeClr val="accent1"/>
+          </a:effectRef>
+          <a:fontRef idx="minor">
+            <a:schemeClr val="lt1"/>
+          </a:fontRef>
+        </p:style>
+        <p:txBody>
+          <a:bodyPr rtlCol="0" anchor="ctr"/>
+          <a:lstStyle/>
+          <a:p>
+            <a:pPr algn="ctr"/>
+          </a:p>
+        </p:txBody>
+      </p:sp>
+      <p:sp>
+        <p:nvSpPr>
+          <p:cNvPr id="24" name="TextBox 23"/>
+          <p:cNvSpPr txBox="1"/>
+          <p:nvPr/>
+        </p:nvSpPr>
+        <p:spPr>
+          <a:xfrm>
+            <a:off x="548640" y="5760720"/>
+            <a:ext cx="10972800" cy="274320"/>
+          </a:xfrm>
+          <a:prstGeom prst="rect">
+            <a:avLst/>
+          </a:prstGeom>
+          <a:noFill/>
+        </p:spPr>
+        <p:txBody>
+          <a:bodyPr wrap="none">
+            <a:spAutoFit/>
+          </a:bodyPr>
+          <a:lstStyle/>
           <a:p>
             <a:pPr>
-              <a:spcAft>
-                <a:spcPts val="600"/>
-              </a:spcAft>
-              <a:defRPr sz="1600">
-                <a:solidFill>
-                  <a:srgbClr val="333333"/>
+              <a:defRPr sz="2000" b="1">
+                <a:solidFill>
+                  <a:srgbClr val="FFFFFF"/>
                 </a:solidFill>
               </a:defRPr>
             </a:pPr>
             <a:r>
-              <a:t>    reader = csv.DictReader(file)</a:t>
-            </a:r>
-          </a:p>
-          <a:p>
-            <a:pPr>
-              <a:spcAft>
-                <a:spcPts val="600"/>
-              </a:spcAft>
-              <a:defRPr sz="1600">
-                <a:solidFill>
-                  <a:srgbClr val="333333"/>
-                </a:solidFill>
-              </a:defRPr>
-            </a:pPr>
-            <a:r>
-              <a:t>    for row in reader:</a:t>
-            </a:r>
-          </a:p>
-          <a:p>
-            <a:pPr>
-              <a:spcAft>
-                <a:spcPts val="600"/>
-              </a:spcAft>
-              <a:defRPr sz="1600">
-                <a:solidFill>
-                  <a:srgbClr val="333333"/>
-                </a:solidFill>
-              </a:defRPr>
-            </a:pPr>
-            <a:r>
-              <a:t>        print(row["name"])</a:t>
-            </a:r>
-          </a:p>
-          <a:p>
-            <a:pPr>
-              <a:spcAft>
-                <a:spcPts val="600"/>
-              </a:spcAft>
-              <a:defRPr b="1" sz="2000">
-                <a:solidFill>
-                  <a:srgbClr val="333333"/>
-                </a:solidFill>
-              </a:defRPr>
-            </a:pPr>
-            <a:r>
               <a:t>Writing CSV:</a:t>
-            </a:r>
-          </a:p>
-          <a:p>
-            <a:pPr>
-              <a:spcAft>
-                <a:spcPts val="600"/>
-              </a:spcAft>
-              <a:defRPr b="1" sz="2000">
-                <a:solidFill>
-                  <a:srgbClr val="333333"/>
-                </a:solidFill>
-              </a:defRPr>
-            </a:pPr>
-            <a:r>
-              <a:t>with open("data.csv", "w", newline="") as file:</a:t>
-            </a:r>
-          </a:p>
-          <a:p>
-            <a:pPr>
-              <a:spcAft>
-                <a:spcPts val="600"/>
-              </a:spcAft>
-              <a:defRPr sz="1600">
-                <a:solidFill>
-                  <a:srgbClr val="333333"/>
-                </a:solidFill>
-              </a:defRPr>
-            </a:pPr>
-            <a:r>
-              <a:t>    writer = csv.writer(file)</a:t>
-            </a:r>
-          </a:p>
-          <a:p>
-            <a:pPr>
-              <a:spcAft>
-                <a:spcPts val="600"/>
-              </a:spcAft>
-              <a:defRPr sz="1600">
-                <a:solidFill>
-                  <a:srgbClr val="333333"/>
-                </a:solidFill>
-              </a:defRPr>
-            </a:pPr>
-            <a:r>
-              <a:t>    writer.writerow(["Name", "Age"])</a:t>
-            </a:r>
-          </a:p>
-          <a:p>
-            <a:pPr>
-              <a:spcAft>
-                <a:spcPts val="600"/>
-              </a:spcAft>
-              <a:defRPr sz="1600">
-                <a:solidFill>
-                  <a:srgbClr val="333333"/>
-                </a:solidFill>
-              </a:defRPr>
-            </a:pPr>
-            <a:r>
-              <a:t>    writer.writerow(["Alice", "25"])</a:t>
             </a:r>
           </a:p>
         </p:txBody>
@@ -4790,7 +8593,7 @@
             <a:avLst/>
           </a:prstGeom>
           <a:solidFill>
-            <a:srgbClr val="FFFFFF"/>
+            <a:srgbClr val="0066CC"/>
           </a:solidFill>
           <a:ln>
             <a:noFill/>
@@ -4826,14 +8629,14 @@
         </p:nvSpPr>
         <p:spPr>
           <a:xfrm>
-            <a:off x="0" y="0"/>
-            <a:ext cx="12191695" cy="137160"/>
-          </a:xfrm>
-          <a:prstGeom prst="rect">
-            <a:avLst/>
-          </a:prstGeom>
-          <a:solidFill>
-            <a:srgbClr val="0066CC"/>
+            <a:off x="0" y="2743200"/>
+            <a:ext cx="3657600" cy="137160"/>
+          </a:xfrm>
+          <a:prstGeom prst="rect">
+            <a:avLst/>
+          </a:prstGeom>
+          <a:solidFill>
+            <a:srgbClr val="FFBB33"/>
           </a:solidFill>
           <a:ln>
             <a:noFill/>
@@ -4863,14 +8666,57 @@
       </p:sp>
       <p:sp>
         <p:nvSpPr>
-          <p:cNvPr id="4" name="TextBox 3"/>
+          <p:cNvPr id="4" name="Rectangle 3"/>
+          <p:cNvSpPr/>
+          <p:nvPr/>
+        </p:nvSpPr>
+        <p:spPr>
+          <a:xfrm>
+            <a:off x="8531352" y="4114800"/>
+            <a:ext cx="3657600" cy="137160"/>
+          </a:xfrm>
+          <a:prstGeom prst="rect">
+            <a:avLst/>
+          </a:prstGeom>
+          <a:solidFill>
+            <a:srgbClr val="FFBB33"/>
+          </a:solidFill>
+          <a:ln>
+            <a:noFill/>
+          </a:ln>
+        </p:spPr>
+        <p:style>
+          <a:lnRef idx="1">
+            <a:schemeClr val="accent1"/>
+          </a:lnRef>
+          <a:fillRef idx="3">
+            <a:schemeClr val="accent1"/>
+          </a:fillRef>
+          <a:effectRef idx="2">
+            <a:schemeClr val="accent1"/>
+          </a:effectRef>
+          <a:fontRef idx="minor">
+            <a:schemeClr val="lt1"/>
+          </a:fontRef>
+        </p:style>
+        <p:txBody>
+          <a:bodyPr rtlCol="0" anchor="ctr"/>
+          <a:lstStyle/>
+          <a:p>
+            <a:pPr algn="ctr"/>
+          </a:p>
+        </p:txBody>
+      </p:sp>
+      <p:sp>
+        <p:nvSpPr>
+          <p:cNvPr id="5" name="TextBox 4"/>
           <p:cNvSpPr txBox="1"/>
           <p:nvPr/>
         </p:nvSpPr>
         <p:spPr>
           <a:xfrm>
-            <a:off x="457200" y="320040"/>
-            <a:ext cx="10972800" cy="640080"/>
+            <a:off x="914400" y="2560320"/>
+            <a:ext cx="10360152" cy="1371600"/>
           </a:xfrm>
           <a:prstGeom prst="rect">
             <a:avLst/>
@@ -4883,278 +8729,15 @@
           </a:bodyPr>
           <a:lstStyle/>
           <a:p>
-            <a:pPr>
-              <a:defRPr sz="3600" b="1">
-                <a:solidFill>
-                  <a:srgbClr val="003366"/>
+            <a:pPr algn="ctr">
+              <a:defRPr sz="4800" b="1">
+                <a:solidFill>
+                  <a:srgbClr val="FFFFFF"/>
                 </a:solidFill>
               </a:defRPr>
             </a:pPr>
             <a:r>
               <a:t>Working with JSON Files</a:t>
-            </a:r>
-          </a:p>
-        </p:txBody>
-      </p:sp>
-      <p:sp>
-        <p:nvSpPr>
-          <p:cNvPr id="5" name="TextBox 4"/>
-          <p:cNvSpPr txBox="1"/>
-          <p:nvPr/>
-        </p:nvSpPr>
-        <p:spPr>
-          <a:xfrm>
-            <a:off x="640080" y="1188720"/>
-            <a:ext cx="10789920" cy="5303520"/>
-          </a:xfrm>
-          <a:prstGeom prst="rect">
-            <a:avLst/>
-          </a:prstGeom>
-          <a:noFill/>
-        </p:spPr>
-        <p:txBody>
-          <a:bodyPr wrap="square">
-            <a:spAutoFit/>
-          </a:bodyPr>
-          <a:lstStyle/>
-          <a:p>
-            <a:pPr>
-              <a:spcAft>
-                <a:spcPts val="600"/>
-              </a:spcAft>
-              <a:defRPr b="1" sz="2000">
-                <a:solidFill>
-                  <a:srgbClr val="333333"/>
-                </a:solidFill>
-              </a:defRPr>
-            </a:pPr>
-            <a:r>
-              <a:t>Reading JSON:</a:t>
-            </a:r>
-          </a:p>
-          <a:p>
-            <a:pPr>
-              <a:spcAft>
-                <a:spcPts val="600"/>
-              </a:spcAft>
-              <a:defRPr sz="1600">
-                <a:solidFill>
-                  <a:srgbClr val="333333"/>
-                </a:solidFill>
-              </a:defRPr>
-            </a:pPr>
-            <a:r>
-              <a:t>import json</a:t>
-            </a:r>
-          </a:p>
-          <a:p>
-            <a:pPr>
-              <a:spcAft>
-                <a:spcPts val="600"/>
-              </a:spcAft>
-              <a:defRPr b="1" sz="2000">
-                <a:solidFill>
-                  <a:srgbClr val="333333"/>
-                </a:solidFill>
-              </a:defRPr>
-            </a:pPr>
-            <a:r>
-              <a:t>with open("data.json", "r") as file:</a:t>
-            </a:r>
-          </a:p>
-          <a:p>
-            <a:pPr>
-              <a:spcAft>
-                <a:spcPts val="600"/>
-              </a:spcAft>
-              <a:defRPr sz="1600">
-                <a:solidFill>
-                  <a:srgbClr val="333333"/>
-                </a:solidFill>
-              </a:defRPr>
-            </a:pPr>
-            <a:r>
-              <a:t>    data = json.load(file)</a:t>
-            </a:r>
-          </a:p>
-          <a:p>
-            <a:pPr>
-              <a:spcAft>
-                <a:spcPts val="600"/>
-              </a:spcAft>
-              <a:defRPr b="1" sz="2000">
-                <a:solidFill>
-                  <a:srgbClr val="333333"/>
-                </a:solidFill>
-              </a:defRPr>
-            </a:pPr>
-            <a:r>
-              <a:t>Writing JSON:</a:t>
-            </a:r>
-          </a:p>
-          <a:p>
-            <a:pPr>
-              <a:spcAft>
-                <a:spcPts val="600"/>
-              </a:spcAft>
-              <a:defRPr b="1" sz="2000">
-                <a:solidFill>
-                  <a:srgbClr val="333333"/>
-                </a:solidFill>
-              </a:defRPr>
-            </a:pPr>
-            <a:r>
-              <a:t>data = {"name": "Alice", "age": 25}</a:t>
-            </a:r>
-          </a:p>
-          <a:p>
-            <a:pPr>
-              <a:spcAft>
-                <a:spcPts val="600"/>
-              </a:spcAft>
-              <a:defRPr b="1" sz="2000">
-                <a:solidFill>
-                  <a:srgbClr val="333333"/>
-                </a:solidFill>
-              </a:defRPr>
-            </a:pPr>
-            <a:r>
-              <a:t>with open("data.json", "w") as file:</a:t>
-            </a:r>
-          </a:p>
-          <a:p>
-            <a:pPr>
-              <a:spcAft>
-                <a:spcPts val="600"/>
-              </a:spcAft>
-              <a:defRPr sz="1600">
-                <a:solidFill>
-                  <a:srgbClr val="333333"/>
-                </a:solidFill>
-              </a:defRPr>
-            </a:pPr>
-            <a:r>
-              <a:t>    json.dump(data, file, indent=4)</a:t>
-            </a:r>
-          </a:p>
-          <a:p>
-            <a:pPr>
-              <a:spcAft>
-                <a:spcPts val="600"/>
-              </a:spcAft>
-              <a:defRPr b="1" sz="2000">
-                <a:solidFill>
-                  <a:srgbClr val="333333"/>
-                </a:solidFill>
-              </a:defRPr>
-            </a:pPr>
-            <a:r>
-              <a:t>JSON Strings:</a:t>
-            </a:r>
-          </a:p>
-          <a:p>
-            <a:pPr>
-              <a:spcAft>
-                <a:spcPts val="600"/>
-              </a:spcAft>
-              <a:defRPr sz="1600">
-                <a:solidFill>
-                  <a:srgbClr val="333333"/>
-                </a:solidFill>
-              </a:defRPr>
-            </a:pPr>
-            <a:r>
-              <a:t>json_str = json.dumps(data)  # To string</a:t>
-            </a:r>
-          </a:p>
-          <a:p>
-            <a:pPr>
-              <a:spcAft>
-                <a:spcPts val="600"/>
-              </a:spcAft>
-              <a:defRPr sz="1600">
-                <a:solidFill>
-                  <a:srgbClr val="333333"/>
-                </a:solidFill>
-              </a:defRPr>
-            </a:pPr>
-            <a:r>
-              <a:t>data = json.loads(json_str)  # From string</a:t>
-            </a:r>
-          </a:p>
-          <a:p>
-            <a:pPr>
-              <a:spcAft>
-                <a:spcPts val="600"/>
-              </a:spcAft>
-              <a:defRPr sz="1600">
-                <a:solidFill>
-                  <a:srgbClr val="333333"/>
-                </a:solidFill>
-              </a:defRPr>
-            </a:pPr>
-            <a:r>
-              <a:t>Why JSON?</a:t>
-            </a:r>
-          </a:p>
-          <a:p>
-            <a:pPr lvl="1">
-              <a:spcAft>
-                <a:spcPts val="400"/>
-              </a:spcAft>
-              <a:defRPr sz="1600">
-                <a:solidFill>
-                  <a:srgbClr val="333333"/>
-                </a:solidFill>
-              </a:defRPr>
-            </a:pPr>
-            <a:r>
-              <a:t>• Human-readable</a:t>
-            </a:r>
-          </a:p>
-          <a:p>
-            <a:pPr lvl="1">
-              <a:spcAft>
-                <a:spcPts val="400"/>
-              </a:spcAft>
-              <a:defRPr sz="1600">
-                <a:solidFill>
-                  <a:srgbClr val="333333"/>
-                </a:solidFill>
-              </a:defRPr>
-            </a:pPr>
-            <a:r>
-              <a:t>• Language-independent</a:t>
-            </a:r>
-          </a:p>
-          <a:p>
-            <a:pPr lvl="1">
-              <a:spcAft>
-                <a:spcPts val="400"/>
-              </a:spcAft>
-              <a:defRPr sz="1600">
-                <a:solidFill>
-                  <a:srgbClr val="333333"/>
-                </a:solidFill>
-              </a:defRPr>
-            </a:pPr>
-            <a:r>
-              <a:t>• Supports nested structures</a:t>
-            </a:r>
-          </a:p>
-          <a:p>
-            <a:pPr lvl="1">
-              <a:spcAft>
-                <a:spcPts val="400"/>
-              </a:spcAft>
-              <a:defRPr sz="1600">
-                <a:solidFill>
-                  <a:srgbClr val="333333"/>
-                </a:solidFill>
-              </a:defRPr>
-            </a:pPr>
-            <a:r>
-              <a:t>• Common API format</a:t>
             </a:r>
           </a:p>
         </p:txBody>
@@ -5192,7 +8775,7 @@
             <a:avLst/>
           </a:prstGeom>
           <a:solidFill>
-            <a:srgbClr val="FFFFFF"/>
+            <a:srgbClr val="FAFAFA"/>
           </a:solidFill>
           <a:ln>
             <a:noFill/>
@@ -5229,7 +8812,7 @@
         <p:spPr>
           <a:xfrm>
             <a:off x="0" y="0"/>
-            <a:ext cx="12191695" cy="137160"/>
+            <a:ext cx="12191695" cy="1097280"/>
           </a:xfrm>
           <a:prstGeom prst="rect">
             <a:avLst/>
@@ -5265,13 +8848,56 @@
       </p:sp>
       <p:sp>
         <p:nvSpPr>
-          <p:cNvPr id="4" name="TextBox 3"/>
+          <p:cNvPr id="4" name="Rectangle 3"/>
+          <p:cNvSpPr/>
+          <p:nvPr/>
+        </p:nvSpPr>
+        <p:spPr>
+          <a:xfrm>
+            <a:off x="0" y="1097280"/>
+            <a:ext cx="137160" cy="5760720"/>
+          </a:xfrm>
+          <a:prstGeom prst="rect">
+            <a:avLst/>
+          </a:prstGeom>
+          <a:solidFill>
+            <a:srgbClr val="FFBB33"/>
+          </a:solidFill>
+          <a:ln>
+            <a:noFill/>
+          </a:ln>
+        </p:spPr>
+        <p:style>
+          <a:lnRef idx="1">
+            <a:schemeClr val="accent1"/>
+          </a:lnRef>
+          <a:fillRef idx="3">
+            <a:schemeClr val="accent1"/>
+          </a:fillRef>
+          <a:effectRef idx="2">
+            <a:schemeClr val="accent1"/>
+          </a:effectRef>
+          <a:fontRef idx="minor">
+            <a:schemeClr val="lt1"/>
+          </a:fontRef>
+        </p:style>
+        <p:txBody>
+          <a:bodyPr rtlCol="0" anchor="ctr"/>
+          <a:lstStyle/>
+          <a:p>
+            <a:pPr algn="ctr"/>
+          </a:p>
+        </p:txBody>
+      </p:sp>
+      <p:sp>
+        <p:nvSpPr>
+          <p:cNvPr id="5" name="TextBox 4"/>
           <p:cNvSpPr txBox="1"/>
           <p:nvPr/>
         </p:nvSpPr>
         <p:spPr>
           <a:xfrm>
-            <a:off x="457200" y="320040"/>
+            <a:off x="365760" y="274320"/>
             <a:ext cx="10972800" cy="640080"/>
           </a:xfrm>
           <a:prstGeom prst="rect">
@@ -5288,26 +8914,69 @@
             <a:pPr>
               <a:defRPr sz="3600" b="1">
                 <a:solidFill>
-                  <a:srgbClr val="003366"/>
+                  <a:srgbClr val="FFFFFF"/>
                 </a:solidFill>
               </a:defRPr>
             </a:pPr>
             <a:r>
-              <a:t>File Paths</a:t>
-            </a:r>
-          </a:p>
-        </p:txBody>
-      </p:sp>
-      <p:sp>
-        <p:nvSpPr>
-          <p:cNvPr id="5" name="TextBox 4"/>
+              <a:t>Working with JSON Files</a:t>
+            </a:r>
+          </a:p>
+        </p:txBody>
+      </p:sp>
+      <p:sp>
+        <p:nvSpPr>
+          <p:cNvPr id="6" name="Rectangle 5"/>
+          <p:cNvSpPr/>
+          <p:nvPr/>
+        </p:nvSpPr>
+        <p:spPr>
+          <a:xfrm>
+            <a:off x="365760" y="1325880"/>
+            <a:ext cx="11430000" cy="365760"/>
+          </a:xfrm>
+          <a:prstGeom prst="rect">
+            <a:avLst/>
+          </a:prstGeom>
+          <a:solidFill>
+            <a:srgbClr val="0078D7"/>
+          </a:solidFill>
+          <a:ln>
+            <a:noFill/>
+          </a:ln>
+        </p:spPr>
+        <p:style>
+          <a:lnRef idx="1">
+            <a:schemeClr val="accent1"/>
+          </a:lnRef>
+          <a:fillRef idx="3">
+            <a:schemeClr val="accent1"/>
+          </a:fillRef>
+          <a:effectRef idx="2">
+            <a:schemeClr val="accent1"/>
+          </a:effectRef>
+          <a:fontRef idx="minor">
+            <a:schemeClr val="lt1"/>
+          </a:fontRef>
+        </p:style>
+        <p:txBody>
+          <a:bodyPr rtlCol="0" anchor="ctr"/>
+          <a:lstStyle/>
+          <a:p>
+            <a:pPr algn="ctr"/>
+          </a:p>
+        </p:txBody>
+      </p:sp>
+      <p:sp>
+        <p:nvSpPr>
+          <p:cNvPr id="7" name="TextBox 6"/>
           <p:cNvSpPr txBox="1"/>
           <p:nvPr/>
         </p:nvSpPr>
         <p:spPr>
           <a:xfrm>
-            <a:off x="640080" y="1188720"/>
-            <a:ext cx="10789920" cy="5303520"/>
+            <a:off x="548640" y="1371600"/>
+            <a:ext cx="10972800" cy="274320"/>
           </a:xfrm>
           <a:prstGeom prst="rect">
             <a:avLst/>
@@ -5315,263 +8984,918 @@
           <a:noFill/>
         </p:spPr>
         <p:txBody>
-          <a:bodyPr wrap="square">
+          <a:bodyPr wrap="none">
             <a:spAutoFit/>
           </a:bodyPr>
           <a:lstStyle/>
           <a:p>
             <a:pPr>
-              <a:spcAft>
-                <a:spcPts val="600"/>
-              </a:spcAft>
-              <a:defRPr b="1" sz="2000">
-                <a:solidFill>
-                  <a:srgbClr val="333333"/>
+              <a:defRPr sz="2000" b="1">
+                <a:solidFill>
+                  <a:srgbClr val="FFFFFF"/>
                 </a:solidFill>
               </a:defRPr>
             </a:pPr>
             <a:r>
-              <a:t>Absolute Path:</a:t>
-            </a:r>
-          </a:p>
+              <a:t>Reading JSON:</a:t>
+            </a:r>
+          </a:p>
+        </p:txBody>
+      </p:sp>
+      <p:sp>
+        <p:nvSpPr>
+          <p:cNvPr id="8" name="Rectangle 7"/>
+          <p:cNvSpPr/>
+          <p:nvPr/>
+        </p:nvSpPr>
+        <p:spPr>
+          <a:xfrm>
+            <a:off x="640080" y="1783080"/>
+            <a:ext cx="10789920" cy="411480"/>
+          </a:xfrm>
+          <a:prstGeom prst="rect">
+            <a:avLst/>
+          </a:prstGeom>
+          <a:solidFill>
+            <a:srgbClr val="282C34"/>
+          </a:solidFill>
+          <a:ln>
+            <a:noFill/>
+          </a:ln>
+        </p:spPr>
+        <p:style>
+          <a:lnRef idx="1">
+            <a:schemeClr val="accent1"/>
+          </a:lnRef>
+          <a:fillRef idx="3">
+            <a:schemeClr val="accent1"/>
+          </a:fillRef>
+          <a:effectRef idx="2">
+            <a:schemeClr val="accent1"/>
+          </a:effectRef>
+          <a:fontRef idx="minor">
+            <a:schemeClr val="lt1"/>
+          </a:fontRef>
+        </p:style>
+        <p:txBody>
+          <a:bodyPr rtlCol="0" anchor="ctr"/>
+          <a:lstStyle/>
+          <a:p>
+            <a:pPr algn="ctr"/>
+          </a:p>
+        </p:txBody>
+      </p:sp>
+      <p:sp>
+        <p:nvSpPr>
+          <p:cNvPr id="9" name="Rectangle 8"/>
+          <p:cNvSpPr/>
+          <p:nvPr/>
+        </p:nvSpPr>
+        <p:spPr>
+          <a:xfrm>
+            <a:off x="640080" y="1783080"/>
+            <a:ext cx="73152" cy="411480"/>
+          </a:xfrm>
+          <a:prstGeom prst="rect">
+            <a:avLst/>
+          </a:prstGeom>
+          <a:solidFill>
+            <a:srgbClr val="61AFEF"/>
+          </a:solidFill>
+          <a:ln>
+            <a:noFill/>
+          </a:ln>
+        </p:spPr>
+        <p:style>
+          <a:lnRef idx="1">
+            <a:schemeClr val="accent1"/>
+          </a:lnRef>
+          <a:fillRef idx="3">
+            <a:schemeClr val="accent1"/>
+          </a:fillRef>
+          <a:effectRef idx="2">
+            <a:schemeClr val="accent1"/>
+          </a:effectRef>
+          <a:fontRef idx="minor">
+            <a:schemeClr val="lt1"/>
+          </a:fontRef>
+        </p:style>
+        <p:txBody>
+          <a:bodyPr rtlCol="0" anchor="ctr"/>
+          <a:lstStyle/>
+          <a:p>
+            <a:pPr algn="ctr"/>
+          </a:p>
+        </p:txBody>
+      </p:sp>
+      <p:sp>
+        <p:nvSpPr>
+          <p:cNvPr id="10" name="TextBox 9"/>
+          <p:cNvSpPr txBox="1"/>
+          <p:nvPr/>
+        </p:nvSpPr>
+        <p:spPr>
+          <a:xfrm>
+            <a:off x="914400" y="1828800"/>
+            <a:ext cx="10241280" cy="320040"/>
+          </a:xfrm>
+          <a:prstGeom prst="rect">
+            <a:avLst/>
+          </a:prstGeom>
+          <a:noFill/>
+        </p:spPr>
+        <p:txBody>
+          <a:bodyPr wrap="none">
+            <a:spAutoFit/>
+          </a:bodyPr>
+          <a:lstStyle/>
           <a:p>
             <a:pPr>
               <a:spcAft>
-                <a:spcPts val="600"/>
+                <a:spcPts val="200"/>
               </a:spcAft>
-              <a:defRPr sz="1600">
-                <a:solidFill>
-                  <a:srgbClr val="333333"/>
-                </a:solidFill>
+              <a:defRPr sz="1400">
+                <a:solidFill>
+                  <a:srgbClr val="ABB2BF"/>
+                </a:solidFill>
+                <a:latin typeface="Consolas"/>
               </a:defRPr>
             </a:pPr>
             <a:r>
-              <a:t>"/home/user/documents/file.txt"</a:t>
-            </a:r>
-          </a:p>
+              <a:t>import json</a:t>
+            </a:r>
+          </a:p>
+        </p:txBody>
+      </p:sp>
+      <p:sp>
+        <p:nvSpPr>
+          <p:cNvPr id="11" name="Rectangle 10"/>
+          <p:cNvSpPr/>
+          <p:nvPr/>
+        </p:nvSpPr>
+        <p:spPr>
+          <a:xfrm>
+            <a:off x="365760" y="2331720"/>
+            <a:ext cx="11430000" cy="365760"/>
+          </a:xfrm>
+          <a:prstGeom prst="rect">
+            <a:avLst/>
+          </a:prstGeom>
+          <a:solidFill>
+            <a:srgbClr val="0078D7"/>
+          </a:solidFill>
+          <a:ln>
+            <a:noFill/>
+          </a:ln>
+        </p:spPr>
+        <p:style>
+          <a:lnRef idx="1">
+            <a:schemeClr val="accent1"/>
+          </a:lnRef>
+          <a:fillRef idx="3">
+            <a:schemeClr val="accent1"/>
+          </a:fillRef>
+          <a:effectRef idx="2">
+            <a:schemeClr val="accent1"/>
+          </a:effectRef>
+          <a:fontRef idx="minor">
+            <a:schemeClr val="lt1"/>
+          </a:fontRef>
+        </p:style>
+        <p:txBody>
+          <a:bodyPr rtlCol="0" anchor="ctr"/>
+          <a:lstStyle/>
+          <a:p>
+            <a:pPr algn="ctr"/>
+          </a:p>
+        </p:txBody>
+      </p:sp>
+      <p:sp>
+        <p:nvSpPr>
+          <p:cNvPr id="12" name="TextBox 11"/>
+          <p:cNvSpPr txBox="1"/>
+          <p:nvPr/>
+        </p:nvSpPr>
+        <p:spPr>
+          <a:xfrm>
+            <a:off x="548640" y="2377440"/>
+            <a:ext cx="10972800" cy="274320"/>
+          </a:xfrm>
+          <a:prstGeom prst="rect">
+            <a:avLst/>
+          </a:prstGeom>
+          <a:noFill/>
+        </p:spPr>
+        <p:txBody>
+          <a:bodyPr wrap="none">
+            <a:spAutoFit/>
+          </a:bodyPr>
+          <a:lstStyle/>
+          <a:p>
+            <a:pPr>
+              <a:defRPr sz="2000" b="1">
+                <a:solidFill>
+                  <a:srgbClr val="FFFFFF"/>
+                </a:solidFill>
+              </a:defRPr>
+            </a:pPr>
+            <a:r>
+              <a:t>with open("data.json", "r") as file:</a:t>
+            </a:r>
+          </a:p>
+        </p:txBody>
+      </p:sp>
+      <p:sp>
+        <p:nvSpPr>
+          <p:cNvPr id="13" name="Rectangle 12"/>
+          <p:cNvSpPr/>
+          <p:nvPr/>
+        </p:nvSpPr>
+        <p:spPr>
+          <a:xfrm>
+            <a:off x="640080" y="2788920"/>
+            <a:ext cx="10789920" cy="411480"/>
+          </a:xfrm>
+          <a:prstGeom prst="rect">
+            <a:avLst/>
+          </a:prstGeom>
+          <a:solidFill>
+            <a:srgbClr val="282C34"/>
+          </a:solidFill>
+          <a:ln>
+            <a:noFill/>
+          </a:ln>
+        </p:spPr>
+        <p:style>
+          <a:lnRef idx="1">
+            <a:schemeClr val="accent1"/>
+          </a:lnRef>
+          <a:fillRef idx="3">
+            <a:schemeClr val="accent1"/>
+          </a:fillRef>
+          <a:effectRef idx="2">
+            <a:schemeClr val="accent1"/>
+          </a:effectRef>
+          <a:fontRef idx="minor">
+            <a:schemeClr val="lt1"/>
+          </a:fontRef>
+        </p:style>
+        <p:txBody>
+          <a:bodyPr rtlCol="0" anchor="ctr"/>
+          <a:lstStyle/>
+          <a:p>
+            <a:pPr algn="ctr"/>
+          </a:p>
+        </p:txBody>
+      </p:sp>
+      <p:sp>
+        <p:nvSpPr>
+          <p:cNvPr id="14" name="Rectangle 13"/>
+          <p:cNvSpPr/>
+          <p:nvPr/>
+        </p:nvSpPr>
+        <p:spPr>
+          <a:xfrm>
+            <a:off x="640080" y="2788920"/>
+            <a:ext cx="73152" cy="411480"/>
+          </a:xfrm>
+          <a:prstGeom prst="rect">
+            <a:avLst/>
+          </a:prstGeom>
+          <a:solidFill>
+            <a:srgbClr val="61AFEF"/>
+          </a:solidFill>
+          <a:ln>
+            <a:noFill/>
+          </a:ln>
+        </p:spPr>
+        <p:style>
+          <a:lnRef idx="1">
+            <a:schemeClr val="accent1"/>
+          </a:lnRef>
+          <a:fillRef idx="3">
+            <a:schemeClr val="accent1"/>
+          </a:fillRef>
+          <a:effectRef idx="2">
+            <a:schemeClr val="accent1"/>
+          </a:effectRef>
+          <a:fontRef idx="minor">
+            <a:schemeClr val="lt1"/>
+          </a:fontRef>
+        </p:style>
+        <p:txBody>
+          <a:bodyPr rtlCol="0" anchor="ctr"/>
+          <a:lstStyle/>
+          <a:p>
+            <a:pPr algn="ctr"/>
+          </a:p>
+        </p:txBody>
+      </p:sp>
+      <p:sp>
+        <p:nvSpPr>
+          <p:cNvPr id="15" name="TextBox 14"/>
+          <p:cNvSpPr txBox="1"/>
+          <p:nvPr/>
+        </p:nvSpPr>
+        <p:spPr>
+          <a:xfrm>
+            <a:off x="914400" y="2834640"/>
+            <a:ext cx="10241280" cy="320040"/>
+          </a:xfrm>
+          <a:prstGeom prst="rect">
+            <a:avLst/>
+          </a:prstGeom>
+          <a:noFill/>
+        </p:spPr>
+        <p:txBody>
+          <a:bodyPr wrap="none">
+            <a:spAutoFit/>
+          </a:bodyPr>
+          <a:lstStyle/>
           <a:p>
             <a:pPr>
               <a:spcAft>
-                <a:spcPts val="600"/>
+                <a:spcPts val="200"/>
               </a:spcAft>
-              <a:defRPr b="1" sz="2000">
+              <a:defRPr sz="1400">
+                <a:solidFill>
+                  <a:srgbClr val="ABB2BF"/>
+                </a:solidFill>
+                <a:latin typeface="Consolas"/>
+              </a:defRPr>
+            </a:pPr>
+            <a:r>
+              <a:t>    data = json.load(file)</a:t>
+            </a:r>
+          </a:p>
+        </p:txBody>
+      </p:sp>
+      <p:sp>
+        <p:nvSpPr>
+          <p:cNvPr id="16" name="Rectangle 15"/>
+          <p:cNvSpPr/>
+          <p:nvPr/>
+        </p:nvSpPr>
+        <p:spPr>
+          <a:xfrm>
+            <a:off x="365760" y="3337560"/>
+            <a:ext cx="11430000" cy="365760"/>
+          </a:xfrm>
+          <a:prstGeom prst="rect">
+            <a:avLst/>
+          </a:prstGeom>
+          <a:solidFill>
+            <a:srgbClr val="0078D7"/>
+          </a:solidFill>
+          <a:ln>
+            <a:noFill/>
+          </a:ln>
+        </p:spPr>
+        <p:style>
+          <a:lnRef idx="1">
+            <a:schemeClr val="accent1"/>
+          </a:lnRef>
+          <a:fillRef idx="3">
+            <a:schemeClr val="accent1"/>
+          </a:fillRef>
+          <a:effectRef idx="2">
+            <a:schemeClr val="accent1"/>
+          </a:effectRef>
+          <a:fontRef idx="minor">
+            <a:schemeClr val="lt1"/>
+          </a:fontRef>
+        </p:style>
+        <p:txBody>
+          <a:bodyPr rtlCol="0" anchor="ctr"/>
+          <a:lstStyle/>
+          <a:p>
+            <a:pPr algn="ctr"/>
+          </a:p>
+        </p:txBody>
+      </p:sp>
+      <p:sp>
+        <p:nvSpPr>
+          <p:cNvPr id="17" name="TextBox 16"/>
+          <p:cNvSpPr txBox="1"/>
+          <p:nvPr/>
+        </p:nvSpPr>
+        <p:spPr>
+          <a:xfrm>
+            <a:off x="548640" y="3383280"/>
+            <a:ext cx="10972800" cy="274320"/>
+          </a:xfrm>
+          <a:prstGeom prst="rect">
+            <a:avLst/>
+          </a:prstGeom>
+          <a:noFill/>
+        </p:spPr>
+        <p:txBody>
+          <a:bodyPr wrap="none">
+            <a:spAutoFit/>
+          </a:bodyPr>
+          <a:lstStyle/>
+          <a:p>
+            <a:pPr>
+              <a:defRPr sz="2000" b="1">
+                <a:solidFill>
+                  <a:srgbClr val="FFFFFF"/>
+                </a:solidFill>
+              </a:defRPr>
+            </a:pPr>
+            <a:r>
+              <a:t>Writing JSON:</a:t>
+            </a:r>
+          </a:p>
+        </p:txBody>
+      </p:sp>
+      <p:sp>
+        <p:nvSpPr>
+          <p:cNvPr id="18" name="TextBox 17"/>
+          <p:cNvSpPr txBox="1"/>
+          <p:nvPr/>
+        </p:nvSpPr>
+        <p:spPr>
+          <a:xfrm>
+            <a:off x="457200" y="3840480"/>
+            <a:ext cx="11247120" cy="320040"/>
+          </a:xfrm>
+          <a:prstGeom prst="rect">
+            <a:avLst/>
+          </a:prstGeom>
+          <a:noFill/>
+        </p:spPr>
+        <p:txBody>
+          <a:bodyPr wrap="none">
+            <a:spAutoFit/>
+          </a:bodyPr>
+          <a:lstStyle/>
+          <a:p>
+            <a:pPr>
+              <a:defRPr sz="1700">
                 <a:solidFill>
                   <a:srgbClr val="333333"/>
                 </a:solidFill>
               </a:defRPr>
             </a:pPr>
             <a:r>
-              <a:t>"C:\\Users\\Name\\file.txt"</a:t>
-            </a:r>
-          </a:p>
+              <a:t>data = {"name": "Alice", "age": 25}</a:t>
+            </a:r>
+          </a:p>
+        </p:txBody>
+      </p:sp>
+      <p:sp>
+        <p:nvSpPr>
+          <p:cNvPr id="19" name="Rectangle 18"/>
+          <p:cNvSpPr/>
+          <p:nvPr/>
+        </p:nvSpPr>
+        <p:spPr>
+          <a:xfrm>
+            <a:off x="365760" y="4069080"/>
+            <a:ext cx="11430000" cy="365760"/>
+          </a:xfrm>
+          <a:prstGeom prst="rect">
+            <a:avLst/>
+          </a:prstGeom>
+          <a:solidFill>
+            <a:srgbClr val="0078D7"/>
+          </a:solidFill>
+          <a:ln>
+            <a:noFill/>
+          </a:ln>
+        </p:spPr>
+        <p:style>
+          <a:lnRef idx="1">
+            <a:schemeClr val="accent1"/>
+          </a:lnRef>
+          <a:fillRef idx="3">
+            <a:schemeClr val="accent1"/>
+          </a:fillRef>
+          <a:effectRef idx="2">
+            <a:schemeClr val="accent1"/>
+          </a:effectRef>
+          <a:fontRef idx="minor">
+            <a:schemeClr val="lt1"/>
+          </a:fontRef>
+        </p:style>
+        <p:txBody>
+          <a:bodyPr rtlCol="0" anchor="ctr"/>
+          <a:lstStyle/>
+          <a:p>
+            <a:pPr algn="ctr"/>
+          </a:p>
+        </p:txBody>
+      </p:sp>
+      <p:sp>
+        <p:nvSpPr>
+          <p:cNvPr id="20" name="TextBox 19"/>
+          <p:cNvSpPr txBox="1"/>
+          <p:nvPr/>
+        </p:nvSpPr>
+        <p:spPr>
+          <a:xfrm>
+            <a:off x="548640" y="4114800"/>
+            <a:ext cx="10972800" cy="274320"/>
+          </a:xfrm>
+          <a:prstGeom prst="rect">
+            <a:avLst/>
+          </a:prstGeom>
+          <a:noFill/>
+        </p:spPr>
+        <p:txBody>
+          <a:bodyPr wrap="none">
+            <a:spAutoFit/>
+          </a:bodyPr>
+          <a:lstStyle/>
+          <a:p>
+            <a:pPr>
+              <a:defRPr sz="2000" b="1">
+                <a:solidFill>
+                  <a:srgbClr val="FFFFFF"/>
+                </a:solidFill>
+              </a:defRPr>
+            </a:pPr>
+            <a:r>
+              <a:t>with open("data.json", "w") as file:</a:t>
+            </a:r>
+          </a:p>
+        </p:txBody>
+      </p:sp>
+      <p:sp>
+        <p:nvSpPr>
+          <p:cNvPr id="21" name="Rectangle 20"/>
+          <p:cNvSpPr/>
+          <p:nvPr/>
+        </p:nvSpPr>
+        <p:spPr>
+          <a:xfrm>
+            <a:off x="640080" y="4526280"/>
+            <a:ext cx="10789920" cy="411480"/>
+          </a:xfrm>
+          <a:prstGeom prst="rect">
+            <a:avLst/>
+          </a:prstGeom>
+          <a:solidFill>
+            <a:srgbClr val="282C34"/>
+          </a:solidFill>
+          <a:ln>
+            <a:noFill/>
+          </a:ln>
+        </p:spPr>
+        <p:style>
+          <a:lnRef idx="1">
+            <a:schemeClr val="accent1"/>
+          </a:lnRef>
+          <a:fillRef idx="3">
+            <a:schemeClr val="accent1"/>
+          </a:fillRef>
+          <a:effectRef idx="2">
+            <a:schemeClr val="accent1"/>
+          </a:effectRef>
+          <a:fontRef idx="minor">
+            <a:schemeClr val="lt1"/>
+          </a:fontRef>
+        </p:style>
+        <p:txBody>
+          <a:bodyPr rtlCol="0" anchor="ctr"/>
+          <a:lstStyle/>
+          <a:p>
+            <a:pPr algn="ctr"/>
+          </a:p>
+        </p:txBody>
+      </p:sp>
+      <p:sp>
+        <p:nvSpPr>
+          <p:cNvPr id="22" name="Rectangle 21"/>
+          <p:cNvSpPr/>
+          <p:nvPr/>
+        </p:nvSpPr>
+        <p:spPr>
+          <a:xfrm>
+            <a:off x="640080" y="4526280"/>
+            <a:ext cx="73152" cy="411480"/>
+          </a:xfrm>
+          <a:prstGeom prst="rect">
+            <a:avLst/>
+          </a:prstGeom>
+          <a:solidFill>
+            <a:srgbClr val="61AFEF"/>
+          </a:solidFill>
+          <a:ln>
+            <a:noFill/>
+          </a:ln>
+        </p:spPr>
+        <p:style>
+          <a:lnRef idx="1">
+            <a:schemeClr val="accent1"/>
+          </a:lnRef>
+          <a:fillRef idx="3">
+            <a:schemeClr val="accent1"/>
+          </a:fillRef>
+          <a:effectRef idx="2">
+            <a:schemeClr val="accent1"/>
+          </a:effectRef>
+          <a:fontRef idx="minor">
+            <a:schemeClr val="lt1"/>
+          </a:fontRef>
+        </p:style>
+        <p:txBody>
+          <a:bodyPr rtlCol="0" anchor="ctr"/>
+          <a:lstStyle/>
+          <a:p>
+            <a:pPr algn="ctr"/>
+          </a:p>
+        </p:txBody>
+      </p:sp>
+      <p:sp>
+        <p:nvSpPr>
+          <p:cNvPr id="23" name="TextBox 22"/>
+          <p:cNvSpPr txBox="1"/>
+          <p:nvPr/>
+        </p:nvSpPr>
+        <p:spPr>
+          <a:xfrm>
+            <a:off x="914400" y="4572000"/>
+            <a:ext cx="10241280" cy="320040"/>
+          </a:xfrm>
+          <a:prstGeom prst="rect">
+            <a:avLst/>
+          </a:prstGeom>
+          <a:noFill/>
+        </p:spPr>
+        <p:txBody>
+          <a:bodyPr wrap="none">
+            <a:spAutoFit/>
+          </a:bodyPr>
+          <a:lstStyle/>
           <a:p>
             <a:pPr>
               <a:spcAft>
-                <a:spcPts val="600"/>
+                <a:spcPts val="200"/>
               </a:spcAft>
-              <a:defRPr b="1" sz="2000">
-                <a:solidFill>
-                  <a:srgbClr val="333333"/>
-                </a:solidFill>
+              <a:defRPr sz="1400">
+                <a:solidFill>
+                  <a:srgbClr val="ABB2BF"/>
+                </a:solidFill>
+                <a:latin typeface="Consolas"/>
               </a:defRPr>
             </a:pPr>
             <a:r>
-              <a:t>Relative Path:</a:t>
-            </a:r>
-          </a:p>
+              <a:t>    json.dump(data, file, indent=4)</a:t>
+            </a:r>
+          </a:p>
+        </p:txBody>
+      </p:sp>
+      <p:sp>
+        <p:nvSpPr>
+          <p:cNvPr id="24" name="Rectangle 23"/>
+          <p:cNvSpPr/>
+          <p:nvPr/>
+        </p:nvSpPr>
+        <p:spPr>
+          <a:xfrm>
+            <a:off x="365760" y="5074920"/>
+            <a:ext cx="11430000" cy="365760"/>
+          </a:xfrm>
+          <a:prstGeom prst="rect">
+            <a:avLst/>
+          </a:prstGeom>
+          <a:solidFill>
+            <a:srgbClr val="0078D7"/>
+          </a:solidFill>
+          <a:ln>
+            <a:noFill/>
+          </a:ln>
+        </p:spPr>
+        <p:style>
+          <a:lnRef idx="1">
+            <a:schemeClr val="accent1"/>
+          </a:lnRef>
+          <a:fillRef idx="3">
+            <a:schemeClr val="accent1"/>
+          </a:fillRef>
+          <a:effectRef idx="2">
+            <a:schemeClr val="accent1"/>
+          </a:effectRef>
+          <a:fontRef idx="minor">
+            <a:schemeClr val="lt1"/>
+          </a:fontRef>
+        </p:style>
+        <p:txBody>
+          <a:bodyPr rtlCol="0" anchor="ctr"/>
+          <a:lstStyle/>
+          <a:p>
+            <a:pPr algn="ctr"/>
+          </a:p>
+        </p:txBody>
+      </p:sp>
+      <p:sp>
+        <p:nvSpPr>
+          <p:cNvPr id="25" name="TextBox 24"/>
+          <p:cNvSpPr txBox="1"/>
+          <p:nvPr/>
+        </p:nvSpPr>
+        <p:spPr>
+          <a:xfrm>
+            <a:off x="548640" y="5120640"/>
+            <a:ext cx="10972800" cy="274320"/>
+          </a:xfrm>
+          <a:prstGeom prst="rect">
+            <a:avLst/>
+          </a:prstGeom>
+          <a:noFill/>
+        </p:spPr>
+        <p:txBody>
+          <a:bodyPr wrap="none">
+            <a:spAutoFit/>
+          </a:bodyPr>
+          <a:lstStyle/>
+          <a:p>
+            <a:pPr>
+              <a:defRPr sz="2000" b="1">
+                <a:solidFill>
+                  <a:srgbClr val="FFFFFF"/>
+                </a:solidFill>
+              </a:defRPr>
+            </a:pPr>
+            <a:r>
+              <a:t>JSON Strings:</a:t>
+            </a:r>
+          </a:p>
+        </p:txBody>
+      </p:sp>
+      <p:sp>
+        <p:nvSpPr>
+          <p:cNvPr id="26" name="Rectangle 25"/>
+          <p:cNvSpPr/>
+          <p:nvPr/>
+        </p:nvSpPr>
+        <p:spPr>
+          <a:xfrm>
+            <a:off x="640080" y="5532120"/>
+            <a:ext cx="10789920" cy="640080"/>
+          </a:xfrm>
+          <a:prstGeom prst="rect">
+            <a:avLst/>
+          </a:prstGeom>
+          <a:solidFill>
+            <a:srgbClr val="282C34"/>
+          </a:solidFill>
+          <a:ln>
+            <a:noFill/>
+          </a:ln>
+        </p:spPr>
+        <p:style>
+          <a:lnRef idx="1">
+            <a:schemeClr val="accent1"/>
+          </a:lnRef>
+          <a:fillRef idx="3">
+            <a:schemeClr val="accent1"/>
+          </a:fillRef>
+          <a:effectRef idx="2">
+            <a:schemeClr val="accent1"/>
+          </a:effectRef>
+          <a:fontRef idx="minor">
+            <a:schemeClr val="lt1"/>
+          </a:fontRef>
+        </p:style>
+        <p:txBody>
+          <a:bodyPr rtlCol="0" anchor="ctr"/>
+          <a:lstStyle/>
+          <a:p>
+            <a:pPr algn="ctr"/>
+          </a:p>
+        </p:txBody>
+      </p:sp>
+      <p:sp>
+        <p:nvSpPr>
+          <p:cNvPr id="27" name="Rectangle 26"/>
+          <p:cNvSpPr/>
+          <p:nvPr/>
+        </p:nvSpPr>
+        <p:spPr>
+          <a:xfrm>
+            <a:off x="640080" y="5532120"/>
+            <a:ext cx="73152" cy="640080"/>
+          </a:xfrm>
+          <a:prstGeom prst="rect">
+            <a:avLst/>
+          </a:prstGeom>
+          <a:solidFill>
+            <a:srgbClr val="61AFEF"/>
+          </a:solidFill>
+          <a:ln>
+            <a:noFill/>
+          </a:ln>
+        </p:spPr>
+        <p:style>
+          <a:lnRef idx="1">
+            <a:schemeClr val="accent1"/>
+          </a:lnRef>
+          <a:fillRef idx="3">
+            <a:schemeClr val="accent1"/>
+          </a:fillRef>
+          <a:effectRef idx="2">
+            <a:schemeClr val="accent1"/>
+          </a:effectRef>
+          <a:fontRef idx="minor">
+            <a:schemeClr val="lt1"/>
+          </a:fontRef>
+        </p:style>
+        <p:txBody>
+          <a:bodyPr rtlCol="0" anchor="ctr"/>
+          <a:lstStyle/>
+          <a:p>
+            <a:pPr algn="ctr"/>
+          </a:p>
+        </p:txBody>
+      </p:sp>
+      <p:sp>
+        <p:nvSpPr>
+          <p:cNvPr id="28" name="TextBox 27"/>
+          <p:cNvSpPr txBox="1"/>
+          <p:nvPr/>
+        </p:nvSpPr>
+        <p:spPr>
+          <a:xfrm>
+            <a:off x="914400" y="5577840"/>
+            <a:ext cx="10241280" cy="548640"/>
+          </a:xfrm>
+          <a:prstGeom prst="rect">
+            <a:avLst/>
+          </a:prstGeom>
+          <a:noFill/>
+        </p:spPr>
+        <p:txBody>
+          <a:bodyPr wrap="none">
+            <a:spAutoFit/>
+          </a:bodyPr>
+          <a:lstStyle/>
           <a:p>
             <a:pPr>
               <a:spcAft>
-                <a:spcPts val="600"/>
+                <a:spcPts val="200"/>
               </a:spcAft>
-              <a:defRPr sz="1600">
-                <a:solidFill>
-                  <a:srgbClr val="333333"/>
-                </a:solidFill>
+              <a:defRPr sz="1400">
+                <a:solidFill>
+                  <a:srgbClr val="ABB2BF"/>
+                </a:solidFill>
+                <a:latin typeface="Consolas"/>
               </a:defRPr>
             </a:pPr>
             <a:r>
-              <a:t>"file.txt"  # Same directory</a:t>
+              <a:t>json_str = json.dumps(data)  # To string</a:t>
             </a:r>
           </a:p>
           <a:p>
             <a:pPr>
               <a:spcAft>
-                <a:spcPts val="600"/>
+                <a:spcPts val="200"/>
               </a:spcAft>
-              <a:defRPr sz="1600">
+              <a:defRPr sz="1400">
+                <a:solidFill>
+                  <a:srgbClr val="ABB2BF"/>
+                </a:solidFill>
+                <a:latin typeface="Consolas"/>
+              </a:defRPr>
+            </a:pPr>
+            <a:r>
+              <a:t>data = json.loads(json_str)  # From string</a:t>
+            </a:r>
+          </a:p>
+        </p:txBody>
+      </p:sp>
+      <p:sp>
+        <p:nvSpPr>
+          <p:cNvPr id="29" name="TextBox 28"/>
+          <p:cNvSpPr txBox="1"/>
+          <p:nvPr/>
+        </p:nvSpPr>
+        <p:spPr>
+          <a:xfrm>
+            <a:off x="457200" y="6355080"/>
+            <a:ext cx="11247120" cy="320040"/>
+          </a:xfrm>
+          <a:prstGeom prst="rect">
+            <a:avLst/>
+          </a:prstGeom>
+          <a:noFill/>
+        </p:spPr>
+        <p:txBody>
+          <a:bodyPr wrap="none">
+            <a:spAutoFit/>
+          </a:bodyPr>
+          <a:lstStyle/>
+          <a:p>
+            <a:pPr>
+              <a:defRPr sz="1700">
                 <a:solidFill>
                   <a:srgbClr val="333333"/>
                 </a:solidFill>
               </a:defRPr>
             </a:pPr>
             <a:r>
-              <a:t>"data/file.txt"  # Subdirectory</a:t>
-            </a:r>
-          </a:p>
-          <a:p>
-            <a:pPr>
-              <a:spcAft>
-                <a:spcPts val="600"/>
-              </a:spcAft>
-              <a:defRPr sz="1600">
-                <a:solidFill>
-                  <a:srgbClr val="333333"/>
-                </a:solidFill>
-              </a:defRPr>
-            </a:pPr>
-            <a:r>
-              <a:t>"../file.txt"  # Parent directory</a:t>
-            </a:r>
-          </a:p>
-          <a:p>
-            <a:pPr>
-              <a:spcAft>
-                <a:spcPts val="600"/>
-              </a:spcAft>
-              <a:defRPr b="1" sz="2000">
-                <a:solidFill>
-                  <a:srgbClr val="333333"/>
-                </a:solidFill>
-              </a:defRPr>
-            </a:pPr>
-            <a:r>
-              <a:t>Using pathlib:</a:t>
-            </a:r>
-          </a:p>
-          <a:p>
-            <a:pPr>
-              <a:spcAft>
-                <a:spcPts val="600"/>
-              </a:spcAft>
-              <a:defRPr sz="1600">
-                <a:solidFill>
-                  <a:srgbClr val="333333"/>
-                </a:solidFill>
-              </a:defRPr>
-            </a:pPr>
-            <a:r>
-              <a:t>from pathlib import Path</a:t>
-            </a:r>
-          </a:p>
-          <a:p>
-            <a:pPr>
-              <a:spcAft>
-                <a:spcPts val="600"/>
-              </a:spcAft>
-              <a:defRPr sz="1600">
-                <a:solidFill>
-                  <a:srgbClr val="333333"/>
-                </a:solidFill>
-              </a:defRPr>
-            </a:pPr>
-            <a:r>
-              <a:t>path = Path("data") / "file.txt"</a:t>
-            </a:r>
-          </a:p>
-          <a:p>
-            <a:pPr>
-              <a:spcAft>
-                <a:spcPts val="600"/>
-              </a:spcAft>
-              <a:defRPr sz="1600">
-                <a:solidFill>
-                  <a:srgbClr val="333333"/>
-                </a:solidFill>
-              </a:defRPr>
-            </a:pPr>
-            <a:r>
-              <a:t>path.exists()</a:t>
-            </a:r>
-          </a:p>
-          <a:p>
-            <a:pPr>
-              <a:spcAft>
-                <a:spcPts val="600"/>
-              </a:spcAft>
-              <a:defRPr sz="1600">
-                <a:solidFill>
-                  <a:srgbClr val="333333"/>
-                </a:solidFill>
-              </a:defRPr>
-            </a:pPr>
-            <a:r>
-              <a:t>path.read_text()</a:t>
-            </a:r>
-          </a:p>
-          <a:p>
-            <a:pPr>
-              <a:spcAft>
-                <a:spcPts val="600"/>
-              </a:spcAft>
-              <a:defRPr sz="1600">
-                <a:solidFill>
-                  <a:srgbClr val="333333"/>
-                </a:solidFill>
-              </a:defRPr>
-            </a:pPr>
-            <a:r>
-              <a:t>path.write_text("content")</a:t>
-            </a:r>
-          </a:p>
-          <a:p>
-            <a:pPr>
-              <a:spcAft>
-                <a:spcPts val="600"/>
-              </a:spcAft>
-              <a:defRPr b="1" sz="2000">
-                <a:solidFill>
-                  <a:srgbClr val="333333"/>
-                </a:solidFill>
-              </a:defRPr>
-            </a:pPr>
-            <a:r>
-              <a:t>Best Practices:</a:t>
-            </a:r>
-          </a:p>
-          <a:p>
-            <a:pPr lvl="1">
-              <a:spcAft>
-                <a:spcPts val="400"/>
-              </a:spcAft>
-              <a:defRPr sz="1600">
-                <a:solidFill>
-                  <a:srgbClr val="333333"/>
-                </a:solidFill>
-              </a:defRPr>
-            </a:pPr>
-            <a:r>
-              <a:t>• Use Path for cross-platform</a:t>
-            </a:r>
-          </a:p>
-          <a:p>
-            <a:pPr lvl="1">
-              <a:spcAft>
-                <a:spcPts val="400"/>
-              </a:spcAft>
-              <a:defRPr sz="1600">
-                <a:solidFill>
-                  <a:srgbClr val="333333"/>
-                </a:solidFill>
-              </a:defRPr>
-            </a:pPr>
-            <a:r>
-              <a:t>• Check if file exists</a:t>
-            </a:r>
-          </a:p>
-          <a:p>
-            <a:pPr lvl="1">
-              <a:spcAft>
-                <a:spcPts val="400"/>
-              </a:spcAft>
-              <a:defRPr sz="1600">
-                <a:solidFill>
-                  <a:srgbClr val="333333"/>
-                </a:solidFill>
-              </a:defRPr>
-            </a:pPr>
-            <a:r>
-              <a:t>• Use absolute paths when possible</a:t>
+              <a:t>Why JSON?</a:t>
             </a:r>
           </a:p>
         </p:txBody>
@@ -5609,7 +9933,7 @@
             <a:avLst/>
           </a:prstGeom>
           <a:solidFill>
-            <a:srgbClr val="FFFFFF"/>
+            <a:srgbClr val="FAFAFA"/>
           </a:solidFill>
           <a:ln>
             <a:noFill/>
@@ -5646,7 +9970,7 @@
         <p:spPr>
           <a:xfrm>
             <a:off x="0" y="0"/>
-            <a:ext cx="12191695" cy="137160"/>
+            <a:ext cx="12191695" cy="1097280"/>
           </a:xfrm>
           <a:prstGeom prst="rect">
             <a:avLst/>
@@ -5682,13 +10006,56 @@
       </p:sp>
       <p:sp>
         <p:nvSpPr>
-          <p:cNvPr id="4" name="TextBox 3"/>
+          <p:cNvPr id="4" name="Rectangle 3"/>
+          <p:cNvSpPr/>
+          <p:nvPr/>
+        </p:nvSpPr>
+        <p:spPr>
+          <a:xfrm>
+            <a:off x="0" y="1097280"/>
+            <a:ext cx="137160" cy="5760720"/>
+          </a:xfrm>
+          <a:prstGeom prst="rect">
+            <a:avLst/>
+          </a:prstGeom>
+          <a:solidFill>
+            <a:srgbClr val="FFBB33"/>
+          </a:solidFill>
+          <a:ln>
+            <a:noFill/>
+          </a:ln>
+        </p:spPr>
+        <p:style>
+          <a:lnRef idx="1">
+            <a:schemeClr val="accent1"/>
+          </a:lnRef>
+          <a:fillRef idx="3">
+            <a:schemeClr val="accent1"/>
+          </a:fillRef>
+          <a:effectRef idx="2">
+            <a:schemeClr val="accent1"/>
+          </a:effectRef>
+          <a:fontRef idx="minor">
+            <a:schemeClr val="lt1"/>
+          </a:fontRef>
+        </p:style>
+        <p:txBody>
+          <a:bodyPr rtlCol="0" anchor="ctr"/>
+          <a:lstStyle/>
+          <a:p>
+            <a:pPr algn="ctr"/>
+          </a:p>
+        </p:txBody>
+      </p:sp>
+      <p:sp>
+        <p:nvSpPr>
+          <p:cNvPr id="5" name="TextBox 4"/>
           <p:cNvSpPr txBox="1"/>
           <p:nvPr/>
         </p:nvSpPr>
         <p:spPr>
           <a:xfrm>
-            <a:off x="457200" y="320040"/>
+            <a:off x="365760" y="274320"/>
             <a:ext cx="10972800" cy="640080"/>
           </a:xfrm>
           <a:prstGeom prst="rect">
@@ -5705,26 +10072,69 @@
             <a:pPr>
               <a:defRPr sz="3600" b="1">
                 <a:solidFill>
-                  <a:srgbClr val="003366"/>
+                  <a:srgbClr val="FFFFFF"/>
                 </a:solidFill>
               </a:defRPr>
             </a:pPr>
             <a:r>
-              <a:t>Error Handling with Files</a:t>
-            </a:r>
-          </a:p>
-        </p:txBody>
-      </p:sp>
-      <p:sp>
-        <p:nvSpPr>
-          <p:cNvPr id="5" name="TextBox 4"/>
+              <a:t>File Paths</a:t>
+            </a:r>
+          </a:p>
+        </p:txBody>
+      </p:sp>
+      <p:sp>
+        <p:nvSpPr>
+          <p:cNvPr id="6" name="Rectangle 5"/>
+          <p:cNvSpPr/>
+          <p:nvPr/>
+        </p:nvSpPr>
+        <p:spPr>
+          <a:xfrm>
+            <a:off x="365760" y="1325880"/>
+            <a:ext cx="11430000" cy="365760"/>
+          </a:xfrm>
+          <a:prstGeom prst="rect">
+            <a:avLst/>
+          </a:prstGeom>
+          <a:solidFill>
+            <a:srgbClr val="0078D7"/>
+          </a:solidFill>
+          <a:ln>
+            <a:noFill/>
+          </a:ln>
+        </p:spPr>
+        <p:style>
+          <a:lnRef idx="1">
+            <a:schemeClr val="accent1"/>
+          </a:lnRef>
+          <a:fillRef idx="3">
+            <a:schemeClr val="accent1"/>
+          </a:fillRef>
+          <a:effectRef idx="2">
+            <a:schemeClr val="accent1"/>
+          </a:effectRef>
+          <a:fontRef idx="minor">
+            <a:schemeClr val="lt1"/>
+          </a:fontRef>
+        </p:style>
+        <p:txBody>
+          <a:bodyPr rtlCol="0" anchor="ctr"/>
+          <a:lstStyle/>
+          <a:p>
+            <a:pPr algn="ctr"/>
+          </a:p>
+        </p:txBody>
+      </p:sp>
+      <p:sp>
+        <p:nvSpPr>
+          <p:cNvPr id="7" name="TextBox 6"/>
           <p:cNvSpPr txBox="1"/>
           <p:nvPr/>
         </p:nvSpPr>
         <p:spPr>
           <a:xfrm>
-            <a:off x="640080" y="1188720"/>
-            <a:ext cx="10789920" cy="5303520"/>
+            <a:off x="548640" y="1371600"/>
+            <a:ext cx="10972800" cy="274320"/>
           </a:xfrm>
           <a:prstGeom prst="rect">
             <a:avLst/>
@@ -5732,308 +10142,718 @@
           <a:noFill/>
         </p:spPr>
         <p:txBody>
-          <a:bodyPr wrap="square">
+          <a:bodyPr wrap="none">
             <a:spAutoFit/>
           </a:bodyPr>
           <a:lstStyle/>
           <a:p>
             <a:pPr>
-              <a:spcAft>
-                <a:spcPts val="600"/>
-              </a:spcAft>
-              <a:defRPr b="1" sz="2000">
+              <a:defRPr sz="2000" b="1">
+                <a:solidFill>
+                  <a:srgbClr val="FFFFFF"/>
+                </a:solidFill>
+              </a:defRPr>
+            </a:pPr>
+            <a:r>
+              <a:t>Absolute Path:</a:t>
+            </a:r>
+          </a:p>
+        </p:txBody>
+      </p:sp>
+      <p:sp>
+        <p:nvSpPr>
+          <p:cNvPr id="8" name="TextBox 7"/>
+          <p:cNvSpPr txBox="1"/>
+          <p:nvPr/>
+        </p:nvSpPr>
+        <p:spPr>
+          <a:xfrm>
+            <a:off x="457200" y="1828800"/>
+            <a:ext cx="11247120" cy="320040"/>
+          </a:xfrm>
+          <a:prstGeom prst="rect">
+            <a:avLst/>
+          </a:prstGeom>
+          <a:noFill/>
+        </p:spPr>
+        <p:txBody>
+          <a:bodyPr wrap="none">
+            <a:spAutoFit/>
+          </a:bodyPr>
+          <a:lstStyle/>
+          <a:p>
+            <a:pPr>
+              <a:defRPr sz="1700">
                 <a:solidFill>
                   <a:srgbClr val="333333"/>
                 </a:solidFill>
               </a:defRPr>
             </a:pPr>
             <a:r>
-              <a:t>Common Errors:</a:t>
-            </a:r>
-          </a:p>
-          <a:p>
-            <a:pPr lvl="1">
-              <a:spcAft>
-                <a:spcPts val="400"/>
-              </a:spcAft>
-              <a:defRPr sz="1600">
+              <a:t>"/home/user/documents/file.txt"</a:t>
+            </a:r>
+          </a:p>
+        </p:txBody>
+      </p:sp>
+      <p:sp>
+        <p:nvSpPr>
+          <p:cNvPr id="9" name="Rectangle 8"/>
+          <p:cNvSpPr/>
+          <p:nvPr/>
+        </p:nvSpPr>
+        <p:spPr>
+          <a:xfrm>
+            <a:off x="365760" y="2057400"/>
+            <a:ext cx="11430000" cy="365760"/>
+          </a:xfrm>
+          <a:prstGeom prst="rect">
+            <a:avLst/>
+          </a:prstGeom>
+          <a:solidFill>
+            <a:srgbClr val="0078D7"/>
+          </a:solidFill>
+          <a:ln>
+            <a:noFill/>
+          </a:ln>
+        </p:spPr>
+        <p:style>
+          <a:lnRef idx="1">
+            <a:schemeClr val="accent1"/>
+          </a:lnRef>
+          <a:fillRef idx="3">
+            <a:schemeClr val="accent1"/>
+          </a:fillRef>
+          <a:effectRef idx="2">
+            <a:schemeClr val="accent1"/>
+          </a:effectRef>
+          <a:fontRef idx="minor">
+            <a:schemeClr val="lt1"/>
+          </a:fontRef>
+        </p:style>
+        <p:txBody>
+          <a:bodyPr rtlCol="0" anchor="ctr"/>
+          <a:lstStyle/>
+          <a:p>
+            <a:pPr algn="ctr"/>
+          </a:p>
+        </p:txBody>
+      </p:sp>
+      <p:sp>
+        <p:nvSpPr>
+          <p:cNvPr id="10" name="TextBox 9"/>
+          <p:cNvSpPr txBox="1"/>
+          <p:nvPr/>
+        </p:nvSpPr>
+        <p:spPr>
+          <a:xfrm>
+            <a:off x="548640" y="2103120"/>
+            <a:ext cx="10972800" cy="274320"/>
+          </a:xfrm>
+          <a:prstGeom prst="rect">
+            <a:avLst/>
+          </a:prstGeom>
+          <a:noFill/>
+        </p:spPr>
+        <p:txBody>
+          <a:bodyPr wrap="none">
+            <a:spAutoFit/>
+          </a:bodyPr>
+          <a:lstStyle/>
+          <a:p>
+            <a:pPr>
+              <a:defRPr sz="2000" b="1">
+                <a:solidFill>
+                  <a:srgbClr val="FFFFFF"/>
+                </a:solidFill>
+              </a:defRPr>
+            </a:pPr>
+            <a:r>
+              <a:t>"C:\\Users\\Name\\file.txt"</a:t>
+            </a:r>
+          </a:p>
+        </p:txBody>
+      </p:sp>
+      <p:sp>
+        <p:nvSpPr>
+          <p:cNvPr id="11" name="Rectangle 10"/>
+          <p:cNvSpPr/>
+          <p:nvPr/>
+        </p:nvSpPr>
+        <p:spPr>
+          <a:xfrm>
+            <a:off x="365760" y="2514600"/>
+            <a:ext cx="11430000" cy="365760"/>
+          </a:xfrm>
+          <a:prstGeom prst="rect">
+            <a:avLst/>
+          </a:prstGeom>
+          <a:solidFill>
+            <a:srgbClr val="0078D7"/>
+          </a:solidFill>
+          <a:ln>
+            <a:noFill/>
+          </a:ln>
+        </p:spPr>
+        <p:style>
+          <a:lnRef idx="1">
+            <a:schemeClr val="accent1"/>
+          </a:lnRef>
+          <a:fillRef idx="3">
+            <a:schemeClr val="accent1"/>
+          </a:fillRef>
+          <a:effectRef idx="2">
+            <a:schemeClr val="accent1"/>
+          </a:effectRef>
+          <a:fontRef idx="minor">
+            <a:schemeClr val="lt1"/>
+          </a:fontRef>
+        </p:style>
+        <p:txBody>
+          <a:bodyPr rtlCol="0" anchor="ctr"/>
+          <a:lstStyle/>
+          <a:p>
+            <a:pPr algn="ctr"/>
+          </a:p>
+        </p:txBody>
+      </p:sp>
+      <p:sp>
+        <p:nvSpPr>
+          <p:cNvPr id="12" name="TextBox 11"/>
+          <p:cNvSpPr txBox="1"/>
+          <p:nvPr/>
+        </p:nvSpPr>
+        <p:spPr>
+          <a:xfrm>
+            <a:off x="548640" y="2560320"/>
+            <a:ext cx="10972800" cy="274320"/>
+          </a:xfrm>
+          <a:prstGeom prst="rect">
+            <a:avLst/>
+          </a:prstGeom>
+          <a:noFill/>
+        </p:spPr>
+        <p:txBody>
+          <a:bodyPr wrap="none">
+            <a:spAutoFit/>
+          </a:bodyPr>
+          <a:lstStyle/>
+          <a:p>
+            <a:pPr>
+              <a:defRPr sz="2000" b="1">
+                <a:solidFill>
+                  <a:srgbClr val="FFFFFF"/>
+                </a:solidFill>
+              </a:defRPr>
+            </a:pPr>
+            <a:r>
+              <a:t>Relative Path:</a:t>
+            </a:r>
+          </a:p>
+        </p:txBody>
+      </p:sp>
+      <p:sp>
+        <p:nvSpPr>
+          <p:cNvPr id="13" name="TextBox 12"/>
+          <p:cNvSpPr txBox="1"/>
+          <p:nvPr/>
+        </p:nvSpPr>
+        <p:spPr>
+          <a:xfrm>
+            <a:off x="457200" y="3017520"/>
+            <a:ext cx="11247120" cy="320040"/>
+          </a:xfrm>
+          <a:prstGeom prst="rect">
+            <a:avLst/>
+          </a:prstGeom>
+          <a:noFill/>
+        </p:spPr>
+        <p:txBody>
+          <a:bodyPr wrap="none">
+            <a:spAutoFit/>
+          </a:bodyPr>
+          <a:lstStyle/>
+          <a:p>
+            <a:pPr>
+              <a:defRPr sz="1700">
                 <a:solidFill>
                   <a:srgbClr val="333333"/>
                 </a:solidFill>
               </a:defRPr>
             </a:pPr>
             <a:r>
-              <a:t>• FileNotFoundError</a:t>
-            </a:r>
-          </a:p>
-          <a:p>
-            <a:pPr lvl="1">
-              <a:spcAft>
-                <a:spcPts val="400"/>
-              </a:spcAft>
-              <a:defRPr sz="1600">
+              <a:t>"file.txt"  # Same directory</a:t>
+            </a:r>
+          </a:p>
+        </p:txBody>
+      </p:sp>
+      <p:sp>
+        <p:nvSpPr>
+          <p:cNvPr id="14" name="TextBox 13"/>
+          <p:cNvSpPr txBox="1"/>
+          <p:nvPr/>
+        </p:nvSpPr>
+        <p:spPr>
+          <a:xfrm>
+            <a:off x="457200" y="3291839"/>
+            <a:ext cx="11247120" cy="320040"/>
+          </a:xfrm>
+          <a:prstGeom prst="rect">
+            <a:avLst/>
+          </a:prstGeom>
+          <a:noFill/>
+        </p:spPr>
+        <p:txBody>
+          <a:bodyPr wrap="none">
+            <a:spAutoFit/>
+          </a:bodyPr>
+          <a:lstStyle/>
+          <a:p>
+            <a:pPr>
+              <a:defRPr sz="1700">
                 <a:solidFill>
                   <a:srgbClr val="333333"/>
                 </a:solidFill>
               </a:defRPr>
             </a:pPr>
             <a:r>
-              <a:t>• PermissionError</a:t>
-            </a:r>
-          </a:p>
-          <a:p>
-            <a:pPr lvl="1">
-              <a:spcAft>
-                <a:spcPts val="400"/>
-              </a:spcAft>
-              <a:defRPr sz="1600">
+              <a:t>"data/file.txt"  # Subdirectory</a:t>
+            </a:r>
+          </a:p>
+        </p:txBody>
+      </p:sp>
+      <p:sp>
+        <p:nvSpPr>
+          <p:cNvPr id="15" name="TextBox 14"/>
+          <p:cNvSpPr txBox="1"/>
+          <p:nvPr/>
+        </p:nvSpPr>
+        <p:spPr>
+          <a:xfrm>
+            <a:off x="457200" y="3566159"/>
+            <a:ext cx="11247120" cy="320040"/>
+          </a:xfrm>
+          <a:prstGeom prst="rect">
+            <a:avLst/>
+          </a:prstGeom>
+          <a:noFill/>
+        </p:spPr>
+        <p:txBody>
+          <a:bodyPr wrap="none">
+            <a:spAutoFit/>
+          </a:bodyPr>
+          <a:lstStyle/>
+          <a:p>
+            <a:pPr>
+              <a:defRPr sz="1700">
                 <a:solidFill>
                   <a:srgbClr val="333333"/>
                 </a:solidFill>
               </a:defRPr>
             </a:pPr>
             <a:r>
-              <a:t>• IsADirectoryError</a:t>
-            </a:r>
-          </a:p>
+              <a:t>"../file.txt"  # Parent directory</a:t>
+            </a:r>
+          </a:p>
+        </p:txBody>
+      </p:sp>
+      <p:sp>
+        <p:nvSpPr>
+          <p:cNvPr id="16" name="Rectangle 15"/>
+          <p:cNvSpPr/>
+          <p:nvPr/>
+        </p:nvSpPr>
+        <p:spPr>
+          <a:xfrm>
+            <a:off x="365760" y="3794759"/>
+            <a:ext cx="11430000" cy="365760"/>
+          </a:xfrm>
+          <a:prstGeom prst="rect">
+            <a:avLst/>
+          </a:prstGeom>
+          <a:solidFill>
+            <a:srgbClr val="0078D7"/>
+          </a:solidFill>
+          <a:ln>
+            <a:noFill/>
+          </a:ln>
+        </p:spPr>
+        <p:style>
+          <a:lnRef idx="1">
+            <a:schemeClr val="accent1"/>
+          </a:lnRef>
+          <a:fillRef idx="3">
+            <a:schemeClr val="accent1"/>
+          </a:fillRef>
+          <a:effectRef idx="2">
+            <a:schemeClr val="accent1"/>
+          </a:effectRef>
+          <a:fontRef idx="minor">
+            <a:schemeClr val="lt1"/>
+          </a:fontRef>
+        </p:style>
+        <p:txBody>
+          <a:bodyPr rtlCol="0" anchor="ctr"/>
+          <a:lstStyle/>
+          <a:p>
+            <a:pPr algn="ctr"/>
+          </a:p>
+        </p:txBody>
+      </p:sp>
+      <p:sp>
+        <p:nvSpPr>
+          <p:cNvPr id="17" name="TextBox 16"/>
+          <p:cNvSpPr txBox="1"/>
+          <p:nvPr/>
+        </p:nvSpPr>
+        <p:spPr>
+          <a:xfrm>
+            <a:off x="548640" y="3840479"/>
+            <a:ext cx="10972800" cy="274320"/>
+          </a:xfrm>
+          <a:prstGeom prst="rect">
+            <a:avLst/>
+          </a:prstGeom>
+          <a:noFill/>
+        </p:spPr>
+        <p:txBody>
+          <a:bodyPr wrap="none">
+            <a:spAutoFit/>
+          </a:bodyPr>
+          <a:lstStyle/>
+          <a:p>
+            <a:pPr>
+              <a:defRPr sz="2000" b="1">
+                <a:solidFill>
+                  <a:srgbClr val="FFFFFF"/>
+                </a:solidFill>
+              </a:defRPr>
+            </a:pPr>
+            <a:r>
+              <a:t>Using pathlib:</a:t>
+            </a:r>
+          </a:p>
+        </p:txBody>
+      </p:sp>
+      <p:sp>
+        <p:nvSpPr>
+          <p:cNvPr id="18" name="Rectangle 17"/>
+          <p:cNvSpPr/>
+          <p:nvPr/>
+        </p:nvSpPr>
+        <p:spPr>
+          <a:xfrm>
+            <a:off x="640080" y="4251959"/>
+            <a:ext cx="10789920" cy="640080"/>
+          </a:xfrm>
+          <a:prstGeom prst="rect">
+            <a:avLst/>
+          </a:prstGeom>
+          <a:solidFill>
+            <a:srgbClr val="282C34"/>
+          </a:solidFill>
+          <a:ln>
+            <a:noFill/>
+          </a:ln>
+        </p:spPr>
+        <p:style>
+          <a:lnRef idx="1">
+            <a:schemeClr val="accent1"/>
+          </a:lnRef>
+          <a:fillRef idx="3">
+            <a:schemeClr val="accent1"/>
+          </a:fillRef>
+          <a:effectRef idx="2">
+            <a:schemeClr val="accent1"/>
+          </a:effectRef>
+          <a:fontRef idx="minor">
+            <a:schemeClr val="lt1"/>
+          </a:fontRef>
+        </p:style>
+        <p:txBody>
+          <a:bodyPr rtlCol="0" anchor="ctr"/>
+          <a:lstStyle/>
+          <a:p>
+            <a:pPr algn="ctr"/>
+          </a:p>
+        </p:txBody>
+      </p:sp>
+      <p:sp>
+        <p:nvSpPr>
+          <p:cNvPr id="19" name="Rectangle 18"/>
+          <p:cNvSpPr/>
+          <p:nvPr/>
+        </p:nvSpPr>
+        <p:spPr>
+          <a:xfrm>
+            <a:off x="640080" y="4251959"/>
+            <a:ext cx="73152" cy="640080"/>
+          </a:xfrm>
+          <a:prstGeom prst="rect">
+            <a:avLst/>
+          </a:prstGeom>
+          <a:solidFill>
+            <a:srgbClr val="61AFEF"/>
+          </a:solidFill>
+          <a:ln>
+            <a:noFill/>
+          </a:ln>
+        </p:spPr>
+        <p:style>
+          <a:lnRef idx="1">
+            <a:schemeClr val="accent1"/>
+          </a:lnRef>
+          <a:fillRef idx="3">
+            <a:schemeClr val="accent1"/>
+          </a:fillRef>
+          <a:effectRef idx="2">
+            <a:schemeClr val="accent1"/>
+          </a:effectRef>
+          <a:fontRef idx="minor">
+            <a:schemeClr val="lt1"/>
+          </a:fontRef>
+        </p:style>
+        <p:txBody>
+          <a:bodyPr rtlCol="0" anchor="ctr"/>
+          <a:lstStyle/>
+          <a:p>
+            <a:pPr algn="ctr"/>
+          </a:p>
+        </p:txBody>
+      </p:sp>
+      <p:sp>
+        <p:nvSpPr>
+          <p:cNvPr id="20" name="TextBox 19"/>
+          <p:cNvSpPr txBox="1"/>
+          <p:nvPr/>
+        </p:nvSpPr>
+        <p:spPr>
+          <a:xfrm>
+            <a:off x="914400" y="4297679"/>
+            <a:ext cx="10241280" cy="548640"/>
+          </a:xfrm>
+          <a:prstGeom prst="rect">
+            <a:avLst/>
+          </a:prstGeom>
+          <a:noFill/>
+        </p:spPr>
+        <p:txBody>
+          <a:bodyPr wrap="none">
+            <a:spAutoFit/>
+          </a:bodyPr>
+          <a:lstStyle/>
           <a:p>
             <a:pPr>
               <a:spcAft>
-                <a:spcPts val="600"/>
+                <a:spcPts val="200"/>
               </a:spcAft>
-              <a:defRPr b="1" sz="2000">
-                <a:solidFill>
-                  <a:srgbClr val="333333"/>
-                </a:solidFill>
+              <a:defRPr sz="1400">
+                <a:solidFill>
+                  <a:srgbClr val="ABB2BF"/>
+                </a:solidFill>
+                <a:latin typeface="Consolas"/>
               </a:defRPr>
             </a:pPr>
             <a:r>
-              <a:t>Safe Reading:</a:t>
+              <a:t>from pathlib import Path</a:t>
             </a:r>
           </a:p>
           <a:p>
             <a:pPr>
               <a:spcAft>
-                <a:spcPts val="600"/>
+                <a:spcPts val="200"/>
               </a:spcAft>
-              <a:defRPr b="1" sz="2000">
+              <a:defRPr sz="1400">
+                <a:solidFill>
+                  <a:srgbClr val="ABB2BF"/>
+                </a:solidFill>
+                <a:latin typeface="Consolas"/>
+              </a:defRPr>
+            </a:pPr>
+            <a:r>
+              <a:t>path = Path("data") / "file.txt"</a:t>
+            </a:r>
+          </a:p>
+        </p:txBody>
+      </p:sp>
+      <p:sp>
+        <p:nvSpPr>
+          <p:cNvPr id="21" name="TextBox 20"/>
+          <p:cNvSpPr txBox="1"/>
+          <p:nvPr/>
+        </p:nvSpPr>
+        <p:spPr>
+          <a:xfrm>
+            <a:off x="457200" y="5074920"/>
+            <a:ext cx="11247120" cy="320040"/>
+          </a:xfrm>
+          <a:prstGeom prst="rect">
+            <a:avLst/>
+          </a:prstGeom>
+          <a:noFill/>
+        </p:spPr>
+        <p:txBody>
+          <a:bodyPr wrap="none">
+            <a:spAutoFit/>
+          </a:bodyPr>
+          <a:lstStyle/>
+          <a:p>
+            <a:pPr>
+              <a:defRPr sz="1700">
                 <a:solidFill>
                   <a:srgbClr val="333333"/>
                 </a:solidFill>
               </a:defRPr>
             </a:pPr>
             <a:r>
-              <a:t>try:</a:t>
-            </a:r>
-          </a:p>
+              <a:t>path.exists()</a:t>
+            </a:r>
+          </a:p>
+        </p:txBody>
+      </p:sp>
+      <p:sp>
+        <p:nvSpPr>
+          <p:cNvPr id="22" name="TextBox 21"/>
+          <p:cNvSpPr txBox="1"/>
+          <p:nvPr/>
+        </p:nvSpPr>
+        <p:spPr>
+          <a:xfrm>
+            <a:off x="457200" y="5349240"/>
+            <a:ext cx="11247120" cy="320040"/>
+          </a:xfrm>
+          <a:prstGeom prst="rect">
+            <a:avLst/>
+          </a:prstGeom>
+          <a:noFill/>
+        </p:spPr>
+        <p:txBody>
+          <a:bodyPr wrap="none">
+            <a:spAutoFit/>
+          </a:bodyPr>
+          <a:lstStyle/>
           <a:p>
             <a:pPr>
-              <a:spcAft>
-                <a:spcPts val="600"/>
-              </a:spcAft>
-              <a:defRPr sz="1600">
+              <a:defRPr sz="1700">
                 <a:solidFill>
                   <a:srgbClr val="333333"/>
                 </a:solidFill>
               </a:defRPr>
             </a:pPr>
             <a:r>
-              <a:t>    with open("file.txt", "r") as file:</a:t>
-            </a:r>
-          </a:p>
+              <a:t>path.read_text()</a:t>
+            </a:r>
+          </a:p>
+        </p:txBody>
+      </p:sp>
+      <p:sp>
+        <p:nvSpPr>
+          <p:cNvPr id="23" name="TextBox 22"/>
+          <p:cNvSpPr txBox="1"/>
+          <p:nvPr/>
+        </p:nvSpPr>
+        <p:spPr>
+          <a:xfrm>
+            <a:off x="457200" y="5623559"/>
+            <a:ext cx="11247120" cy="320040"/>
+          </a:xfrm>
+          <a:prstGeom prst="rect">
+            <a:avLst/>
+          </a:prstGeom>
+          <a:noFill/>
+        </p:spPr>
+        <p:txBody>
+          <a:bodyPr wrap="none">
+            <a:spAutoFit/>
+          </a:bodyPr>
+          <a:lstStyle/>
           <a:p>
             <a:pPr>
-              <a:spcAft>
-                <a:spcPts val="600"/>
-              </a:spcAft>
-              <a:defRPr sz="1600">
+              <a:defRPr sz="1700">
                 <a:solidFill>
                   <a:srgbClr val="333333"/>
                 </a:solidFill>
               </a:defRPr>
             </a:pPr>
             <a:r>
-              <a:t>        content = file.read()</a:t>
-            </a:r>
-          </a:p>
+              <a:t>path.write_text("content")</a:t>
+            </a:r>
+          </a:p>
+        </p:txBody>
+      </p:sp>
+      <p:sp>
+        <p:nvSpPr>
+          <p:cNvPr id="24" name="Rectangle 23"/>
+          <p:cNvSpPr/>
+          <p:nvPr/>
+        </p:nvSpPr>
+        <p:spPr>
+          <a:xfrm>
+            <a:off x="365760" y="5852159"/>
+            <a:ext cx="11430000" cy="365760"/>
+          </a:xfrm>
+          <a:prstGeom prst="rect">
+            <a:avLst/>
+          </a:prstGeom>
+          <a:solidFill>
+            <a:srgbClr val="0078D7"/>
+          </a:solidFill>
+          <a:ln>
+            <a:noFill/>
+          </a:ln>
+        </p:spPr>
+        <p:style>
+          <a:lnRef idx="1">
+            <a:schemeClr val="accent1"/>
+          </a:lnRef>
+          <a:fillRef idx="3">
+            <a:schemeClr val="accent1"/>
+          </a:fillRef>
+          <a:effectRef idx="2">
+            <a:schemeClr val="accent1"/>
+          </a:effectRef>
+          <a:fontRef idx="minor">
+            <a:schemeClr val="lt1"/>
+          </a:fontRef>
+        </p:style>
+        <p:txBody>
+          <a:bodyPr rtlCol="0" anchor="ctr"/>
+          <a:lstStyle/>
+          <a:p>
+            <a:pPr algn="ctr"/>
+          </a:p>
+        </p:txBody>
+      </p:sp>
+      <p:sp>
+        <p:nvSpPr>
+          <p:cNvPr id="25" name="TextBox 24"/>
+          <p:cNvSpPr txBox="1"/>
+          <p:nvPr/>
+        </p:nvSpPr>
+        <p:spPr>
+          <a:xfrm>
+            <a:off x="548640" y="5897879"/>
+            <a:ext cx="10972800" cy="274320"/>
+          </a:xfrm>
+          <a:prstGeom prst="rect">
+            <a:avLst/>
+          </a:prstGeom>
+          <a:noFill/>
+        </p:spPr>
+        <p:txBody>
+          <a:bodyPr wrap="none">
+            <a:spAutoFit/>
+          </a:bodyPr>
+          <a:lstStyle/>
           <a:p>
             <a:pPr>
-              <a:spcAft>
-                <a:spcPts val="600"/>
-              </a:spcAft>
-              <a:defRPr b="1" sz="2000">
-                <a:solidFill>
-                  <a:srgbClr val="333333"/>
+              <a:defRPr sz="2000" b="1">
+                <a:solidFill>
+                  <a:srgbClr val="FFFFFF"/>
                 </a:solidFill>
               </a:defRPr>
             </a:pPr>
             <a:r>
-              <a:t>except FileNotFoundError:</a:t>
-            </a:r>
-          </a:p>
-          <a:p>
-            <a:pPr>
-              <a:spcAft>
-                <a:spcPts val="600"/>
-              </a:spcAft>
-              <a:defRPr sz="1600">
-                <a:solidFill>
-                  <a:srgbClr val="333333"/>
-                </a:solidFill>
-              </a:defRPr>
-            </a:pPr>
-            <a:r>
-              <a:t>    print("File not found")</a:t>
-            </a:r>
-          </a:p>
-          <a:p>
-            <a:pPr>
-              <a:spcAft>
-                <a:spcPts val="600"/>
-              </a:spcAft>
-              <a:defRPr sz="1600">
-                <a:solidFill>
-                  <a:srgbClr val="333333"/>
-                </a:solidFill>
-              </a:defRPr>
-            </a:pPr>
-            <a:r>
-              <a:t>    content = ""</a:t>
-            </a:r>
-          </a:p>
-          <a:p>
-            <a:pPr>
-              <a:spcAft>
-                <a:spcPts val="600"/>
-              </a:spcAft>
-              <a:defRPr b="1" sz="2000">
-                <a:solidFill>
-                  <a:srgbClr val="333333"/>
-                </a:solidFill>
-              </a:defRPr>
-            </a:pPr>
-            <a:r>
-              <a:t>Check Before Opening:</a:t>
-            </a:r>
-          </a:p>
-          <a:p>
-            <a:pPr>
-              <a:spcAft>
-                <a:spcPts val="600"/>
-              </a:spcAft>
-              <a:defRPr sz="1600">
-                <a:solidFill>
-                  <a:srgbClr val="333333"/>
-                </a:solidFill>
-              </a:defRPr>
-            </a:pPr>
-            <a:r>
-              <a:t>import os</a:t>
-            </a:r>
-          </a:p>
-          <a:p>
-            <a:pPr>
-              <a:spcAft>
-                <a:spcPts val="600"/>
-              </a:spcAft>
-              <a:defRPr b="1" sz="2000">
-                <a:solidFill>
-                  <a:srgbClr val="333333"/>
-                </a:solidFill>
-              </a:defRPr>
-            </a:pPr>
-            <a:r>
-              <a:t>if os.path.exists("file.txt"):</a:t>
-            </a:r>
-          </a:p>
-          <a:p>
-            <a:pPr>
-              <a:spcAft>
-                <a:spcPts val="600"/>
-              </a:spcAft>
-              <a:defRPr sz="1600">
-                <a:solidFill>
-                  <a:srgbClr val="333333"/>
-                </a:solidFill>
-              </a:defRPr>
-            </a:pPr>
-            <a:r>
-              <a:t>    with open("file.txt", "r") as file:</a:t>
-            </a:r>
-          </a:p>
-          <a:p>
-            <a:pPr>
-              <a:spcAft>
-                <a:spcPts val="600"/>
-              </a:spcAft>
-              <a:defRPr sz="1600">
-                <a:solidFill>
-                  <a:srgbClr val="333333"/>
-                </a:solidFill>
-              </a:defRPr>
-            </a:pPr>
-            <a:r>
-              <a:t>        content = file.read()</a:t>
-            </a:r>
-          </a:p>
-          <a:p>
-            <a:pPr>
-              <a:spcAft>
-                <a:spcPts val="600"/>
-              </a:spcAft>
-              <a:defRPr b="1" sz="2000">
-                <a:solidFill>
-                  <a:srgbClr val="333333"/>
-                </a:solidFill>
-              </a:defRPr>
-            </a:pPr>
-            <a:r>
-              <a:t>Directory Operations:</a:t>
-            </a:r>
-          </a:p>
-          <a:p>
-            <a:pPr>
-              <a:spcAft>
-                <a:spcPts val="600"/>
-              </a:spcAft>
-              <a:defRPr sz="1600">
-                <a:solidFill>
-                  <a:srgbClr val="333333"/>
-                </a:solidFill>
-              </a:defRPr>
-            </a:pPr>
-            <a:r>
-              <a:t>os.listdir(".")  # List files</a:t>
-            </a:r>
-          </a:p>
-          <a:p>
-            <a:pPr>
-              <a:spcAft>
-                <a:spcPts val="600"/>
-              </a:spcAft>
-              <a:defRPr sz="1600">
-                <a:solidFill>
-                  <a:srgbClr val="333333"/>
-                </a:solidFill>
-              </a:defRPr>
-            </a:pPr>
-            <a:r>
-              <a:t>os.makedirs("new_dir")</a:t>
-            </a:r>
-          </a:p>
-          <a:p>
-            <a:pPr>
-              <a:spcAft>
-                <a:spcPts val="600"/>
-              </a:spcAft>
-              <a:defRPr sz="1600">
-                <a:solidFill>
-                  <a:srgbClr val="333333"/>
-                </a:solidFill>
-              </a:defRPr>
-            </a:pPr>
-            <a:r>
-              <a:t>os.path.isfile("file.txt")</a:t>
+              <a:t>Best Practices:</a:t>
             </a:r>
           </a:p>
         </p:txBody>
@@ -6071,7 +10891,7 @@
             <a:avLst/>
           </a:prstGeom>
           <a:solidFill>
-            <a:srgbClr val="FFFFFF"/>
+            <a:srgbClr val="FAFAFA"/>
           </a:solidFill>
           <a:ln>
             <a:noFill/>
@@ -6108,7 +10928,7 @@
         <p:spPr>
           <a:xfrm>
             <a:off x="0" y="0"/>
-            <a:ext cx="12191695" cy="137160"/>
+            <a:ext cx="12191695" cy="1097280"/>
           </a:xfrm>
           <a:prstGeom prst="rect">
             <a:avLst/>
@@ -6144,13 +10964,56 @@
       </p:sp>
       <p:sp>
         <p:nvSpPr>
-          <p:cNvPr id="4" name="TextBox 3"/>
+          <p:cNvPr id="4" name="Rectangle 3"/>
+          <p:cNvSpPr/>
+          <p:nvPr/>
+        </p:nvSpPr>
+        <p:spPr>
+          <a:xfrm>
+            <a:off x="0" y="1097280"/>
+            <a:ext cx="137160" cy="5760720"/>
+          </a:xfrm>
+          <a:prstGeom prst="rect">
+            <a:avLst/>
+          </a:prstGeom>
+          <a:solidFill>
+            <a:srgbClr val="FFBB33"/>
+          </a:solidFill>
+          <a:ln>
+            <a:noFill/>
+          </a:ln>
+        </p:spPr>
+        <p:style>
+          <a:lnRef idx="1">
+            <a:schemeClr val="accent1"/>
+          </a:lnRef>
+          <a:fillRef idx="3">
+            <a:schemeClr val="accent1"/>
+          </a:fillRef>
+          <a:effectRef idx="2">
+            <a:schemeClr val="accent1"/>
+          </a:effectRef>
+          <a:fontRef idx="minor">
+            <a:schemeClr val="lt1"/>
+          </a:fontRef>
+        </p:style>
+        <p:txBody>
+          <a:bodyPr rtlCol="0" anchor="ctr"/>
+          <a:lstStyle/>
+          <a:p>
+            <a:pPr algn="ctr"/>
+          </a:p>
+        </p:txBody>
+      </p:sp>
+      <p:sp>
+        <p:nvSpPr>
+          <p:cNvPr id="5" name="TextBox 4"/>
           <p:cNvSpPr txBox="1"/>
           <p:nvPr/>
         </p:nvSpPr>
         <p:spPr>
           <a:xfrm>
-            <a:off x="457200" y="320040"/>
+            <a:off x="365760" y="274320"/>
             <a:ext cx="10972800" cy="640080"/>
           </a:xfrm>
           <a:prstGeom prst="rect">
@@ -6167,26 +11030,69 @@
             <a:pPr>
               <a:defRPr sz="3600" b="1">
                 <a:solidFill>
-                  <a:srgbClr val="003366"/>
+                  <a:srgbClr val="FFFFFF"/>
                 </a:solidFill>
               </a:defRPr>
             </a:pPr>
             <a:r>
-              <a:t>Best Practices</a:t>
-            </a:r>
-          </a:p>
-        </p:txBody>
-      </p:sp>
-      <p:sp>
-        <p:nvSpPr>
-          <p:cNvPr id="5" name="TextBox 4"/>
+              <a:t>Error Handling with Files</a:t>
+            </a:r>
+          </a:p>
+        </p:txBody>
+      </p:sp>
+      <p:sp>
+        <p:nvSpPr>
+          <p:cNvPr id="6" name="Rectangle 5"/>
+          <p:cNvSpPr/>
+          <p:nvPr/>
+        </p:nvSpPr>
+        <p:spPr>
+          <a:xfrm>
+            <a:off x="365760" y="1325880"/>
+            <a:ext cx="11430000" cy="365760"/>
+          </a:xfrm>
+          <a:prstGeom prst="rect">
+            <a:avLst/>
+          </a:prstGeom>
+          <a:solidFill>
+            <a:srgbClr val="0078D7"/>
+          </a:solidFill>
+          <a:ln>
+            <a:noFill/>
+          </a:ln>
+        </p:spPr>
+        <p:style>
+          <a:lnRef idx="1">
+            <a:schemeClr val="accent1"/>
+          </a:lnRef>
+          <a:fillRef idx="3">
+            <a:schemeClr val="accent1"/>
+          </a:fillRef>
+          <a:effectRef idx="2">
+            <a:schemeClr val="accent1"/>
+          </a:effectRef>
+          <a:fontRef idx="minor">
+            <a:schemeClr val="lt1"/>
+          </a:fontRef>
+        </p:style>
+        <p:txBody>
+          <a:bodyPr rtlCol="0" anchor="ctr"/>
+          <a:lstStyle/>
+          <a:p>
+            <a:pPr algn="ctr"/>
+          </a:p>
+        </p:txBody>
+      </p:sp>
+      <p:sp>
+        <p:nvSpPr>
+          <p:cNvPr id="7" name="TextBox 6"/>
           <p:cNvSpPr txBox="1"/>
           <p:nvPr/>
         </p:nvSpPr>
         <p:spPr>
           <a:xfrm>
-            <a:off x="640080" y="1188720"/>
-            <a:ext cx="10789920" cy="5303520"/>
+            <a:off x="548640" y="1371600"/>
+            <a:ext cx="10972800" cy="274320"/>
           </a:xfrm>
           <a:prstGeom prst="rect">
             <a:avLst/>
@@ -6194,30 +11100,82 @@
           <a:noFill/>
         </p:spPr>
         <p:txBody>
-          <a:bodyPr wrap="square">
+          <a:bodyPr wrap="none">
             <a:spAutoFit/>
           </a:bodyPr>
           <a:lstStyle/>
           <a:p>
             <a:pPr>
-              <a:spcAft>
-                <a:spcPts val="600"/>
-              </a:spcAft>
-              <a:defRPr b="1" sz="2000">
+              <a:defRPr sz="2000" b="1">
+                <a:solidFill>
+                  <a:srgbClr val="FFFFFF"/>
+                </a:solidFill>
+              </a:defRPr>
+            </a:pPr>
+            <a:r>
+              <a:t>Common Errors:</a:t>
+            </a:r>
+          </a:p>
+        </p:txBody>
+      </p:sp>
+      <p:sp>
+        <p:nvSpPr>
+          <p:cNvPr id="8" name="TextBox 7"/>
+          <p:cNvSpPr txBox="1"/>
+          <p:nvPr/>
+        </p:nvSpPr>
+        <p:spPr>
+          <a:xfrm>
+            <a:off x="457200" y="1828800"/>
+            <a:ext cx="11247120" cy="320040"/>
+          </a:xfrm>
+          <a:prstGeom prst="rect">
+            <a:avLst/>
+          </a:prstGeom>
+          <a:noFill/>
+        </p:spPr>
+        <p:txBody>
+          <a:bodyPr wrap="none">
+            <a:spAutoFit/>
+          </a:bodyPr>
+          <a:lstStyle/>
+          <a:p>
+            <a:pPr lvl="1">
+              <a:defRPr sz="1600">
                 <a:solidFill>
                   <a:srgbClr val="333333"/>
                 </a:solidFill>
               </a:defRPr>
             </a:pPr>
             <a:r>
-              <a:t>Always Use "with":</a:t>
-            </a:r>
-          </a:p>
+              <a:t>• FileNotFoundError</a:t>
+            </a:r>
+          </a:p>
+        </p:txBody>
+      </p:sp>
+      <p:sp>
+        <p:nvSpPr>
+          <p:cNvPr id="9" name="TextBox 8"/>
+          <p:cNvSpPr txBox="1"/>
+          <p:nvPr/>
+        </p:nvSpPr>
+        <p:spPr>
+          <a:xfrm>
+            <a:off x="457200" y="2103120"/>
+            <a:ext cx="11247120" cy="320040"/>
+          </a:xfrm>
+          <a:prstGeom prst="rect">
+            <a:avLst/>
+          </a:prstGeom>
+          <a:noFill/>
+        </p:spPr>
+        <p:txBody>
+          <a:bodyPr wrap="none">
+            <a:spAutoFit/>
+          </a:bodyPr>
+          <a:lstStyle/>
           <a:p>
             <a:pPr lvl="1">
-              <a:spcAft>
-                <a:spcPts val="400"/>
-              </a:spcAft>
               <a:defRPr sz="1600">
                 <a:solidFill>
                   <a:srgbClr val="333333"/>
@@ -6225,14 +11183,34 @@
               </a:defRPr>
             </a:pPr>
             <a:r>
-              <a:t>• Automatically closes files</a:t>
-            </a:r>
-          </a:p>
+              <a:t>• PermissionError</a:t>
+            </a:r>
+          </a:p>
+        </p:txBody>
+      </p:sp>
+      <p:sp>
+        <p:nvSpPr>
+          <p:cNvPr id="10" name="TextBox 9"/>
+          <p:cNvSpPr txBox="1"/>
+          <p:nvPr/>
+        </p:nvSpPr>
+        <p:spPr>
+          <a:xfrm>
+            <a:off x="457200" y="2377439"/>
+            <a:ext cx="11247120" cy="320040"/>
+          </a:xfrm>
+          <a:prstGeom prst="rect">
+            <a:avLst/>
+          </a:prstGeom>
+          <a:noFill/>
+        </p:spPr>
+        <p:txBody>
+          <a:bodyPr wrap="none">
+            <a:spAutoFit/>
+          </a:bodyPr>
+          <a:lstStyle/>
           <a:p>
             <a:pPr lvl="1">
-              <a:spcAft>
-                <a:spcPts val="400"/>
-              </a:spcAft>
               <a:defRPr sz="1600">
                 <a:solidFill>
                   <a:srgbClr val="333333"/>
@@ -6240,262 +11218,679 @@
               </a:defRPr>
             </a:pPr>
             <a:r>
-              <a:t>• Handles errors gracefully</a:t>
-            </a:r>
-          </a:p>
+              <a:t>• IsADirectoryError</a:t>
+            </a:r>
+          </a:p>
+        </p:txBody>
+      </p:sp>
+      <p:sp>
+        <p:nvSpPr>
+          <p:cNvPr id="11" name="Rectangle 10"/>
+          <p:cNvSpPr/>
+          <p:nvPr/>
+        </p:nvSpPr>
+        <p:spPr>
+          <a:xfrm>
+            <a:off x="365760" y="2606039"/>
+            <a:ext cx="11430000" cy="365760"/>
+          </a:xfrm>
+          <a:prstGeom prst="rect">
+            <a:avLst/>
+          </a:prstGeom>
+          <a:solidFill>
+            <a:srgbClr val="0078D7"/>
+          </a:solidFill>
+          <a:ln>
+            <a:noFill/>
+          </a:ln>
+        </p:spPr>
+        <p:style>
+          <a:lnRef idx="1">
+            <a:schemeClr val="accent1"/>
+          </a:lnRef>
+          <a:fillRef idx="3">
+            <a:schemeClr val="accent1"/>
+          </a:fillRef>
+          <a:effectRef idx="2">
+            <a:schemeClr val="accent1"/>
+          </a:effectRef>
+          <a:fontRef idx="minor">
+            <a:schemeClr val="lt1"/>
+          </a:fontRef>
+        </p:style>
+        <p:txBody>
+          <a:bodyPr rtlCol="0" anchor="ctr"/>
+          <a:lstStyle/>
+          <a:p>
+            <a:pPr algn="ctr"/>
+          </a:p>
+        </p:txBody>
+      </p:sp>
+      <p:sp>
+        <p:nvSpPr>
+          <p:cNvPr id="12" name="TextBox 11"/>
+          <p:cNvSpPr txBox="1"/>
+          <p:nvPr/>
+        </p:nvSpPr>
+        <p:spPr>
+          <a:xfrm>
+            <a:off x="548640" y="2651759"/>
+            <a:ext cx="10972800" cy="274320"/>
+          </a:xfrm>
+          <a:prstGeom prst="rect">
+            <a:avLst/>
+          </a:prstGeom>
+          <a:noFill/>
+        </p:spPr>
+        <p:txBody>
+          <a:bodyPr wrap="none">
+            <a:spAutoFit/>
+          </a:bodyPr>
+          <a:lstStyle/>
+          <a:p>
+            <a:pPr>
+              <a:defRPr sz="2000" b="1">
+                <a:solidFill>
+                  <a:srgbClr val="FFFFFF"/>
+                </a:solidFill>
+              </a:defRPr>
+            </a:pPr>
+            <a:r>
+              <a:t>Safe Reading:</a:t>
+            </a:r>
+          </a:p>
+        </p:txBody>
+      </p:sp>
+      <p:sp>
+        <p:nvSpPr>
+          <p:cNvPr id="13" name="Rectangle 12"/>
+          <p:cNvSpPr/>
+          <p:nvPr/>
+        </p:nvSpPr>
+        <p:spPr>
+          <a:xfrm>
+            <a:off x="365760" y="3063239"/>
+            <a:ext cx="11430000" cy="365760"/>
+          </a:xfrm>
+          <a:prstGeom prst="rect">
+            <a:avLst/>
+          </a:prstGeom>
+          <a:solidFill>
+            <a:srgbClr val="0078D7"/>
+          </a:solidFill>
+          <a:ln>
+            <a:noFill/>
+          </a:ln>
+        </p:spPr>
+        <p:style>
+          <a:lnRef idx="1">
+            <a:schemeClr val="accent1"/>
+          </a:lnRef>
+          <a:fillRef idx="3">
+            <a:schemeClr val="accent1"/>
+          </a:fillRef>
+          <a:effectRef idx="2">
+            <a:schemeClr val="accent1"/>
+          </a:effectRef>
+          <a:fontRef idx="minor">
+            <a:schemeClr val="lt1"/>
+          </a:fontRef>
+        </p:style>
+        <p:txBody>
+          <a:bodyPr rtlCol="0" anchor="ctr"/>
+          <a:lstStyle/>
+          <a:p>
+            <a:pPr algn="ctr"/>
+          </a:p>
+        </p:txBody>
+      </p:sp>
+      <p:sp>
+        <p:nvSpPr>
+          <p:cNvPr id="14" name="TextBox 13"/>
+          <p:cNvSpPr txBox="1"/>
+          <p:nvPr/>
+        </p:nvSpPr>
+        <p:spPr>
+          <a:xfrm>
+            <a:off x="548640" y="3108959"/>
+            <a:ext cx="10972800" cy="274320"/>
+          </a:xfrm>
+          <a:prstGeom prst="rect">
+            <a:avLst/>
+          </a:prstGeom>
+          <a:noFill/>
+        </p:spPr>
+        <p:txBody>
+          <a:bodyPr wrap="none">
+            <a:spAutoFit/>
+          </a:bodyPr>
+          <a:lstStyle/>
+          <a:p>
+            <a:pPr>
+              <a:defRPr sz="2000" b="1">
+                <a:solidFill>
+                  <a:srgbClr val="FFFFFF"/>
+                </a:solidFill>
+              </a:defRPr>
+            </a:pPr>
+            <a:r>
+              <a:t>try:</a:t>
+            </a:r>
+          </a:p>
+        </p:txBody>
+      </p:sp>
+      <p:sp>
+        <p:nvSpPr>
+          <p:cNvPr id="15" name="Rectangle 14"/>
+          <p:cNvSpPr/>
+          <p:nvPr/>
+        </p:nvSpPr>
+        <p:spPr>
+          <a:xfrm>
+            <a:off x="640080" y="3520439"/>
+            <a:ext cx="10789920" cy="640080"/>
+          </a:xfrm>
+          <a:prstGeom prst="rect">
+            <a:avLst/>
+          </a:prstGeom>
+          <a:solidFill>
+            <a:srgbClr val="282C34"/>
+          </a:solidFill>
+          <a:ln>
+            <a:noFill/>
+          </a:ln>
+        </p:spPr>
+        <p:style>
+          <a:lnRef idx="1">
+            <a:schemeClr val="accent1"/>
+          </a:lnRef>
+          <a:fillRef idx="3">
+            <a:schemeClr val="accent1"/>
+          </a:fillRef>
+          <a:effectRef idx="2">
+            <a:schemeClr val="accent1"/>
+          </a:effectRef>
+          <a:fontRef idx="minor">
+            <a:schemeClr val="lt1"/>
+          </a:fontRef>
+        </p:style>
+        <p:txBody>
+          <a:bodyPr rtlCol="0" anchor="ctr"/>
+          <a:lstStyle/>
+          <a:p>
+            <a:pPr algn="ctr"/>
+          </a:p>
+        </p:txBody>
+      </p:sp>
+      <p:sp>
+        <p:nvSpPr>
+          <p:cNvPr id="16" name="Rectangle 15"/>
+          <p:cNvSpPr/>
+          <p:nvPr/>
+        </p:nvSpPr>
+        <p:spPr>
+          <a:xfrm>
+            <a:off x="640080" y="3520439"/>
+            <a:ext cx="73152" cy="640080"/>
+          </a:xfrm>
+          <a:prstGeom prst="rect">
+            <a:avLst/>
+          </a:prstGeom>
+          <a:solidFill>
+            <a:srgbClr val="61AFEF"/>
+          </a:solidFill>
+          <a:ln>
+            <a:noFill/>
+          </a:ln>
+        </p:spPr>
+        <p:style>
+          <a:lnRef idx="1">
+            <a:schemeClr val="accent1"/>
+          </a:lnRef>
+          <a:fillRef idx="3">
+            <a:schemeClr val="accent1"/>
+          </a:fillRef>
+          <a:effectRef idx="2">
+            <a:schemeClr val="accent1"/>
+          </a:effectRef>
+          <a:fontRef idx="minor">
+            <a:schemeClr val="lt1"/>
+          </a:fontRef>
+        </p:style>
+        <p:txBody>
+          <a:bodyPr rtlCol="0" anchor="ctr"/>
+          <a:lstStyle/>
+          <a:p>
+            <a:pPr algn="ctr"/>
+          </a:p>
+        </p:txBody>
+      </p:sp>
+      <p:sp>
+        <p:nvSpPr>
+          <p:cNvPr id="17" name="TextBox 16"/>
+          <p:cNvSpPr txBox="1"/>
+          <p:nvPr/>
+        </p:nvSpPr>
+        <p:spPr>
+          <a:xfrm>
+            <a:off x="914400" y="3566159"/>
+            <a:ext cx="10241280" cy="548640"/>
+          </a:xfrm>
+          <a:prstGeom prst="rect">
+            <a:avLst/>
+          </a:prstGeom>
+          <a:noFill/>
+        </p:spPr>
+        <p:txBody>
+          <a:bodyPr wrap="none">
+            <a:spAutoFit/>
+          </a:bodyPr>
+          <a:lstStyle/>
           <a:p>
             <a:pPr>
               <a:spcAft>
-                <a:spcPts val="600"/>
+                <a:spcPts val="200"/>
               </a:spcAft>
-              <a:defRPr b="1" sz="2000">
-                <a:solidFill>
-                  <a:srgbClr val="333333"/>
-                </a:solidFill>
+              <a:defRPr sz="1400">
+                <a:solidFill>
+                  <a:srgbClr val="ABB2BF"/>
+                </a:solidFill>
+                <a:latin typeface="Consolas"/>
               </a:defRPr>
             </a:pPr>
             <a:r>
-              <a:t>Handle Errors:</a:t>
-            </a:r>
-          </a:p>
-          <a:p>
-            <a:pPr lvl="1">
-              <a:spcAft>
-                <a:spcPts val="400"/>
-              </a:spcAft>
-              <a:defRPr sz="1600">
-                <a:solidFill>
-                  <a:srgbClr val="333333"/>
-                </a:solidFill>
-              </a:defRPr>
-            </a:pPr>
-            <a:r>
-              <a:t>• Check if file exists</a:t>
-            </a:r>
-          </a:p>
-          <a:p>
-            <a:pPr lvl="1">
-              <a:spcAft>
-                <a:spcPts val="400"/>
-              </a:spcAft>
-              <a:defRPr sz="1600">
-                <a:solidFill>
-                  <a:srgbClr val="333333"/>
-                </a:solidFill>
-              </a:defRPr>
-            </a:pPr>
-            <a:r>
-              <a:t>• Use try-except</a:t>
-            </a:r>
-          </a:p>
-          <a:p>
-            <a:pPr lvl="1">
-              <a:spcAft>
-                <a:spcPts val="400"/>
-              </a:spcAft>
-              <a:defRPr sz="1600">
-                <a:solidFill>
-                  <a:srgbClr val="333333"/>
-                </a:solidFill>
-              </a:defRPr>
-            </a:pPr>
-            <a:r>
-              <a:t>• Provide helpful messages</a:t>
+              <a:t>    with open("file.txt", "r") as file:</a:t>
             </a:r>
           </a:p>
           <a:p>
             <a:pPr>
               <a:spcAft>
-                <a:spcPts val="600"/>
+                <a:spcPts val="200"/>
               </a:spcAft>
-              <a:defRPr b="1" sz="2000">
-                <a:solidFill>
-                  <a:srgbClr val="333333"/>
-                </a:solidFill>
+              <a:defRPr sz="1400">
+                <a:solidFill>
+                  <a:srgbClr val="ABB2BF"/>
+                </a:solidFill>
+                <a:latin typeface="Consolas"/>
               </a:defRPr>
             </a:pPr>
             <a:r>
-              <a:t>Choose Right Format:</a:t>
-            </a:r>
-          </a:p>
-          <a:p>
-            <a:pPr lvl="1">
-              <a:spcAft>
-                <a:spcPts val="400"/>
-              </a:spcAft>
-              <a:defRPr sz="1600">
-                <a:solidFill>
-                  <a:srgbClr val="333333"/>
+              <a:t>        content = file.read()</a:t>
+            </a:r>
+          </a:p>
+        </p:txBody>
+      </p:sp>
+      <p:sp>
+        <p:nvSpPr>
+          <p:cNvPr id="18" name="Rectangle 17"/>
+          <p:cNvSpPr/>
+          <p:nvPr/>
+        </p:nvSpPr>
+        <p:spPr>
+          <a:xfrm>
+            <a:off x="365760" y="4297680"/>
+            <a:ext cx="11430000" cy="365760"/>
+          </a:xfrm>
+          <a:prstGeom prst="rect">
+            <a:avLst/>
+          </a:prstGeom>
+          <a:solidFill>
+            <a:srgbClr val="0078D7"/>
+          </a:solidFill>
+          <a:ln>
+            <a:noFill/>
+          </a:ln>
+        </p:spPr>
+        <p:style>
+          <a:lnRef idx="1">
+            <a:schemeClr val="accent1"/>
+          </a:lnRef>
+          <a:fillRef idx="3">
+            <a:schemeClr val="accent1"/>
+          </a:fillRef>
+          <a:effectRef idx="2">
+            <a:schemeClr val="accent1"/>
+          </a:effectRef>
+          <a:fontRef idx="minor">
+            <a:schemeClr val="lt1"/>
+          </a:fontRef>
+        </p:style>
+        <p:txBody>
+          <a:bodyPr rtlCol="0" anchor="ctr"/>
+          <a:lstStyle/>
+          <a:p>
+            <a:pPr algn="ctr"/>
+          </a:p>
+        </p:txBody>
+      </p:sp>
+      <p:sp>
+        <p:nvSpPr>
+          <p:cNvPr id="19" name="TextBox 18"/>
+          <p:cNvSpPr txBox="1"/>
+          <p:nvPr/>
+        </p:nvSpPr>
+        <p:spPr>
+          <a:xfrm>
+            <a:off x="548640" y="4343400"/>
+            <a:ext cx="10972800" cy="274320"/>
+          </a:xfrm>
+          <a:prstGeom prst="rect">
+            <a:avLst/>
+          </a:prstGeom>
+          <a:noFill/>
+        </p:spPr>
+        <p:txBody>
+          <a:bodyPr wrap="none">
+            <a:spAutoFit/>
+          </a:bodyPr>
+          <a:lstStyle/>
+          <a:p>
+            <a:pPr>
+              <a:defRPr sz="2000" b="1">
+                <a:solidFill>
+                  <a:srgbClr val="FFFFFF"/>
                 </a:solidFill>
               </a:defRPr>
             </a:pPr>
             <a:r>
-              <a:t>• Text: Simple data</a:t>
-            </a:r>
-          </a:p>
-          <a:p>
-            <a:pPr lvl="1">
-              <a:spcAft>
-                <a:spcPts val="400"/>
-              </a:spcAft>
-              <a:defRPr sz="1600">
-                <a:solidFill>
-                  <a:srgbClr val="333333"/>
-                </a:solidFill>
-              </a:defRPr>
-            </a:pPr>
-            <a:r>
-              <a:t>• CSV: Tabular data</a:t>
-            </a:r>
-          </a:p>
-          <a:p>
-            <a:pPr lvl="1">
-              <a:spcAft>
-                <a:spcPts val="400"/>
-              </a:spcAft>
-              <a:defRPr sz="1600">
-                <a:solidFill>
-                  <a:srgbClr val="333333"/>
-                </a:solidFill>
-              </a:defRPr>
-            </a:pPr>
-            <a:r>
-              <a:t>• JSON: Structured data</a:t>
-            </a:r>
-          </a:p>
+              <a:t>except FileNotFoundError:</a:t>
+            </a:r>
+          </a:p>
+        </p:txBody>
+      </p:sp>
+      <p:sp>
+        <p:nvSpPr>
+          <p:cNvPr id="20" name="Rectangle 19"/>
+          <p:cNvSpPr/>
+          <p:nvPr/>
+        </p:nvSpPr>
+        <p:spPr>
+          <a:xfrm>
+            <a:off x="640080" y="4754880"/>
+            <a:ext cx="10789920" cy="640080"/>
+          </a:xfrm>
+          <a:prstGeom prst="rect">
+            <a:avLst/>
+          </a:prstGeom>
+          <a:solidFill>
+            <a:srgbClr val="282C34"/>
+          </a:solidFill>
+          <a:ln>
+            <a:noFill/>
+          </a:ln>
+        </p:spPr>
+        <p:style>
+          <a:lnRef idx="1">
+            <a:schemeClr val="accent1"/>
+          </a:lnRef>
+          <a:fillRef idx="3">
+            <a:schemeClr val="accent1"/>
+          </a:fillRef>
+          <a:effectRef idx="2">
+            <a:schemeClr val="accent1"/>
+          </a:effectRef>
+          <a:fontRef idx="minor">
+            <a:schemeClr val="lt1"/>
+          </a:fontRef>
+        </p:style>
+        <p:txBody>
+          <a:bodyPr rtlCol="0" anchor="ctr"/>
+          <a:lstStyle/>
+          <a:p>
+            <a:pPr algn="ctr"/>
+          </a:p>
+        </p:txBody>
+      </p:sp>
+      <p:sp>
+        <p:nvSpPr>
+          <p:cNvPr id="21" name="Rectangle 20"/>
+          <p:cNvSpPr/>
+          <p:nvPr/>
+        </p:nvSpPr>
+        <p:spPr>
+          <a:xfrm>
+            <a:off x="640080" y="4754880"/>
+            <a:ext cx="73152" cy="640080"/>
+          </a:xfrm>
+          <a:prstGeom prst="rect">
+            <a:avLst/>
+          </a:prstGeom>
+          <a:solidFill>
+            <a:srgbClr val="61AFEF"/>
+          </a:solidFill>
+          <a:ln>
+            <a:noFill/>
+          </a:ln>
+        </p:spPr>
+        <p:style>
+          <a:lnRef idx="1">
+            <a:schemeClr val="accent1"/>
+          </a:lnRef>
+          <a:fillRef idx="3">
+            <a:schemeClr val="accent1"/>
+          </a:fillRef>
+          <a:effectRef idx="2">
+            <a:schemeClr val="accent1"/>
+          </a:effectRef>
+          <a:fontRef idx="minor">
+            <a:schemeClr val="lt1"/>
+          </a:fontRef>
+        </p:style>
+        <p:txBody>
+          <a:bodyPr rtlCol="0" anchor="ctr"/>
+          <a:lstStyle/>
+          <a:p>
+            <a:pPr algn="ctr"/>
+          </a:p>
+        </p:txBody>
+      </p:sp>
+      <p:sp>
+        <p:nvSpPr>
+          <p:cNvPr id="22" name="TextBox 21"/>
+          <p:cNvSpPr txBox="1"/>
+          <p:nvPr/>
+        </p:nvSpPr>
+        <p:spPr>
+          <a:xfrm>
+            <a:off x="914400" y="4800600"/>
+            <a:ext cx="10241280" cy="548640"/>
+          </a:xfrm>
+          <a:prstGeom prst="rect">
+            <a:avLst/>
+          </a:prstGeom>
+          <a:noFill/>
+        </p:spPr>
+        <p:txBody>
+          <a:bodyPr wrap="none">
+            <a:spAutoFit/>
+          </a:bodyPr>
+          <a:lstStyle/>
           <a:p>
             <a:pPr>
               <a:spcAft>
-                <a:spcPts val="600"/>
+                <a:spcPts val="200"/>
               </a:spcAft>
-              <a:defRPr b="1" sz="2000">
-                <a:solidFill>
-                  <a:srgbClr val="333333"/>
-                </a:solidFill>
+              <a:defRPr sz="1400">
+                <a:solidFill>
+                  <a:srgbClr val="ABB2BF"/>
+                </a:solidFill>
+                <a:latin typeface="Consolas"/>
               </a:defRPr>
             </a:pPr>
             <a:r>
-              <a:t>Performance:</a:t>
-            </a:r>
-          </a:p>
-          <a:p>
-            <a:pPr lvl="1">
-              <a:spcAft>
-                <a:spcPts val="400"/>
-              </a:spcAft>
-              <a:defRPr sz="1600">
-                <a:solidFill>
-                  <a:srgbClr val="333333"/>
-                </a:solidFill>
-              </a:defRPr>
-            </a:pPr>
-            <a:r>
-              <a:t>• Read line-by-line for large files</a:t>
-            </a:r>
-          </a:p>
-          <a:p>
-            <a:pPr lvl="1">
-              <a:spcAft>
-                <a:spcPts val="400"/>
-              </a:spcAft>
-              <a:defRPr sz="1600">
-                <a:solidFill>
-                  <a:srgbClr val="333333"/>
-                </a:solidFill>
-              </a:defRPr>
-            </a:pPr>
-            <a:r>
-              <a:t>• Use buffering</a:t>
-            </a:r>
-          </a:p>
-          <a:p>
-            <a:pPr lvl="1">
-              <a:spcAft>
-                <a:spcPts val="400"/>
-              </a:spcAft>
-              <a:defRPr sz="1600">
-                <a:solidFill>
-                  <a:srgbClr val="333333"/>
-                </a:solidFill>
-              </a:defRPr>
-            </a:pPr>
-            <a:r>
-              <a:t>• Close files when done</a:t>
+              <a:t>    print("File not found")</a:t>
             </a:r>
           </a:p>
           <a:p>
             <a:pPr>
               <a:spcAft>
-                <a:spcPts val="600"/>
+                <a:spcPts val="200"/>
               </a:spcAft>
-              <a:defRPr b="1" sz="2000">
-                <a:solidFill>
-                  <a:srgbClr val="333333"/>
-                </a:solidFill>
+              <a:defRPr sz="1400">
+                <a:solidFill>
+                  <a:srgbClr val="ABB2BF"/>
+                </a:solidFill>
+                <a:latin typeface="Consolas"/>
               </a:defRPr>
             </a:pPr>
             <a:r>
-              <a:t>Security:</a:t>
-            </a:r>
-          </a:p>
-          <a:p>
-            <a:pPr lvl="1">
-              <a:spcAft>
-                <a:spcPts val="400"/>
-              </a:spcAft>
-              <a:defRPr sz="1600">
-                <a:solidFill>
-                  <a:srgbClr val="333333"/>
+              <a:t>    content = ""</a:t>
+            </a:r>
+          </a:p>
+        </p:txBody>
+      </p:sp>
+      <p:sp>
+        <p:nvSpPr>
+          <p:cNvPr id="23" name="Rectangle 22"/>
+          <p:cNvSpPr/>
+          <p:nvPr/>
+        </p:nvSpPr>
+        <p:spPr>
+          <a:xfrm>
+            <a:off x="365760" y="5532120"/>
+            <a:ext cx="11430000" cy="365760"/>
+          </a:xfrm>
+          <a:prstGeom prst="rect">
+            <a:avLst/>
+          </a:prstGeom>
+          <a:solidFill>
+            <a:srgbClr val="0078D7"/>
+          </a:solidFill>
+          <a:ln>
+            <a:noFill/>
+          </a:ln>
+        </p:spPr>
+        <p:style>
+          <a:lnRef idx="1">
+            <a:schemeClr val="accent1"/>
+          </a:lnRef>
+          <a:fillRef idx="3">
+            <a:schemeClr val="accent1"/>
+          </a:fillRef>
+          <a:effectRef idx="2">
+            <a:schemeClr val="accent1"/>
+          </a:effectRef>
+          <a:fontRef idx="minor">
+            <a:schemeClr val="lt1"/>
+          </a:fontRef>
+        </p:style>
+        <p:txBody>
+          <a:bodyPr rtlCol="0" anchor="ctr"/>
+          <a:lstStyle/>
+          <a:p>
+            <a:pPr algn="ctr"/>
+          </a:p>
+        </p:txBody>
+      </p:sp>
+      <p:sp>
+        <p:nvSpPr>
+          <p:cNvPr id="24" name="TextBox 23"/>
+          <p:cNvSpPr txBox="1"/>
+          <p:nvPr/>
+        </p:nvSpPr>
+        <p:spPr>
+          <a:xfrm>
+            <a:off x="548640" y="5577840"/>
+            <a:ext cx="10972800" cy="274320"/>
+          </a:xfrm>
+          <a:prstGeom prst="rect">
+            <a:avLst/>
+          </a:prstGeom>
+          <a:noFill/>
+        </p:spPr>
+        <p:txBody>
+          <a:bodyPr wrap="none">
+            <a:spAutoFit/>
+          </a:bodyPr>
+          <a:lstStyle/>
+          <a:p>
+            <a:pPr>
+              <a:defRPr sz="2000" b="1">
+                <a:solidFill>
+                  <a:srgbClr val="FFFFFF"/>
                 </a:solidFill>
               </a:defRPr>
             </a:pPr>
             <a:r>
-              <a:t>• Validate file paths</a:t>
-            </a:r>
-          </a:p>
-          <a:p>
-            <a:pPr lvl="1">
-              <a:spcAft>
-                <a:spcPts val="400"/>
-              </a:spcAft>
-              <a:defRPr sz="1600">
-                <a:solidFill>
-                  <a:srgbClr val="333333"/>
+              <a:t>Check Before Opening:</a:t>
+            </a:r>
+          </a:p>
+        </p:txBody>
+      </p:sp>
+      <p:sp>
+        <p:nvSpPr>
+          <p:cNvPr id="25" name="Rectangle 24"/>
+          <p:cNvSpPr/>
+          <p:nvPr/>
+        </p:nvSpPr>
+        <p:spPr>
+          <a:xfrm>
+            <a:off x="365760" y="5989320"/>
+            <a:ext cx="11430000" cy="365760"/>
+          </a:xfrm>
+          <a:prstGeom prst="rect">
+            <a:avLst/>
+          </a:prstGeom>
+          <a:solidFill>
+            <a:srgbClr val="0078D7"/>
+          </a:solidFill>
+          <a:ln>
+            <a:noFill/>
+          </a:ln>
+        </p:spPr>
+        <p:style>
+          <a:lnRef idx="1">
+            <a:schemeClr val="accent1"/>
+          </a:lnRef>
+          <a:fillRef idx="3">
+            <a:schemeClr val="accent1"/>
+          </a:fillRef>
+          <a:effectRef idx="2">
+            <a:schemeClr val="accent1"/>
+          </a:effectRef>
+          <a:fontRef idx="minor">
+            <a:schemeClr val="lt1"/>
+          </a:fontRef>
+        </p:style>
+        <p:txBody>
+          <a:bodyPr rtlCol="0" anchor="ctr"/>
+          <a:lstStyle/>
+          <a:p>
+            <a:pPr algn="ctr"/>
+          </a:p>
+        </p:txBody>
+      </p:sp>
+      <p:sp>
+        <p:nvSpPr>
+          <p:cNvPr id="26" name="TextBox 25"/>
+          <p:cNvSpPr txBox="1"/>
+          <p:nvPr/>
+        </p:nvSpPr>
+        <p:spPr>
+          <a:xfrm>
+            <a:off x="548640" y="6035040"/>
+            <a:ext cx="10972800" cy="274320"/>
+          </a:xfrm>
+          <a:prstGeom prst="rect">
+            <a:avLst/>
+          </a:prstGeom>
+          <a:noFill/>
+        </p:spPr>
+        <p:txBody>
+          <a:bodyPr wrap="none">
+            <a:spAutoFit/>
+          </a:bodyPr>
+          <a:lstStyle/>
+          <a:p>
+            <a:pPr>
+              <a:defRPr sz="2000" b="1">
+                <a:solidFill>
+                  <a:srgbClr val="FFFFFF"/>
                 </a:solidFill>
               </a:defRPr>
             </a:pPr>
             <a:r>
-              <a:t>• Don't trust user input</a:t>
-            </a:r>
-          </a:p>
-          <a:p>
-            <a:pPr lvl="1">
-              <a:spcAft>
-                <a:spcPts val="400"/>
-              </a:spcAft>
-              <a:defRPr sz="1600">
-                <a:solidFill>
-                  <a:srgbClr val="333333"/>
-                </a:solidFill>
-              </a:defRPr>
-            </a:pPr>
-            <a:r>
-              <a:t>• Check file size</a:t>
-            </a:r>
-          </a:p>
-          <a:p>
-            <a:pPr lvl="1">
-              <a:spcAft>
-                <a:spcPts val="400"/>
-              </a:spcAft>
-              <a:defRPr sz="1600">
-                <a:solidFill>
-                  <a:srgbClr val="333333"/>
-                </a:solidFill>
-              </a:defRPr>
-            </a:pPr>
-            <a:r>
-              <a:t>• Use appropriate permissions</a:t>
+              <a:t>Directory Operations:</a:t>
             </a:r>
           </a:p>
         </p:txBody>
